--- a/deep-dive/drafts/no.1-xss/image/HTMLパーサ図.pptx
+++ b/deep-dive/drafts/no.1-xss/image/HTMLパーサ図.pptx
@@ -7,6 +7,7 @@
   <p:sldIdLst>
     <p:sldId id="256" r:id="rId7"/>
     <p:sldId id="257" r:id="rId8"/>
+    <p:sldId id="258" r:id="rId9"/>
   </p:sldIdLst>
   <p:sldSz cx="12192000" cy="6858000" type="screen4x3"/>
   <p:notesSz cx="6858000" cy="9144000"/>
@@ -3091,87 +3092,13 @@
       <p:grpSpPr/>
       <p:sp>
         <p:nvSpPr>
-          <p:cNvPr id="2" name="TextBox 1"/>
-          <p:cNvSpPr txBox="1"/>
-          <p:nvPr/>
-        </p:nvSpPr>
-        <p:spPr>
-          <a:xfrm>
-            <a:off x="457200" y="256032"/>
-            <a:ext cx="11247120" cy="502920"/>
-          </a:xfrm>
-          <a:prstGeom prst="rect">
-            <a:avLst/>
-          </a:prstGeom>
-          <a:noFill/>
-        </p:spPr>
-        <p:txBody>
-          <a:bodyPr wrap="square" anchor="t" lIns="0" rIns="0" tIns="0" bIns="0">
-            <a:spAutoFit/>
-          </a:bodyPr>
-          <a:lstStyle/>
-          <a:p>
-            <a:pPr algn="l"/>
-            <a:r>
-              <a:rPr sz="2800" b="1">
-                <a:solidFill>
-                  <a:srgbClr val="24404D"/>
-                </a:solidFill>
-                <a:latin typeface="Hiragino Sans"/>
-                <a:ea typeface="Hiragino Sans"/>
-                <a:cs typeface="Hiragino Sans"/>
-              </a:rPr>
-              <a:t>ブラウザのHTMLパーサ：全体像</a:t>
-            </a:r>
-          </a:p>
-        </p:txBody>
-      </p:sp>
-      <p:sp>
-        <p:nvSpPr>
-          <p:cNvPr id="3" name="TextBox 2"/>
-          <p:cNvSpPr txBox="1"/>
-          <p:nvPr/>
-        </p:nvSpPr>
-        <p:spPr>
-          <a:xfrm>
-            <a:off x="457200" y="786384"/>
-            <a:ext cx="11247120" cy="320040"/>
-          </a:xfrm>
-          <a:prstGeom prst="rect">
-            <a:avLst/>
-          </a:prstGeom>
-          <a:noFill/>
-        </p:spPr>
-        <p:txBody>
-          <a:bodyPr wrap="square" anchor="t" lIns="0" rIns="0" tIns="0" bIns="0">
-            <a:spAutoFit/>
-          </a:bodyPr>
-          <a:lstStyle/>
-          <a:p>
-            <a:pPr algn="l"/>
-            <a:r>
-              <a:rPr sz="1300" b="0">
-                <a:solidFill>
-                  <a:srgbClr val="5E7682"/>
-                </a:solidFill>
-                <a:latin typeface="Hiragino Sans"/>
-                <a:ea typeface="Hiragino Sans"/>
-                <a:cs typeface="Hiragino Sans"/>
-              </a:rPr>
-              <a:t>サーバから届いたバイト列は、4つの段階を経て「画面」と「実行されるスクリプト」になる</a:t>
-            </a:r>
-          </a:p>
-        </p:txBody>
-      </p:sp>
-      <p:sp>
-        <p:nvSpPr>
-          <p:cNvPr id="4" name="Rounded Rectangle 3"/>
+          <p:cNvPr id="2" name="Rounded Rectangle 1"/>
           <p:cNvSpPr/>
           <p:nvPr/>
         </p:nvSpPr>
         <p:spPr>
           <a:xfrm>
-            <a:off x="457200" y="1417320"/>
+            <a:off x="457200" y="1143000"/>
             <a:ext cx="2514600" cy="2331720"/>
           </a:xfrm>
           <a:prstGeom prst="roundRect">
@@ -3213,13 +3140,13 @@
       </p:sp>
       <p:sp>
         <p:nvSpPr>
-          <p:cNvPr id="5" name="TextBox 4"/>
+          <p:cNvPr id="3" name="TextBox 2"/>
           <p:cNvSpPr txBox="1"/>
           <p:nvPr/>
         </p:nvSpPr>
         <p:spPr>
           <a:xfrm>
-            <a:off x="621792" y="1554480"/>
+            <a:off x="621792" y="1280160"/>
             <a:ext cx="2185416" cy="365760"/>
           </a:xfrm>
           <a:prstGeom prst="rect">
@@ -3250,13 +3177,13 @@
       </p:sp>
       <p:sp>
         <p:nvSpPr>
-          <p:cNvPr id="6" name="TextBox 5"/>
+          <p:cNvPr id="4" name="TextBox 3"/>
           <p:cNvSpPr txBox="1"/>
           <p:nvPr/>
         </p:nvSpPr>
         <p:spPr>
           <a:xfrm>
-            <a:off x="621792" y="1984248"/>
+            <a:off x="621792" y="1709928"/>
             <a:ext cx="2185416" cy="731520"/>
           </a:xfrm>
           <a:prstGeom prst="rect">
@@ -3287,13 +3214,13 @@
       </p:sp>
       <p:sp>
         <p:nvSpPr>
-          <p:cNvPr id="7" name="Rounded Rectangle 6"/>
+          <p:cNvPr id="5" name="Rounded Rectangle 4"/>
           <p:cNvSpPr/>
           <p:nvPr/>
         </p:nvSpPr>
         <p:spPr>
           <a:xfrm>
-            <a:off x="621792" y="2807208"/>
+            <a:off x="621792" y="2532888"/>
             <a:ext cx="2185416" cy="777240"/>
           </a:xfrm>
           <a:prstGeom prst="roundRect">
@@ -3335,13 +3262,13 @@
       </p:sp>
       <p:sp>
         <p:nvSpPr>
-          <p:cNvPr id="8" name="TextBox 7"/>
+          <p:cNvPr id="6" name="TextBox 5"/>
           <p:cNvSpPr txBox="1"/>
           <p:nvPr/>
         </p:nvSpPr>
         <p:spPr>
           <a:xfrm>
-            <a:off x="713232" y="2880360"/>
+            <a:off x="713232" y="2606040"/>
             <a:ext cx="2002536" cy="640080"/>
           </a:xfrm>
           <a:prstGeom prst="rect">
@@ -3372,13 +3299,13 @@
       </p:sp>
       <p:cxnSp>
         <p:nvCxnSpPr>
-          <p:cNvPr id="9" name="Connector 8"/>
+          <p:cNvPr id="7" name="Connector 6"/>
           <p:cNvCxnSpPr/>
           <p:nvPr/>
         </p:nvCxnSpPr>
         <p:spPr>
           <a:xfrm>
-            <a:off x="3008376" y="2583180"/>
+            <a:off x="3008376" y="2308860"/>
             <a:ext cx="310896" cy="0"/>
           </a:xfrm>
           <a:prstGeom prst="line">
@@ -3408,13 +3335,13 @@
       </p:cxnSp>
       <p:sp>
         <p:nvSpPr>
-          <p:cNvPr id="10" name="Rounded Rectangle 9"/>
+          <p:cNvPr id="8" name="Rounded Rectangle 7"/>
           <p:cNvSpPr/>
           <p:nvPr/>
         </p:nvSpPr>
         <p:spPr>
           <a:xfrm>
-            <a:off x="3355848" y="1417320"/>
+            <a:off x="3355848" y="1143000"/>
             <a:ext cx="2514600" cy="2331720"/>
           </a:xfrm>
           <a:prstGeom prst="roundRect">
@@ -3456,13 +3383,13 @@
       </p:sp>
       <p:sp>
         <p:nvSpPr>
-          <p:cNvPr id="11" name="TextBox 10"/>
+          <p:cNvPr id="9" name="TextBox 8"/>
           <p:cNvSpPr txBox="1"/>
           <p:nvPr/>
         </p:nvSpPr>
         <p:spPr>
           <a:xfrm>
-            <a:off x="3520440" y="1554480"/>
+            <a:off x="3520440" y="1280160"/>
             <a:ext cx="2185416" cy="365760"/>
           </a:xfrm>
           <a:prstGeom prst="rect">
@@ -3493,13 +3420,13 @@
       </p:sp>
       <p:sp>
         <p:nvSpPr>
-          <p:cNvPr id="12" name="TextBox 11"/>
+          <p:cNvPr id="10" name="TextBox 9"/>
           <p:cNvSpPr txBox="1"/>
           <p:nvPr/>
         </p:nvSpPr>
         <p:spPr>
           <a:xfrm>
-            <a:off x="3520440" y="1984248"/>
+            <a:off x="3520440" y="1709928"/>
             <a:ext cx="2185416" cy="731520"/>
           </a:xfrm>
           <a:prstGeom prst="rect">
@@ -3544,13 +3471,13 @@
       </p:sp>
       <p:sp>
         <p:nvSpPr>
-          <p:cNvPr id="13" name="Rounded Rectangle 12"/>
+          <p:cNvPr id="11" name="Rounded Rectangle 10"/>
           <p:cNvSpPr/>
           <p:nvPr/>
         </p:nvSpPr>
         <p:spPr>
           <a:xfrm>
-            <a:off x="3520440" y="2807208"/>
+            <a:off x="3520440" y="2532888"/>
             <a:ext cx="2185416" cy="777240"/>
           </a:xfrm>
           <a:prstGeom prst="roundRect">
@@ -3592,13 +3519,13 @@
       </p:sp>
       <p:sp>
         <p:nvSpPr>
-          <p:cNvPr id="14" name="TextBox 13"/>
+          <p:cNvPr id="12" name="TextBox 11"/>
           <p:cNvSpPr txBox="1"/>
           <p:nvPr/>
         </p:nvSpPr>
         <p:spPr>
           <a:xfrm>
-            <a:off x="3611880" y="2880360"/>
+            <a:off x="3611880" y="2606040"/>
             <a:ext cx="2002536" cy="640080"/>
           </a:xfrm>
           <a:prstGeom prst="rect">
@@ -3629,13 +3556,13 @@
       </p:sp>
       <p:cxnSp>
         <p:nvCxnSpPr>
-          <p:cNvPr id="15" name="Connector 14"/>
+          <p:cNvPr id="13" name="Connector 12"/>
           <p:cNvCxnSpPr/>
           <p:nvPr/>
         </p:nvCxnSpPr>
         <p:spPr>
           <a:xfrm>
-            <a:off x="5907024" y="2583180"/>
+            <a:off x="5907024" y="2308860"/>
             <a:ext cx="310896" cy="0"/>
           </a:xfrm>
           <a:prstGeom prst="line">
@@ -3665,13 +3592,13 @@
       </p:cxnSp>
       <p:sp>
         <p:nvSpPr>
-          <p:cNvPr id="16" name="Rounded Rectangle 15"/>
+          <p:cNvPr id="14" name="Rounded Rectangle 13"/>
           <p:cNvSpPr/>
           <p:nvPr/>
         </p:nvSpPr>
         <p:spPr>
           <a:xfrm>
-            <a:off x="6254496" y="1417320"/>
+            <a:off x="6254496" y="1143000"/>
             <a:ext cx="2514600" cy="2331720"/>
           </a:xfrm>
           <a:prstGeom prst="roundRect">
@@ -3713,13 +3640,13 @@
       </p:sp>
       <p:sp>
         <p:nvSpPr>
-          <p:cNvPr id="17" name="TextBox 16"/>
+          <p:cNvPr id="15" name="TextBox 14"/>
           <p:cNvSpPr txBox="1"/>
           <p:nvPr/>
         </p:nvSpPr>
         <p:spPr>
           <a:xfrm>
-            <a:off x="6419088" y="1554480"/>
+            <a:off x="6419088" y="1280160"/>
             <a:ext cx="2185416" cy="365760"/>
           </a:xfrm>
           <a:prstGeom prst="rect">
@@ -3750,13 +3677,13 @@
       </p:sp>
       <p:sp>
         <p:nvSpPr>
-          <p:cNvPr id="18" name="TextBox 17"/>
+          <p:cNvPr id="16" name="TextBox 15"/>
           <p:cNvSpPr txBox="1"/>
           <p:nvPr/>
         </p:nvSpPr>
         <p:spPr>
           <a:xfrm>
-            <a:off x="6419088" y="1984248"/>
+            <a:off x="6419088" y="1709928"/>
             <a:ext cx="2185416" cy="731520"/>
           </a:xfrm>
           <a:prstGeom prst="rect">
@@ -3801,13 +3728,13 @@
       </p:sp>
       <p:sp>
         <p:nvSpPr>
-          <p:cNvPr id="19" name="Rounded Rectangle 18"/>
+          <p:cNvPr id="17" name="Rounded Rectangle 16"/>
           <p:cNvSpPr/>
           <p:nvPr/>
         </p:nvSpPr>
         <p:spPr>
           <a:xfrm>
-            <a:off x="6419088" y="2807208"/>
+            <a:off x="6419088" y="2532888"/>
             <a:ext cx="2185416" cy="777240"/>
           </a:xfrm>
           <a:prstGeom prst="roundRect">
@@ -3849,13 +3776,13 @@
       </p:sp>
       <p:sp>
         <p:nvSpPr>
-          <p:cNvPr id="20" name="TextBox 19"/>
+          <p:cNvPr id="18" name="TextBox 17"/>
           <p:cNvSpPr txBox="1"/>
           <p:nvPr/>
         </p:nvSpPr>
         <p:spPr>
           <a:xfrm>
-            <a:off x="6510528" y="2880360"/>
+            <a:off x="6510528" y="2606040"/>
             <a:ext cx="2002536" cy="640080"/>
           </a:xfrm>
           <a:prstGeom prst="rect">
@@ -3900,13 +3827,13 @@
       </p:sp>
       <p:cxnSp>
         <p:nvCxnSpPr>
-          <p:cNvPr id="21" name="Connector 20"/>
+          <p:cNvPr id="19" name="Connector 18"/>
           <p:cNvCxnSpPr/>
           <p:nvPr/>
         </p:nvCxnSpPr>
         <p:spPr>
           <a:xfrm>
-            <a:off x="8805672" y="2583180"/>
+            <a:off x="8805672" y="2308860"/>
             <a:ext cx="310896" cy="0"/>
           </a:xfrm>
           <a:prstGeom prst="line">
@@ -3936,13 +3863,13 @@
       </p:cxnSp>
       <p:sp>
         <p:nvSpPr>
-          <p:cNvPr id="22" name="Rounded Rectangle 21"/>
+          <p:cNvPr id="20" name="Rounded Rectangle 19"/>
           <p:cNvSpPr/>
           <p:nvPr/>
         </p:nvSpPr>
         <p:spPr>
           <a:xfrm>
-            <a:off x="9153144" y="1417320"/>
+            <a:off x="9153144" y="1143000"/>
             <a:ext cx="2514600" cy="2331720"/>
           </a:xfrm>
           <a:prstGeom prst="roundRect">
@@ -3984,13 +3911,13 @@
       </p:sp>
       <p:sp>
         <p:nvSpPr>
-          <p:cNvPr id="23" name="TextBox 22"/>
+          <p:cNvPr id="21" name="TextBox 20"/>
           <p:cNvSpPr txBox="1"/>
           <p:nvPr/>
         </p:nvSpPr>
         <p:spPr>
           <a:xfrm>
-            <a:off x="9317736" y="1554480"/>
+            <a:off x="9317736" y="1280160"/>
             <a:ext cx="2185416" cy="365760"/>
           </a:xfrm>
           <a:prstGeom prst="rect">
@@ -4021,13 +3948,13 @@
       </p:sp>
       <p:sp>
         <p:nvSpPr>
-          <p:cNvPr id="24" name="TextBox 23"/>
+          <p:cNvPr id="22" name="TextBox 21"/>
           <p:cNvSpPr txBox="1"/>
           <p:nvPr/>
         </p:nvSpPr>
         <p:spPr>
           <a:xfrm>
-            <a:off x="9317736" y="1984248"/>
+            <a:off x="9317736" y="1709928"/>
             <a:ext cx="2185416" cy="731520"/>
           </a:xfrm>
           <a:prstGeom prst="rect">
@@ -4072,13 +3999,13 @@
       </p:sp>
       <p:sp>
         <p:nvSpPr>
-          <p:cNvPr id="25" name="Rounded Rectangle 24"/>
+          <p:cNvPr id="23" name="Rounded Rectangle 22"/>
           <p:cNvSpPr/>
           <p:nvPr/>
         </p:nvSpPr>
         <p:spPr>
           <a:xfrm>
-            <a:off x="9317736" y="2807208"/>
+            <a:off x="9317736" y="2532888"/>
             <a:ext cx="2185416" cy="777240"/>
           </a:xfrm>
           <a:prstGeom prst="roundRect">
@@ -4120,13 +4047,13 @@
       </p:sp>
       <p:sp>
         <p:nvSpPr>
-          <p:cNvPr id="26" name="TextBox 25"/>
+          <p:cNvPr id="24" name="TextBox 23"/>
           <p:cNvSpPr txBox="1"/>
           <p:nvPr/>
         </p:nvSpPr>
         <p:spPr>
           <a:xfrm>
-            <a:off x="9409176" y="2880360"/>
+            <a:off x="9409176" y="2606040"/>
             <a:ext cx="2002536" cy="640080"/>
           </a:xfrm>
           <a:prstGeom prst="rect">
@@ -4171,13 +4098,13 @@
       </p:sp>
       <p:cxnSp>
         <p:nvCxnSpPr>
-          <p:cNvPr id="27" name="Connector 26"/>
+          <p:cNvPr id="25" name="Connector 24"/>
           <p:cNvCxnSpPr/>
           <p:nvPr/>
         </p:nvCxnSpPr>
         <p:spPr>
           <a:xfrm>
-            <a:off x="10410444" y="3767327"/>
+            <a:off x="10410444" y="3493007"/>
             <a:ext cx="0" cy="393193"/>
           </a:xfrm>
           <a:prstGeom prst="line">
@@ -4207,13 +4134,13 @@
       </p:cxnSp>
       <p:sp>
         <p:nvSpPr>
-          <p:cNvPr id="28" name="Rounded Rectangle 27"/>
+          <p:cNvPr id="26" name="Rounded Rectangle 25"/>
           <p:cNvSpPr/>
           <p:nvPr/>
         </p:nvSpPr>
         <p:spPr>
           <a:xfrm>
-            <a:off x="9107424" y="4206240"/>
+            <a:off x="9107424" y="3931920"/>
             <a:ext cx="2606040" cy="566928"/>
           </a:xfrm>
           <a:prstGeom prst="roundRect">
@@ -4255,13 +4182,13 @@
       </p:sp>
       <p:sp>
         <p:nvSpPr>
-          <p:cNvPr id="29" name="TextBox 28"/>
+          <p:cNvPr id="27" name="TextBox 26"/>
           <p:cNvSpPr txBox="1"/>
           <p:nvPr/>
         </p:nvSpPr>
         <p:spPr>
           <a:xfrm>
-            <a:off x="9153144" y="4206240"/>
+            <a:off x="9153144" y="3931920"/>
             <a:ext cx="2514600" cy="566928"/>
           </a:xfrm>
           <a:prstGeom prst="rect">
@@ -4292,13 +4219,13 @@
       </p:sp>
       <p:sp>
         <p:nvSpPr>
-          <p:cNvPr id="30" name="Rounded Rectangle 29"/>
+          <p:cNvPr id="28" name="Rounded Rectangle 27"/>
           <p:cNvSpPr/>
           <p:nvPr/>
         </p:nvSpPr>
         <p:spPr>
           <a:xfrm>
-            <a:off x="9107424" y="4892040"/>
+            <a:off x="9107424" y="4617720"/>
             <a:ext cx="2606040" cy="566928"/>
           </a:xfrm>
           <a:prstGeom prst="roundRect">
@@ -4340,13 +4267,13 @@
       </p:sp>
       <p:sp>
         <p:nvSpPr>
-          <p:cNvPr id="31" name="TextBox 30"/>
+          <p:cNvPr id="29" name="TextBox 28"/>
           <p:cNvSpPr txBox="1"/>
           <p:nvPr/>
         </p:nvSpPr>
         <p:spPr>
           <a:xfrm>
-            <a:off x="9153144" y="4892040"/>
+            <a:off x="9153144" y="4617720"/>
             <a:ext cx="2514600" cy="566928"/>
           </a:xfrm>
           <a:prstGeom prst="rect">
@@ -4377,13 +4304,13 @@
       </p:sp>
       <p:cxnSp>
         <p:nvCxnSpPr>
-          <p:cNvPr id="32" name="Connector 31"/>
+          <p:cNvPr id="30" name="Connector 29"/>
           <p:cNvCxnSpPr/>
           <p:nvPr/>
         </p:nvCxnSpPr>
         <p:spPr>
           <a:xfrm>
-            <a:off x="7511796" y="3767327"/>
+            <a:off x="7511796" y="3493007"/>
             <a:ext cx="0" cy="393193"/>
           </a:xfrm>
           <a:prstGeom prst="line">
@@ -4413,13 +4340,13 @@
       </p:cxnSp>
       <p:sp>
         <p:nvSpPr>
-          <p:cNvPr id="33" name="Rounded Rectangle 32"/>
+          <p:cNvPr id="31" name="Rounded Rectangle 30"/>
           <p:cNvSpPr/>
           <p:nvPr/>
         </p:nvSpPr>
         <p:spPr>
           <a:xfrm>
-            <a:off x="457200" y="4206240"/>
+            <a:off x="457200" y="3931920"/>
             <a:ext cx="8311896" cy="1252728"/>
           </a:xfrm>
           <a:prstGeom prst="roundRect">
@@ -4461,13 +4388,13 @@
       </p:sp>
       <p:sp>
         <p:nvSpPr>
-          <p:cNvPr id="34" name="TextBox 33"/>
+          <p:cNvPr id="32" name="TextBox 31"/>
           <p:cNvSpPr txBox="1"/>
           <p:nvPr/>
         </p:nvSpPr>
         <p:spPr>
           <a:xfrm>
-            <a:off x="685800" y="4315968"/>
+            <a:off x="685800" y="4041648"/>
             <a:ext cx="7854696" cy="1097280"/>
           </a:xfrm>
           <a:prstGeom prst="rect">
@@ -4548,13 +4475,13 @@
       </p:sp>
       <p:sp>
         <p:nvSpPr>
-          <p:cNvPr id="35" name="TextBox 34"/>
+          <p:cNvPr id="33" name="TextBox 32"/>
           <p:cNvSpPr txBox="1"/>
           <p:nvPr/>
         </p:nvSpPr>
         <p:spPr>
           <a:xfrm>
-            <a:off x="457200" y="5715000"/>
+            <a:off x="457200" y="5440680"/>
             <a:ext cx="10515600" cy="274320"/>
           </a:xfrm>
           <a:prstGeom prst="rect">
@@ -4609,8 +4536,8 @@
         </p:nvSpPr>
         <p:spPr>
           <a:xfrm>
-            <a:off x="457200" y="256032"/>
-            <a:ext cx="11247120" cy="502920"/>
+            <a:off x="457200" y="1028700"/>
+            <a:ext cx="5486400" cy="320040"/>
           </a:xfrm>
           <a:prstGeom prst="rect">
             <a:avLst/>
@@ -4625,7 +4552,7 @@
           <a:p>
             <a:pPr algn="l"/>
             <a:r>
-              <a:rPr sz="2800" b="1">
+              <a:rPr sz="1300" b="1">
                 <a:solidFill>
                   <a:srgbClr val="24404D"/>
                 </a:solidFill>
@@ -4633,102 +4560,28 @@
                 <a:ea typeface="Hiragino Sans"/>
                 <a:cs typeface="Hiragino Sans"/>
               </a:rPr>
-              <a:t>トークナイザは「状態」を切り替えながら1文字ずつ読む</a:t>
-            </a:r>
-          </a:p>
-        </p:txBody>
-      </p:sp>
-      <p:sp>
-        <p:nvSpPr>
-          <p:cNvPr id="3" name="TextBox 2"/>
-          <p:cNvSpPr txBox="1"/>
-          <p:nvPr/>
-        </p:nvSpPr>
-        <p:spPr>
-          <a:xfrm>
-            <a:off x="457200" y="786384"/>
-            <a:ext cx="11247120" cy="320040"/>
-          </a:xfrm>
-          <a:prstGeom prst="rect">
-            <a:avLst/>
-          </a:prstGeom>
-          <a:noFill/>
-        </p:spPr>
-        <p:txBody>
-          <a:bodyPr wrap="square" anchor="t" lIns="0" rIns="0" tIns="0" bIns="0">
-            <a:spAutoFit/>
-          </a:bodyPr>
-          <a:lstStyle/>
-          <a:p>
-            <a:pPr algn="l"/>
-            <a:r>
-              <a:rPr sz="1300" b="0">
-                <a:solidFill>
-                  <a:srgbClr val="5E7682"/>
+              <a:t>入力 </a:t>
+            </a:r>
+            <a:r>
+              <a:rPr sz="1300" b="1">
+                <a:solidFill>
+                  <a:srgbClr val="D9433B"/>
+                </a:solidFill>
+                <a:latin typeface="Menlo"/>
+                <a:ea typeface="Menlo"/>
+                <a:cs typeface="Menlo"/>
+              </a:rPr>
+              <a:t>&lt;b&gt;太字&lt;/b&gt;</a:t>
+            </a:r>
+            <a:r>
+              <a:rPr sz="1300" b="1">
+                <a:solidFill>
+                  <a:srgbClr val="24404D"/>
                 </a:solidFill>
                 <a:latin typeface="Hiragino Sans"/>
                 <a:ea typeface="Hiragino Sans"/>
                 <a:cs typeface="Hiragino Sans"/>
               </a:rPr>
-              <a:t>同じ「&lt;」でも、生の文字で来るか文字参照（&amp;lt;）で来るかで、たどる状態がまったく違う</a:t>
-            </a:r>
-          </a:p>
-        </p:txBody>
-      </p:sp>
-      <p:sp>
-        <p:nvSpPr>
-          <p:cNvPr id="4" name="TextBox 3"/>
-          <p:cNvSpPr txBox="1"/>
-          <p:nvPr/>
-        </p:nvSpPr>
-        <p:spPr>
-          <a:xfrm>
-            <a:off x="457200" y="1325880"/>
-            <a:ext cx="5486400" cy="320040"/>
-          </a:xfrm>
-          <a:prstGeom prst="rect">
-            <a:avLst/>
-          </a:prstGeom>
-          <a:noFill/>
-        </p:spPr>
-        <p:txBody>
-          <a:bodyPr wrap="square" anchor="t" lIns="0" rIns="0" tIns="0" bIns="0">
-            <a:spAutoFit/>
-          </a:bodyPr>
-          <a:lstStyle/>
-          <a:p>
-            <a:pPr algn="l"/>
-            <a:r>
-              <a:rPr sz="1300" b="1">
-                <a:solidFill>
-                  <a:srgbClr val="24404D"/>
-                </a:solidFill>
-                <a:latin typeface="Hiragino Sans"/>
-                <a:ea typeface="Hiragino Sans"/>
-                <a:cs typeface="Hiragino Sans"/>
-              </a:rPr>
-              <a:t>入力 </a:t>
-            </a:r>
-            <a:r>
-              <a:rPr sz="1300" b="1">
-                <a:solidFill>
-                  <a:srgbClr val="D9433B"/>
-                </a:solidFill>
-                <a:latin typeface="Menlo"/>
-                <a:ea typeface="Menlo"/>
-                <a:cs typeface="Menlo"/>
-              </a:rPr>
-              <a:t>&lt;b&gt;太字&lt;/b&gt;</a:t>
-            </a:r>
-            <a:r>
-              <a:rPr sz="1300" b="1">
-                <a:solidFill>
-                  <a:srgbClr val="24404D"/>
-                </a:solidFill>
-                <a:latin typeface="Hiragino Sans"/>
-                <a:ea typeface="Hiragino Sans"/>
-                <a:cs typeface="Hiragino Sans"/>
-              </a:rPr>
               <a:t>　（生の &lt; が来た場合）</a:t>
             </a:r>
           </a:p>
@@ -4736,13 +4589,13 @@
       </p:sp>
       <p:sp>
         <p:nvSpPr>
-          <p:cNvPr id="5" name="Rounded Rectangle 4"/>
+          <p:cNvPr id="3" name="Rounded Rectangle 2"/>
           <p:cNvSpPr/>
           <p:nvPr/>
         </p:nvSpPr>
         <p:spPr>
           <a:xfrm>
-            <a:off x="457200" y="1783080"/>
+            <a:off x="457200" y="1485900"/>
             <a:ext cx="2103120" cy="868680"/>
           </a:xfrm>
           <a:prstGeom prst="roundRect">
@@ -4784,13 +4637,13 @@
       </p:sp>
       <p:sp>
         <p:nvSpPr>
-          <p:cNvPr id="6" name="TextBox 5"/>
+          <p:cNvPr id="4" name="TextBox 3"/>
           <p:cNvSpPr txBox="1"/>
           <p:nvPr/>
         </p:nvSpPr>
         <p:spPr>
           <a:xfrm>
-            <a:off x="457200" y="1901952"/>
+            <a:off x="457200" y="1604772"/>
             <a:ext cx="2103120" cy="347472"/>
           </a:xfrm>
           <a:prstGeom prst="rect">
@@ -4821,13 +4674,13 @@
       </p:sp>
       <p:sp>
         <p:nvSpPr>
-          <p:cNvPr id="7" name="TextBox 6"/>
+          <p:cNvPr id="5" name="TextBox 4"/>
           <p:cNvSpPr txBox="1"/>
           <p:nvPr/>
         </p:nvSpPr>
         <p:spPr>
           <a:xfrm>
-            <a:off x="457200" y="2267712"/>
+            <a:off x="457200" y="1970532"/>
             <a:ext cx="2103120" cy="274320"/>
           </a:xfrm>
           <a:prstGeom prst="rect">
@@ -4858,13 +4711,13 @@
       </p:sp>
       <p:sp>
         <p:nvSpPr>
-          <p:cNvPr id="8" name="Rounded Rectangle 7"/>
+          <p:cNvPr id="6" name="Rounded Rectangle 5"/>
           <p:cNvSpPr/>
           <p:nvPr/>
         </p:nvSpPr>
         <p:spPr>
           <a:xfrm>
-            <a:off x="3291840" y="1783080"/>
+            <a:off x="3291840" y="1485900"/>
             <a:ext cx="2103120" cy="868680"/>
           </a:xfrm>
           <a:prstGeom prst="roundRect">
@@ -4906,13 +4759,13 @@
       </p:sp>
       <p:sp>
         <p:nvSpPr>
-          <p:cNvPr id="9" name="TextBox 8"/>
+          <p:cNvPr id="7" name="TextBox 6"/>
           <p:cNvSpPr txBox="1"/>
           <p:nvPr/>
         </p:nvSpPr>
         <p:spPr>
           <a:xfrm>
-            <a:off x="3291840" y="1901952"/>
+            <a:off x="3291840" y="1604772"/>
             <a:ext cx="2103120" cy="347472"/>
           </a:xfrm>
           <a:prstGeom prst="rect">
@@ -4943,13 +4796,13 @@
       </p:sp>
       <p:sp>
         <p:nvSpPr>
-          <p:cNvPr id="10" name="TextBox 9"/>
+          <p:cNvPr id="8" name="TextBox 7"/>
           <p:cNvSpPr txBox="1"/>
           <p:nvPr/>
         </p:nvSpPr>
         <p:spPr>
           <a:xfrm>
-            <a:off x="3291840" y="2267712"/>
+            <a:off x="3291840" y="1970532"/>
             <a:ext cx="2103120" cy="274320"/>
           </a:xfrm>
           <a:prstGeom prst="rect">
@@ -4980,13 +4833,13 @@
       </p:sp>
       <p:sp>
         <p:nvSpPr>
-          <p:cNvPr id="11" name="Rounded Rectangle 10"/>
+          <p:cNvPr id="9" name="Rounded Rectangle 8"/>
           <p:cNvSpPr/>
           <p:nvPr/>
         </p:nvSpPr>
         <p:spPr>
           <a:xfrm>
-            <a:off x="6126480" y="1783080"/>
+            <a:off x="6126480" y="1485900"/>
             <a:ext cx="2103120" cy="868680"/>
           </a:xfrm>
           <a:prstGeom prst="roundRect">
@@ -5028,13 +4881,13 @@
       </p:sp>
       <p:sp>
         <p:nvSpPr>
-          <p:cNvPr id="12" name="TextBox 11"/>
+          <p:cNvPr id="10" name="TextBox 9"/>
           <p:cNvSpPr txBox="1"/>
           <p:nvPr/>
         </p:nvSpPr>
         <p:spPr>
           <a:xfrm>
-            <a:off x="6126480" y="1901952"/>
+            <a:off x="6126480" y="1604772"/>
             <a:ext cx="2103120" cy="347472"/>
           </a:xfrm>
           <a:prstGeom prst="rect">
@@ -5065,13 +4918,13 @@
       </p:sp>
       <p:sp>
         <p:nvSpPr>
-          <p:cNvPr id="13" name="TextBox 12"/>
+          <p:cNvPr id="11" name="TextBox 10"/>
           <p:cNvSpPr txBox="1"/>
           <p:nvPr/>
         </p:nvSpPr>
         <p:spPr>
           <a:xfrm>
-            <a:off x="6126480" y="2267712"/>
+            <a:off x="6126480" y="1970532"/>
             <a:ext cx="2103120" cy="274320"/>
           </a:xfrm>
           <a:prstGeom prst="rect">
@@ -5102,13 +4955,13 @@
       </p:sp>
       <p:sp>
         <p:nvSpPr>
-          <p:cNvPr id="14" name="Rounded Rectangle 13"/>
+          <p:cNvPr id="12" name="Rounded Rectangle 11"/>
           <p:cNvSpPr/>
           <p:nvPr/>
         </p:nvSpPr>
         <p:spPr>
           <a:xfrm>
-            <a:off x="8961120" y="1783080"/>
+            <a:off x="8961120" y="1485900"/>
             <a:ext cx="2697480" cy="868680"/>
           </a:xfrm>
           <a:prstGeom prst="roundRect">
@@ -5150,13 +5003,13 @@
       </p:sp>
       <p:sp>
         <p:nvSpPr>
-          <p:cNvPr id="15" name="TextBox 14"/>
+          <p:cNvPr id="13" name="TextBox 12"/>
           <p:cNvSpPr txBox="1"/>
           <p:nvPr/>
         </p:nvSpPr>
         <p:spPr>
           <a:xfrm>
-            <a:off x="8961120" y="1892807"/>
+            <a:off x="8961120" y="1595627"/>
             <a:ext cx="2697480" cy="365760"/>
           </a:xfrm>
           <a:prstGeom prst="rect">
@@ -5187,13 +5040,13 @@
       </p:sp>
       <p:sp>
         <p:nvSpPr>
-          <p:cNvPr id="16" name="TextBox 15"/>
+          <p:cNvPr id="14" name="TextBox 13"/>
           <p:cNvSpPr txBox="1"/>
           <p:nvPr/>
         </p:nvSpPr>
         <p:spPr>
           <a:xfrm>
-            <a:off x="8961120" y="2258568"/>
+            <a:off x="8961120" y="1961388"/>
             <a:ext cx="2697480" cy="320040"/>
           </a:xfrm>
           <a:prstGeom prst="rect">
@@ -5224,13 +5077,13 @@
       </p:sp>
       <p:cxnSp>
         <p:nvCxnSpPr>
-          <p:cNvPr id="17" name="Connector 16"/>
+          <p:cNvPr id="15" name="Connector 14"/>
           <p:cNvCxnSpPr/>
           <p:nvPr/>
         </p:nvCxnSpPr>
         <p:spPr>
           <a:xfrm>
-            <a:off x="2587751" y="2217420"/>
+            <a:off x="2587751" y="1920240"/>
             <a:ext cx="676657" cy="0"/>
           </a:xfrm>
           <a:prstGeom prst="line">
@@ -5260,13 +5113,13 @@
       </p:cxnSp>
       <p:sp>
         <p:nvSpPr>
-          <p:cNvPr id="18" name="TextBox 17"/>
+          <p:cNvPr id="16" name="TextBox 15"/>
           <p:cNvSpPr txBox="1"/>
           <p:nvPr/>
         </p:nvSpPr>
         <p:spPr>
           <a:xfrm>
-            <a:off x="2560320" y="1828800"/>
+            <a:off x="2560320" y="1531620"/>
             <a:ext cx="731520" cy="320040"/>
           </a:xfrm>
           <a:prstGeom prst="rect">
@@ -5297,13 +5150,13 @@
       </p:sp>
       <p:cxnSp>
         <p:nvCxnSpPr>
-          <p:cNvPr id="19" name="Connector 18"/>
+          <p:cNvPr id="17" name="Connector 16"/>
           <p:cNvCxnSpPr/>
           <p:nvPr/>
         </p:nvCxnSpPr>
         <p:spPr>
           <a:xfrm>
-            <a:off x="5422392" y="2217420"/>
+            <a:off x="5422392" y="1920240"/>
             <a:ext cx="676656" cy="0"/>
           </a:xfrm>
           <a:prstGeom prst="line">
@@ -5333,13 +5186,13 @@
       </p:cxnSp>
       <p:sp>
         <p:nvSpPr>
-          <p:cNvPr id="20" name="TextBox 19"/>
+          <p:cNvPr id="18" name="TextBox 17"/>
           <p:cNvSpPr txBox="1"/>
           <p:nvPr/>
         </p:nvSpPr>
         <p:spPr>
           <a:xfrm>
-            <a:off x="5394960" y="1828800"/>
+            <a:off x="5394960" y="1531620"/>
             <a:ext cx="731519" cy="320040"/>
           </a:xfrm>
           <a:prstGeom prst="rect">
@@ -5370,13 +5223,13 @@
       </p:sp>
       <p:cxnSp>
         <p:nvCxnSpPr>
-          <p:cNvPr id="21" name="Connector 20"/>
+          <p:cNvPr id="19" name="Connector 18"/>
           <p:cNvCxnSpPr/>
           <p:nvPr/>
         </p:nvCxnSpPr>
         <p:spPr>
           <a:xfrm>
-            <a:off x="8257031" y="2217420"/>
+            <a:off x="8257031" y="1920240"/>
             <a:ext cx="676657" cy="0"/>
           </a:xfrm>
           <a:prstGeom prst="line">
@@ -5406,13 +5259,13 @@
       </p:cxnSp>
       <p:sp>
         <p:nvSpPr>
-          <p:cNvPr id="22" name="TextBox 21"/>
+          <p:cNvPr id="20" name="TextBox 19"/>
           <p:cNvSpPr txBox="1"/>
           <p:nvPr/>
         </p:nvSpPr>
         <p:spPr>
           <a:xfrm>
-            <a:off x="8229600" y="1828800"/>
+            <a:off x="8229600" y="1531620"/>
             <a:ext cx="731520" cy="320040"/>
           </a:xfrm>
           <a:prstGeom prst="rect">
@@ -5443,13 +5296,13 @@
       </p:sp>
       <p:sp>
         <p:nvSpPr>
-          <p:cNvPr id="23" name="TextBox 22"/>
+          <p:cNvPr id="21" name="TextBox 20"/>
           <p:cNvSpPr txBox="1"/>
           <p:nvPr/>
         </p:nvSpPr>
         <p:spPr>
           <a:xfrm>
-            <a:off x="457200" y="3063240"/>
+            <a:off x="457200" y="2766060"/>
             <a:ext cx="6400800" cy="320040"/>
           </a:xfrm>
           <a:prstGeom prst="rect">
@@ -5502,13 +5355,13 @@
       </p:sp>
       <p:sp>
         <p:nvSpPr>
-          <p:cNvPr id="24" name="Rounded Rectangle 23"/>
+          <p:cNvPr id="22" name="Rounded Rectangle 21"/>
           <p:cNvSpPr/>
           <p:nvPr/>
         </p:nvSpPr>
         <p:spPr>
           <a:xfrm>
-            <a:off x="457200" y="3520440"/>
+            <a:off x="457200" y="3223260"/>
             <a:ext cx="2103120" cy="868680"/>
           </a:xfrm>
           <a:prstGeom prst="roundRect">
@@ -5550,13 +5403,13 @@
       </p:sp>
       <p:sp>
         <p:nvSpPr>
-          <p:cNvPr id="25" name="TextBox 24"/>
+          <p:cNvPr id="23" name="TextBox 22"/>
           <p:cNvSpPr txBox="1"/>
           <p:nvPr/>
         </p:nvSpPr>
         <p:spPr>
           <a:xfrm>
-            <a:off x="457200" y="3639312"/>
+            <a:off x="457200" y="3342132"/>
             <a:ext cx="2103120" cy="347472"/>
           </a:xfrm>
           <a:prstGeom prst="rect">
@@ -5587,13 +5440,13 @@
       </p:sp>
       <p:sp>
         <p:nvSpPr>
-          <p:cNvPr id="26" name="TextBox 25"/>
+          <p:cNvPr id="24" name="TextBox 23"/>
           <p:cNvSpPr txBox="1"/>
           <p:nvPr/>
         </p:nvSpPr>
         <p:spPr>
           <a:xfrm>
-            <a:off x="457200" y="4005072"/>
+            <a:off x="457200" y="3707892"/>
             <a:ext cx="2103120" cy="274320"/>
           </a:xfrm>
           <a:prstGeom prst="rect">
@@ -5624,13 +5477,13 @@
       </p:sp>
       <p:sp>
         <p:nvSpPr>
-          <p:cNvPr id="27" name="Rounded Rectangle 26"/>
+          <p:cNvPr id="25" name="Rounded Rectangle 24"/>
           <p:cNvSpPr/>
           <p:nvPr/>
         </p:nvSpPr>
         <p:spPr>
           <a:xfrm>
-            <a:off x="3291840" y="3520440"/>
+            <a:off x="3291840" y="3223260"/>
             <a:ext cx="2103120" cy="868680"/>
           </a:xfrm>
           <a:prstGeom prst="roundRect">
@@ -5672,13 +5525,13 @@
       </p:sp>
       <p:sp>
         <p:nvSpPr>
-          <p:cNvPr id="28" name="TextBox 27"/>
+          <p:cNvPr id="26" name="TextBox 25"/>
           <p:cNvSpPr txBox="1"/>
           <p:nvPr/>
         </p:nvSpPr>
         <p:spPr>
           <a:xfrm>
-            <a:off x="3291840" y="3639312"/>
+            <a:off x="3291840" y="3342132"/>
             <a:ext cx="2103120" cy="347472"/>
           </a:xfrm>
           <a:prstGeom prst="rect">
@@ -5709,13 +5562,13 @@
       </p:sp>
       <p:sp>
         <p:nvSpPr>
-          <p:cNvPr id="29" name="TextBox 28"/>
+          <p:cNvPr id="27" name="TextBox 26"/>
           <p:cNvSpPr txBox="1"/>
           <p:nvPr/>
         </p:nvSpPr>
         <p:spPr>
           <a:xfrm>
-            <a:off x="3291840" y="4005072"/>
+            <a:off x="3291840" y="3707892"/>
             <a:ext cx="2103120" cy="274320"/>
           </a:xfrm>
           <a:prstGeom prst="rect">
@@ -5746,13 +5599,13 @@
       </p:sp>
       <p:sp>
         <p:nvSpPr>
-          <p:cNvPr id="30" name="Rounded Rectangle 29"/>
+          <p:cNvPr id="28" name="Rounded Rectangle 27"/>
           <p:cNvSpPr/>
           <p:nvPr/>
         </p:nvSpPr>
         <p:spPr>
           <a:xfrm>
-            <a:off x="6126480" y="3520440"/>
+            <a:off x="6126480" y="3223260"/>
             <a:ext cx="2103120" cy="868680"/>
           </a:xfrm>
           <a:prstGeom prst="roundRect">
@@ -5794,13 +5647,13 @@
       </p:sp>
       <p:sp>
         <p:nvSpPr>
-          <p:cNvPr id="31" name="TextBox 30"/>
+          <p:cNvPr id="29" name="TextBox 28"/>
           <p:cNvSpPr txBox="1"/>
           <p:nvPr/>
         </p:nvSpPr>
         <p:spPr>
           <a:xfrm>
-            <a:off x="6126480" y="3630168"/>
+            <a:off x="6126480" y="3332988"/>
             <a:ext cx="2103120" cy="365760"/>
           </a:xfrm>
           <a:prstGeom prst="rect">
@@ -5831,13 +5684,13 @@
       </p:sp>
       <p:sp>
         <p:nvSpPr>
-          <p:cNvPr id="32" name="TextBox 31"/>
+          <p:cNvPr id="30" name="TextBox 29"/>
           <p:cNvSpPr txBox="1"/>
           <p:nvPr/>
         </p:nvSpPr>
         <p:spPr>
           <a:xfrm>
-            <a:off x="6126480" y="3995928"/>
+            <a:off x="6126480" y="3698748"/>
             <a:ext cx="2103120" cy="320040"/>
           </a:xfrm>
           <a:prstGeom prst="rect">
@@ -5868,13 +5721,13 @@
       </p:sp>
       <p:sp>
         <p:nvSpPr>
-          <p:cNvPr id="33" name="Rounded Rectangle 32"/>
+          <p:cNvPr id="31" name="Rounded Rectangle 30"/>
           <p:cNvSpPr/>
           <p:nvPr/>
         </p:nvSpPr>
         <p:spPr>
           <a:xfrm>
-            <a:off x="8961120" y="3520440"/>
+            <a:off x="8961120" y="3223260"/>
             <a:ext cx="2697480" cy="868680"/>
           </a:xfrm>
           <a:prstGeom prst="roundRect">
@@ -5916,13 +5769,13 @@
       </p:sp>
       <p:sp>
         <p:nvSpPr>
-          <p:cNvPr id="34" name="TextBox 33"/>
+          <p:cNvPr id="32" name="TextBox 31"/>
           <p:cNvSpPr txBox="1"/>
           <p:nvPr/>
         </p:nvSpPr>
         <p:spPr>
           <a:xfrm>
-            <a:off x="8961120" y="3630168"/>
+            <a:off x="8961120" y="3332988"/>
             <a:ext cx="2697480" cy="365760"/>
           </a:xfrm>
           <a:prstGeom prst="rect">
@@ -5953,13 +5806,13 @@
       </p:sp>
       <p:sp>
         <p:nvSpPr>
-          <p:cNvPr id="35" name="TextBox 34"/>
+          <p:cNvPr id="33" name="TextBox 32"/>
           <p:cNvSpPr txBox="1"/>
           <p:nvPr/>
         </p:nvSpPr>
         <p:spPr>
           <a:xfrm>
-            <a:off x="8961120" y="3995928"/>
+            <a:off x="8961120" y="3698748"/>
             <a:ext cx="2697480" cy="320040"/>
           </a:xfrm>
           <a:prstGeom prst="rect">
@@ -5990,13 +5843,13 @@
       </p:sp>
       <p:cxnSp>
         <p:nvCxnSpPr>
-          <p:cNvPr id="36" name="Connector 35"/>
+          <p:cNvPr id="34" name="Connector 33"/>
           <p:cNvCxnSpPr/>
           <p:nvPr/>
         </p:nvCxnSpPr>
         <p:spPr>
           <a:xfrm>
-            <a:off x="2587751" y="3954780"/>
+            <a:off x="2587751" y="3657600"/>
             <a:ext cx="676657" cy="0"/>
           </a:xfrm>
           <a:prstGeom prst="line">
@@ -6026,13 +5879,13 @@
       </p:cxnSp>
       <p:sp>
         <p:nvSpPr>
-          <p:cNvPr id="37" name="TextBox 36"/>
+          <p:cNvPr id="35" name="TextBox 34"/>
           <p:cNvSpPr txBox="1"/>
           <p:nvPr/>
         </p:nvSpPr>
         <p:spPr>
           <a:xfrm>
-            <a:off x="2560320" y="3566160"/>
+            <a:off x="2560320" y="3268980"/>
             <a:ext cx="731520" cy="320040"/>
           </a:xfrm>
           <a:prstGeom prst="rect">
@@ -6063,13 +5916,13 @@
       </p:sp>
       <p:cxnSp>
         <p:nvCxnSpPr>
-          <p:cNvPr id="38" name="Connector 37"/>
+          <p:cNvPr id="36" name="Connector 35"/>
           <p:cNvCxnSpPr/>
           <p:nvPr/>
         </p:nvCxnSpPr>
         <p:spPr>
           <a:xfrm>
-            <a:off x="5422392" y="3954780"/>
+            <a:off x="5422392" y="3657600"/>
             <a:ext cx="676656" cy="0"/>
           </a:xfrm>
           <a:prstGeom prst="line">
@@ -6099,13 +5952,13 @@
       </p:cxnSp>
       <p:sp>
         <p:nvSpPr>
-          <p:cNvPr id="39" name="TextBox 38"/>
+          <p:cNvPr id="37" name="TextBox 36"/>
           <p:cNvSpPr txBox="1"/>
           <p:nvPr/>
         </p:nvSpPr>
         <p:spPr>
           <a:xfrm>
-            <a:off x="5394960" y="3566160"/>
+            <a:off x="5394960" y="3268980"/>
             <a:ext cx="731519" cy="320040"/>
           </a:xfrm>
           <a:prstGeom prst="rect">
@@ -6136,13 +5989,13 @@
       </p:sp>
       <p:cxnSp>
         <p:nvCxnSpPr>
-          <p:cNvPr id="40" name="Connector 39"/>
+          <p:cNvPr id="38" name="Connector 37"/>
           <p:cNvCxnSpPr/>
           <p:nvPr/>
         </p:nvCxnSpPr>
         <p:spPr>
           <a:xfrm>
-            <a:off x="8257031" y="3954780"/>
+            <a:off x="8257031" y="3657600"/>
             <a:ext cx="676657" cy="0"/>
           </a:xfrm>
           <a:prstGeom prst="line">
@@ -6172,13 +6025,13 @@
       </p:cxnSp>
       <p:sp>
         <p:nvSpPr>
-          <p:cNvPr id="41" name="Rounded Rectangle 40"/>
+          <p:cNvPr id="39" name="Rounded Rectangle 38"/>
           <p:cNvSpPr/>
           <p:nvPr/>
         </p:nvSpPr>
         <p:spPr>
           <a:xfrm>
-            <a:off x="457200" y="4754880"/>
+            <a:off x="457200" y="4457700"/>
             <a:ext cx="384048" cy="384048"/>
           </a:xfrm>
           <a:prstGeom prst="roundRect">
@@ -6227,13 +6080,13 @@
       </p:sp>
       <p:sp>
         <p:nvSpPr>
-          <p:cNvPr id="42" name="TextBox 41"/>
+          <p:cNvPr id="40" name="TextBox 39"/>
           <p:cNvSpPr txBox="1"/>
           <p:nvPr/>
         </p:nvSpPr>
         <p:spPr>
           <a:xfrm>
-            <a:off x="960120" y="4773168"/>
+            <a:off x="960120" y="4475988"/>
             <a:ext cx="4754880" cy="384048"/>
           </a:xfrm>
           <a:prstGeom prst="rect">
@@ -6264,13 +6117,13 @@
       </p:sp>
       <p:sp>
         <p:nvSpPr>
-          <p:cNvPr id="43" name="Rounded Rectangle 42"/>
+          <p:cNvPr id="41" name="Rounded Rectangle 40"/>
           <p:cNvSpPr/>
           <p:nvPr/>
         </p:nvSpPr>
         <p:spPr>
           <a:xfrm>
-            <a:off x="6126480" y="4754880"/>
+            <a:off x="6126480" y="4457700"/>
             <a:ext cx="384048" cy="384048"/>
           </a:xfrm>
           <a:prstGeom prst="roundRect">
@@ -6319,13 +6172,13 @@
       </p:sp>
       <p:sp>
         <p:nvSpPr>
-          <p:cNvPr id="44" name="TextBox 43"/>
+          <p:cNvPr id="42" name="TextBox 41"/>
           <p:cNvSpPr txBox="1"/>
           <p:nvPr/>
         </p:nvSpPr>
         <p:spPr>
           <a:xfrm>
-            <a:off x="6629400" y="4773168"/>
+            <a:off x="6629400" y="4475988"/>
             <a:ext cx="4754880" cy="384048"/>
           </a:xfrm>
           <a:prstGeom prst="rect">
@@ -6356,13 +6209,13 @@
       </p:sp>
       <p:sp>
         <p:nvSpPr>
-          <p:cNvPr id="45" name="Rounded Rectangle 44"/>
+          <p:cNvPr id="43" name="Rounded Rectangle 42"/>
           <p:cNvSpPr/>
           <p:nvPr/>
         </p:nvSpPr>
         <p:spPr>
           <a:xfrm>
-            <a:off x="457200" y="5257800"/>
+            <a:off x="457200" y="4960620"/>
             <a:ext cx="384048" cy="384048"/>
           </a:xfrm>
           <a:prstGeom prst="roundRect">
@@ -6411,13 +6264,13 @@
       </p:sp>
       <p:sp>
         <p:nvSpPr>
-          <p:cNvPr id="46" name="TextBox 45"/>
+          <p:cNvPr id="44" name="TextBox 43"/>
           <p:cNvSpPr txBox="1"/>
           <p:nvPr/>
         </p:nvSpPr>
         <p:spPr>
           <a:xfrm>
-            <a:off x="960120" y="5276088"/>
+            <a:off x="960120" y="4978908"/>
             <a:ext cx="4754880" cy="384048"/>
           </a:xfrm>
           <a:prstGeom prst="rect">
@@ -6448,13 +6301,13 @@
       </p:sp>
       <p:sp>
         <p:nvSpPr>
-          <p:cNvPr id="47" name="Rounded Rectangle 46"/>
+          <p:cNvPr id="45" name="Rounded Rectangle 44"/>
           <p:cNvSpPr/>
           <p:nvPr/>
         </p:nvSpPr>
         <p:spPr>
           <a:xfrm>
-            <a:off x="6126480" y="5257800"/>
+            <a:off x="6126480" y="4960620"/>
             <a:ext cx="384048" cy="384048"/>
           </a:xfrm>
           <a:prstGeom prst="roundRect">
@@ -6503,13 +6356,13 @@
       </p:sp>
       <p:sp>
         <p:nvSpPr>
-          <p:cNvPr id="48" name="TextBox 47"/>
+          <p:cNvPr id="46" name="TextBox 45"/>
           <p:cNvSpPr txBox="1"/>
           <p:nvPr/>
         </p:nvSpPr>
         <p:spPr>
           <a:xfrm>
-            <a:off x="6629400" y="5276088"/>
+            <a:off x="6629400" y="4978908"/>
             <a:ext cx="4754880" cy="384048"/>
           </a:xfrm>
           <a:prstGeom prst="rect">
@@ -6540,13 +6393,13 @@
       </p:sp>
       <p:sp>
         <p:nvSpPr>
-          <p:cNvPr id="49" name="TextBox 48"/>
+          <p:cNvPr id="47" name="TextBox 46"/>
           <p:cNvSpPr txBox="1"/>
           <p:nvPr/>
         </p:nvSpPr>
         <p:spPr>
           <a:xfrm>
-            <a:off x="457200" y="5852160"/>
+            <a:off x="457200" y="5554980"/>
             <a:ext cx="10515600" cy="274320"/>
           </a:xfrm>
           <a:prstGeom prst="rect">
@@ -6571,6 +6424,2069 @@
                 <a:cs typeface="Hiragino Sans"/>
               </a:rPr>
               <a:t>参考：HTML Living Standard 13.2.5「Tokenization」（13.2.5.1 Data state / 13.2.5.6 Tag open state / 13.2.5.77 Character reference state）</a:t>
+            </a:r>
+          </a:p>
+        </p:txBody>
+      </p:sp>
+    </p:spTree>
+  </p:cSld>
+  <p:clrMapOvr>
+    <a:masterClrMapping/>
+  </p:clrMapOvr>
+</p:sld>
+</file>
+
+<file path=ppt/slides/slide3.xml><?xml version="1.0" encoding="utf-8"?>
+<p:sld xmlns:a="http://schemas.openxmlformats.org/drawingml/2006/main" xmlns:p="http://schemas.openxmlformats.org/presentationml/2006/main" xmlns:r="http://schemas.openxmlformats.org/officeDocument/2006/relationships">
+  <p:cSld>
+    <p:spTree>
+      <p:nvGrpSpPr>
+        <p:cNvPr id="1" name=""/>
+        <p:cNvGrpSpPr/>
+        <p:nvPr/>
+      </p:nvGrpSpPr>
+      <p:grpSpPr/>
+      <p:sp>
+        <p:nvSpPr>
+          <p:cNvPr id="2" name="Rounded Rectangle 1"/>
+          <p:cNvSpPr/>
+          <p:nvPr/>
+        </p:nvSpPr>
+        <p:spPr>
+          <a:xfrm>
+            <a:off x="2898648" y="585216"/>
+            <a:ext cx="6400800" cy="548640"/>
+          </a:xfrm>
+          <a:prstGeom prst="roundRect">
+            <a:avLst>
+              <a:gd name="adj" fmla="val 20000"/>
+            </a:avLst>
+          </a:prstGeom>
+          <a:solidFill>
+            <a:srgbClr val="FFFFFF"/>
+          </a:solidFill>
+          <a:ln w="19050">
+            <a:solidFill>
+              <a:srgbClr val="C2CBD0"/>
+            </a:solidFill>
+          </a:ln>
+          <a:effectLst/>
+        </p:spPr>
+        <p:style>
+          <a:lnRef idx="1">
+            <a:schemeClr val="accent1"/>
+          </a:lnRef>
+          <a:fillRef idx="3">
+            <a:schemeClr val="accent1"/>
+          </a:fillRef>
+          <a:effectRef idx="2">
+            <a:schemeClr val="accent1"/>
+          </a:effectRef>
+          <a:fontRef idx="minor">
+            <a:schemeClr val="lt1"/>
+          </a:fontRef>
+        </p:style>
+        <p:txBody>
+          <a:bodyPr rtlCol="0" anchor="ctr"/>
+          <a:lstStyle/>
+          <a:p>
+            <a:pPr algn="ctr"/>
+          </a:p>
+        </p:txBody>
+      </p:sp>
+      <p:sp>
+        <p:nvSpPr>
+          <p:cNvPr id="3" name="TextBox 2"/>
+          <p:cNvSpPr txBox="1"/>
+          <p:nvPr/>
+        </p:nvSpPr>
+        <p:spPr>
+          <a:xfrm>
+            <a:off x="2898648" y="585216"/>
+            <a:ext cx="6400800" cy="548640"/>
+          </a:xfrm>
+          <a:prstGeom prst="rect">
+            <a:avLst/>
+          </a:prstGeom>
+          <a:noFill/>
+        </p:spPr>
+        <p:txBody>
+          <a:bodyPr wrap="square" anchor="ctr" lIns="0" rIns="0" tIns="0" bIns="0">
+            <a:spAutoFit/>
+          </a:bodyPr>
+          <a:lstStyle/>
+          <a:p>
+            <a:pPr algn="ctr"/>
+            <a:r>
+              <a:rPr sz="1200" b="0">
+                <a:solidFill>
+                  <a:srgbClr val="5E7682"/>
+                </a:solidFill>
+                <a:latin typeface="Hiragino Sans"/>
+                <a:ea typeface="Hiragino Sans"/>
+                <a:cs typeface="Hiragino Sans"/>
+              </a:rPr>
+              <a:t>サーバのテンプレート　</a:t>
+            </a:r>
+            <a:r>
+              <a:rPr sz="1500" b="0">
+                <a:solidFill>
+                  <a:srgbClr val="24404D"/>
+                </a:solidFill>
+                <a:latin typeface="Menlo"/>
+                <a:ea typeface="Menlo"/>
+                <a:cs typeface="Menlo"/>
+              </a:rPr>
+              <a:t>&lt;p&gt;こんにちは、</a:t>
+            </a:r>
+            <a:r>
+              <a:rPr sz="1500" b="1">
+                <a:solidFill>
+                  <a:srgbClr val="F08A24"/>
+                </a:solidFill>
+                <a:latin typeface="Menlo"/>
+                <a:ea typeface="Menlo"/>
+                <a:cs typeface="Menlo"/>
+              </a:rPr>
+              <a:t>{name}</a:t>
+            </a:r>
+            <a:r>
+              <a:rPr sz="1500" b="0">
+                <a:solidFill>
+                  <a:srgbClr val="24404D"/>
+                </a:solidFill>
+                <a:latin typeface="Menlo"/>
+                <a:ea typeface="Menlo"/>
+                <a:cs typeface="Menlo"/>
+              </a:rPr>
+              <a:t>さん&lt;/p&gt;</a:t>
+            </a:r>
+          </a:p>
+        </p:txBody>
+      </p:sp>
+      <p:sp>
+        <p:nvSpPr>
+          <p:cNvPr id="4" name="Rounded Rectangle 3"/>
+          <p:cNvSpPr/>
+          <p:nvPr/>
+        </p:nvSpPr>
+        <p:spPr>
+          <a:xfrm>
+            <a:off x="457200" y="1408176"/>
+            <a:ext cx="5532120" cy="4617720"/>
+          </a:xfrm>
+          <a:prstGeom prst="roundRect">
+            <a:avLst>
+              <a:gd name="adj" fmla="val 4000"/>
+            </a:avLst>
+          </a:prstGeom>
+          <a:solidFill>
+            <a:srgbClr val="FBEBEA"/>
+          </a:solidFill>
+          <a:ln w="19050">
+            <a:solidFill>
+              <a:srgbClr val="D9433B"/>
+            </a:solidFill>
+          </a:ln>
+          <a:effectLst/>
+        </p:spPr>
+        <p:style>
+          <a:lnRef idx="1">
+            <a:schemeClr val="accent1"/>
+          </a:lnRef>
+          <a:fillRef idx="3">
+            <a:schemeClr val="accent1"/>
+          </a:fillRef>
+          <a:effectRef idx="2">
+            <a:schemeClr val="accent1"/>
+          </a:effectRef>
+          <a:fontRef idx="minor">
+            <a:schemeClr val="lt1"/>
+          </a:fontRef>
+        </p:style>
+        <p:txBody>
+          <a:bodyPr rtlCol="0" anchor="ctr"/>
+          <a:lstStyle/>
+          <a:p>
+            <a:pPr algn="ctr"/>
+          </a:p>
+        </p:txBody>
+      </p:sp>
+      <p:sp>
+        <p:nvSpPr>
+          <p:cNvPr id="5" name="TextBox 4"/>
+          <p:cNvSpPr txBox="1"/>
+          <p:nvPr/>
+        </p:nvSpPr>
+        <p:spPr>
+          <a:xfrm>
+            <a:off x="685800" y="1517904"/>
+            <a:ext cx="5074920" cy="365760"/>
+          </a:xfrm>
+          <a:prstGeom prst="rect">
+            <a:avLst/>
+          </a:prstGeom>
+          <a:noFill/>
+        </p:spPr>
+        <p:txBody>
+          <a:bodyPr wrap="square" anchor="t" lIns="0" rIns="0" tIns="0" bIns="0">
+            <a:spAutoFit/>
+          </a:bodyPr>
+          <a:lstStyle/>
+          <a:p>
+            <a:pPr algn="l"/>
+            <a:r>
+              <a:rPr sz="1600" b="1">
+                <a:solidFill>
+                  <a:srgbClr val="D9433B"/>
+                </a:solidFill>
+                <a:latin typeface="Hiragino Sans"/>
+                <a:ea typeface="Hiragino Sans"/>
+                <a:cs typeface="Hiragino Sans"/>
+              </a:rPr>
+              <a:t>エスケープしない場合</a:t>
+            </a:r>
+          </a:p>
+        </p:txBody>
+      </p:sp>
+      <p:sp>
+        <p:nvSpPr>
+          <p:cNvPr id="6" name="TextBox 5"/>
+          <p:cNvSpPr txBox="1"/>
+          <p:nvPr/>
+        </p:nvSpPr>
+        <p:spPr>
+          <a:xfrm>
+            <a:off x="685800" y="1956816"/>
+            <a:ext cx="5074920" cy="320040"/>
+          </a:xfrm>
+          <a:prstGeom prst="rect">
+            <a:avLst/>
+          </a:prstGeom>
+          <a:noFill/>
+        </p:spPr>
+        <p:txBody>
+          <a:bodyPr wrap="square" anchor="t" lIns="0" rIns="0" tIns="0" bIns="0">
+            <a:spAutoFit/>
+          </a:bodyPr>
+          <a:lstStyle/>
+          <a:p>
+            <a:pPr algn="l"/>
+            <a:r>
+              <a:rPr sz="1300" b="0">
+                <a:solidFill>
+                  <a:srgbClr val="24404D"/>
+                </a:solidFill>
+                <a:latin typeface="Menlo"/>
+                <a:ea typeface="Menlo"/>
+                <a:cs typeface="Menlo"/>
+              </a:rPr>
+              <a:t>name = </a:t>
+            </a:r>
+            <a:r>
+              <a:rPr sz="1300" b="1">
+                <a:solidFill>
+                  <a:srgbClr val="D9433B"/>
+                </a:solidFill>
+                <a:latin typeface="Menlo"/>
+                <a:ea typeface="Menlo"/>
+                <a:cs typeface="Menlo"/>
+              </a:rPr>
+              <a:t>&lt;b&gt;Nico&lt;/b&gt;</a:t>
+            </a:r>
+          </a:p>
+        </p:txBody>
+      </p:sp>
+      <p:sp>
+        <p:nvSpPr>
+          <p:cNvPr id="7" name="TextBox 6"/>
+          <p:cNvSpPr txBox="1"/>
+          <p:nvPr/>
+        </p:nvSpPr>
+        <p:spPr>
+          <a:xfrm>
+            <a:off x="685800" y="2368296"/>
+            <a:ext cx="5074920" cy="274320"/>
+          </a:xfrm>
+          <a:prstGeom prst="rect">
+            <a:avLst/>
+          </a:prstGeom>
+          <a:noFill/>
+        </p:spPr>
+        <p:txBody>
+          <a:bodyPr wrap="square" anchor="t" lIns="0" rIns="0" tIns="0" bIns="0">
+            <a:spAutoFit/>
+          </a:bodyPr>
+          <a:lstStyle/>
+          <a:p>
+            <a:pPr algn="l"/>
+            <a:r>
+              <a:rPr sz="1100" b="1">
+                <a:solidFill>
+                  <a:srgbClr val="5E7682"/>
+                </a:solidFill>
+                <a:latin typeface="Hiragino Sans"/>
+                <a:ea typeface="Hiragino Sans"/>
+                <a:cs typeface="Hiragino Sans"/>
+              </a:rPr>
+              <a:t>埋め込み後のHTML</a:t>
+            </a:r>
+          </a:p>
+        </p:txBody>
+      </p:sp>
+      <p:sp>
+        <p:nvSpPr>
+          <p:cNvPr id="8" name="Rounded Rectangle 7"/>
+          <p:cNvSpPr/>
+          <p:nvPr/>
+        </p:nvSpPr>
+        <p:spPr>
+          <a:xfrm>
+            <a:off x="685800" y="2642616"/>
+            <a:ext cx="5074920" cy="457200"/>
+          </a:xfrm>
+          <a:prstGeom prst="roundRect">
+            <a:avLst>
+              <a:gd name="adj" fmla="val 12000"/>
+            </a:avLst>
+          </a:prstGeom>
+          <a:solidFill>
+            <a:srgbClr val="FFFFFF"/>
+          </a:solidFill>
+          <a:ln w="12700">
+            <a:solidFill>
+              <a:srgbClr val="D9433B"/>
+            </a:solidFill>
+          </a:ln>
+          <a:effectLst/>
+        </p:spPr>
+        <p:style>
+          <a:lnRef idx="1">
+            <a:schemeClr val="accent1"/>
+          </a:lnRef>
+          <a:fillRef idx="3">
+            <a:schemeClr val="accent1"/>
+          </a:fillRef>
+          <a:effectRef idx="2">
+            <a:schemeClr val="accent1"/>
+          </a:effectRef>
+          <a:fontRef idx="minor">
+            <a:schemeClr val="lt1"/>
+          </a:fontRef>
+        </p:style>
+        <p:txBody>
+          <a:bodyPr rtlCol="0" anchor="ctr"/>
+          <a:lstStyle/>
+          <a:p>
+            <a:pPr algn="ctr"/>
+          </a:p>
+        </p:txBody>
+      </p:sp>
+      <p:sp>
+        <p:nvSpPr>
+          <p:cNvPr id="9" name="TextBox 8"/>
+          <p:cNvSpPr txBox="1"/>
+          <p:nvPr/>
+        </p:nvSpPr>
+        <p:spPr>
+          <a:xfrm>
+            <a:off x="777240" y="2642616"/>
+            <a:ext cx="4892040" cy="457200"/>
+          </a:xfrm>
+          <a:prstGeom prst="rect">
+            <a:avLst/>
+          </a:prstGeom>
+          <a:noFill/>
+        </p:spPr>
+        <p:txBody>
+          <a:bodyPr wrap="square" anchor="ctr" lIns="0" rIns="0" tIns="0" bIns="0">
+            <a:spAutoFit/>
+          </a:bodyPr>
+          <a:lstStyle/>
+          <a:p>
+            <a:pPr algn="l"/>
+            <a:r>
+              <a:rPr sz="1150" b="0">
+                <a:solidFill>
+                  <a:srgbClr val="24404D"/>
+                </a:solidFill>
+                <a:latin typeface="Menlo"/>
+                <a:ea typeface="Menlo"/>
+                <a:cs typeface="Menlo"/>
+              </a:rPr>
+              <a:t>&lt;p&gt;こんにちは、</a:t>
+            </a:r>
+            <a:r>
+              <a:rPr sz="1150" b="1">
+                <a:solidFill>
+                  <a:srgbClr val="D9433B"/>
+                </a:solidFill>
+                <a:latin typeface="Menlo"/>
+                <a:ea typeface="Menlo"/>
+                <a:cs typeface="Menlo"/>
+              </a:rPr>
+              <a:t>&lt;b&gt;</a:t>
+            </a:r>
+            <a:r>
+              <a:rPr sz="1150" b="0">
+                <a:solidFill>
+                  <a:srgbClr val="24404D"/>
+                </a:solidFill>
+                <a:latin typeface="Menlo"/>
+                <a:ea typeface="Menlo"/>
+                <a:cs typeface="Menlo"/>
+              </a:rPr>
+              <a:t>Nico</a:t>
+            </a:r>
+            <a:r>
+              <a:rPr sz="1150" b="1">
+                <a:solidFill>
+                  <a:srgbClr val="D9433B"/>
+                </a:solidFill>
+                <a:latin typeface="Menlo"/>
+                <a:ea typeface="Menlo"/>
+                <a:cs typeface="Menlo"/>
+              </a:rPr>
+              <a:t>&lt;/b&gt;</a:t>
+            </a:r>
+            <a:r>
+              <a:rPr sz="1150" b="0">
+                <a:solidFill>
+                  <a:srgbClr val="24404D"/>
+                </a:solidFill>
+                <a:latin typeface="Menlo"/>
+                <a:ea typeface="Menlo"/>
+                <a:cs typeface="Menlo"/>
+              </a:rPr>
+              <a:t>さん&lt;/p&gt;</a:t>
+            </a:r>
+          </a:p>
+        </p:txBody>
+      </p:sp>
+      <p:sp>
+        <p:nvSpPr>
+          <p:cNvPr id="10" name="TextBox 9"/>
+          <p:cNvSpPr txBox="1"/>
+          <p:nvPr/>
+        </p:nvSpPr>
+        <p:spPr>
+          <a:xfrm>
+            <a:off x="685800" y="3236976"/>
+            <a:ext cx="5074920" cy="274320"/>
+          </a:xfrm>
+          <a:prstGeom prst="rect">
+            <a:avLst/>
+          </a:prstGeom>
+          <a:noFill/>
+        </p:spPr>
+        <p:txBody>
+          <a:bodyPr wrap="square" anchor="t" lIns="0" rIns="0" tIns="0" bIns="0">
+            <a:spAutoFit/>
+          </a:bodyPr>
+          <a:lstStyle/>
+          <a:p>
+            <a:pPr algn="l"/>
+            <a:r>
+              <a:rPr sz="1100" b="1">
+                <a:solidFill>
+                  <a:srgbClr val="5E7682"/>
+                </a:solidFill>
+                <a:latin typeface="Hiragino Sans"/>
+                <a:ea typeface="Hiragino Sans"/>
+                <a:cs typeface="Hiragino Sans"/>
+              </a:rPr>
+              <a:t>② トークナイザが出すトークン</a:t>
+            </a:r>
+          </a:p>
+        </p:txBody>
+      </p:sp>
+      <p:sp>
+        <p:nvSpPr>
+          <p:cNvPr id="11" name="Rounded Rectangle 10"/>
+          <p:cNvSpPr/>
+          <p:nvPr/>
+        </p:nvSpPr>
+        <p:spPr>
+          <a:xfrm>
+            <a:off x="685800" y="3511296"/>
+            <a:ext cx="1371600" cy="274320"/>
+          </a:xfrm>
+          <a:prstGeom prst="roundRect">
+            <a:avLst>
+              <a:gd name="adj" fmla="val 25000"/>
+            </a:avLst>
+          </a:prstGeom>
+          <a:solidFill>
+            <a:srgbClr val="FFFFFF"/>
+          </a:solidFill>
+          <a:ln w="12700">
+            <a:solidFill>
+              <a:srgbClr val="D9433B"/>
+            </a:solidFill>
+          </a:ln>
+          <a:effectLst/>
+        </p:spPr>
+        <p:style>
+          <a:lnRef idx="1">
+            <a:schemeClr val="accent1"/>
+          </a:lnRef>
+          <a:fillRef idx="3">
+            <a:schemeClr val="accent1"/>
+          </a:fillRef>
+          <a:effectRef idx="2">
+            <a:schemeClr val="accent1"/>
+          </a:effectRef>
+          <a:fontRef idx="minor">
+            <a:schemeClr val="lt1"/>
+          </a:fontRef>
+        </p:style>
+        <p:txBody>
+          <a:bodyPr rtlCol="0" anchor="ctr"/>
+          <a:lstStyle/>
+          <a:p>
+            <a:pPr algn="ctr"/>
+          </a:p>
+        </p:txBody>
+      </p:sp>
+      <p:sp>
+        <p:nvSpPr>
+          <p:cNvPr id="12" name="TextBox 11"/>
+          <p:cNvSpPr txBox="1"/>
+          <p:nvPr/>
+        </p:nvSpPr>
+        <p:spPr>
+          <a:xfrm>
+            <a:off x="685800" y="3511296"/>
+            <a:ext cx="1371600" cy="274320"/>
+          </a:xfrm>
+          <a:prstGeom prst="rect">
+            <a:avLst/>
+          </a:prstGeom>
+          <a:noFill/>
+        </p:spPr>
+        <p:txBody>
+          <a:bodyPr wrap="square" anchor="ctr" lIns="0" rIns="0" tIns="0" bIns="0">
+            <a:spAutoFit/>
+          </a:bodyPr>
+          <a:lstStyle/>
+          <a:p>
+            <a:pPr algn="ctr"/>
+            <a:r>
+              <a:rPr sz="1000" b="0">
+                <a:solidFill>
+                  <a:srgbClr val="24404D"/>
+                </a:solidFill>
+                <a:latin typeface="Menlo"/>
+                <a:ea typeface="Menlo"/>
+                <a:cs typeface="Menlo"/>
+              </a:rPr>
+              <a:t>StartTag p</a:t>
+            </a:r>
+          </a:p>
+        </p:txBody>
+      </p:sp>
+      <p:sp>
+        <p:nvSpPr>
+          <p:cNvPr id="13" name="Rounded Rectangle 12"/>
+          <p:cNvSpPr/>
+          <p:nvPr/>
+        </p:nvSpPr>
+        <p:spPr>
+          <a:xfrm>
+            <a:off x="685800" y="3840480"/>
+            <a:ext cx="1481328" cy="274320"/>
+          </a:xfrm>
+          <a:prstGeom prst="roundRect">
+            <a:avLst>
+              <a:gd name="adj" fmla="val 25000"/>
+            </a:avLst>
+          </a:prstGeom>
+          <a:solidFill>
+            <a:srgbClr val="FFFFFF"/>
+          </a:solidFill>
+          <a:ln w="12700">
+            <a:solidFill>
+              <a:srgbClr val="D9433B"/>
+            </a:solidFill>
+          </a:ln>
+          <a:effectLst/>
+        </p:spPr>
+        <p:style>
+          <a:lnRef idx="1">
+            <a:schemeClr val="accent1"/>
+          </a:lnRef>
+          <a:fillRef idx="3">
+            <a:schemeClr val="accent1"/>
+          </a:fillRef>
+          <a:effectRef idx="2">
+            <a:schemeClr val="accent1"/>
+          </a:effectRef>
+          <a:fontRef idx="minor">
+            <a:schemeClr val="lt1"/>
+          </a:fontRef>
+        </p:style>
+        <p:txBody>
+          <a:bodyPr rtlCol="0" anchor="ctr"/>
+          <a:lstStyle/>
+          <a:p>
+            <a:pPr algn="ctr"/>
+          </a:p>
+        </p:txBody>
+      </p:sp>
+      <p:sp>
+        <p:nvSpPr>
+          <p:cNvPr id="14" name="TextBox 13"/>
+          <p:cNvSpPr txBox="1"/>
+          <p:nvPr/>
+        </p:nvSpPr>
+        <p:spPr>
+          <a:xfrm>
+            <a:off x="685800" y="3840480"/>
+            <a:ext cx="1481328" cy="274320"/>
+          </a:xfrm>
+          <a:prstGeom prst="rect">
+            <a:avLst/>
+          </a:prstGeom>
+          <a:noFill/>
+        </p:spPr>
+        <p:txBody>
+          <a:bodyPr wrap="square" anchor="ctr" lIns="0" rIns="0" tIns="0" bIns="0">
+            <a:spAutoFit/>
+          </a:bodyPr>
+          <a:lstStyle/>
+          <a:p>
+            <a:pPr algn="ctr"/>
+            <a:r>
+              <a:rPr sz="1000" b="0">
+                <a:solidFill>
+                  <a:srgbClr val="24404D"/>
+                </a:solidFill>
+                <a:latin typeface="Menlo"/>
+                <a:ea typeface="Menlo"/>
+                <a:cs typeface="Menlo"/>
+              </a:rPr>
+              <a:t>Char こんにちは、</a:t>
+            </a:r>
+          </a:p>
+        </p:txBody>
+      </p:sp>
+      <p:sp>
+        <p:nvSpPr>
+          <p:cNvPr id="15" name="Rounded Rectangle 14"/>
+          <p:cNvSpPr/>
+          <p:nvPr/>
+        </p:nvSpPr>
+        <p:spPr>
+          <a:xfrm>
+            <a:off x="685800" y="4169664"/>
+            <a:ext cx="1371600" cy="274320"/>
+          </a:xfrm>
+          <a:prstGeom prst="roundRect">
+            <a:avLst>
+              <a:gd name="adj" fmla="val 25000"/>
+            </a:avLst>
+          </a:prstGeom>
+          <a:solidFill>
+            <a:srgbClr val="D9433B"/>
+          </a:solidFill>
+          <a:ln>
+            <a:noFill/>
+          </a:ln>
+          <a:effectLst/>
+        </p:spPr>
+        <p:style>
+          <a:lnRef idx="1">
+            <a:schemeClr val="accent1"/>
+          </a:lnRef>
+          <a:fillRef idx="3">
+            <a:schemeClr val="accent1"/>
+          </a:fillRef>
+          <a:effectRef idx="2">
+            <a:schemeClr val="accent1"/>
+          </a:effectRef>
+          <a:fontRef idx="minor">
+            <a:schemeClr val="lt1"/>
+          </a:fontRef>
+        </p:style>
+        <p:txBody>
+          <a:bodyPr rtlCol="0" anchor="ctr"/>
+          <a:lstStyle/>
+          <a:p>
+            <a:pPr algn="ctr"/>
+          </a:p>
+        </p:txBody>
+      </p:sp>
+      <p:sp>
+        <p:nvSpPr>
+          <p:cNvPr id="16" name="TextBox 15"/>
+          <p:cNvSpPr txBox="1"/>
+          <p:nvPr/>
+        </p:nvSpPr>
+        <p:spPr>
+          <a:xfrm>
+            <a:off x="685800" y="4169664"/>
+            <a:ext cx="1371600" cy="274320"/>
+          </a:xfrm>
+          <a:prstGeom prst="rect">
+            <a:avLst/>
+          </a:prstGeom>
+          <a:noFill/>
+        </p:spPr>
+        <p:txBody>
+          <a:bodyPr wrap="square" anchor="ctr" lIns="0" rIns="0" tIns="0" bIns="0">
+            <a:spAutoFit/>
+          </a:bodyPr>
+          <a:lstStyle/>
+          <a:p>
+            <a:pPr algn="ctr"/>
+            <a:r>
+              <a:rPr sz="1000" b="0">
+                <a:solidFill>
+                  <a:srgbClr val="FFFFFF"/>
+                </a:solidFill>
+                <a:latin typeface="Menlo"/>
+                <a:ea typeface="Menlo"/>
+                <a:cs typeface="Menlo"/>
+              </a:rPr>
+              <a:t>StartTag b</a:t>
+            </a:r>
+          </a:p>
+        </p:txBody>
+      </p:sp>
+      <p:sp>
+        <p:nvSpPr>
+          <p:cNvPr id="17" name="Rounded Rectangle 16"/>
+          <p:cNvSpPr/>
+          <p:nvPr/>
+        </p:nvSpPr>
+        <p:spPr>
+          <a:xfrm>
+            <a:off x="685800" y="4498848"/>
+            <a:ext cx="1261872" cy="274320"/>
+          </a:xfrm>
+          <a:prstGeom prst="roundRect">
+            <a:avLst>
+              <a:gd name="adj" fmla="val 25000"/>
+            </a:avLst>
+          </a:prstGeom>
+          <a:solidFill>
+            <a:srgbClr val="FFFFFF"/>
+          </a:solidFill>
+          <a:ln w="12700">
+            <a:solidFill>
+              <a:srgbClr val="D9433B"/>
+            </a:solidFill>
+          </a:ln>
+          <a:effectLst/>
+        </p:spPr>
+        <p:style>
+          <a:lnRef idx="1">
+            <a:schemeClr val="accent1"/>
+          </a:lnRef>
+          <a:fillRef idx="3">
+            <a:schemeClr val="accent1"/>
+          </a:fillRef>
+          <a:effectRef idx="2">
+            <a:schemeClr val="accent1"/>
+          </a:effectRef>
+          <a:fontRef idx="minor">
+            <a:schemeClr val="lt1"/>
+          </a:fontRef>
+        </p:style>
+        <p:txBody>
+          <a:bodyPr rtlCol="0" anchor="ctr"/>
+          <a:lstStyle/>
+          <a:p>
+            <a:pPr algn="ctr"/>
+          </a:p>
+        </p:txBody>
+      </p:sp>
+      <p:sp>
+        <p:nvSpPr>
+          <p:cNvPr id="18" name="TextBox 17"/>
+          <p:cNvSpPr txBox="1"/>
+          <p:nvPr/>
+        </p:nvSpPr>
+        <p:spPr>
+          <a:xfrm>
+            <a:off x="685800" y="4498848"/>
+            <a:ext cx="1261872" cy="274320"/>
+          </a:xfrm>
+          <a:prstGeom prst="rect">
+            <a:avLst/>
+          </a:prstGeom>
+          <a:noFill/>
+        </p:spPr>
+        <p:txBody>
+          <a:bodyPr wrap="square" anchor="ctr" lIns="0" rIns="0" tIns="0" bIns="0">
+            <a:spAutoFit/>
+          </a:bodyPr>
+          <a:lstStyle/>
+          <a:p>
+            <a:pPr algn="ctr"/>
+            <a:r>
+              <a:rPr sz="1000" b="0">
+                <a:solidFill>
+                  <a:srgbClr val="24404D"/>
+                </a:solidFill>
+                <a:latin typeface="Menlo"/>
+                <a:ea typeface="Menlo"/>
+                <a:cs typeface="Menlo"/>
+              </a:rPr>
+              <a:t>Char Nico</a:t>
+            </a:r>
+          </a:p>
+        </p:txBody>
+      </p:sp>
+      <p:sp>
+        <p:nvSpPr>
+          <p:cNvPr id="19" name="Rounded Rectangle 18"/>
+          <p:cNvSpPr/>
+          <p:nvPr/>
+        </p:nvSpPr>
+        <p:spPr>
+          <a:xfrm>
+            <a:off x="685800" y="4828032"/>
+            <a:ext cx="1152144" cy="274320"/>
+          </a:xfrm>
+          <a:prstGeom prst="roundRect">
+            <a:avLst>
+              <a:gd name="adj" fmla="val 25000"/>
+            </a:avLst>
+          </a:prstGeom>
+          <a:solidFill>
+            <a:srgbClr val="D9433B"/>
+          </a:solidFill>
+          <a:ln>
+            <a:noFill/>
+          </a:ln>
+          <a:effectLst/>
+        </p:spPr>
+        <p:style>
+          <a:lnRef idx="1">
+            <a:schemeClr val="accent1"/>
+          </a:lnRef>
+          <a:fillRef idx="3">
+            <a:schemeClr val="accent1"/>
+          </a:fillRef>
+          <a:effectRef idx="2">
+            <a:schemeClr val="accent1"/>
+          </a:effectRef>
+          <a:fontRef idx="minor">
+            <a:schemeClr val="lt1"/>
+          </a:fontRef>
+        </p:style>
+        <p:txBody>
+          <a:bodyPr rtlCol="0" anchor="ctr"/>
+          <a:lstStyle/>
+          <a:p>
+            <a:pPr algn="ctr"/>
+          </a:p>
+        </p:txBody>
+      </p:sp>
+      <p:sp>
+        <p:nvSpPr>
+          <p:cNvPr id="20" name="TextBox 19"/>
+          <p:cNvSpPr txBox="1"/>
+          <p:nvPr/>
+        </p:nvSpPr>
+        <p:spPr>
+          <a:xfrm>
+            <a:off x="685800" y="4828032"/>
+            <a:ext cx="1152144" cy="274320"/>
+          </a:xfrm>
+          <a:prstGeom prst="rect">
+            <a:avLst/>
+          </a:prstGeom>
+          <a:noFill/>
+        </p:spPr>
+        <p:txBody>
+          <a:bodyPr wrap="square" anchor="ctr" lIns="0" rIns="0" tIns="0" bIns="0">
+            <a:spAutoFit/>
+          </a:bodyPr>
+          <a:lstStyle/>
+          <a:p>
+            <a:pPr algn="ctr"/>
+            <a:r>
+              <a:rPr sz="1000" b="0">
+                <a:solidFill>
+                  <a:srgbClr val="FFFFFF"/>
+                </a:solidFill>
+                <a:latin typeface="Menlo"/>
+                <a:ea typeface="Menlo"/>
+                <a:cs typeface="Menlo"/>
+              </a:rPr>
+              <a:t>EndTag b</a:t>
+            </a:r>
+          </a:p>
+        </p:txBody>
+      </p:sp>
+      <p:sp>
+        <p:nvSpPr>
+          <p:cNvPr id="21" name="Rounded Rectangle 20"/>
+          <p:cNvSpPr/>
+          <p:nvPr/>
+        </p:nvSpPr>
+        <p:spPr>
+          <a:xfrm>
+            <a:off x="685800" y="5157216"/>
+            <a:ext cx="1042415" cy="274320"/>
+          </a:xfrm>
+          <a:prstGeom prst="roundRect">
+            <a:avLst>
+              <a:gd name="adj" fmla="val 25000"/>
+            </a:avLst>
+          </a:prstGeom>
+          <a:solidFill>
+            <a:srgbClr val="FFFFFF"/>
+          </a:solidFill>
+          <a:ln w="12700">
+            <a:solidFill>
+              <a:srgbClr val="D9433B"/>
+            </a:solidFill>
+          </a:ln>
+          <a:effectLst/>
+        </p:spPr>
+        <p:style>
+          <a:lnRef idx="1">
+            <a:schemeClr val="accent1"/>
+          </a:lnRef>
+          <a:fillRef idx="3">
+            <a:schemeClr val="accent1"/>
+          </a:fillRef>
+          <a:effectRef idx="2">
+            <a:schemeClr val="accent1"/>
+          </a:effectRef>
+          <a:fontRef idx="minor">
+            <a:schemeClr val="lt1"/>
+          </a:fontRef>
+        </p:style>
+        <p:txBody>
+          <a:bodyPr rtlCol="0" anchor="ctr"/>
+          <a:lstStyle/>
+          <a:p>
+            <a:pPr algn="ctr"/>
+          </a:p>
+        </p:txBody>
+      </p:sp>
+      <p:sp>
+        <p:nvSpPr>
+          <p:cNvPr id="22" name="TextBox 21"/>
+          <p:cNvSpPr txBox="1"/>
+          <p:nvPr/>
+        </p:nvSpPr>
+        <p:spPr>
+          <a:xfrm>
+            <a:off x="685800" y="5157216"/>
+            <a:ext cx="1042415" cy="274320"/>
+          </a:xfrm>
+          <a:prstGeom prst="rect">
+            <a:avLst/>
+          </a:prstGeom>
+          <a:noFill/>
+        </p:spPr>
+        <p:txBody>
+          <a:bodyPr wrap="square" anchor="ctr" lIns="0" rIns="0" tIns="0" bIns="0">
+            <a:spAutoFit/>
+          </a:bodyPr>
+          <a:lstStyle/>
+          <a:p>
+            <a:pPr algn="ctr"/>
+            <a:r>
+              <a:rPr sz="1000" b="0">
+                <a:solidFill>
+                  <a:srgbClr val="24404D"/>
+                </a:solidFill>
+                <a:latin typeface="Menlo"/>
+                <a:ea typeface="Menlo"/>
+                <a:cs typeface="Menlo"/>
+              </a:rPr>
+              <a:t>Char さん</a:t>
+            </a:r>
+          </a:p>
+        </p:txBody>
+      </p:sp>
+      <p:sp>
+        <p:nvSpPr>
+          <p:cNvPr id="23" name="Rounded Rectangle 22"/>
+          <p:cNvSpPr/>
+          <p:nvPr/>
+        </p:nvSpPr>
+        <p:spPr>
+          <a:xfrm>
+            <a:off x="685800" y="5486400"/>
+            <a:ext cx="1152144" cy="274320"/>
+          </a:xfrm>
+          <a:prstGeom prst="roundRect">
+            <a:avLst>
+              <a:gd name="adj" fmla="val 25000"/>
+            </a:avLst>
+          </a:prstGeom>
+          <a:solidFill>
+            <a:srgbClr val="FFFFFF"/>
+          </a:solidFill>
+          <a:ln w="12700">
+            <a:solidFill>
+              <a:srgbClr val="D9433B"/>
+            </a:solidFill>
+          </a:ln>
+          <a:effectLst/>
+        </p:spPr>
+        <p:style>
+          <a:lnRef idx="1">
+            <a:schemeClr val="accent1"/>
+          </a:lnRef>
+          <a:fillRef idx="3">
+            <a:schemeClr val="accent1"/>
+          </a:fillRef>
+          <a:effectRef idx="2">
+            <a:schemeClr val="accent1"/>
+          </a:effectRef>
+          <a:fontRef idx="minor">
+            <a:schemeClr val="lt1"/>
+          </a:fontRef>
+        </p:style>
+        <p:txBody>
+          <a:bodyPr rtlCol="0" anchor="ctr"/>
+          <a:lstStyle/>
+          <a:p>
+            <a:pPr algn="ctr"/>
+          </a:p>
+        </p:txBody>
+      </p:sp>
+      <p:sp>
+        <p:nvSpPr>
+          <p:cNvPr id="24" name="TextBox 23"/>
+          <p:cNvSpPr txBox="1"/>
+          <p:nvPr/>
+        </p:nvSpPr>
+        <p:spPr>
+          <a:xfrm>
+            <a:off x="685800" y="5486400"/>
+            <a:ext cx="1152144" cy="274320"/>
+          </a:xfrm>
+          <a:prstGeom prst="rect">
+            <a:avLst/>
+          </a:prstGeom>
+          <a:noFill/>
+        </p:spPr>
+        <p:txBody>
+          <a:bodyPr wrap="square" anchor="ctr" lIns="0" rIns="0" tIns="0" bIns="0">
+            <a:spAutoFit/>
+          </a:bodyPr>
+          <a:lstStyle/>
+          <a:p>
+            <a:pPr algn="ctr"/>
+            <a:r>
+              <a:rPr sz="1000" b="0">
+                <a:solidFill>
+                  <a:srgbClr val="24404D"/>
+                </a:solidFill>
+                <a:latin typeface="Menlo"/>
+                <a:ea typeface="Menlo"/>
+                <a:cs typeface="Menlo"/>
+              </a:rPr>
+              <a:t>EndTag p</a:t>
+            </a:r>
+          </a:p>
+        </p:txBody>
+      </p:sp>
+      <p:sp>
+        <p:nvSpPr>
+          <p:cNvPr id="25" name="TextBox 24"/>
+          <p:cNvSpPr txBox="1"/>
+          <p:nvPr/>
+        </p:nvSpPr>
+        <p:spPr>
+          <a:xfrm>
+            <a:off x="3268979" y="3236976"/>
+            <a:ext cx="2491740" cy="274320"/>
+          </a:xfrm>
+          <a:prstGeom prst="rect">
+            <a:avLst/>
+          </a:prstGeom>
+          <a:noFill/>
+        </p:spPr>
+        <p:txBody>
+          <a:bodyPr wrap="square" anchor="t" lIns="0" rIns="0" tIns="0" bIns="0">
+            <a:spAutoFit/>
+          </a:bodyPr>
+          <a:lstStyle/>
+          <a:p>
+            <a:pPr algn="l"/>
+            <a:r>
+              <a:rPr sz="1100" b="1">
+                <a:solidFill>
+                  <a:srgbClr val="5E7682"/>
+                </a:solidFill>
+                <a:latin typeface="Hiragino Sans"/>
+                <a:ea typeface="Hiragino Sans"/>
+                <a:cs typeface="Hiragino Sans"/>
+              </a:rPr>
+              <a:t>③ できるDOMツリー</a:t>
+            </a:r>
+          </a:p>
+        </p:txBody>
+      </p:sp>
+      <p:sp>
+        <p:nvSpPr>
+          <p:cNvPr id="26" name="Rounded Rectangle 25"/>
+          <p:cNvSpPr/>
+          <p:nvPr/>
+        </p:nvSpPr>
+        <p:spPr>
+          <a:xfrm>
+            <a:off x="3268979" y="3511296"/>
+            <a:ext cx="2491740" cy="2331720"/>
+          </a:xfrm>
+          <a:prstGeom prst="roundRect">
+            <a:avLst>
+              <a:gd name="adj" fmla="val 6000"/>
+            </a:avLst>
+          </a:prstGeom>
+          <a:solidFill>
+            <a:srgbClr val="FFFFFF"/>
+          </a:solidFill>
+          <a:ln w="12700">
+            <a:solidFill>
+              <a:srgbClr val="D9433B"/>
+            </a:solidFill>
+          </a:ln>
+          <a:effectLst/>
+        </p:spPr>
+        <p:style>
+          <a:lnRef idx="1">
+            <a:schemeClr val="accent1"/>
+          </a:lnRef>
+          <a:fillRef idx="3">
+            <a:schemeClr val="accent1"/>
+          </a:fillRef>
+          <a:effectRef idx="2">
+            <a:schemeClr val="accent1"/>
+          </a:effectRef>
+          <a:fontRef idx="minor">
+            <a:schemeClr val="lt1"/>
+          </a:fontRef>
+        </p:style>
+        <p:txBody>
+          <a:bodyPr rtlCol="0" anchor="ctr"/>
+          <a:lstStyle/>
+          <a:p>
+            <a:pPr algn="ctr"/>
+          </a:p>
+        </p:txBody>
+      </p:sp>
+      <p:sp>
+        <p:nvSpPr>
+          <p:cNvPr id="27" name="TextBox 26"/>
+          <p:cNvSpPr txBox="1"/>
+          <p:nvPr/>
+        </p:nvSpPr>
+        <p:spPr>
+          <a:xfrm>
+            <a:off x="3406139" y="3621024"/>
+            <a:ext cx="2217420" cy="2651760"/>
+          </a:xfrm>
+          <a:prstGeom prst="rect">
+            <a:avLst/>
+          </a:prstGeom>
+          <a:noFill/>
+        </p:spPr>
+        <p:txBody>
+          <a:bodyPr wrap="square" anchor="t" lIns="0" rIns="0" tIns="0" bIns="0">
+            <a:spAutoFit/>
+          </a:bodyPr>
+          <a:lstStyle/>
+          <a:p>
+            <a:pPr algn="l"/>
+            <a:r>
+              <a:rPr sz="1100" b="0">
+                <a:solidFill>
+                  <a:srgbClr val="24404D"/>
+                </a:solidFill>
+                <a:latin typeface="Menlo"/>
+                <a:ea typeface="Menlo"/>
+                <a:cs typeface="Menlo"/>
+              </a:rPr>
+              <a:t>&lt;p&gt;</a:t>
+            </a:r>
+          </a:p>
+          <a:p>
+            <a:pPr algn="l"/>
+            <a:r>
+              <a:rPr sz="1100" b="0">
+                <a:solidFill>
+                  <a:srgbClr val="24404D"/>
+                </a:solidFill>
+                <a:latin typeface="Menlo"/>
+                <a:ea typeface="Menlo"/>
+                <a:cs typeface="Menlo"/>
+              </a:rPr>
+              <a:t>├ "こんにちは、"</a:t>
+            </a:r>
+          </a:p>
+          <a:p>
+            <a:pPr algn="l"/>
+            <a:r>
+              <a:rPr sz="1100" b="0">
+                <a:solidFill>
+                  <a:srgbClr val="24404D"/>
+                </a:solidFill>
+                <a:latin typeface="Menlo"/>
+                <a:ea typeface="Menlo"/>
+                <a:cs typeface="Menlo"/>
+              </a:rPr>
+              <a:t>├ </a:t>
+            </a:r>
+            <a:r>
+              <a:rPr sz="1100" b="1">
+                <a:solidFill>
+                  <a:srgbClr val="D9433B"/>
+                </a:solidFill>
+                <a:latin typeface="Menlo"/>
+                <a:ea typeface="Menlo"/>
+                <a:cs typeface="Menlo"/>
+              </a:rPr>
+              <a:t>&lt;b&gt;</a:t>
+            </a:r>
+          </a:p>
+          <a:p>
+            <a:pPr algn="l"/>
+            <a:r>
+              <a:rPr sz="1100" b="0">
+                <a:solidFill>
+                  <a:srgbClr val="24404D"/>
+                </a:solidFill>
+                <a:latin typeface="Menlo"/>
+                <a:ea typeface="Menlo"/>
+                <a:cs typeface="Menlo"/>
+              </a:rPr>
+              <a:t>│ └ "Nico"</a:t>
+            </a:r>
+          </a:p>
+          <a:p>
+            <a:pPr algn="l"/>
+            <a:r>
+              <a:rPr sz="1100" b="0">
+                <a:solidFill>
+                  <a:srgbClr val="24404D"/>
+                </a:solidFill>
+                <a:latin typeface="Menlo"/>
+                <a:ea typeface="Menlo"/>
+                <a:cs typeface="Menlo"/>
+              </a:rPr>
+              <a:t>└ "さん"</a:t>
+            </a:r>
+          </a:p>
+          <a:p>
+            <a:pPr algn="l"/>
+            <a:r>
+              <a:rPr sz="1100" b="0">
+                <a:solidFill>
+                  <a:srgbClr val="24404D"/>
+                </a:solidFill>
+                <a:latin typeface="Menlo"/>
+                <a:ea typeface="Menlo"/>
+                <a:cs typeface="Menlo"/>
+              </a:rPr>
+              <a:t/>
+            </a:r>
+          </a:p>
+          <a:p>
+            <a:pPr algn="l"/>
+            <a:r>
+              <a:rPr sz="1100" b="1">
+                <a:solidFill>
+                  <a:srgbClr val="D9433B"/>
+                </a:solidFill>
+                <a:latin typeface="Hiragino Sans"/>
+                <a:ea typeface="Hiragino Sans"/>
+                <a:cs typeface="Hiragino Sans"/>
+              </a:rPr>
+              <a:t>要素が1つ増えた</a:t>
+            </a:r>
+          </a:p>
+        </p:txBody>
+      </p:sp>
+      <p:sp>
+        <p:nvSpPr>
+          <p:cNvPr id="28" name="Rounded Rectangle 27"/>
+          <p:cNvSpPr/>
+          <p:nvPr/>
+        </p:nvSpPr>
+        <p:spPr>
+          <a:xfrm>
+            <a:off x="6199632" y="1408176"/>
+            <a:ext cx="5532120" cy="4617720"/>
+          </a:xfrm>
+          <a:prstGeom prst="roundRect">
+            <a:avLst>
+              <a:gd name="adj" fmla="val 4000"/>
+            </a:avLst>
+          </a:prstGeom>
+          <a:solidFill>
+            <a:srgbClr val="E6F5F2"/>
+          </a:solidFill>
+          <a:ln w="19050">
+            <a:solidFill>
+              <a:srgbClr val="1AA69A"/>
+            </a:solidFill>
+          </a:ln>
+          <a:effectLst/>
+        </p:spPr>
+        <p:style>
+          <a:lnRef idx="1">
+            <a:schemeClr val="accent1"/>
+          </a:lnRef>
+          <a:fillRef idx="3">
+            <a:schemeClr val="accent1"/>
+          </a:fillRef>
+          <a:effectRef idx="2">
+            <a:schemeClr val="accent1"/>
+          </a:effectRef>
+          <a:fontRef idx="minor">
+            <a:schemeClr val="lt1"/>
+          </a:fontRef>
+        </p:style>
+        <p:txBody>
+          <a:bodyPr rtlCol="0" anchor="ctr"/>
+          <a:lstStyle/>
+          <a:p>
+            <a:pPr algn="ctr"/>
+          </a:p>
+        </p:txBody>
+      </p:sp>
+      <p:sp>
+        <p:nvSpPr>
+          <p:cNvPr id="29" name="TextBox 28"/>
+          <p:cNvSpPr txBox="1"/>
+          <p:nvPr/>
+        </p:nvSpPr>
+        <p:spPr>
+          <a:xfrm>
+            <a:off x="6428232" y="1517904"/>
+            <a:ext cx="5074920" cy="365760"/>
+          </a:xfrm>
+          <a:prstGeom prst="rect">
+            <a:avLst/>
+          </a:prstGeom>
+          <a:noFill/>
+        </p:spPr>
+        <p:txBody>
+          <a:bodyPr wrap="square" anchor="t" lIns="0" rIns="0" tIns="0" bIns="0">
+            <a:spAutoFit/>
+          </a:bodyPr>
+          <a:lstStyle/>
+          <a:p>
+            <a:pPr algn="l"/>
+            <a:r>
+              <a:rPr sz="1600" b="1">
+                <a:solidFill>
+                  <a:srgbClr val="0E7C72"/>
+                </a:solidFill>
+                <a:latin typeface="Hiragino Sans"/>
+                <a:ea typeface="Hiragino Sans"/>
+                <a:cs typeface="Hiragino Sans"/>
+              </a:rPr>
+              <a:t>エスケープした場合</a:t>
+            </a:r>
+          </a:p>
+        </p:txBody>
+      </p:sp>
+      <p:sp>
+        <p:nvSpPr>
+          <p:cNvPr id="30" name="TextBox 29"/>
+          <p:cNvSpPr txBox="1"/>
+          <p:nvPr/>
+        </p:nvSpPr>
+        <p:spPr>
+          <a:xfrm>
+            <a:off x="6428232" y="1956816"/>
+            <a:ext cx="5074920" cy="320040"/>
+          </a:xfrm>
+          <a:prstGeom prst="rect">
+            <a:avLst/>
+          </a:prstGeom>
+          <a:noFill/>
+        </p:spPr>
+        <p:txBody>
+          <a:bodyPr wrap="square" anchor="t" lIns="0" rIns="0" tIns="0" bIns="0">
+            <a:spAutoFit/>
+          </a:bodyPr>
+          <a:lstStyle/>
+          <a:p>
+            <a:pPr algn="l"/>
+            <a:r>
+              <a:rPr sz="1300" b="0">
+                <a:solidFill>
+                  <a:srgbClr val="24404D"/>
+                </a:solidFill>
+                <a:latin typeface="Menlo"/>
+                <a:ea typeface="Menlo"/>
+                <a:cs typeface="Menlo"/>
+              </a:rPr>
+              <a:t>name = </a:t>
+            </a:r>
+            <a:r>
+              <a:rPr sz="1300" b="1">
+                <a:solidFill>
+                  <a:srgbClr val="0E7C72"/>
+                </a:solidFill>
+                <a:latin typeface="Menlo"/>
+                <a:ea typeface="Menlo"/>
+                <a:cs typeface="Menlo"/>
+              </a:rPr>
+              <a:t>&amp;lt;b&amp;gt;Nico&amp;lt;/b&amp;gt;</a:t>
+            </a:r>
+          </a:p>
+        </p:txBody>
+      </p:sp>
+      <p:sp>
+        <p:nvSpPr>
+          <p:cNvPr id="31" name="TextBox 30"/>
+          <p:cNvSpPr txBox="1"/>
+          <p:nvPr/>
+        </p:nvSpPr>
+        <p:spPr>
+          <a:xfrm>
+            <a:off x="6428232" y="2368296"/>
+            <a:ext cx="5074920" cy="274320"/>
+          </a:xfrm>
+          <a:prstGeom prst="rect">
+            <a:avLst/>
+          </a:prstGeom>
+          <a:noFill/>
+        </p:spPr>
+        <p:txBody>
+          <a:bodyPr wrap="square" anchor="t" lIns="0" rIns="0" tIns="0" bIns="0">
+            <a:spAutoFit/>
+          </a:bodyPr>
+          <a:lstStyle/>
+          <a:p>
+            <a:pPr algn="l"/>
+            <a:r>
+              <a:rPr sz="1100" b="1">
+                <a:solidFill>
+                  <a:srgbClr val="5E7682"/>
+                </a:solidFill>
+                <a:latin typeface="Hiragino Sans"/>
+                <a:ea typeface="Hiragino Sans"/>
+                <a:cs typeface="Hiragino Sans"/>
+              </a:rPr>
+              <a:t>埋め込み後のHTML</a:t>
+            </a:r>
+          </a:p>
+        </p:txBody>
+      </p:sp>
+      <p:sp>
+        <p:nvSpPr>
+          <p:cNvPr id="32" name="Rounded Rectangle 31"/>
+          <p:cNvSpPr/>
+          <p:nvPr/>
+        </p:nvSpPr>
+        <p:spPr>
+          <a:xfrm>
+            <a:off x="6428232" y="2642616"/>
+            <a:ext cx="5074920" cy="457200"/>
+          </a:xfrm>
+          <a:prstGeom prst="roundRect">
+            <a:avLst>
+              <a:gd name="adj" fmla="val 12000"/>
+            </a:avLst>
+          </a:prstGeom>
+          <a:solidFill>
+            <a:srgbClr val="FFFFFF"/>
+          </a:solidFill>
+          <a:ln w="12700">
+            <a:solidFill>
+              <a:srgbClr val="1AA69A"/>
+            </a:solidFill>
+          </a:ln>
+          <a:effectLst/>
+        </p:spPr>
+        <p:style>
+          <a:lnRef idx="1">
+            <a:schemeClr val="accent1"/>
+          </a:lnRef>
+          <a:fillRef idx="3">
+            <a:schemeClr val="accent1"/>
+          </a:fillRef>
+          <a:effectRef idx="2">
+            <a:schemeClr val="accent1"/>
+          </a:effectRef>
+          <a:fontRef idx="minor">
+            <a:schemeClr val="lt1"/>
+          </a:fontRef>
+        </p:style>
+        <p:txBody>
+          <a:bodyPr rtlCol="0" anchor="ctr"/>
+          <a:lstStyle/>
+          <a:p>
+            <a:pPr algn="ctr"/>
+          </a:p>
+        </p:txBody>
+      </p:sp>
+      <p:sp>
+        <p:nvSpPr>
+          <p:cNvPr id="33" name="TextBox 32"/>
+          <p:cNvSpPr txBox="1"/>
+          <p:nvPr/>
+        </p:nvSpPr>
+        <p:spPr>
+          <a:xfrm>
+            <a:off x="6519672" y="2642616"/>
+            <a:ext cx="4892040" cy="457200"/>
+          </a:xfrm>
+          <a:prstGeom prst="rect">
+            <a:avLst/>
+          </a:prstGeom>
+          <a:noFill/>
+        </p:spPr>
+        <p:txBody>
+          <a:bodyPr wrap="square" anchor="ctr" lIns="0" rIns="0" tIns="0" bIns="0">
+            <a:spAutoFit/>
+          </a:bodyPr>
+          <a:lstStyle/>
+          <a:p>
+            <a:pPr algn="l"/>
+            <a:r>
+              <a:rPr sz="1150" b="0">
+                <a:solidFill>
+                  <a:srgbClr val="24404D"/>
+                </a:solidFill>
+                <a:latin typeface="Menlo"/>
+                <a:ea typeface="Menlo"/>
+                <a:cs typeface="Menlo"/>
+              </a:rPr>
+              <a:t>&lt;p&gt;こんにちは、</a:t>
+            </a:r>
+            <a:r>
+              <a:rPr sz="1150" b="1">
+                <a:solidFill>
+                  <a:srgbClr val="0E7C72"/>
+                </a:solidFill>
+                <a:latin typeface="Menlo"/>
+                <a:ea typeface="Menlo"/>
+                <a:cs typeface="Menlo"/>
+              </a:rPr>
+              <a:t>&amp;lt;b&amp;gt;</a:t>
+            </a:r>
+            <a:r>
+              <a:rPr sz="1150" b="0">
+                <a:solidFill>
+                  <a:srgbClr val="24404D"/>
+                </a:solidFill>
+                <a:latin typeface="Menlo"/>
+                <a:ea typeface="Menlo"/>
+                <a:cs typeface="Menlo"/>
+              </a:rPr>
+              <a:t>Nico</a:t>
+            </a:r>
+            <a:r>
+              <a:rPr sz="1150" b="1">
+                <a:solidFill>
+                  <a:srgbClr val="0E7C72"/>
+                </a:solidFill>
+                <a:latin typeface="Menlo"/>
+                <a:ea typeface="Menlo"/>
+                <a:cs typeface="Menlo"/>
+              </a:rPr>
+              <a:t>&amp;lt;/b&amp;gt;</a:t>
+            </a:r>
+            <a:r>
+              <a:rPr sz="1150" b="0">
+                <a:solidFill>
+                  <a:srgbClr val="24404D"/>
+                </a:solidFill>
+                <a:latin typeface="Menlo"/>
+                <a:ea typeface="Menlo"/>
+                <a:cs typeface="Menlo"/>
+              </a:rPr>
+              <a:t>さん&lt;/p&gt;</a:t>
+            </a:r>
+          </a:p>
+        </p:txBody>
+      </p:sp>
+      <p:sp>
+        <p:nvSpPr>
+          <p:cNvPr id="34" name="TextBox 33"/>
+          <p:cNvSpPr txBox="1"/>
+          <p:nvPr/>
+        </p:nvSpPr>
+        <p:spPr>
+          <a:xfrm>
+            <a:off x="6428232" y="3236976"/>
+            <a:ext cx="5074920" cy="274320"/>
+          </a:xfrm>
+          <a:prstGeom prst="rect">
+            <a:avLst/>
+          </a:prstGeom>
+          <a:noFill/>
+        </p:spPr>
+        <p:txBody>
+          <a:bodyPr wrap="square" anchor="t" lIns="0" rIns="0" tIns="0" bIns="0">
+            <a:spAutoFit/>
+          </a:bodyPr>
+          <a:lstStyle/>
+          <a:p>
+            <a:pPr algn="l"/>
+            <a:r>
+              <a:rPr sz="1100" b="1">
+                <a:solidFill>
+                  <a:srgbClr val="5E7682"/>
+                </a:solidFill>
+                <a:latin typeface="Hiragino Sans"/>
+                <a:ea typeface="Hiragino Sans"/>
+                <a:cs typeface="Hiragino Sans"/>
+              </a:rPr>
+              <a:t>② トークナイザが出すトークン</a:t>
+            </a:r>
+          </a:p>
+        </p:txBody>
+      </p:sp>
+      <p:sp>
+        <p:nvSpPr>
+          <p:cNvPr id="35" name="Rounded Rectangle 34"/>
+          <p:cNvSpPr/>
+          <p:nvPr/>
+        </p:nvSpPr>
+        <p:spPr>
+          <a:xfrm>
+            <a:off x="6428232" y="3511296"/>
+            <a:ext cx="1371600" cy="274320"/>
+          </a:xfrm>
+          <a:prstGeom prst="roundRect">
+            <a:avLst>
+              <a:gd name="adj" fmla="val 25000"/>
+            </a:avLst>
+          </a:prstGeom>
+          <a:solidFill>
+            <a:srgbClr val="FFFFFF"/>
+          </a:solidFill>
+          <a:ln w="12700">
+            <a:solidFill>
+              <a:srgbClr val="1AA69A"/>
+            </a:solidFill>
+          </a:ln>
+          <a:effectLst/>
+        </p:spPr>
+        <p:style>
+          <a:lnRef idx="1">
+            <a:schemeClr val="accent1"/>
+          </a:lnRef>
+          <a:fillRef idx="3">
+            <a:schemeClr val="accent1"/>
+          </a:fillRef>
+          <a:effectRef idx="2">
+            <a:schemeClr val="accent1"/>
+          </a:effectRef>
+          <a:fontRef idx="minor">
+            <a:schemeClr val="lt1"/>
+          </a:fontRef>
+        </p:style>
+        <p:txBody>
+          <a:bodyPr rtlCol="0" anchor="ctr"/>
+          <a:lstStyle/>
+          <a:p>
+            <a:pPr algn="ctr"/>
+          </a:p>
+        </p:txBody>
+      </p:sp>
+      <p:sp>
+        <p:nvSpPr>
+          <p:cNvPr id="36" name="TextBox 35"/>
+          <p:cNvSpPr txBox="1"/>
+          <p:nvPr/>
+        </p:nvSpPr>
+        <p:spPr>
+          <a:xfrm>
+            <a:off x="6428232" y="3511296"/>
+            <a:ext cx="1371600" cy="274320"/>
+          </a:xfrm>
+          <a:prstGeom prst="rect">
+            <a:avLst/>
+          </a:prstGeom>
+          <a:noFill/>
+        </p:spPr>
+        <p:txBody>
+          <a:bodyPr wrap="square" anchor="ctr" lIns="0" rIns="0" tIns="0" bIns="0">
+            <a:spAutoFit/>
+          </a:bodyPr>
+          <a:lstStyle/>
+          <a:p>
+            <a:pPr algn="ctr"/>
+            <a:r>
+              <a:rPr sz="1000" b="0">
+                <a:solidFill>
+                  <a:srgbClr val="24404D"/>
+                </a:solidFill>
+                <a:latin typeface="Menlo"/>
+                <a:ea typeface="Menlo"/>
+                <a:cs typeface="Menlo"/>
+              </a:rPr>
+              <a:t>StartTag p</a:t>
+            </a:r>
+          </a:p>
+        </p:txBody>
+      </p:sp>
+      <p:sp>
+        <p:nvSpPr>
+          <p:cNvPr id="37" name="Rounded Rectangle 36"/>
+          <p:cNvSpPr/>
+          <p:nvPr/>
+        </p:nvSpPr>
+        <p:spPr>
+          <a:xfrm>
+            <a:off x="6428232" y="3840480"/>
+            <a:ext cx="1700784" cy="475488"/>
+          </a:xfrm>
+          <a:prstGeom prst="roundRect">
+            <a:avLst>
+              <a:gd name="adj" fmla="val 25000"/>
+            </a:avLst>
+          </a:prstGeom>
+          <a:solidFill>
+            <a:srgbClr val="FFFFFF"/>
+          </a:solidFill>
+          <a:ln w="12700">
+            <a:solidFill>
+              <a:srgbClr val="1AA69A"/>
+            </a:solidFill>
+          </a:ln>
+          <a:effectLst/>
+        </p:spPr>
+        <p:style>
+          <a:lnRef idx="1">
+            <a:schemeClr val="accent1"/>
+          </a:lnRef>
+          <a:fillRef idx="3">
+            <a:schemeClr val="accent1"/>
+          </a:fillRef>
+          <a:effectRef idx="2">
+            <a:schemeClr val="accent1"/>
+          </a:effectRef>
+          <a:fontRef idx="minor">
+            <a:schemeClr val="lt1"/>
+          </a:fontRef>
+        </p:style>
+        <p:txBody>
+          <a:bodyPr rtlCol="0" anchor="ctr"/>
+          <a:lstStyle/>
+          <a:p>
+            <a:pPr algn="ctr"/>
+          </a:p>
+        </p:txBody>
+      </p:sp>
+      <p:sp>
+        <p:nvSpPr>
+          <p:cNvPr id="38" name="TextBox 37"/>
+          <p:cNvSpPr txBox="1"/>
+          <p:nvPr/>
+        </p:nvSpPr>
+        <p:spPr>
+          <a:xfrm>
+            <a:off x="6428232" y="3840480"/>
+            <a:ext cx="1700784" cy="475488"/>
+          </a:xfrm>
+          <a:prstGeom prst="rect">
+            <a:avLst/>
+          </a:prstGeom>
+          <a:noFill/>
+        </p:spPr>
+        <p:txBody>
+          <a:bodyPr wrap="square" anchor="ctr" lIns="0" rIns="0" tIns="0" bIns="0">
+            <a:spAutoFit/>
+          </a:bodyPr>
+          <a:lstStyle/>
+          <a:p>
+            <a:pPr algn="ctr"/>
+            <a:r>
+              <a:rPr sz="1000" b="0">
+                <a:solidFill>
+                  <a:srgbClr val="24404D"/>
+                </a:solidFill>
+                <a:latin typeface="Menlo"/>
+                <a:ea typeface="Menlo"/>
+                <a:cs typeface="Menlo"/>
+              </a:rPr>
+              <a:t>Char こんにちは、</a:t>
+            </a:r>
+          </a:p>
+          <a:p>
+            <a:pPr algn="ctr"/>
+            <a:r>
+              <a:rPr sz="1000" b="0">
+                <a:solidFill>
+                  <a:srgbClr val="24404D"/>
+                </a:solidFill>
+                <a:latin typeface="Menlo"/>
+                <a:ea typeface="Menlo"/>
+                <a:cs typeface="Menlo"/>
+              </a:rPr>
+              <a:t>&lt;b&gt;Nico&lt;/b&gt;さん</a:t>
+            </a:r>
+          </a:p>
+        </p:txBody>
+      </p:sp>
+      <p:sp>
+        <p:nvSpPr>
+          <p:cNvPr id="39" name="Rounded Rectangle 38"/>
+          <p:cNvSpPr/>
+          <p:nvPr/>
+        </p:nvSpPr>
+        <p:spPr>
+          <a:xfrm>
+            <a:off x="6428232" y="4370832"/>
+            <a:ext cx="1152144" cy="274320"/>
+          </a:xfrm>
+          <a:prstGeom prst="roundRect">
+            <a:avLst>
+              <a:gd name="adj" fmla="val 25000"/>
+            </a:avLst>
+          </a:prstGeom>
+          <a:solidFill>
+            <a:srgbClr val="FFFFFF"/>
+          </a:solidFill>
+          <a:ln w="12700">
+            <a:solidFill>
+              <a:srgbClr val="1AA69A"/>
+            </a:solidFill>
+          </a:ln>
+          <a:effectLst/>
+        </p:spPr>
+        <p:style>
+          <a:lnRef idx="1">
+            <a:schemeClr val="accent1"/>
+          </a:lnRef>
+          <a:fillRef idx="3">
+            <a:schemeClr val="accent1"/>
+          </a:fillRef>
+          <a:effectRef idx="2">
+            <a:schemeClr val="accent1"/>
+          </a:effectRef>
+          <a:fontRef idx="minor">
+            <a:schemeClr val="lt1"/>
+          </a:fontRef>
+        </p:style>
+        <p:txBody>
+          <a:bodyPr rtlCol="0" anchor="ctr"/>
+          <a:lstStyle/>
+          <a:p>
+            <a:pPr algn="ctr"/>
+          </a:p>
+        </p:txBody>
+      </p:sp>
+      <p:sp>
+        <p:nvSpPr>
+          <p:cNvPr id="40" name="TextBox 39"/>
+          <p:cNvSpPr txBox="1"/>
+          <p:nvPr/>
+        </p:nvSpPr>
+        <p:spPr>
+          <a:xfrm>
+            <a:off x="6428232" y="4370832"/>
+            <a:ext cx="1152144" cy="274320"/>
+          </a:xfrm>
+          <a:prstGeom prst="rect">
+            <a:avLst/>
+          </a:prstGeom>
+          <a:noFill/>
+        </p:spPr>
+        <p:txBody>
+          <a:bodyPr wrap="square" anchor="ctr" lIns="0" rIns="0" tIns="0" bIns="0">
+            <a:spAutoFit/>
+          </a:bodyPr>
+          <a:lstStyle/>
+          <a:p>
+            <a:pPr algn="ctr"/>
+            <a:r>
+              <a:rPr sz="1000" b="0">
+                <a:solidFill>
+                  <a:srgbClr val="24404D"/>
+                </a:solidFill>
+                <a:latin typeface="Menlo"/>
+                <a:ea typeface="Menlo"/>
+                <a:cs typeface="Menlo"/>
+              </a:rPr>
+              <a:t>EndTag p</a:t>
+            </a:r>
+          </a:p>
+        </p:txBody>
+      </p:sp>
+      <p:sp>
+        <p:nvSpPr>
+          <p:cNvPr id="41" name="TextBox 40"/>
+          <p:cNvSpPr txBox="1"/>
+          <p:nvPr/>
+        </p:nvSpPr>
+        <p:spPr>
+          <a:xfrm>
+            <a:off x="9011412" y="3236976"/>
+            <a:ext cx="2491740" cy="274320"/>
+          </a:xfrm>
+          <a:prstGeom prst="rect">
+            <a:avLst/>
+          </a:prstGeom>
+          <a:noFill/>
+        </p:spPr>
+        <p:txBody>
+          <a:bodyPr wrap="square" anchor="t" lIns="0" rIns="0" tIns="0" bIns="0">
+            <a:spAutoFit/>
+          </a:bodyPr>
+          <a:lstStyle/>
+          <a:p>
+            <a:pPr algn="l"/>
+            <a:r>
+              <a:rPr sz="1100" b="1">
+                <a:solidFill>
+                  <a:srgbClr val="5E7682"/>
+                </a:solidFill>
+                <a:latin typeface="Hiragino Sans"/>
+                <a:ea typeface="Hiragino Sans"/>
+                <a:cs typeface="Hiragino Sans"/>
+              </a:rPr>
+              <a:t>③ できるDOMツリー</a:t>
+            </a:r>
+          </a:p>
+        </p:txBody>
+      </p:sp>
+      <p:sp>
+        <p:nvSpPr>
+          <p:cNvPr id="42" name="Rounded Rectangle 41"/>
+          <p:cNvSpPr/>
+          <p:nvPr/>
+        </p:nvSpPr>
+        <p:spPr>
+          <a:xfrm>
+            <a:off x="9011412" y="3511296"/>
+            <a:ext cx="2491740" cy="2331720"/>
+          </a:xfrm>
+          <a:prstGeom prst="roundRect">
+            <a:avLst>
+              <a:gd name="adj" fmla="val 6000"/>
+            </a:avLst>
+          </a:prstGeom>
+          <a:solidFill>
+            <a:srgbClr val="FFFFFF"/>
+          </a:solidFill>
+          <a:ln w="12700">
+            <a:solidFill>
+              <a:srgbClr val="1AA69A"/>
+            </a:solidFill>
+          </a:ln>
+          <a:effectLst/>
+        </p:spPr>
+        <p:style>
+          <a:lnRef idx="1">
+            <a:schemeClr val="accent1"/>
+          </a:lnRef>
+          <a:fillRef idx="3">
+            <a:schemeClr val="accent1"/>
+          </a:fillRef>
+          <a:effectRef idx="2">
+            <a:schemeClr val="accent1"/>
+          </a:effectRef>
+          <a:fontRef idx="minor">
+            <a:schemeClr val="lt1"/>
+          </a:fontRef>
+        </p:style>
+        <p:txBody>
+          <a:bodyPr rtlCol="0" anchor="ctr"/>
+          <a:lstStyle/>
+          <a:p>
+            <a:pPr algn="ctr"/>
+          </a:p>
+        </p:txBody>
+      </p:sp>
+      <p:sp>
+        <p:nvSpPr>
+          <p:cNvPr id="43" name="TextBox 42"/>
+          <p:cNvSpPr txBox="1"/>
+          <p:nvPr/>
+        </p:nvSpPr>
+        <p:spPr>
+          <a:xfrm>
+            <a:off x="9148572" y="3621024"/>
+            <a:ext cx="2217420" cy="2651760"/>
+          </a:xfrm>
+          <a:prstGeom prst="rect">
+            <a:avLst/>
+          </a:prstGeom>
+          <a:noFill/>
+        </p:spPr>
+        <p:txBody>
+          <a:bodyPr wrap="square" anchor="t" lIns="0" rIns="0" tIns="0" bIns="0">
+            <a:spAutoFit/>
+          </a:bodyPr>
+          <a:lstStyle/>
+          <a:p>
+            <a:pPr algn="l"/>
+            <a:r>
+              <a:rPr sz="1100" b="0">
+                <a:solidFill>
+                  <a:srgbClr val="24404D"/>
+                </a:solidFill>
+                <a:latin typeface="Menlo"/>
+                <a:ea typeface="Menlo"/>
+                <a:cs typeface="Menlo"/>
+              </a:rPr>
+              <a:t>&lt;p&gt;</a:t>
+            </a:r>
+          </a:p>
+          <a:p>
+            <a:pPr algn="l"/>
+            <a:r>
+              <a:rPr sz="1100" b="0">
+                <a:solidFill>
+                  <a:srgbClr val="24404D"/>
+                </a:solidFill>
+                <a:latin typeface="Menlo"/>
+                <a:ea typeface="Menlo"/>
+                <a:cs typeface="Menlo"/>
+              </a:rPr>
+              <a:t>└ "こんにちは、</a:t>
+            </a:r>
+          </a:p>
+          <a:p>
+            <a:pPr algn="l"/>
+            <a:r>
+              <a:rPr sz="1100" b="0">
+                <a:solidFill>
+                  <a:srgbClr val="24404D"/>
+                </a:solidFill>
+                <a:latin typeface="Menlo"/>
+                <a:ea typeface="Menlo"/>
+                <a:cs typeface="Menlo"/>
+              </a:rPr>
+              <a:t>   &lt;b&gt;Nico&lt;/b&gt;さん"</a:t>
+            </a:r>
+          </a:p>
+          <a:p>
+            <a:pPr algn="l"/>
+            <a:r>
+              <a:rPr sz="1100" b="0">
+                <a:solidFill>
+                  <a:srgbClr val="24404D"/>
+                </a:solidFill>
+                <a:latin typeface="Menlo"/>
+                <a:ea typeface="Menlo"/>
+                <a:cs typeface="Menlo"/>
+              </a:rPr>
+              <a:t/>
+            </a:r>
+          </a:p>
+          <a:p>
+            <a:pPr algn="l"/>
+            <a:r>
+              <a:rPr sz="1100" b="1">
+                <a:solidFill>
+                  <a:srgbClr val="0E7C72"/>
+                </a:solidFill>
+                <a:latin typeface="Hiragino Sans"/>
+                <a:ea typeface="Hiragino Sans"/>
+                <a:cs typeface="Hiragino Sans"/>
+              </a:rPr>
+              <a:t>テキスト1つのまま</a:t>
             </a:r>
           </a:p>
         </p:txBody>

--- a/deep-dive/drafts/no.1-xss/image/HTMLパーサ図.pptx
+++ b/deep-dive/drafts/no.1-xss/image/HTMLパーサ図.pptx
@@ -8,6 +8,8 @@
     <p:sldId id="256" r:id="rId7"/>
     <p:sldId id="257" r:id="rId8"/>
     <p:sldId id="258" r:id="rId9"/>
+    <p:sldId id="259" r:id="rId10"/>
+    <p:sldId id="260" r:id="rId11"/>
   </p:sldIdLst>
   <p:sldSz cx="12192000" cy="6858000" type="screen4x3"/>
   <p:notesSz cx="6858000" cy="9144000"/>
@@ -8487,6 +8489,4128 @@
                 <a:cs typeface="Hiragino Sans"/>
               </a:rPr>
               <a:t>テキスト1つのまま</a:t>
+            </a:r>
+          </a:p>
+        </p:txBody>
+      </p:sp>
+    </p:spTree>
+  </p:cSld>
+  <p:clrMapOvr>
+    <a:masterClrMapping/>
+  </p:clrMapOvr>
+</p:sld>
+</file>
+
+<file path=ppt/slides/slide4.xml><?xml version="1.0" encoding="utf-8"?>
+<p:sld xmlns:a="http://schemas.openxmlformats.org/drawingml/2006/main" xmlns:p="http://schemas.openxmlformats.org/presentationml/2006/main" xmlns:r="http://schemas.openxmlformats.org/officeDocument/2006/relationships">
+  <p:cSld>
+    <p:spTree>
+      <p:nvGrpSpPr>
+        <p:cNvPr id="1" name=""/>
+        <p:cNvGrpSpPr/>
+        <p:nvPr/>
+      </p:nvGrpSpPr>
+      <p:grpSpPr/>
+      <p:sp>
+        <p:nvSpPr>
+          <p:cNvPr id="2" name="TextBox 1"/>
+          <p:cNvSpPr txBox="1"/>
+          <p:nvPr/>
+        </p:nvSpPr>
+        <p:spPr>
+          <a:xfrm>
+            <a:off x="457200" y="1097280"/>
+            <a:ext cx="5669280" cy="365760"/>
+          </a:xfrm>
+          <a:prstGeom prst="rect">
+            <a:avLst/>
+          </a:prstGeom>
+          <a:noFill/>
+        </p:spPr>
+        <p:txBody>
+          <a:bodyPr wrap="square" anchor="t" lIns="0" rIns="0" tIns="0" bIns="0">
+            <a:spAutoFit/>
+          </a:bodyPr>
+          <a:lstStyle/>
+          <a:p>
+            <a:pPr algn="l"/>
+            <a:r>
+              <a:rPr sz="1400" b="1">
+                <a:solidFill>
+                  <a:srgbClr val="24404D"/>
+                </a:solidFill>
+                <a:latin typeface="Hiragino Sans"/>
+                <a:ea typeface="Hiragino Sans"/>
+                <a:cs typeface="Hiragino Sans"/>
+              </a:rPr>
+              <a:t>html.escape() が置き換える5文字（上から順に実行）</a:t>
+            </a:r>
+          </a:p>
+        </p:txBody>
+      </p:sp>
+      <p:sp>
+        <p:nvSpPr>
+          <p:cNvPr id="3" name="Rounded Rectangle 2"/>
+          <p:cNvSpPr/>
+          <p:nvPr/>
+        </p:nvSpPr>
+        <p:spPr>
+          <a:xfrm>
+            <a:off x="457200" y="1600200"/>
+            <a:ext cx="914400" cy="566928"/>
+          </a:xfrm>
+          <a:prstGeom prst="roundRect">
+            <a:avLst>
+              <a:gd name="adj" fmla="val 20000"/>
+            </a:avLst>
+          </a:prstGeom>
+          <a:solidFill>
+            <a:srgbClr val="FBEBEA"/>
+          </a:solidFill>
+          <a:ln w="19050">
+            <a:solidFill>
+              <a:srgbClr val="D9433B"/>
+            </a:solidFill>
+          </a:ln>
+          <a:effectLst/>
+        </p:spPr>
+        <p:style>
+          <a:lnRef idx="1">
+            <a:schemeClr val="accent1"/>
+          </a:lnRef>
+          <a:fillRef idx="3">
+            <a:schemeClr val="accent1"/>
+          </a:fillRef>
+          <a:effectRef idx="2">
+            <a:schemeClr val="accent1"/>
+          </a:effectRef>
+          <a:fontRef idx="minor">
+            <a:schemeClr val="lt1"/>
+          </a:fontRef>
+        </p:style>
+        <p:txBody>
+          <a:bodyPr rtlCol="0" anchor="ctr"/>
+          <a:lstStyle/>
+          <a:p>
+            <a:pPr algn="ctr"/>
+          </a:p>
+        </p:txBody>
+      </p:sp>
+      <p:sp>
+        <p:nvSpPr>
+          <p:cNvPr id="4" name="TextBox 3"/>
+          <p:cNvSpPr txBox="1"/>
+          <p:nvPr/>
+        </p:nvSpPr>
+        <p:spPr>
+          <a:xfrm>
+            <a:off x="457200" y="1600200"/>
+            <a:ext cx="914400" cy="566928"/>
+          </a:xfrm>
+          <a:prstGeom prst="rect">
+            <a:avLst/>
+          </a:prstGeom>
+          <a:noFill/>
+        </p:spPr>
+        <p:txBody>
+          <a:bodyPr wrap="square" anchor="ctr" lIns="0" rIns="0" tIns="0" bIns="0">
+            <a:spAutoFit/>
+          </a:bodyPr>
+          <a:lstStyle/>
+          <a:p>
+            <a:pPr algn="ctr"/>
+            <a:r>
+              <a:rPr sz="2200" b="1">
+                <a:solidFill>
+                  <a:srgbClr val="D9433B"/>
+                </a:solidFill>
+                <a:latin typeface="Menlo"/>
+                <a:ea typeface="Menlo"/>
+                <a:cs typeface="Menlo"/>
+              </a:rPr>
+              <a:t>&amp;</a:t>
+            </a:r>
+          </a:p>
+        </p:txBody>
+      </p:sp>
+      <p:cxnSp>
+        <p:nvCxnSpPr>
+          <p:cNvPr id="5" name="Connector 4"/>
+          <p:cNvCxnSpPr/>
+          <p:nvPr/>
+        </p:nvCxnSpPr>
+        <p:spPr>
+          <a:xfrm flipV="1">
+            <a:off x="1444752" y="1883664"/>
+            <a:ext cx="585216" cy="0"/>
+          </a:xfrm>
+          <a:prstGeom prst="line">
+            <a:avLst/>
+          </a:prstGeom>
+          <a:ln w="25400">
+            <a:solidFill>
+              <a:srgbClr val="5E7682"/>
+            </a:solidFill>
+            <a:tailEnd type="triangle" w="med" len="med"/>
+          </a:ln>
+        </p:spPr>
+        <p:style>
+          <a:lnRef idx="2">
+            <a:schemeClr val="accent1"/>
+          </a:lnRef>
+          <a:fillRef idx="0">
+            <a:schemeClr val="accent1"/>
+          </a:fillRef>
+          <a:effectRef idx="1">
+            <a:schemeClr val="accent1"/>
+          </a:effectRef>
+          <a:fontRef idx="minor">
+            <a:schemeClr val="tx1"/>
+          </a:fontRef>
+        </p:style>
+      </p:cxnSp>
+      <p:sp>
+        <p:nvSpPr>
+          <p:cNvPr id="6" name="Rounded Rectangle 5"/>
+          <p:cNvSpPr/>
+          <p:nvPr/>
+        </p:nvSpPr>
+        <p:spPr>
+          <a:xfrm>
+            <a:off x="2103120" y="1600200"/>
+            <a:ext cx="1737360" cy="566928"/>
+          </a:xfrm>
+          <a:prstGeom prst="roundRect">
+            <a:avLst>
+              <a:gd name="adj" fmla="val 20000"/>
+            </a:avLst>
+          </a:prstGeom>
+          <a:solidFill>
+            <a:srgbClr val="E6F5F2"/>
+          </a:solidFill>
+          <a:ln w="19050">
+            <a:solidFill>
+              <a:srgbClr val="1AA69A"/>
+            </a:solidFill>
+          </a:ln>
+          <a:effectLst/>
+        </p:spPr>
+        <p:style>
+          <a:lnRef idx="1">
+            <a:schemeClr val="accent1"/>
+          </a:lnRef>
+          <a:fillRef idx="3">
+            <a:schemeClr val="accent1"/>
+          </a:fillRef>
+          <a:effectRef idx="2">
+            <a:schemeClr val="accent1"/>
+          </a:effectRef>
+          <a:fontRef idx="minor">
+            <a:schemeClr val="lt1"/>
+          </a:fontRef>
+        </p:style>
+        <p:txBody>
+          <a:bodyPr rtlCol="0" anchor="ctr"/>
+          <a:lstStyle/>
+          <a:p>
+            <a:pPr algn="ctr"/>
+          </a:p>
+        </p:txBody>
+      </p:sp>
+      <p:sp>
+        <p:nvSpPr>
+          <p:cNvPr id="7" name="TextBox 6"/>
+          <p:cNvSpPr txBox="1"/>
+          <p:nvPr/>
+        </p:nvSpPr>
+        <p:spPr>
+          <a:xfrm>
+            <a:off x="2103120" y="1600200"/>
+            <a:ext cx="1737360" cy="566928"/>
+          </a:xfrm>
+          <a:prstGeom prst="rect">
+            <a:avLst/>
+          </a:prstGeom>
+          <a:noFill/>
+        </p:spPr>
+        <p:txBody>
+          <a:bodyPr wrap="square" anchor="ctr" lIns="0" rIns="0" tIns="0" bIns="0">
+            <a:spAutoFit/>
+          </a:bodyPr>
+          <a:lstStyle/>
+          <a:p>
+            <a:pPr algn="ctr"/>
+            <a:r>
+              <a:rPr sz="1800" b="1">
+                <a:solidFill>
+                  <a:srgbClr val="0E7C72"/>
+                </a:solidFill>
+                <a:latin typeface="Menlo"/>
+                <a:ea typeface="Menlo"/>
+                <a:cs typeface="Menlo"/>
+              </a:rPr>
+              <a:t>&amp;amp;</a:t>
+            </a:r>
+          </a:p>
+        </p:txBody>
+      </p:sp>
+      <p:sp>
+        <p:nvSpPr>
+          <p:cNvPr id="8" name="TextBox 7"/>
+          <p:cNvSpPr txBox="1"/>
+          <p:nvPr/>
+        </p:nvSpPr>
+        <p:spPr>
+          <a:xfrm>
+            <a:off x="3977639" y="1600200"/>
+            <a:ext cx="2194560" cy="566928"/>
+          </a:xfrm>
+          <a:prstGeom prst="rect">
+            <a:avLst/>
+          </a:prstGeom>
+          <a:noFill/>
+        </p:spPr>
+        <p:txBody>
+          <a:bodyPr wrap="square" anchor="ctr" lIns="0" rIns="0" tIns="0" bIns="0">
+            <a:spAutoFit/>
+          </a:bodyPr>
+          <a:lstStyle/>
+          <a:p>
+            <a:pPr algn="l"/>
+            <a:r>
+              <a:rPr sz="1200" b="1">
+                <a:solidFill>
+                  <a:srgbClr val="F08A24"/>
+                </a:solidFill>
+                <a:latin typeface="Hiragino Sans"/>
+                <a:ea typeface="Hiragino Sans"/>
+                <a:cs typeface="Hiragino Sans"/>
+              </a:rPr>
+              <a:t>必ず最初</a:t>
+            </a:r>
+          </a:p>
+        </p:txBody>
+      </p:sp>
+      <p:sp>
+        <p:nvSpPr>
+          <p:cNvPr id="9" name="Rounded Rectangle 8"/>
+          <p:cNvSpPr/>
+          <p:nvPr/>
+        </p:nvSpPr>
+        <p:spPr>
+          <a:xfrm>
+            <a:off x="457200" y="2313432"/>
+            <a:ext cx="914400" cy="566928"/>
+          </a:xfrm>
+          <a:prstGeom prst="roundRect">
+            <a:avLst>
+              <a:gd name="adj" fmla="val 20000"/>
+            </a:avLst>
+          </a:prstGeom>
+          <a:solidFill>
+            <a:srgbClr val="FBEBEA"/>
+          </a:solidFill>
+          <a:ln w="19050">
+            <a:solidFill>
+              <a:srgbClr val="D9433B"/>
+            </a:solidFill>
+          </a:ln>
+          <a:effectLst/>
+        </p:spPr>
+        <p:style>
+          <a:lnRef idx="1">
+            <a:schemeClr val="accent1"/>
+          </a:lnRef>
+          <a:fillRef idx="3">
+            <a:schemeClr val="accent1"/>
+          </a:fillRef>
+          <a:effectRef idx="2">
+            <a:schemeClr val="accent1"/>
+          </a:effectRef>
+          <a:fontRef idx="minor">
+            <a:schemeClr val="lt1"/>
+          </a:fontRef>
+        </p:style>
+        <p:txBody>
+          <a:bodyPr rtlCol="0" anchor="ctr"/>
+          <a:lstStyle/>
+          <a:p>
+            <a:pPr algn="ctr"/>
+          </a:p>
+        </p:txBody>
+      </p:sp>
+      <p:sp>
+        <p:nvSpPr>
+          <p:cNvPr id="10" name="TextBox 9"/>
+          <p:cNvSpPr txBox="1"/>
+          <p:nvPr/>
+        </p:nvSpPr>
+        <p:spPr>
+          <a:xfrm>
+            <a:off x="457200" y="2313432"/>
+            <a:ext cx="914400" cy="566928"/>
+          </a:xfrm>
+          <a:prstGeom prst="rect">
+            <a:avLst/>
+          </a:prstGeom>
+          <a:noFill/>
+        </p:spPr>
+        <p:txBody>
+          <a:bodyPr wrap="square" anchor="ctr" lIns="0" rIns="0" tIns="0" bIns="0">
+            <a:spAutoFit/>
+          </a:bodyPr>
+          <a:lstStyle/>
+          <a:p>
+            <a:pPr algn="ctr"/>
+            <a:r>
+              <a:rPr sz="2200" b="1">
+                <a:solidFill>
+                  <a:srgbClr val="D9433B"/>
+                </a:solidFill>
+                <a:latin typeface="Menlo"/>
+                <a:ea typeface="Menlo"/>
+                <a:cs typeface="Menlo"/>
+              </a:rPr>
+              <a:t>&lt;</a:t>
+            </a:r>
+          </a:p>
+        </p:txBody>
+      </p:sp>
+      <p:cxnSp>
+        <p:nvCxnSpPr>
+          <p:cNvPr id="11" name="Connector 10"/>
+          <p:cNvCxnSpPr/>
+          <p:nvPr/>
+        </p:nvCxnSpPr>
+        <p:spPr>
+          <a:xfrm flipV="1">
+            <a:off x="1444752" y="2596895"/>
+            <a:ext cx="585216" cy="0"/>
+          </a:xfrm>
+          <a:prstGeom prst="line">
+            <a:avLst/>
+          </a:prstGeom>
+          <a:ln w="25400">
+            <a:solidFill>
+              <a:srgbClr val="5E7682"/>
+            </a:solidFill>
+            <a:tailEnd type="triangle" w="med" len="med"/>
+          </a:ln>
+        </p:spPr>
+        <p:style>
+          <a:lnRef idx="2">
+            <a:schemeClr val="accent1"/>
+          </a:lnRef>
+          <a:fillRef idx="0">
+            <a:schemeClr val="accent1"/>
+          </a:fillRef>
+          <a:effectRef idx="1">
+            <a:schemeClr val="accent1"/>
+          </a:effectRef>
+          <a:fontRef idx="minor">
+            <a:schemeClr val="tx1"/>
+          </a:fontRef>
+        </p:style>
+      </p:cxnSp>
+      <p:sp>
+        <p:nvSpPr>
+          <p:cNvPr id="12" name="Rounded Rectangle 11"/>
+          <p:cNvSpPr/>
+          <p:nvPr/>
+        </p:nvSpPr>
+        <p:spPr>
+          <a:xfrm>
+            <a:off x="2103120" y="2313432"/>
+            <a:ext cx="1737360" cy="566928"/>
+          </a:xfrm>
+          <a:prstGeom prst="roundRect">
+            <a:avLst>
+              <a:gd name="adj" fmla="val 20000"/>
+            </a:avLst>
+          </a:prstGeom>
+          <a:solidFill>
+            <a:srgbClr val="E6F5F2"/>
+          </a:solidFill>
+          <a:ln w="19050">
+            <a:solidFill>
+              <a:srgbClr val="1AA69A"/>
+            </a:solidFill>
+          </a:ln>
+          <a:effectLst/>
+        </p:spPr>
+        <p:style>
+          <a:lnRef idx="1">
+            <a:schemeClr val="accent1"/>
+          </a:lnRef>
+          <a:fillRef idx="3">
+            <a:schemeClr val="accent1"/>
+          </a:fillRef>
+          <a:effectRef idx="2">
+            <a:schemeClr val="accent1"/>
+          </a:effectRef>
+          <a:fontRef idx="minor">
+            <a:schemeClr val="lt1"/>
+          </a:fontRef>
+        </p:style>
+        <p:txBody>
+          <a:bodyPr rtlCol="0" anchor="ctr"/>
+          <a:lstStyle/>
+          <a:p>
+            <a:pPr algn="ctr"/>
+          </a:p>
+        </p:txBody>
+      </p:sp>
+      <p:sp>
+        <p:nvSpPr>
+          <p:cNvPr id="13" name="TextBox 12"/>
+          <p:cNvSpPr txBox="1"/>
+          <p:nvPr/>
+        </p:nvSpPr>
+        <p:spPr>
+          <a:xfrm>
+            <a:off x="2103120" y="2313432"/>
+            <a:ext cx="1737360" cy="566928"/>
+          </a:xfrm>
+          <a:prstGeom prst="rect">
+            <a:avLst/>
+          </a:prstGeom>
+          <a:noFill/>
+        </p:spPr>
+        <p:txBody>
+          <a:bodyPr wrap="square" anchor="ctr" lIns="0" rIns="0" tIns="0" bIns="0">
+            <a:spAutoFit/>
+          </a:bodyPr>
+          <a:lstStyle/>
+          <a:p>
+            <a:pPr algn="ctr"/>
+            <a:r>
+              <a:rPr sz="1800" b="1">
+                <a:solidFill>
+                  <a:srgbClr val="0E7C72"/>
+                </a:solidFill>
+                <a:latin typeface="Menlo"/>
+                <a:ea typeface="Menlo"/>
+                <a:cs typeface="Menlo"/>
+              </a:rPr>
+              <a:t>&amp;lt;</a:t>
+            </a:r>
+          </a:p>
+        </p:txBody>
+      </p:sp>
+      <p:sp>
+        <p:nvSpPr>
+          <p:cNvPr id="14" name="Rounded Rectangle 13"/>
+          <p:cNvSpPr/>
+          <p:nvPr/>
+        </p:nvSpPr>
+        <p:spPr>
+          <a:xfrm>
+            <a:off x="457200" y="3026664"/>
+            <a:ext cx="914400" cy="566928"/>
+          </a:xfrm>
+          <a:prstGeom prst="roundRect">
+            <a:avLst>
+              <a:gd name="adj" fmla="val 20000"/>
+            </a:avLst>
+          </a:prstGeom>
+          <a:solidFill>
+            <a:srgbClr val="FBEBEA"/>
+          </a:solidFill>
+          <a:ln w="19050">
+            <a:solidFill>
+              <a:srgbClr val="D9433B"/>
+            </a:solidFill>
+          </a:ln>
+          <a:effectLst/>
+        </p:spPr>
+        <p:style>
+          <a:lnRef idx="1">
+            <a:schemeClr val="accent1"/>
+          </a:lnRef>
+          <a:fillRef idx="3">
+            <a:schemeClr val="accent1"/>
+          </a:fillRef>
+          <a:effectRef idx="2">
+            <a:schemeClr val="accent1"/>
+          </a:effectRef>
+          <a:fontRef idx="minor">
+            <a:schemeClr val="lt1"/>
+          </a:fontRef>
+        </p:style>
+        <p:txBody>
+          <a:bodyPr rtlCol="0" anchor="ctr"/>
+          <a:lstStyle/>
+          <a:p>
+            <a:pPr algn="ctr"/>
+          </a:p>
+        </p:txBody>
+      </p:sp>
+      <p:sp>
+        <p:nvSpPr>
+          <p:cNvPr id="15" name="TextBox 14"/>
+          <p:cNvSpPr txBox="1"/>
+          <p:nvPr/>
+        </p:nvSpPr>
+        <p:spPr>
+          <a:xfrm>
+            <a:off x="457200" y="3026664"/>
+            <a:ext cx="914400" cy="566928"/>
+          </a:xfrm>
+          <a:prstGeom prst="rect">
+            <a:avLst/>
+          </a:prstGeom>
+          <a:noFill/>
+        </p:spPr>
+        <p:txBody>
+          <a:bodyPr wrap="square" anchor="ctr" lIns="0" rIns="0" tIns="0" bIns="0">
+            <a:spAutoFit/>
+          </a:bodyPr>
+          <a:lstStyle/>
+          <a:p>
+            <a:pPr algn="ctr"/>
+            <a:r>
+              <a:rPr sz="2200" b="1">
+                <a:solidFill>
+                  <a:srgbClr val="D9433B"/>
+                </a:solidFill>
+                <a:latin typeface="Menlo"/>
+                <a:ea typeface="Menlo"/>
+                <a:cs typeface="Menlo"/>
+              </a:rPr>
+              <a:t>&gt;</a:t>
+            </a:r>
+          </a:p>
+        </p:txBody>
+      </p:sp>
+      <p:cxnSp>
+        <p:nvCxnSpPr>
+          <p:cNvPr id="16" name="Connector 15"/>
+          <p:cNvCxnSpPr/>
+          <p:nvPr/>
+        </p:nvCxnSpPr>
+        <p:spPr>
+          <a:xfrm flipV="1">
+            <a:off x="1444752" y="3310128"/>
+            <a:ext cx="585216" cy="0"/>
+          </a:xfrm>
+          <a:prstGeom prst="line">
+            <a:avLst/>
+          </a:prstGeom>
+          <a:ln w="25400">
+            <a:solidFill>
+              <a:srgbClr val="5E7682"/>
+            </a:solidFill>
+            <a:tailEnd type="triangle" w="med" len="med"/>
+          </a:ln>
+        </p:spPr>
+        <p:style>
+          <a:lnRef idx="2">
+            <a:schemeClr val="accent1"/>
+          </a:lnRef>
+          <a:fillRef idx="0">
+            <a:schemeClr val="accent1"/>
+          </a:fillRef>
+          <a:effectRef idx="1">
+            <a:schemeClr val="accent1"/>
+          </a:effectRef>
+          <a:fontRef idx="minor">
+            <a:schemeClr val="tx1"/>
+          </a:fontRef>
+        </p:style>
+      </p:cxnSp>
+      <p:sp>
+        <p:nvSpPr>
+          <p:cNvPr id="17" name="Rounded Rectangle 16"/>
+          <p:cNvSpPr/>
+          <p:nvPr/>
+        </p:nvSpPr>
+        <p:spPr>
+          <a:xfrm>
+            <a:off x="2103120" y="3026664"/>
+            <a:ext cx="1737360" cy="566928"/>
+          </a:xfrm>
+          <a:prstGeom prst="roundRect">
+            <a:avLst>
+              <a:gd name="adj" fmla="val 20000"/>
+            </a:avLst>
+          </a:prstGeom>
+          <a:solidFill>
+            <a:srgbClr val="E6F5F2"/>
+          </a:solidFill>
+          <a:ln w="19050">
+            <a:solidFill>
+              <a:srgbClr val="1AA69A"/>
+            </a:solidFill>
+          </a:ln>
+          <a:effectLst/>
+        </p:spPr>
+        <p:style>
+          <a:lnRef idx="1">
+            <a:schemeClr val="accent1"/>
+          </a:lnRef>
+          <a:fillRef idx="3">
+            <a:schemeClr val="accent1"/>
+          </a:fillRef>
+          <a:effectRef idx="2">
+            <a:schemeClr val="accent1"/>
+          </a:effectRef>
+          <a:fontRef idx="minor">
+            <a:schemeClr val="lt1"/>
+          </a:fontRef>
+        </p:style>
+        <p:txBody>
+          <a:bodyPr rtlCol="0" anchor="ctr"/>
+          <a:lstStyle/>
+          <a:p>
+            <a:pPr algn="ctr"/>
+          </a:p>
+        </p:txBody>
+      </p:sp>
+      <p:sp>
+        <p:nvSpPr>
+          <p:cNvPr id="18" name="TextBox 17"/>
+          <p:cNvSpPr txBox="1"/>
+          <p:nvPr/>
+        </p:nvSpPr>
+        <p:spPr>
+          <a:xfrm>
+            <a:off x="2103120" y="3026664"/>
+            <a:ext cx="1737360" cy="566928"/>
+          </a:xfrm>
+          <a:prstGeom prst="rect">
+            <a:avLst/>
+          </a:prstGeom>
+          <a:noFill/>
+        </p:spPr>
+        <p:txBody>
+          <a:bodyPr wrap="square" anchor="ctr" lIns="0" rIns="0" tIns="0" bIns="0">
+            <a:spAutoFit/>
+          </a:bodyPr>
+          <a:lstStyle/>
+          <a:p>
+            <a:pPr algn="ctr"/>
+            <a:r>
+              <a:rPr sz="1800" b="1">
+                <a:solidFill>
+                  <a:srgbClr val="0E7C72"/>
+                </a:solidFill>
+                <a:latin typeface="Menlo"/>
+                <a:ea typeface="Menlo"/>
+                <a:cs typeface="Menlo"/>
+              </a:rPr>
+              <a:t>&amp;gt;</a:t>
+            </a:r>
+          </a:p>
+        </p:txBody>
+      </p:sp>
+      <p:sp>
+        <p:nvSpPr>
+          <p:cNvPr id="19" name="Rounded Rectangle 18"/>
+          <p:cNvSpPr/>
+          <p:nvPr/>
+        </p:nvSpPr>
+        <p:spPr>
+          <a:xfrm>
+            <a:off x="457200" y="3739896"/>
+            <a:ext cx="914400" cy="566928"/>
+          </a:xfrm>
+          <a:prstGeom prst="roundRect">
+            <a:avLst>
+              <a:gd name="adj" fmla="val 20000"/>
+            </a:avLst>
+          </a:prstGeom>
+          <a:solidFill>
+            <a:srgbClr val="FBEBEA"/>
+          </a:solidFill>
+          <a:ln w="19050">
+            <a:solidFill>
+              <a:srgbClr val="D9433B"/>
+            </a:solidFill>
+          </a:ln>
+          <a:effectLst/>
+        </p:spPr>
+        <p:style>
+          <a:lnRef idx="1">
+            <a:schemeClr val="accent1"/>
+          </a:lnRef>
+          <a:fillRef idx="3">
+            <a:schemeClr val="accent1"/>
+          </a:fillRef>
+          <a:effectRef idx="2">
+            <a:schemeClr val="accent1"/>
+          </a:effectRef>
+          <a:fontRef idx="minor">
+            <a:schemeClr val="lt1"/>
+          </a:fontRef>
+        </p:style>
+        <p:txBody>
+          <a:bodyPr rtlCol="0" anchor="ctr"/>
+          <a:lstStyle/>
+          <a:p>
+            <a:pPr algn="ctr"/>
+          </a:p>
+        </p:txBody>
+      </p:sp>
+      <p:sp>
+        <p:nvSpPr>
+          <p:cNvPr id="20" name="TextBox 19"/>
+          <p:cNvSpPr txBox="1"/>
+          <p:nvPr/>
+        </p:nvSpPr>
+        <p:spPr>
+          <a:xfrm>
+            <a:off x="457200" y="3739896"/>
+            <a:ext cx="914400" cy="566928"/>
+          </a:xfrm>
+          <a:prstGeom prst="rect">
+            <a:avLst/>
+          </a:prstGeom>
+          <a:noFill/>
+        </p:spPr>
+        <p:txBody>
+          <a:bodyPr wrap="square" anchor="ctr" lIns="0" rIns="0" tIns="0" bIns="0">
+            <a:spAutoFit/>
+          </a:bodyPr>
+          <a:lstStyle/>
+          <a:p>
+            <a:pPr algn="ctr"/>
+            <a:r>
+              <a:rPr sz="2200" b="1">
+                <a:solidFill>
+                  <a:srgbClr val="D9433B"/>
+                </a:solidFill>
+                <a:latin typeface="Menlo"/>
+                <a:ea typeface="Menlo"/>
+                <a:cs typeface="Menlo"/>
+              </a:rPr>
+              <a:t>"</a:t>
+            </a:r>
+          </a:p>
+        </p:txBody>
+      </p:sp>
+      <p:cxnSp>
+        <p:nvCxnSpPr>
+          <p:cNvPr id="21" name="Connector 20"/>
+          <p:cNvCxnSpPr/>
+          <p:nvPr/>
+        </p:nvCxnSpPr>
+        <p:spPr>
+          <a:xfrm flipV="1">
+            <a:off x="1444752" y="4023360"/>
+            <a:ext cx="585216" cy="0"/>
+          </a:xfrm>
+          <a:prstGeom prst="line">
+            <a:avLst/>
+          </a:prstGeom>
+          <a:ln w="25400">
+            <a:solidFill>
+              <a:srgbClr val="5E7682"/>
+            </a:solidFill>
+            <a:tailEnd type="triangle" w="med" len="med"/>
+          </a:ln>
+        </p:spPr>
+        <p:style>
+          <a:lnRef idx="2">
+            <a:schemeClr val="accent1"/>
+          </a:lnRef>
+          <a:fillRef idx="0">
+            <a:schemeClr val="accent1"/>
+          </a:fillRef>
+          <a:effectRef idx="1">
+            <a:schemeClr val="accent1"/>
+          </a:effectRef>
+          <a:fontRef idx="minor">
+            <a:schemeClr val="tx1"/>
+          </a:fontRef>
+        </p:style>
+      </p:cxnSp>
+      <p:sp>
+        <p:nvSpPr>
+          <p:cNvPr id="22" name="Rounded Rectangle 21"/>
+          <p:cNvSpPr/>
+          <p:nvPr/>
+        </p:nvSpPr>
+        <p:spPr>
+          <a:xfrm>
+            <a:off x="2103120" y="3739896"/>
+            <a:ext cx="1737360" cy="566928"/>
+          </a:xfrm>
+          <a:prstGeom prst="roundRect">
+            <a:avLst>
+              <a:gd name="adj" fmla="val 20000"/>
+            </a:avLst>
+          </a:prstGeom>
+          <a:solidFill>
+            <a:srgbClr val="E6F5F2"/>
+          </a:solidFill>
+          <a:ln w="19050">
+            <a:solidFill>
+              <a:srgbClr val="1AA69A"/>
+            </a:solidFill>
+          </a:ln>
+          <a:effectLst/>
+        </p:spPr>
+        <p:style>
+          <a:lnRef idx="1">
+            <a:schemeClr val="accent1"/>
+          </a:lnRef>
+          <a:fillRef idx="3">
+            <a:schemeClr val="accent1"/>
+          </a:fillRef>
+          <a:effectRef idx="2">
+            <a:schemeClr val="accent1"/>
+          </a:effectRef>
+          <a:fontRef idx="minor">
+            <a:schemeClr val="lt1"/>
+          </a:fontRef>
+        </p:style>
+        <p:txBody>
+          <a:bodyPr rtlCol="0" anchor="ctr"/>
+          <a:lstStyle/>
+          <a:p>
+            <a:pPr algn="ctr"/>
+          </a:p>
+        </p:txBody>
+      </p:sp>
+      <p:sp>
+        <p:nvSpPr>
+          <p:cNvPr id="23" name="TextBox 22"/>
+          <p:cNvSpPr txBox="1"/>
+          <p:nvPr/>
+        </p:nvSpPr>
+        <p:spPr>
+          <a:xfrm>
+            <a:off x="2103120" y="3739896"/>
+            <a:ext cx="1737360" cy="566928"/>
+          </a:xfrm>
+          <a:prstGeom prst="rect">
+            <a:avLst/>
+          </a:prstGeom>
+          <a:noFill/>
+        </p:spPr>
+        <p:txBody>
+          <a:bodyPr wrap="square" anchor="ctr" lIns="0" rIns="0" tIns="0" bIns="0">
+            <a:spAutoFit/>
+          </a:bodyPr>
+          <a:lstStyle/>
+          <a:p>
+            <a:pPr algn="ctr"/>
+            <a:r>
+              <a:rPr sz="1800" b="1">
+                <a:solidFill>
+                  <a:srgbClr val="0E7C72"/>
+                </a:solidFill>
+                <a:latin typeface="Menlo"/>
+                <a:ea typeface="Menlo"/>
+                <a:cs typeface="Menlo"/>
+              </a:rPr>
+              <a:t>&amp;quot;</a:t>
+            </a:r>
+          </a:p>
+        </p:txBody>
+      </p:sp>
+      <p:sp>
+        <p:nvSpPr>
+          <p:cNvPr id="24" name="TextBox 23"/>
+          <p:cNvSpPr txBox="1"/>
+          <p:nvPr/>
+        </p:nvSpPr>
+        <p:spPr>
+          <a:xfrm>
+            <a:off x="3977639" y="3739896"/>
+            <a:ext cx="2194560" cy="566928"/>
+          </a:xfrm>
+          <a:prstGeom prst="rect">
+            <a:avLst/>
+          </a:prstGeom>
+          <a:noFill/>
+        </p:spPr>
+        <p:txBody>
+          <a:bodyPr wrap="square" anchor="ctr" lIns="0" rIns="0" tIns="0" bIns="0">
+            <a:spAutoFit/>
+          </a:bodyPr>
+          <a:lstStyle/>
+          <a:p>
+            <a:pPr algn="l"/>
+            <a:r>
+              <a:rPr sz="1200" b="0">
+                <a:solidFill>
+                  <a:srgbClr val="5E7682"/>
+                </a:solidFill>
+                <a:latin typeface="Hiragino Sans"/>
+                <a:ea typeface="Hiragino Sans"/>
+                <a:cs typeface="Hiragino Sans"/>
+              </a:rPr>
+              <a:t>quote=True のとき</a:t>
+            </a:r>
+          </a:p>
+        </p:txBody>
+      </p:sp>
+      <p:sp>
+        <p:nvSpPr>
+          <p:cNvPr id="25" name="Rounded Rectangle 24"/>
+          <p:cNvSpPr/>
+          <p:nvPr/>
+        </p:nvSpPr>
+        <p:spPr>
+          <a:xfrm>
+            <a:off x="457200" y="4453128"/>
+            <a:ext cx="914400" cy="566928"/>
+          </a:xfrm>
+          <a:prstGeom prst="roundRect">
+            <a:avLst>
+              <a:gd name="adj" fmla="val 20000"/>
+            </a:avLst>
+          </a:prstGeom>
+          <a:solidFill>
+            <a:srgbClr val="FBEBEA"/>
+          </a:solidFill>
+          <a:ln w="19050">
+            <a:solidFill>
+              <a:srgbClr val="D9433B"/>
+            </a:solidFill>
+          </a:ln>
+          <a:effectLst/>
+        </p:spPr>
+        <p:style>
+          <a:lnRef idx="1">
+            <a:schemeClr val="accent1"/>
+          </a:lnRef>
+          <a:fillRef idx="3">
+            <a:schemeClr val="accent1"/>
+          </a:fillRef>
+          <a:effectRef idx="2">
+            <a:schemeClr val="accent1"/>
+          </a:effectRef>
+          <a:fontRef idx="minor">
+            <a:schemeClr val="lt1"/>
+          </a:fontRef>
+        </p:style>
+        <p:txBody>
+          <a:bodyPr rtlCol="0" anchor="ctr"/>
+          <a:lstStyle/>
+          <a:p>
+            <a:pPr algn="ctr"/>
+          </a:p>
+        </p:txBody>
+      </p:sp>
+      <p:sp>
+        <p:nvSpPr>
+          <p:cNvPr id="26" name="TextBox 25"/>
+          <p:cNvSpPr txBox="1"/>
+          <p:nvPr/>
+        </p:nvSpPr>
+        <p:spPr>
+          <a:xfrm>
+            <a:off x="457200" y="4453128"/>
+            <a:ext cx="914400" cy="566928"/>
+          </a:xfrm>
+          <a:prstGeom prst="rect">
+            <a:avLst/>
+          </a:prstGeom>
+          <a:noFill/>
+        </p:spPr>
+        <p:txBody>
+          <a:bodyPr wrap="square" anchor="ctr" lIns="0" rIns="0" tIns="0" bIns="0">
+            <a:spAutoFit/>
+          </a:bodyPr>
+          <a:lstStyle/>
+          <a:p>
+            <a:pPr algn="ctr"/>
+            <a:r>
+              <a:rPr sz="2200" b="1">
+                <a:solidFill>
+                  <a:srgbClr val="D9433B"/>
+                </a:solidFill>
+                <a:latin typeface="Menlo"/>
+                <a:ea typeface="Menlo"/>
+                <a:cs typeface="Menlo"/>
+              </a:rPr>
+              <a:t>'</a:t>
+            </a:r>
+          </a:p>
+        </p:txBody>
+      </p:sp>
+      <p:cxnSp>
+        <p:nvCxnSpPr>
+          <p:cNvPr id="27" name="Connector 26"/>
+          <p:cNvCxnSpPr/>
+          <p:nvPr/>
+        </p:nvCxnSpPr>
+        <p:spPr>
+          <a:xfrm flipV="1">
+            <a:off x="1444752" y="4736592"/>
+            <a:ext cx="585216" cy="0"/>
+          </a:xfrm>
+          <a:prstGeom prst="line">
+            <a:avLst/>
+          </a:prstGeom>
+          <a:ln w="25400">
+            <a:solidFill>
+              <a:srgbClr val="5E7682"/>
+            </a:solidFill>
+            <a:tailEnd type="triangle" w="med" len="med"/>
+          </a:ln>
+        </p:spPr>
+        <p:style>
+          <a:lnRef idx="2">
+            <a:schemeClr val="accent1"/>
+          </a:lnRef>
+          <a:fillRef idx="0">
+            <a:schemeClr val="accent1"/>
+          </a:fillRef>
+          <a:effectRef idx="1">
+            <a:schemeClr val="accent1"/>
+          </a:effectRef>
+          <a:fontRef idx="minor">
+            <a:schemeClr val="tx1"/>
+          </a:fontRef>
+        </p:style>
+      </p:cxnSp>
+      <p:sp>
+        <p:nvSpPr>
+          <p:cNvPr id="28" name="Rounded Rectangle 27"/>
+          <p:cNvSpPr/>
+          <p:nvPr/>
+        </p:nvSpPr>
+        <p:spPr>
+          <a:xfrm>
+            <a:off x="2103120" y="4453128"/>
+            <a:ext cx="1737360" cy="566928"/>
+          </a:xfrm>
+          <a:prstGeom prst="roundRect">
+            <a:avLst>
+              <a:gd name="adj" fmla="val 20000"/>
+            </a:avLst>
+          </a:prstGeom>
+          <a:solidFill>
+            <a:srgbClr val="E6F5F2"/>
+          </a:solidFill>
+          <a:ln w="19050">
+            <a:solidFill>
+              <a:srgbClr val="1AA69A"/>
+            </a:solidFill>
+          </a:ln>
+          <a:effectLst/>
+        </p:spPr>
+        <p:style>
+          <a:lnRef idx="1">
+            <a:schemeClr val="accent1"/>
+          </a:lnRef>
+          <a:fillRef idx="3">
+            <a:schemeClr val="accent1"/>
+          </a:fillRef>
+          <a:effectRef idx="2">
+            <a:schemeClr val="accent1"/>
+          </a:effectRef>
+          <a:fontRef idx="minor">
+            <a:schemeClr val="lt1"/>
+          </a:fontRef>
+        </p:style>
+        <p:txBody>
+          <a:bodyPr rtlCol="0" anchor="ctr"/>
+          <a:lstStyle/>
+          <a:p>
+            <a:pPr algn="ctr"/>
+          </a:p>
+        </p:txBody>
+      </p:sp>
+      <p:sp>
+        <p:nvSpPr>
+          <p:cNvPr id="29" name="TextBox 28"/>
+          <p:cNvSpPr txBox="1"/>
+          <p:nvPr/>
+        </p:nvSpPr>
+        <p:spPr>
+          <a:xfrm>
+            <a:off x="2103120" y="4453128"/>
+            <a:ext cx="1737360" cy="566928"/>
+          </a:xfrm>
+          <a:prstGeom prst="rect">
+            <a:avLst/>
+          </a:prstGeom>
+          <a:noFill/>
+        </p:spPr>
+        <p:txBody>
+          <a:bodyPr wrap="square" anchor="ctr" lIns="0" rIns="0" tIns="0" bIns="0">
+            <a:spAutoFit/>
+          </a:bodyPr>
+          <a:lstStyle/>
+          <a:p>
+            <a:pPr algn="ctr"/>
+            <a:r>
+              <a:rPr sz="1800" b="1">
+                <a:solidFill>
+                  <a:srgbClr val="0E7C72"/>
+                </a:solidFill>
+                <a:latin typeface="Menlo"/>
+                <a:ea typeface="Menlo"/>
+                <a:cs typeface="Menlo"/>
+              </a:rPr>
+              <a:t>&amp;#x27;</a:t>
+            </a:r>
+          </a:p>
+        </p:txBody>
+      </p:sp>
+      <p:sp>
+        <p:nvSpPr>
+          <p:cNvPr id="30" name="TextBox 29"/>
+          <p:cNvSpPr txBox="1"/>
+          <p:nvPr/>
+        </p:nvSpPr>
+        <p:spPr>
+          <a:xfrm>
+            <a:off x="3977639" y="4453128"/>
+            <a:ext cx="2194560" cy="566928"/>
+          </a:xfrm>
+          <a:prstGeom prst="rect">
+            <a:avLst/>
+          </a:prstGeom>
+          <a:noFill/>
+        </p:spPr>
+        <p:txBody>
+          <a:bodyPr wrap="square" anchor="ctr" lIns="0" rIns="0" tIns="0" bIns="0">
+            <a:spAutoFit/>
+          </a:bodyPr>
+          <a:lstStyle/>
+          <a:p>
+            <a:pPr algn="l"/>
+            <a:r>
+              <a:rPr sz="1200" b="0">
+                <a:solidFill>
+                  <a:srgbClr val="5E7682"/>
+                </a:solidFill>
+                <a:latin typeface="Hiragino Sans"/>
+                <a:ea typeface="Hiragino Sans"/>
+                <a:cs typeface="Hiragino Sans"/>
+              </a:rPr>
+              <a:t>quote=True のとき</a:t>
+            </a:r>
+          </a:p>
+        </p:txBody>
+      </p:sp>
+      <p:sp>
+        <p:nvSpPr>
+          <p:cNvPr id="31" name="Rounded Rectangle 30"/>
+          <p:cNvSpPr/>
+          <p:nvPr/>
+        </p:nvSpPr>
+        <p:spPr>
+          <a:xfrm>
+            <a:off x="6400800" y="1097280"/>
+            <a:ext cx="5330952" cy="2514600"/>
+          </a:xfrm>
+          <a:prstGeom prst="roundRect">
+            <a:avLst>
+              <a:gd name="adj" fmla="val 6000"/>
+            </a:avLst>
+          </a:prstGeom>
+          <a:solidFill>
+            <a:srgbClr val="F1F3F4"/>
+          </a:solidFill>
+          <a:ln w="19050">
+            <a:solidFill>
+              <a:srgbClr val="C2CBD0"/>
+            </a:solidFill>
+          </a:ln>
+          <a:effectLst/>
+        </p:spPr>
+        <p:style>
+          <a:lnRef idx="1">
+            <a:schemeClr val="accent1"/>
+          </a:lnRef>
+          <a:fillRef idx="3">
+            <a:schemeClr val="accent1"/>
+          </a:fillRef>
+          <a:effectRef idx="2">
+            <a:schemeClr val="accent1"/>
+          </a:effectRef>
+          <a:fontRef idx="minor">
+            <a:schemeClr val="lt1"/>
+          </a:fontRef>
+        </p:style>
+        <p:txBody>
+          <a:bodyPr rtlCol="0" anchor="ctr"/>
+          <a:lstStyle/>
+          <a:p>
+            <a:pPr algn="ctr"/>
+          </a:p>
+        </p:txBody>
+      </p:sp>
+      <p:sp>
+        <p:nvSpPr>
+          <p:cNvPr id="32" name="TextBox 31"/>
+          <p:cNvSpPr txBox="1"/>
+          <p:nvPr/>
+        </p:nvSpPr>
+        <p:spPr>
+          <a:xfrm>
+            <a:off x="6629400" y="1207008"/>
+            <a:ext cx="4873752" cy="365760"/>
+          </a:xfrm>
+          <a:prstGeom prst="rect">
+            <a:avLst/>
+          </a:prstGeom>
+          <a:noFill/>
+        </p:spPr>
+        <p:txBody>
+          <a:bodyPr wrap="square" anchor="t" lIns="0" rIns="0" tIns="0" bIns="0">
+            <a:spAutoFit/>
+          </a:bodyPr>
+          <a:lstStyle/>
+          <a:p>
+            <a:pPr algn="l"/>
+            <a:r>
+              <a:rPr sz="1400" b="1">
+                <a:solidFill>
+                  <a:srgbClr val="24404D"/>
+                </a:solidFill>
+                <a:latin typeface="Hiragino Sans"/>
+                <a:ea typeface="Hiragino Sans"/>
+                <a:cs typeface="Hiragino Sans"/>
+              </a:rPr>
+              <a:t>なぜ「&amp;」を最初に置き換えるのか</a:t>
+            </a:r>
+          </a:p>
+        </p:txBody>
+      </p:sp>
+      <p:sp>
+        <p:nvSpPr>
+          <p:cNvPr id="33" name="TextBox 32"/>
+          <p:cNvSpPr txBox="1"/>
+          <p:nvPr/>
+        </p:nvSpPr>
+        <p:spPr>
+          <a:xfrm>
+            <a:off x="6629400" y="1664208"/>
+            <a:ext cx="4873752" cy="274320"/>
+          </a:xfrm>
+          <a:prstGeom prst="rect">
+            <a:avLst/>
+          </a:prstGeom>
+          <a:noFill/>
+        </p:spPr>
+        <p:txBody>
+          <a:bodyPr wrap="square" anchor="t" lIns="0" rIns="0" tIns="0" bIns="0">
+            <a:spAutoFit/>
+          </a:bodyPr>
+          <a:lstStyle/>
+          <a:p>
+            <a:pPr algn="l"/>
+            <a:r>
+              <a:rPr sz="1100" b="0">
+                <a:solidFill>
+                  <a:srgbClr val="5E7682"/>
+                </a:solidFill>
+                <a:latin typeface="Hiragino Sans"/>
+                <a:ea typeface="Hiragino Sans"/>
+                <a:cs typeface="Hiragino Sans"/>
+              </a:rPr>
+              <a:t>順番を逆にすると（&lt; を先に置き換えると）</a:t>
+            </a:r>
+          </a:p>
+        </p:txBody>
+      </p:sp>
+      <p:sp>
+        <p:nvSpPr>
+          <p:cNvPr id="34" name="TextBox 33"/>
+          <p:cNvSpPr txBox="1"/>
+          <p:nvPr/>
+        </p:nvSpPr>
+        <p:spPr>
+          <a:xfrm>
+            <a:off x="6629400" y="1965960"/>
+            <a:ext cx="4873752" cy="411480"/>
+          </a:xfrm>
+          <a:prstGeom prst="rect">
+            <a:avLst/>
+          </a:prstGeom>
+          <a:noFill/>
+        </p:spPr>
+        <p:txBody>
+          <a:bodyPr wrap="square" anchor="t" lIns="0" rIns="0" tIns="0" bIns="0">
+            <a:spAutoFit/>
+          </a:bodyPr>
+          <a:lstStyle/>
+          <a:p>
+            <a:pPr algn="l"/>
+            <a:r>
+              <a:rPr sz="1500" b="1">
+                <a:solidFill>
+                  <a:srgbClr val="D9433B"/>
+                </a:solidFill>
+                <a:latin typeface="Menlo"/>
+                <a:ea typeface="Menlo"/>
+                <a:cs typeface="Menlo"/>
+              </a:rPr>
+              <a:t>&lt;</a:t>
+            </a:r>
+            <a:r>
+              <a:rPr sz="1500" b="0">
+                <a:solidFill>
+                  <a:srgbClr val="5E7682"/>
+                </a:solidFill>
+                <a:latin typeface="Hiragino Sans"/>
+                <a:ea typeface="Hiragino Sans"/>
+                <a:cs typeface="Hiragino Sans"/>
+              </a:rPr>
+              <a:t>  →  </a:t>
+            </a:r>
+            <a:r>
+              <a:rPr sz="1500" b="0">
+                <a:solidFill>
+                  <a:srgbClr val="24404D"/>
+                </a:solidFill>
+                <a:latin typeface="Menlo"/>
+                <a:ea typeface="Menlo"/>
+                <a:cs typeface="Menlo"/>
+              </a:rPr>
+              <a:t>&amp;lt;</a:t>
+            </a:r>
+            <a:r>
+              <a:rPr sz="1500" b="0">
+                <a:solidFill>
+                  <a:srgbClr val="5E7682"/>
+                </a:solidFill>
+                <a:latin typeface="Hiragino Sans"/>
+                <a:ea typeface="Hiragino Sans"/>
+                <a:cs typeface="Hiragino Sans"/>
+              </a:rPr>
+              <a:t>  →  </a:t>
+            </a:r>
+            <a:r>
+              <a:rPr sz="1500" b="1">
+                <a:solidFill>
+                  <a:srgbClr val="D9433B"/>
+                </a:solidFill>
+                <a:latin typeface="Menlo"/>
+                <a:ea typeface="Menlo"/>
+                <a:cs typeface="Menlo"/>
+              </a:rPr>
+              <a:t>&amp;amp;lt;</a:t>
+            </a:r>
+          </a:p>
+        </p:txBody>
+      </p:sp>
+      <p:sp>
+        <p:nvSpPr>
+          <p:cNvPr id="35" name="TextBox 34"/>
+          <p:cNvSpPr txBox="1"/>
+          <p:nvPr/>
+        </p:nvSpPr>
+        <p:spPr>
+          <a:xfrm>
+            <a:off x="6629400" y="2423159"/>
+            <a:ext cx="4873752" cy="274320"/>
+          </a:xfrm>
+          <a:prstGeom prst="rect">
+            <a:avLst/>
+          </a:prstGeom>
+          <a:noFill/>
+        </p:spPr>
+        <p:txBody>
+          <a:bodyPr wrap="square" anchor="t" lIns="0" rIns="0" tIns="0" bIns="0">
+            <a:spAutoFit/>
+          </a:bodyPr>
+          <a:lstStyle/>
+          <a:p>
+            <a:pPr algn="l"/>
+            <a:r>
+              <a:rPr sz="1100" b="0">
+                <a:solidFill>
+                  <a:srgbClr val="D9433B"/>
+                </a:solidFill>
+                <a:latin typeface="Hiragino Sans"/>
+                <a:ea typeface="Hiragino Sans"/>
+                <a:cs typeface="Hiragino Sans"/>
+              </a:rPr>
+              <a:t>自分が作った &amp; まで置き換えてしまい、画面に「&amp;lt;」と出る</a:t>
+            </a:r>
+          </a:p>
+        </p:txBody>
+      </p:sp>
+      <p:sp>
+        <p:nvSpPr>
+          <p:cNvPr id="36" name="TextBox 35"/>
+          <p:cNvSpPr txBox="1"/>
+          <p:nvPr/>
+        </p:nvSpPr>
+        <p:spPr>
+          <a:xfrm>
+            <a:off x="6629400" y="2834640"/>
+            <a:ext cx="4873752" cy="274320"/>
+          </a:xfrm>
+          <a:prstGeom prst="rect">
+            <a:avLst/>
+          </a:prstGeom>
+          <a:noFill/>
+        </p:spPr>
+        <p:txBody>
+          <a:bodyPr wrap="square" anchor="t" lIns="0" rIns="0" tIns="0" bIns="0">
+            <a:spAutoFit/>
+          </a:bodyPr>
+          <a:lstStyle/>
+          <a:p>
+            <a:pPr algn="l"/>
+            <a:r>
+              <a:rPr sz="1100" b="0">
+                <a:solidFill>
+                  <a:srgbClr val="5E7682"/>
+                </a:solidFill>
+                <a:latin typeface="Hiragino Sans"/>
+                <a:ea typeface="Hiragino Sans"/>
+                <a:cs typeface="Hiragino Sans"/>
+              </a:rPr>
+              <a:t>&amp; を先に置き換えれば</a:t>
+            </a:r>
+          </a:p>
+        </p:txBody>
+      </p:sp>
+      <p:sp>
+        <p:nvSpPr>
+          <p:cNvPr id="37" name="TextBox 36"/>
+          <p:cNvSpPr txBox="1"/>
+          <p:nvPr/>
+        </p:nvSpPr>
+        <p:spPr>
+          <a:xfrm>
+            <a:off x="6629400" y="3108960"/>
+            <a:ext cx="4873752" cy="411480"/>
+          </a:xfrm>
+          <a:prstGeom prst="rect">
+            <a:avLst/>
+          </a:prstGeom>
+          <a:noFill/>
+        </p:spPr>
+        <p:txBody>
+          <a:bodyPr wrap="square" anchor="t" lIns="0" rIns="0" tIns="0" bIns="0">
+            <a:spAutoFit/>
+          </a:bodyPr>
+          <a:lstStyle/>
+          <a:p>
+            <a:pPr algn="l"/>
+            <a:r>
+              <a:rPr sz="1500" b="1">
+                <a:solidFill>
+                  <a:srgbClr val="24404D"/>
+                </a:solidFill>
+                <a:latin typeface="Menlo"/>
+                <a:ea typeface="Menlo"/>
+                <a:cs typeface="Menlo"/>
+              </a:rPr>
+              <a:t>&lt;</a:t>
+            </a:r>
+            <a:r>
+              <a:rPr sz="1500" b="0">
+                <a:solidFill>
+                  <a:srgbClr val="5E7682"/>
+                </a:solidFill>
+                <a:latin typeface="Hiragino Sans"/>
+                <a:ea typeface="Hiragino Sans"/>
+                <a:cs typeface="Hiragino Sans"/>
+              </a:rPr>
+              <a:t>  →  </a:t>
+            </a:r>
+            <a:r>
+              <a:rPr sz="1500" b="1">
+                <a:solidFill>
+                  <a:srgbClr val="0E7C72"/>
+                </a:solidFill>
+                <a:latin typeface="Menlo"/>
+                <a:ea typeface="Menlo"/>
+                <a:cs typeface="Menlo"/>
+              </a:rPr>
+              <a:t>&amp;lt;</a:t>
+            </a:r>
+            <a:r>
+              <a:rPr sz="1100" b="0">
+                <a:solidFill>
+                  <a:srgbClr val="0E7C72"/>
+                </a:solidFill>
+                <a:latin typeface="Hiragino Sans"/>
+                <a:ea typeface="Hiragino Sans"/>
+                <a:cs typeface="Hiragino Sans"/>
+              </a:rPr>
+              <a:t>　画面には「&lt;」と出る</a:t>
+            </a:r>
+          </a:p>
+        </p:txBody>
+      </p:sp>
+      <p:sp>
+        <p:nvSpPr>
+          <p:cNvPr id="38" name="Rounded Rectangle 37"/>
+          <p:cNvSpPr/>
+          <p:nvPr/>
+        </p:nvSpPr>
+        <p:spPr>
+          <a:xfrm>
+            <a:off x="6400800" y="3794760"/>
+            <a:ext cx="5330952" cy="1783080"/>
+          </a:xfrm>
+          <a:prstGeom prst="roundRect">
+            <a:avLst>
+              <a:gd name="adj" fmla="val 6000"/>
+            </a:avLst>
+          </a:prstGeom>
+          <a:solidFill>
+            <a:srgbClr val="FFFFFF"/>
+          </a:solidFill>
+          <a:ln w="19050">
+            <a:solidFill>
+              <a:srgbClr val="1AA69A"/>
+            </a:solidFill>
+          </a:ln>
+          <a:effectLst/>
+        </p:spPr>
+        <p:style>
+          <a:lnRef idx="1">
+            <a:schemeClr val="accent1"/>
+          </a:lnRef>
+          <a:fillRef idx="3">
+            <a:schemeClr val="accent1"/>
+          </a:fillRef>
+          <a:effectRef idx="2">
+            <a:schemeClr val="accent1"/>
+          </a:effectRef>
+          <a:fontRef idx="minor">
+            <a:schemeClr val="lt1"/>
+          </a:fontRef>
+        </p:style>
+        <p:txBody>
+          <a:bodyPr rtlCol="0" anchor="ctr"/>
+          <a:lstStyle/>
+          <a:p>
+            <a:pPr algn="ctr"/>
+          </a:p>
+        </p:txBody>
+      </p:sp>
+      <p:sp>
+        <p:nvSpPr>
+          <p:cNvPr id="39" name="TextBox 38"/>
+          <p:cNvSpPr txBox="1"/>
+          <p:nvPr/>
+        </p:nvSpPr>
+        <p:spPr>
+          <a:xfrm>
+            <a:off x="6629400" y="3931920"/>
+            <a:ext cx="4873752" cy="1828800"/>
+          </a:xfrm>
+          <a:prstGeom prst="rect">
+            <a:avLst/>
+          </a:prstGeom>
+          <a:noFill/>
+        </p:spPr>
+        <p:txBody>
+          <a:bodyPr wrap="square" anchor="t" lIns="0" rIns="0" tIns="0" bIns="0">
+            <a:spAutoFit/>
+          </a:bodyPr>
+          <a:lstStyle/>
+          <a:p>
+            <a:pPr algn="l"/>
+            <a:r>
+              <a:rPr sz="1400" b="1">
+                <a:solidFill>
+                  <a:srgbClr val="0E7C72"/>
+                </a:solidFill>
+                <a:latin typeface="Hiragino Sans"/>
+                <a:ea typeface="Hiragino Sans"/>
+                <a:cs typeface="Hiragino Sans"/>
+              </a:rPr>
+              <a:t>エスケープ ＝ 文字を消すことではない</a:t>
+            </a:r>
+          </a:p>
+          <a:p>
+            <a:pPr algn="l"/>
+            <a:r>
+              <a:rPr sz="600" b="0">
+                <a:solidFill>
+                  <a:srgbClr val="24404D"/>
+                </a:solidFill>
+                <a:latin typeface="Hiragino Sans"/>
+                <a:ea typeface="Hiragino Sans"/>
+                <a:cs typeface="Hiragino Sans"/>
+              </a:rPr>
+              <a:t/>
+            </a:r>
+          </a:p>
+          <a:p>
+            <a:pPr algn="l"/>
+            <a:r>
+              <a:rPr sz="1200" b="0">
+                <a:solidFill>
+                  <a:srgbClr val="24404D"/>
+                </a:solidFill>
+                <a:latin typeface="Hiragino Sans"/>
+                <a:ea typeface="Hiragino Sans"/>
+                <a:cs typeface="Hiragino Sans"/>
+              </a:rPr>
+              <a:t>トークナイザが特別扱いする文字を、</a:t>
+            </a:r>
+          </a:p>
+          <a:p>
+            <a:pPr algn="l"/>
+            <a:r>
+              <a:rPr sz="1200" b="0">
+                <a:solidFill>
+                  <a:srgbClr val="24404D"/>
+                </a:solidFill>
+                <a:latin typeface="Hiragino Sans"/>
+                <a:ea typeface="Hiragino Sans"/>
+                <a:cs typeface="Hiragino Sans"/>
+              </a:rPr>
+              <a:t>文字参照（</a:t>
+            </a:r>
+            <a:r>
+              <a:rPr sz="1200" b="1">
+                <a:solidFill>
+                  <a:srgbClr val="24404D"/>
+                </a:solidFill>
+                <a:latin typeface="Menlo"/>
+                <a:ea typeface="Menlo"/>
+                <a:cs typeface="Menlo"/>
+              </a:rPr>
+              <a:t>&amp;lt;</a:t>
+            </a:r>
+            <a:r>
+              <a:rPr sz="1200" b="0">
+                <a:solidFill>
+                  <a:srgbClr val="24404D"/>
+                </a:solidFill>
+                <a:latin typeface="Hiragino Sans"/>
+                <a:ea typeface="Hiragino Sans"/>
+                <a:cs typeface="Hiragino Sans"/>
+              </a:rPr>
+              <a:t> など）に言い換えるだけ。</a:t>
+            </a:r>
+          </a:p>
+          <a:p>
+            <a:pPr algn="l"/>
+            <a:r>
+              <a:rPr sz="600" b="0">
+                <a:solidFill>
+                  <a:srgbClr val="24404D"/>
+                </a:solidFill>
+                <a:latin typeface="Hiragino Sans"/>
+                <a:ea typeface="Hiragino Sans"/>
+                <a:cs typeface="Hiragino Sans"/>
+              </a:rPr>
+              <a:t/>
+            </a:r>
+          </a:p>
+          <a:p>
+            <a:pPr algn="l"/>
+            <a:r>
+              <a:rPr sz="1200" b="0">
+                <a:solidFill>
+                  <a:srgbClr val="24404D"/>
+                </a:solidFill>
+                <a:latin typeface="Hiragino Sans"/>
+                <a:ea typeface="Hiragino Sans"/>
+                <a:cs typeface="Hiragino Sans"/>
+              </a:rPr>
+              <a:t>文字参照はトークナイザの中で「ただの文字」に戻るので、</a:t>
+            </a:r>
+          </a:p>
+          <a:p>
+            <a:pPr algn="l"/>
+            <a:r>
+              <a:rPr sz="1200" b="0">
+                <a:solidFill>
+                  <a:srgbClr val="24404D"/>
+                </a:solidFill>
+                <a:latin typeface="Hiragino Sans"/>
+                <a:ea typeface="Hiragino Sans"/>
+                <a:cs typeface="Hiragino Sans"/>
+              </a:rPr>
+              <a:t>画面には元の文字がそのまま表示される</a:t>
+            </a:r>
+          </a:p>
+        </p:txBody>
+      </p:sp>
+    </p:spTree>
+  </p:cSld>
+  <p:clrMapOvr>
+    <a:masterClrMapping/>
+  </p:clrMapOvr>
+</p:sld>
+</file>
+
+<file path=ppt/slides/slide5.xml><?xml version="1.0" encoding="utf-8"?>
+<p:sld xmlns:a="http://schemas.openxmlformats.org/drawingml/2006/main" xmlns:p="http://schemas.openxmlformats.org/presentationml/2006/main" xmlns:r="http://schemas.openxmlformats.org/officeDocument/2006/relationships">
+  <p:cSld>
+    <p:spTree>
+      <p:nvGrpSpPr>
+        <p:cNvPr id="1" name=""/>
+        <p:cNvGrpSpPr/>
+        <p:nvPr/>
+      </p:nvGrpSpPr>
+      <p:grpSpPr/>
+      <p:sp>
+        <p:nvSpPr>
+          <p:cNvPr id="2" name="Rounded Rectangle 1"/>
+          <p:cNvSpPr/>
+          <p:nvPr/>
+        </p:nvSpPr>
+        <p:spPr>
+          <a:xfrm>
+            <a:off x="457200" y="822960"/>
+            <a:ext cx="2459736" cy="457200"/>
+          </a:xfrm>
+          <a:prstGeom prst="roundRect">
+            <a:avLst>
+              <a:gd name="adj" fmla="val 12000"/>
+            </a:avLst>
+          </a:prstGeom>
+          <a:solidFill>
+            <a:srgbClr val="24404D"/>
+          </a:solidFill>
+          <a:ln>
+            <a:noFill/>
+          </a:ln>
+          <a:effectLst/>
+        </p:spPr>
+        <p:style>
+          <a:lnRef idx="1">
+            <a:schemeClr val="accent1"/>
+          </a:lnRef>
+          <a:fillRef idx="3">
+            <a:schemeClr val="accent1"/>
+          </a:fillRef>
+          <a:effectRef idx="2">
+            <a:schemeClr val="accent1"/>
+          </a:effectRef>
+          <a:fontRef idx="minor">
+            <a:schemeClr val="lt1"/>
+          </a:fontRef>
+        </p:style>
+        <p:txBody>
+          <a:bodyPr rtlCol="0" anchor="ctr"/>
+          <a:lstStyle/>
+          <a:p>
+            <a:pPr algn="ctr"/>
+          </a:p>
+        </p:txBody>
+      </p:sp>
+      <p:sp>
+        <p:nvSpPr>
+          <p:cNvPr id="3" name="TextBox 2"/>
+          <p:cNvSpPr txBox="1"/>
+          <p:nvPr/>
+        </p:nvSpPr>
+        <p:spPr>
+          <a:xfrm>
+            <a:off x="457200" y="822960"/>
+            <a:ext cx="2459736" cy="457200"/>
+          </a:xfrm>
+          <a:prstGeom prst="rect">
+            <a:avLst/>
+          </a:prstGeom>
+          <a:noFill/>
+        </p:spPr>
+        <p:txBody>
+          <a:bodyPr wrap="square" anchor="ctr" lIns="0" rIns="0" tIns="0" bIns="0">
+            <a:spAutoFit/>
+          </a:bodyPr>
+          <a:lstStyle/>
+          <a:p>
+            <a:pPr algn="ctr"/>
+            <a:r>
+              <a:rPr sz="1200" b="1">
+                <a:solidFill>
+                  <a:srgbClr val="FFFFFF"/>
+                </a:solidFill>
+                <a:latin typeface="Hiragino Sans"/>
+                <a:ea typeface="Hiragino Sans"/>
+                <a:cs typeface="Hiragino Sans"/>
+              </a:rPr>
+              <a:t>埋め込む場所</a:t>
+            </a:r>
+          </a:p>
+        </p:txBody>
+      </p:sp>
+      <p:sp>
+        <p:nvSpPr>
+          <p:cNvPr id="4" name="Rounded Rectangle 3"/>
+          <p:cNvSpPr/>
+          <p:nvPr/>
+        </p:nvSpPr>
+        <p:spPr>
+          <a:xfrm>
+            <a:off x="2971800" y="822960"/>
+            <a:ext cx="2276856" cy="457200"/>
+          </a:xfrm>
+          <a:prstGeom prst="roundRect">
+            <a:avLst>
+              <a:gd name="adj" fmla="val 12000"/>
+            </a:avLst>
+          </a:prstGeom>
+          <a:solidFill>
+            <a:srgbClr val="24404D"/>
+          </a:solidFill>
+          <a:ln>
+            <a:noFill/>
+          </a:ln>
+          <a:effectLst/>
+        </p:spPr>
+        <p:style>
+          <a:lnRef idx="1">
+            <a:schemeClr val="accent1"/>
+          </a:lnRef>
+          <a:fillRef idx="3">
+            <a:schemeClr val="accent1"/>
+          </a:fillRef>
+          <a:effectRef idx="2">
+            <a:schemeClr val="accent1"/>
+          </a:effectRef>
+          <a:fontRef idx="minor">
+            <a:schemeClr val="lt1"/>
+          </a:fontRef>
+        </p:style>
+        <p:txBody>
+          <a:bodyPr rtlCol="0" anchor="ctr"/>
+          <a:lstStyle/>
+          <a:p>
+            <a:pPr algn="ctr"/>
+          </a:p>
+        </p:txBody>
+      </p:sp>
+      <p:sp>
+        <p:nvSpPr>
+          <p:cNvPr id="5" name="TextBox 4"/>
+          <p:cNvSpPr txBox="1"/>
+          <p:nvPr/>
+        </p:nvSpPr>
+        <p:spPr>
+          <a:xfrm>
+            <a:off x="2971800" y="822960"/>
+            <a:ext cx="2276856" cy="457200"/>
+          </a:xfrm>
+          <a:prstGeom prst="rect">
+            <a:avLst/>
+          </a:prstGeom>
+          <a:noFill/>
+        </p:spPr>
+        <p:txBody>
+          <a:bodyPr wrap="square" anchor="ctr" lIns="0" rIns="0" tIns="0" bIns="0">
+            <a:spAutoFit/>
+          </a:bodyPr>
+          <a:lstStyle/>
+          <a:p>
+            <a:pPr algn="ctr"/>
+            <a:r>
+              <a:rPr sz="1200" b="1">
+                <a:solidFill>
+                  <a:srgbClr val="FFFFFF"/>
+                </a:solidFill>
+                <a:latin typeface="Hiragino Sans"/>
+                <a:ea typeface="Hiragino Sans"/>
+                <a:cs typeface="Hiragino Sans"/>
+              </a:rPr>
+              <a:t>トークナイザの状態</a:t>
+            </a:r>
+          </a:p>
+        </p:txBody>
+      </p:sp>
+      <p:sp>
+        <p:nvSpPr>
+          <p:cNvPr id="6" name="Rounded Rectangle 5"/>
+          <p:cNvSpPr/>
+          <p:nvPr/>
+        </p:nvSpPr>
+        <p:spPr>
+          <a:xfrm>
+            <a:off x="5303520" y="822960"/>
+            <a:ext cx="1911095" cy="457200"/>
+          </a:xfrm>
+          <a:prstGeom prst="roundRect">
+            <a:avLst>
+              <a:gd name="adj" fmla="val 12000"/>
+            </a:avLst>
+          </a:prstGeom>
+          <a:solidFill>
+            <a:srgbClr val="24404D"/>
+          </a:solidFill>
+          <a:ln>
+            <a:noFill/>
+          </a:ln>
+          <a:effectLst/>
+        </p:spPr>
+        <p:style>
+          <a:lnRef idx="1">
+            <a:schemeClr val="accent1"/>
+          </a:lnRef>
+          <a:fillRef idx="3">
+            <a:schemeClr val="accent1"/>
+          </a:fillRef>
+          <a:effectRef idx="2">
+            <a:schemeClr val="accent1"/>
+          </a:effectRef>
+          <a:fontRef idx="minor">
+            <a:schemeClr val="lt1"/>
+          </a:fontRef>
+        </p:style>
+        <p:txBody>
+          <a:bodyPr rtlCol="0" anchor="ctr"/>
+          <a:lstStyle/>
+          <a:p>
+            <a:pPr algn="ctr"/>
+          </a:p>
+        </p:txBody>
+      </p:sp>
+      <p:sp>
+        <p:nvSpPr>
+          <p:cNvPr id="7" name="TextBox 6"/>
+          <p:cNvSpPr txBox="1"/>
+          <p:nvPr/>
+        </p:nvSpPr>
+        <p:spPr>
+          <a:xfrm>
+            <a:off x="5303520" y="822960"/>
+            <a:ext cx="1911095" cy="457200"/>
+          </a:xfrm>
+          <a:prstGeom prst="rect">
+            <a:avLst/>
+          </a:prstGeom>
+          <a:noFill/>
+        </p:spPr>
+        <p:txBody>
+          <a:bodyPr wrap="square" anchor="ctr" lIns="0" rIns="0" tIns="0" bIns="0">
+            <a:spAutoFit/>
+          </a:bodyPr>
+          <a:lstStyle/>
+          <a:p>
+            <a:pPr algn="ctr"/>
+            <a:r>
+              <a:rPr sz="1200" b="1">
+                <a:solidFill>
+                  <a:srgbClr val="FFFFFF"/>
+                </a:solidFill>
+                <a:latin typeface="Hiragino Sans"/>
+                <a:ea typeface="Hiragino Sans"/>
+                <a:cs typeface="Hiragino Sans"/>
+              </a:rPr>
+              <a:t>そこから抜け出す文字</a:t>
+            </a:r>
+          </a:p>
+        </p:txBody>
+      </p:sp>
+      <p:sp>
+        <p:nvSpPr>
+          <p:cNvPr id="8" name="Rounded Rectangle 7"/>
+          <p:cNvSpPr/>
+          <p:nvPr/>
+        </p:nvSpPr>
+        <p:spPr>
+          <a:xfrm>
+            <a:off x="7269479" y="822960"/>
+            <a:ext cx="1133856" cy="457200"/>
+          </a:xfrm>
+          <a:prstGeom prst="roundRect">
+            <a:avLst>
+              <a:gd name="adj" fmla="val 12000"/>
+            </a:avLst>
+          </a:prstGeom>
+          <a:solidFill>
+            <a:srgbClr val="24404D"/>
+          </a:solidFill>
+          <a:ln>
+            <a:noFill/>
+          </a:ln>
+          <a:effectLst/>
+        </p:spPr>
+        <p:style>
+          <a:lnRef idx="1">
+            <a:schemeClr val="accent1"/>
+          </a:lnRef>
+          <a:fillRef idx="3">
+            <a:schemeClr val="accent1"/>
+          </a:fillRef>
+          <a:effectRef idx="2">
+            <a:schemeClr val="accent1"/>
+          </a:effectRef>
+          <a:fontRef idx="minor">
+            <a:schemeClr val="lt1"/>
+          </a:fontRef>
+        </p:style>
+        <p:txBody>
+          <a:bodyPr rtlCol="0" anchor="ctr"/>
+          <a:lstStyle/>
+          <a:p>
+            <a:pPr algn="ctr"/>
+          </a:p>
+        </p:txBody>
+      </p:sp>
+      <p:sp>
+        <p:nvSpPr>
+          <p:cNvPr id="9" name="TextBox 8"/>
+          <p:cNvSpPr txBox="1"/>
+          <p:nvPr/>
+        </p:nvSpPr>
+        <p:spPr>
+          <a:xfrm>
+            <a:off x="7269479" y="822960"/>
+            <a:ext cx="1133856" cy="457200"/>
+          </a:xfrm>
+          <a:prstGeom prst="rect">
+            <a:avLst/>
+          </a:prstGeom>
+          <a:noFill/>
+        </p:spPr>
+        <p:txBody>
+          <a:bodyPr wrap="square" anchor="ctr" lIns="0" rIns="0" tIns="0" bIns="0">
+            <a:spAutoFit/>
+          </a:bodyPr>
+          <a:lstStyle/>
+          <a:p>
+            <a:pPr algn="ctr"/>
+            <a:r>
+              <a:rPr sz="1200" b="1">
+                <a:solidFill>
+                  <a:srgbClr val="FFFFFF"/>
+                </a:solidFill>
+                <a:latin typeface="Hiragino Sans"/>
+                <a:ea typeface="Hiragino Sans"/>
+                <a:cs typeface="Hiragino Sans"/>
+              </a:rPr>
+              <a:t>文字参照</a:t>
+            </a:r>
+          </a:p>
+        </p:txBody>
+      </p:sp>
+      <p:sp>
+        <p:nvSpPr>
+          <p:cNvPr id="10" name="Rounded Rectangle 9"/>
+          <p:cNvSpPr/>
+          <p:nvPr/>
+        </p:nvSpPr>
+        <p:spPr>
+          <a:xfrm>
+            <a:off x="8458200" y="822960"/>
+            <a:ext cx="3218688" cy="457200"/>
+          </a:xfrm>
+          <a:prstGeom prst="roundRect">
+            <a:avLst>
+              <a:gd name="adj" fmla="val 12000"/>
+            </a:avLst>
+          </a:prstGeom>
+          <a:solidFill>
+            <a:srgbClr val="24404D"/>
+          </a:solidFill>
+          <a:ln>
+            <a:noFill/>
+          </a:ln>
+          <a:effectLst/>
+        </p:spPr>
+        <p:style>
+          <a:lnRef idx="1">
+            <a:schemeClr val="accent1"/>
+          </a:lnRef>
+          <a:fillRef idx="3">
+            <a:schemeClr val="accent1"/>
+          </a:fillRef>
+          <a:effectRef idx="2">
+            <a:schemeClr val="accent1"/>
+          </a:effectRef>
+          <a:fontRef idx="minor">
+            <a:schemeClr val="lt1"/>
+          </a:fontRef>
+        </p:style>
+        <p:txBody>
+          <a:bodyPr rtlCol="0" anchor="ctr"/>
+          <a:lstStyle/>
+          <a:p>
+            <a:pPr algn="ctr"/>
+          </a:p>
+        </p:txBody>
+      </p:sp>
+      <p:sp>
+        <p:nvSpPr>
+          <p:cNvPr id="11" name="TextBox 10"/>
+          <p:cNvSpPr txBox="1"/>
+          <p:nvPr/>
+        </p:nvSpPr>
+        <p:spPr>
+          <a:xfrm>
+            <a:off x="8458200" y="822960"/>
+            <a:ext cx="3218688" cy="457200"/>
+          </a:xfrm>
+          <a:prstGeom prst="rect">
+            <a:avLst/>
+          </a:prstGeom>
+          <a:noFill/>
+        </p:spPr>
+        <p:txBody>
+          <a:bodyPr wrap="square" anchor="ctr" lIns="0" rIns="0" tIns="0" bIns="0">
+            <a:spAutoFit/>
+          </a:bodyPr>
+          <a:lstStyle/>
+          <a:p>
+            <a:pPr algn="ctr"/>
+            <a:r>
+              <a:rPr sz="1200" b="1">
+                <a:solidFill>
+                  <a:srgbClr val="FFFFFF"/>
+                </a:solidFill>
+                <a:latin typeface="Hiragino Sans"/>
+                <a:ea typeface="Hiragino Sans"/>
+                <a:cs typeface="Hiragino Sans"/>
+              </a:rPr>
+              <a:t>必要な対策</a:t>
+            </a:r>
+          </a:p>
+        </p:txBody>
+      </p:sp>
+      <p:sp>
+        <p:nvSpPr>
+          <p:cNvPr id="12" name="Rounded Rectangle 11"/>
+          <p:cNvSpPr/>
+          <p:nvPr/>
+        </p:nvSpPr>
+        <p:spPr>
+          <a:xfrm>
+            <a:off x="457200" y="1371600"/>
+            <a:ext cx="2459736" cy="987552"/>
+          </a:xfrm>
+          <a:prstGeom prst="roundRect">
+            <a:avLst>
+              <a:gd name="adj" fmla="val 8000"/>
+            </a:avLst>
+          </a:prstGeom>
+          <a:solidFill>
+            <a:srgbClr val="E6F5F2"/>
+          </a:solidFill>
+          <a:ln w="12700">
+            <a:solidFill>
+              <a:srgbClr val="1AA69A"/>
+            </a:solidFill>
+          </a:ln>
+          <a:effectLst/>
+        </p:spPr>
+        <p:style>
+          <a:lnRef idx="1">
+            <a:schemeClr val="accent1"/>
+          </a:lnRef>
+          <a:fillRef idx="3">
+            <a:schemeClr val="accent1"/>
+          </a:fillRef>
+          <a:effectRef idx="2">
+            <a:schemeClr val="accent1"/>
+          </a:effectRef>
+          <a:fontRef idx="minor">
+            <a:schemeClr val="lt1"/>
+          </a:fontRef>
+        </p:style>
+        <p:txBody>
+          <a:bodyPr rtlCol="0" anchor="ctr"/>
+          <a:lstStyle/>
+          <a:p>
+            <a:pPr algn="ctr"/>
+          </a:p>
+        </p:txBody>
+      </p:sp>
+      <p:sp>
+        <p:nvSpPr>
+          <p:cNvPr id="13" name="Rounded Rectangle 12"/>
+          <p:cNvSpPr/>
+          <p:nvPr/>
+        </p:nvSpPr>
+        <p:spPr>
+          <a:xfrm>
+            <a:off x="2971800" y="1371600"/>
+            <a:ext cx="2276856" cy="987552"/>
+          </a:xfrm>
+          <a:prstGeom prst="roundRect">
+            <a:avLst>
+              <a:gd name="adj" fmla="val 8000"/>
+            </a:avLst>
+          </a:prstGeom>
+          <a:solidFill>
+            <a:srgbClr val="FFFFFF"/>
+          </a:solidFill>
+          <a:ln w="12700">
+            <a:solidFill>
+              <a:srgbClr val="C2CBD0"/>
+            </a:solidFill>
+          </a:ln>
+          <a:effectLst/>
+        </p:spPr>
+        <p:style>
+          <a:lnRef idx="1">
+            <a:schemeClr val="accent1"/>
+          </a:lnRef>
+          <a:fillRef idx="3">
+            <a:schemeClr val="accent1"/>
+          </a:fillRef>
+          <a:effectRef idx="2">
+            <a:schemeClr val="accent1"/>
+          </a:effectRef>
+          <a:fontRef idx="minor">
+            <a:schemeClr val="lt1"/>
+          </a:fontRef>
+        </p:style>
+        <p:txBody>
+          <a:bodyPr rtlCol="0" anchor="ctr"/>
+          <a:lstStyle/>
+          <a:p>
+            <a:pPr algn="ctr"/>
+          </a:p>
+        </p:txBody>
+      </p:sp>
+      <p:sp>
+        <p:nvSpPr>
+          <p:cNvPr id="14" name="Rounded Rectangle 13"/>
+          <p:cNvSpPr/>
+          <p:nvPr/>
+        </p:nvSpPr>
+        <p:spPr>
+          <a:xfrm>
+            <a:off x="5303520" y="1371600"/>
+            <a:ext cx="1911095" cy="987552"/>
+          </a:xfrm>
+          <a:prstGeom prst="roundRect">
+            <a:avLst>
+              <a:gd name="adj" fmla="val 8000"/>
+            </a:avLst>
+          </a:prstGeom>
+          <a:solidFill>
+            <a:srgbClr val="FFFFFF"/>
+          </a:solidFill>
+          <a:ln w="12700">
+            <a:solidFill>
+              <a:srgbClr val="C2CBD0"/>
+            </a:solidFill>
+          </a:ln>
+          <a:effectLst/>
+        </p:spPr>
+        <p:style>
+          <a:lnRef idx="1">
+            <a:schemeClr val="accent1"/>
+          </a:lnRef>
+          <a:fillRef idx="3">
+            <a:schemeClr val="accent1"/>
+          </a:fillRef>
+          <a:effectRef idx="2">
+            <a:schemeClr val="accent1"/>
+          </a:effectRef>
+          <a:fontRef idx="minor">
+            <a:schemeClr val="lt1"/>
+          </a:fontRef>
+        </p:style>
+        <p:txBody>
+          <a:bodyPr rtlCol="0" anchor="ctr"/>
+          <a:lstStyle/>
+          <a:p>
+            <a:pPr algn="ctr"/>
+          </a:p>
+        </p:txBody>
+      </p:sp>
+      <p:sp>
+        <p:nvSpPr>
+          <p:cNvPr id="15" name="Rounded Rectangle 14"/>
+          <p:cNvSpPr/>
+          <p:nvPr/>
+        </p:nvSpPr>
+        <p:spPr>
+          <a:xfrm>
+            <a:off x="7269479" y="1371600"/>
+            <a:ext cx="1133856" cy="987552"/>
+          </a:xfrm>
+          <a:prstGeom prst="roundRect">
+            <a:avLst>
+              <a:gd name="adj" fmla="val 8000"/>
+            </a:avLst>
+          </a:prstGeom>
+          <a:solidFill>
+            <a:srgbClr val="FFFFFF"/>
+          </a:solidFill>
+          <a:ln w="12700">
+            <a:solidFill>
+              <a:srgbClr val="C2CBD0"/>
+            </a:solidFill>
+          </a:ln>
+          <a:effectLst/>
+        </p:spPr>
+        <p:style>
+          <a:lnRef idx="1">
+            <a:schemeClr val="accent1"/>
+          </a:lnRef>
+          <a:fillRef idx="3">
+            <a:schemeClr val="accent1"/>
+          </a:fillRef>
+          <a:effectRef idx="2">
+            <a:schemeClr val="accent1"/>
+          </a:effectRef>
+          <a:fontRef idx="minor">
+            <a:schemeClr val="lt1"/>
+          </a:fontRef>
+        </p:style>
+        <p:txBody>
+          <a:bodyPr rtlCol="0" anchor="ctr"/>
+          <a:lstStyle/>
+          <a:p>
+            <a:pPr algn="ctr"/>
+          </a:p>
+        </p:txBody>
+      </p:sp>
+      <p:sp>
+        <p:nvSpPr>
+          <p:cNvPr id="16" name="Rounded Rectangle 15"/>
+          <p:cNvSpPr/>
+          <p:nvPr/>
+        </p:nvSpPr>
+        <p:spPr>
+          <a:xfrm>
+            <a:off x="8458200" y="1371600"/>
+            <a:ext cx="3218688" cy="987552"/>
+          </a:xfrm>
+          <a:prstGeom prst="roundRect">
+            <a:avLst>
+              <a:gd name="adj" fmla="val 8000"/>
+            </a:avLst>
+          </a:prstGeom>
+          <a:solidFill>
+            <a:srgbClr val="E6F5F2"/>
+          </a:solidFill>
+          <a:ln w="12700">
+            <a:solidFill>
+              <a:srgbClr val="1AA69A"/>
+            </a:solidFill>
+          </a:ln>
+          <a:effectLst/>
+        </p:spPr>
+        <p:style>
+          <a:lnRef idx="1">
+            <a:schemeClr val="accent1"/>
+          </a:lnRef>
+          <a:fillRef idx="3">
+            <a:schemeClr val="accent1"/>
+          </a:fillRef>
+          <a:effectRef idx="2">
+            <a:schemeClr val="accent1"/>
+          </a:effectRef>
+          <a:fontRef idx="minor">
+            <a:schemeClr val="lt1"/>
+          </a:fontRef>
+        </p:style>
+        <p:txBody>
+          <a:bodyPr rtlCol="0" anchor="ctr"/>
+          <a:lstStyle/>
+          <a:p>
+            <a:pPr algn="ctr"/>
+          </a:p>
+        </p:txBody>
+      </p:sp>
+      <p:sp>
+        <p:nvSpPr>
+          <p:cNvPr id="17" name="TextBox 16"/>
+          <p:cNvSpPr txBox="1"/>
+          <p:nvPr/>
+        </p:nvSpPr>
+        <p:spPr>
+          <a:xfrm>
+            <a:off x="566928" y="1499615"/>
+            <a:ext cx="2240280" cy="320040"/>
+          </a:xfrm>
+          <a:prstGeom prst="rect">
+            <a:avLst/>
+          </a:prstGeom>
+          <a:noFill/>
+        </p:spPr>
+        <p:txBody>
+          <a:bodyPr wrap="square" anchor="t" lIns="0" rIns="0" tIns="0" bIns="0">
+            <a:spAutoFit/>
+          </a:bodyPr>
+          <a:lstStyle/>
+          <a:p>
+            <a:pPr algn="l"/>
+            <a:r>
+              <a:rPr sz="1300" b="1">
+                <a:solidFill>
+                  <a:srgbClr val="0E7C72"/>
+                </a:solidFill>
+                <a:latin typeface="Hiragino Sans"/>
+                <a:ea typeface="Hiragino Sans"/>
+                <a:cs typeface="Hiragino Sans"/>
+              </a:rPr>
+              <a:t>本文</a:t>
+            </a:r>
+          </a:p>
+        </p:txBody>
+      </p:sp>
+      <p:sp>
+        <p:nvSpPr>
+          <p:cNvPr id="18" name="TextBox 17"/>
+          <p:cNvSpPr txBox="1"/>
+          <p:nvPr/>
+        </p:nvSpPr>
+        <p:spPr>
+          <a:xfrm>
+            <a:off x="566928" y="1874520"/>
+            <a:ext cx="2240280" cy="365760"/>
+          </a:xfrm>
+          <a:prstGeom prst="rect">
+            <a:avLst/>
+          </a:prstGeom>
+          <a:noFill/>
+        </p:spPr>
+        <p:txBody>
+          <a:bodyPr wrap="square" anchor="t" lIns="0" rIns="0" tIns="0" bIns="0">
+            <a:spAutoFit/>
+          </a:bodyPr>
+          <a:lstStyle/>
+          <a:p>
+            <a:pPr algn="l"/>
+            <a:r>
+              <a:rPr sz="1050" b="0">
+                <a:solidFill>
+                  <a:srgbClr val="24404D"/>
+                </a:solidFill>
+                <a:latin typeface="Menlo"/>
+                <a:ea typeface="Menlo"/>
+                <a:cs typeface="Menlo"/>
+              </a:rPr>
+              <a:t>&lt;p&gt;{v}&lt;/p&gt;</a:t>
+            </a:r>
+          </a:p>
+        </p:txBody>
+      </p:sp>
+      <p:sp>
+        <p:nvSpPr>
+          <p:cNvPr id="19" name="TextBox 18"/>
+          <p:cNvSpPr txBox="1"/>
+          <p:nvPr/>
+        </p:nvSpPr>
+        <p:spPr>
+          <a:xfrm>
+            <a:off x="3063240" y="1371600"/>
+            <a:ext cx="2093976" cy="987552"/>
+          </a:xfrm>
+          <a:prstGeom prst="rect">
+            <a:avLst/>
+          </a:prstGeom>
+          <a:noFill/>
+        </p:spPr>
+        <p:txBody>
+          <a:bodyPr wrap="square" anchor="ctr" lIns="0" rIns="0" tIns="0" bIns="0">
+            <a:spAutoFit/>
+          </a:bodyPr>
+          <a:lstStyle/>
+          <a:p>
+            <a:pPr algn="ctr"/>
+            <a:r>
+              <a:rPr sz="1100" b="0">
+                <a:solidFill>
+                  <a:srgbClr val="24404D"/>
+                </a:solidFill>
+                <a:latin typeface="Hiragino Sans"/>
+                <a:ea typeface="Hiragino Sans"/>
+                <a:cs typeface="Hiragino Sans"/>
+              </a:rPr>
+              <a:t>Data state</a:t>
+            </a:r>
+          </a:p>
+        </p:txBody>
+      </p:sp>
+      <p:sp>
+        <p:nvSpPr>
+          <p:cNvPr id="20" name="TextBox 19"/>
+          <p:cNvSpPr txBox="1"/>
+          <p:nvPr/>
+        </p:nvSpPr>
+        <p:spPr>
+          <a:xfrm>
+            <a:off x="5303520" y="1371600"/>
+            <a:ext cx="1911095" cy="987552"/>
+          </a:xfrm>
+          <a:prstGeom prst="rect">
+            <a:avLst/>
+          </a:prstGeom>
+          <a:noFill/>
+        </p:spPr>
+        <p:txBody>
+          <a:bodyPr wrap="square" anchor="ctr" lIns="0" rIns="0" tIns="0" bIns="0">
+            <a:spAutoFit/>
+          </a:bodyPr>
+          <a:lstStyle/>
+          <a:p>
+            <a:pPr algn="ctr"/>
+            <a:r>
+              <a:rPr sz="1500" b="1">
+                <a:solidFill>
+                  <a:srgbClr val="D9433B"/>
+                </a:solidFill>
+                <a:latin typeface="Menlo"/>
+                <a:ea typeface="Menlo"/>
+                <a:cs typeface="Menlo"/>
+              </a:rPr>
+              <a:t>&lt;</a:t>
+            </a:r>
+          </a:p>
+        </p:txBody>
+      </p:sp>
+      <p:sp>
+        <p:nvSpPr>
+          <p:cNvPr id="21" name="TextBox 20"/>
+          <p:cNvSpPr txBox="1"/>
+          <p:nvPr/>
+        </p:nvSpPr>
+        <p:spPr>
+          <a:xfrm>
+            <a:off x="7269479" y="1371600"/>
+            <a:ext cx="1133856" cy="987552"/>
+          </a:xfrm>
+          <a:prstGeom prst="rect">
+            <a:avLst/>
+          </a:prstGeom>
+          <a:noFill/>
+        </p:spPr>
+        <p:txBody>
+          <a:bodyPr wrap="square" anchor="ctr" lIns="0" rIns="0" tIns="0" bIns="0">
+            <a:spAutoFit/>
+          </a:bodyPr>
+          <a:lstStyle/>
+          <a:p>
+            <a:pPr algn="ctr"/>
+            <a:r>
+              <a:rPr sz="1100" b="0">
+                <a:solidFill>
+                  <a:srgbClr val="24404D"/>
+                </a:solidFill>
+                <a:latin typeface="Hiragino Sans"/>
+                <a:ea typeface="Hiragino Sans"/>
+                <a:cs typeface="Hiragino Sans"/>
+              </a:rPr>
+              <a:t>解釈される</a:t>
+            </a:r>
+          </a:p>
+        </p:txBody>
+      </p:sp>
+      <p:sp>
+        <p:nvSpPr>
+          <p:cNvPr id="22" name="TextBox 21"/>
+          <p:cNvSpPr txBox="1"/>
+          <p:nvPr/>
+        </p:nvSpPr>
+        <p:spPr>
+          <a:xfrm>
+            <a:off x="8595360" y="1371600"/>
+            <a:ext cx="2944368" cy="987552"/>
+          </a:xfrm>
+          <a:prstGeom prst="rect">
+            <a:avLst/>
+          </a:prstGeom>
+          <a:noFill/>
+        </p:spPr>
+        <p:txBody>
+          <a:bodyPr wrap="square" anchor="ctr" lIns="0" rIns="0" tIns="0" bIns="0">
+            <a:spAutoFit/>
+          </a:bodyPr>
+          <a:lstStyle/>
+          <a:p>
+            <a:pPr algn="l"/>
+            <a:r>
+              <a:rPr sz="1150" b="1">
+                <a:solidFill>
+                  <a:srgbClr val="0E7C72"/>
+                </a:solidFill>
+                <a:latin typeface="Hiragino Sans"/>
+                <a:ea typeface="Hiragino Sans"/>
+                <a:cs typeface="Hiragino Sans"/>
+              </a:rPr>
+              <a:t>HTMLエスケープ</a:t>
+            </a:r>
+          </a:p>
+        </p:txBody>
+      </p:sp>
+      <p:sp>
+        <p:nvSpPr>
+          <p:cNvPr id="23" name="Rounded Rectangle 22"/>
+          <p:cNvSpPr/>
+          <p:nvPr/>
+        </p:nvSpPr>
+        <p:spPr>
+          <a:xfrm>
+            <a:off x="457200" y="2450592"/>
+            <a:ext cx="2459736" cy="987552"/>
+          </a:xfrm>
+          <a:prstGeom prst="roundRect">
+            <a:avLst>
+              <a:gd name="adj" fmla="val 8000"/>
+            </a:avLst>
+          </a:prstGeom>
+          <a:solidFill>
+            <a:srgbClr val="E6F5F2"/>
+          </a:solidFill>
+          <a:ln w="12700">
+            <a:solidFill>
+              <a:srgbClr val="1AA69A"/>
+            </a:solidFill>
+          </a:ln>
+          <a:effectLst/>
+        </p:spPr>
+        <p:style>
+          <a:lnRef idx="1">
+            <a:schemeClr val="accent1"/>
+          </a:lnRef>
+          <a:fillRef idx="3">
+            <a:schemeClr val="accent1"/>
+          </a:fillRef>
+          <a:effectRef idx="2">
+            <a:schemeClr val="accent1"/>
+          </a:effectRef>
+          <a:fontRef idx="minor">
+            <a:schemeClr val="lt1"/>
+          </a:fontRef>
+        </p:style>
+        <p:txBody>
+          <a:bodyPr rtlCol="0" anchor="ctr"/>
+          <a:lstStyle/>
+          <a:p>
+            <a:pPr algn="ctr"/>
+          </a:p>
+        </p:txBody>
+      </p:sp>
+      <p:sp>
+        <p:nvSpPr>
+          <p:cNvPr id="24" name="Rounded Rectangle 23"/>
+          <p:cNvSpPr/>
+          <p:nvPr/>
+        </p:nvSpPr>
+        <p:spPr>
+          <a:xfrm>
+            <a:off x="2971800" y="2450592"/>
+            <a:ext cx="2276856" cy="987552"/>
+          </a:xfrm>
+          <a:prstGeom prst="roundRect">
+            <a:avLst>
+              <a:gd name="adj" fmla="val 8000"/>
+            </a:avLst>
+          </a:prstGeom>
+          <a:solidFill>
+            <a:srgbClr val="FFFFFF"/>
+          </a:solidFill>
+          <a:ln w="12700">
+            <a:solidFill>
+              <a:srgbClr val="C2CBD0"/>
+            </a:solidFill>
+          </a:ln>
+          <a:effectLst/>
+        </p:spPr>
+        <p:style>
+          <a:lnRef idx="1">
+            <a:schemeClr val="accent1"/>
+          </a:lnRef>
+          <a:fillRef idx="3">
+            <a:schemeClr val="accent1"/>
+          </a:fillRef>
+          <a:effectRef idx="2">
+            <a:schemeClr val="accent1"/>
+          </a:effectRef>
+          <a:fontRef idx="minor">
+            <a:schemeClr val="lt1"/>
+          </a:fontRef>
+        </p:style>
+        <p:txBody>
+          <a:bodyPr rtlCol="0" anchor="ctr"/>
+          <a:lstStyle/>
+          <a:p>
+            <a:pPr algn="ctr"/>
+          </a:p>
+        </p:txBody>
+      </p:sp>
+      <p:sp>
+        <p:nvSpPr>
+          <p:cNvPr id="25" name="Rounded Rectangle 24"/>
+          <p:cNvSpPr/>
+          <p:nvPr/>
+        </p:nvSpPr>
+        <p:spPr>
+          <a:xfrm>
+            <a:off x="5303520" y="2450592"/>
+            <a:ext cx="1911095" cy="987552"/>
+          </a:xfrm>
+          <a:prstGeom prst="roundRect">
+            <a:avLst>
+              <a:gd name="adj" fmla="val 8000"/>
+            </a:avLst>
+          </a:prstGeom>
+          <a:solidFill>
+            <a:srgbClr val="FFFFFF"/>
+          </a:solidFill>
+          <a:ln w="12700">
+            <a:solidFill>
+              <a:srgbClr val="C2CBD0"/>
+            </a:solidFill>
+          </a:ln>
+          <a:effectLst/>
+        </p:spPr>
+        <p:style>
+          <a:lnRef idx="1">
+            <a:schemeClr val="accent1"/>
+          </a:lnRef>
+          <a:fillRef idx="3">
+            <a:schemeClr val="accent1"/>
+          </a:fillRef>
+          <a:effectRef idx="2">
+            <a:schemeClr val="accent1"/>
+          </a:effectRef>
+          <a:fontRef idx="minor">
+            <a:schemeClr val="lt1"/>
+          </a:fontRef>
+        </p:style>
+        <p:txBody>
+          <a:bodyPr rtlCol="0" anchor="ctr"/>
+          <a:lstStyle/>
+          <a:p>
+            <a:pPr algn="ctr"/>
+          </a:p>
+        </p:txBody>
+      </p:sp>
+      <p:sp>
+        <p:nvSpPr>
+          <p:cNvPr id="26" name="Rounded Rectangle 25"/>
+          <p:cNvSpPr/>
+          <p:nvPr/>
+        </p:nvSpPr>
+        <p:spPr>
+          <a:xfrm>
+            <a:off x="7269479" y="2450592"/>
+            <a:ext cx="1133856" cy="987552"/>
+          </a:xfrm>
+          <a:prstGeom prst="roundRect">
+            <a:avLst>
+              <a:gd name="adj" fmla="val 8000"/>
+            </a:avLst>
+          </a:prstGeom>
+          <a:solidFill>
+            <a:srgbClr val="FFFFFF"/>
+          </a:solidFill>
+          <a:ln w="12700">
+            <a:solidFill>
+              <a:srgbClr val="C2CBD0"/>
+            </a:solidFill>
+          </a:ln>
+          <a:effectLst/>
+        </p:spPr>
+        <p:style>
+          <a:lnRef idx="1">
+            <a:schemeClr val="accent1"/>
+          </a:lnRef>
+          <a:fillRef idx="3">
+            <a:schemeClr val="accent1"/>
+          </a:fillRef>
+          <a:effectRef idx="2">
+            <a:schemeClr val="accent1"/>
+          </a:effectRef>
+          <a:fontRef idx="minor">
+            <a:schemeClr val="lt1"/>
+          </a:fontRef>
+        </p:style>
+        <p:txBody>
+          <a:bodyPr rtlCol="0" anchor="ctr"/>
+          <a:lstStyle/>
+          <a:p>
+            <a:pPr algn="ctr"/>
+          </a:p>
+        </p:txBody>
+      </p:sp>
+      <p:sp>
+        <p:nvSpPr>
+          <p:cNvPr id="27" name="Rounded Rectangle 26"/>
+          <p:cNvSpPr/>
+          <p:nvPr/>
+        </p:nvSpPr>
+        <p:spPr>
+          <a:xfrm>
+            <a:off x="8458200" y="2450592"/>
+            <a:ext cx="3218688" cy="987552"/>
+          </a:xfrm>
+          <a:prstGeom prst="roundRect">
+            <a:avLst>
+              <a:gd name="adj" fmla="val 8000"/>
+            </a:avLst>
+          </a:prstGeom>
+          <a:solidFill>
+            <a:srgbClr val="E6F5F2"/>
+          </a:solidFill>
+          <a:ln w="12700">
+            <a:solidFill>
+              <a:srgbClr val="1AA69A"/>
+            </a:solidFill>
+          </a:ln>
+          <a:effectLst/>
+        </p:spPr>
+        <p:style>
+          <a:lnRef idx="1">
+            <a:schemeClr val="accent1"/>
+          </a:lnRef>
+          <a:fillRef idx="3">
+            <a:schemeClr val="accent1"/>
+          </a:fillRef>
+          <a:effectRef idx="2">
+            <a:schemeClr val="accent1"/>
+          </a:effectRef>
+          <a:fontRef idx="minor">
+            <a:schemeClr val="lt1"/>
+          </a:fontRef>
+        </p:style>
+        <p:txBody>
+          <a:bodyPr rtlCol="0" anchor="ctr"/>
+          <a:lstStyle/>
+          <a:p>
+            <a:pPr algn="ctr"/>
+          </a:p>
+        </p:txBody>
+      </p:sp>
+      <p:sp>
+        <p:nvSpPr>
+          <p:cNvPr id="28" name="TextBox 27"/>
+          <p:cNvSpPr txBox="1"/>
+          <p:nvPr/>
+        </p:nvSpPr>
+        <p:spPr>
+          <a:xfrm>
+            <a:off x="566928" y="2578608"/>
+            <a:ext cx="2240280" cy="320040"/>
+          </a:xfrm>
+          <a:prstGeom prst="rect">
+            <a:avLst/>
+          </a:prstGeom>
+          <a:noFill/>
+        </p:spPr>
+        <p:txBody>
+          <a:bodyPr wrap="square" anchor="t" lIns="0" rIns="0" tIns="0" bIns="0">
+            <a:spAutoFit/>
+          </a:bodyPr>
+          <a:lstStyle/>
+          <a:p>
+            <a:pPr algn="l"/>
+            <a:r>
+              <a:rPr sz="1300" b="1">
+                <a:solidFill>
+                  <a:srgbClr val="0E7C72"/>
+                </a:solidFill>
+                <a:latin typeface="Hiragino Sans"/>
+                <a:ea typeface="Hiragino Sans"/>
+                <a:cs typeface="Hiragino Sans"/>
+              </a:rPr>
+              <a:t>属性値</a:t>
+            </a:r>
+          </a:p>
+        </p:txBody>
+      </p:sp>
+      <p:sp>
+        <p:nvSpPr>
+          <p:cNvPr id="29" name="TextBox 28"/>
+          <p:cNvSpPr txBox="1"/>
+          <p:nvPr/>
+        </p:nvSpPr>
+        <p:spPr>
+          <a:xfrm>
+            <a:off x="566928" y="2953511"/>
+            <a:ext cx="2240280" cy="365760"/>
+          </a:xfrm>
+          <a:prstGeom prst="rect">
+            <a:avLst/>
+          </a:prstGeom>
+          <a:noFill/>
+        </p:spPr>
+        <p:txBody>
+          <a:bodyPr wrap="square" anchor="t" lIns="0" rIns="0" tIns="0" bIns="0">
+            <a:spAutoFit/>
+          </a:bodyPr>
+          <a:lstStyle/>
+          <a:p>
+            <a:pPr algn="l"/>
+            <a:r>
+              <a:rPr sz="1050" b="0">
+                <a:solidFill>
+                  <a:srgbClr val="24404D"/>
+                </a:solidFill>
+                <a:latin typeface="Menlo"/>
+                <a:ea typeface="Menlo"/>
+                <a:cs typeface="Menlo"/>
+              </a:rPr>
+              <a:t>title="{v}"</a:t>
+            </a:r>
+          </a:p>
+        </p:txBody>
+      </p:sp>
+      <p:sp>
+        <p:nvSpPr>
+          <p:cNvPr id="30" name="TextBox 29"/>
+          <p:cNvSpPr txBox="1"/>
+          <p:nvPr/>
+        </p:nvSpPr>
+        <p:spPr>
+          <a:xfrm>
+            <a:off x="3063240" y="2450592"/>
+            <a:ext cx="2093976" cy="987552"/>
+          </a:xfrm>
+          <a:prstGeom prst="rect">
+            <a:avLst/>
+          </a:prstGeom>
+          <a:noFill/>
+        </p:spPr>
+        <p:txBody>
+          <a:bodyPr wrap="square" anchor="ctr" lIns="0" rIns="0" tIns="0" bIns="0">
+            <a:spAutoFit/>
+          </a:bodyPr>
+          <a:lstStyle/>
+          <a:p>
+            <a:pPr algn="ctr"/>
+            <a:r>
+              <a:rPr sz="1100" b="0">
+                <a:solidFill>
+                  <a:srgbClr val="24404D"/>
+                </a:solidFill>
+                <a:latin typeface="Hiragino Sans"/>
+                <a:ea typeface="Hiragino Sans"/>
+                <a:cs typeface="Hiragino Sans"/>
+              </a:rPr>
+              <a:t>Attribute value</a:t>
+            </a:r>
+          </a:p>
+          <a:p>
+            <a:pPr algn="ctr"/>
+            <a:r>
+              <a:rPr sz="1100" b="0">
+                <a:solidFill>
+                  <a:srgbClr val="24404D"/>
+                </a:solidFill>
+                <a:latin typeface="Hiragino Sans"/>
+                <a:ea typeface="Hiragino Sans"/>
+                <a:cs typeface="Hiragino Sans"/>
+              </a:rPr>
+              <a:t>(double-quoted) state</a:t>
+            </a:r>
+          </a:p>
+        </p:txBody>
+      </p:sp>
+      <p:sp>
+        <p:nvSpPr>
+          <p:cNvPr id="31" name="TextBox 30"/>
+          <p:cNvSpPr txBox="1"/>
+          <p:nvPr/>
+        </p:nvSpPr>
+        <p:spPr>
+          <a:xfrm>
+            <a:off x="5303520" y="2450592"/>
+            <a:ext cx="1911095" cy="987552"/>
+          </a:xfrm>
+          <a:prstGeom prst="rect">
+            <a:avLst/>
+          </a:prstGeom>
+          <a:noFill/>
+        </p:spPr>
+        <p:txBody>
+          <a:bodyPr wrap="square" anchor="ctr" lIns="0" rIns="0" tIns="0" bIns="0">
+            <a:spAutoFit/>
+          </a:bodyPr>
+          <a:lstStyle/>
+          <a:p>
+            <a:pPr algn="ctr"/>
+            <a:r>
+              <a:rPr sz="1500" b="1">
+                <a:solidFill>
+                  <a:srgbClr val="D9433B"/>
+                </a:solidFill>
+                <a:latin typeface="Menlo"/>
+                <a:ea typeface="Menlo"/>
+                <a:cs typeface="Menlo"/>
+              </a:rPr>
+              <a:t>"</a:t>
+            </a:r>
+          </a:p>
+        </p:txBody>
+      </p:sp>
+      <p:sp>
+        <p:nvSpPr>
+          <p:cNvPr id="32" name="TextBox 31"/>
+          <p:cNvSpPr txBox="1"/>
+          <p:nvPr/>
+        </p:nvSpPr>
+        <p:spPr>
+          <a:xfrm>
+            <a:off x="7269479" y="2450592"/>
+            <a:ext cx="1133856" cy="987552"/>
+          </a:xfrm>
+          <a:prstGeom prst="rect">
+            <a:avLst/>
+          </a:prstGeom>
+          <a:noFill/>
+        </p:spPr>
+        <p:txBody>
+          <a:bodyPr wrap="square" anchor="ctr" lIns="0" rIns="0" tIns="0" bIns="0">
+            <a:spAutoFit/>
+          </a:bodyPr>
+          <a:lstStyle/>
+          <a:p>
+            <a:pPr algn="ctr"/>
+            <a:r>
+              <a:rPr sz="1100" b="0">
+                <a:solidFill>
+                  <a:srgbClr val="24404D"/>
+                </a:solidFill>
+                <a:latin typeface="Hiragino Sans"/>
+                <a:ea typeface="Hiragino Sans"/>
+                <a:cs typeface="Hiragino Sans"/>
+              </a:rPr>
+              <a:t>解釈される</a:t>
+            </a:r>
+          </a:p>
+        </p:txBody>
+      </p:sp>
+      <p:sp>
+        <p:nvSpPr>
+          <p:cNvPr id="33" name="TextBox 32"/>
+          <p:cNvSpPr txBox="1"/>
+          <p:nvPr/>
+        </p:nvSpPr>
+        <p:spPr>
+          <a:xfrm>
+            <a:off x="8595360" y="2450592"/>
+            <a:ext cx="2944368" cy="987552"/>
+          </a:xfrm>
+          <a:prstGeom prst="rect">
+            <a:avLst/>
+          </a:prstGeom>
+          <a:noFill/>
+        </p:spPr>
+        <p:txBody>
+          <a:bodyPr wrap="square" anchor="ctr" lIns="0" rIns="0" tIns="0" bIns="0">
+            <a:spAutoFit/>
+          </a:bodyPr>
+          <a:lstStyle/>
+          <a:p>
+            <a:pPr algn="l"/>
+            <a:r>
+              <a:rPr sz="1150" b="1">
+                <a:solidFill>
+                  <a:srgbClr val="0E7C72"/>
+                </a:solidFill>
+                <a:latin typeface="Hiragino Sans"/>
+                <a:ea typeface="Hiragino Sans"/>
+                <a:cs typeface="Hiragino Sans"/>
+              </a:rPr>
+              <a:t>HTMLエスケープ（" を含む）</a:t>
+            </a:r>
+          </a:p>
+          <a:p>
+            <a:pPr algn="l"/>
+            <a:r>
+              <a:rPr sz="1150" b="1">
+                <a:solidFill>
+                  <a:srgbClr val="0E7C72"/>
+                </a:solidFill>
+                <a:latin typeface="Hiragino Sans"/>
+                <a:ea typeface="Hiragino Sans"/>
+                <a:cs typeface="Hiragino Sans"/>
+              </a:rPr>
+              <a:t>＋ 属性値は必ず " で囲む</a:t>
+            </a:r>
+          </a:p>
+        </p:txBody>
+      </p:sp>
+      <p:sp>
+        <p:nvSpPr>
+          <p:cNvPr id="34" name="Rounded Rectangle 33"/>
+          <p:cNvSpPr/>
+          <p:nvPr/>
+        </p:nvSpPr>
+        <p:spPr>
+          <a:xfrm>
+            <a:off x="457200" y="3529584"/>
+            <a:ext cx="2459736" cy="987552"/>
+          </a:xfrm>
+          <a:prstGeom prst="roundRect">
+            <a:avLst>
+              <a:gd name="adj" fmla="val 8000"/>
+            </a:avLst>
+          </a:prstGeom>
+          <a:solidFill>
+            <a:srgbClr val="FBEBEA"/>
+          </a:solidFill>
+          <a:ln w="12700">
+            <a:solidFill>
+              <a:srgbClr val="D9433B"/>
+            </a:solidFill>
+          </a:ln>
+          <a:effectLst/>
+        </p:spPr>
+        <p:style>
+          <a:lnRef idx="1">
+            <a:schemeClr val="accent1"/>
+          </a:lnRef>
+          <a:fillRef idx="3">
+            <a:schemeClr val="accent1"/>
+          </a:fillRef>
+          <a:effectRef idx="2">
+            <a:schemeClr val="accent1"/>
+          </a:effectRef>
+          <a:fontRef idx="minor">
+            <a:schemeClr val="lt1"/>
+          </a:fontRef>
+        </p:style>
+        <p:txBody>
+          <a:bodyPr rtlCol="0" anchor="ctr"/>
+          <a:lstStyle/>
+          <a:p>
+            <a:pPr algn="ctr"/>
+          </a:p>
+        </p:txBody>
+      </p:sp>
+      <p:sp>
+        <p:nvSpPr>
+          <p:cNvPr id="35" name="Rounded Rectangle 34"/>
+          <p:cNvSpPr/>
+          <p:nvPr/>
+        </p:nvSpPr>
+        <p:spPr>
+          <a:xfrm>
+            <a:off x="2971800" y="3529584"/>
+            <a:ext cx="2276856" cy="987552"/>
+          </a:xfrm>
+          <a:prstGeom prst="roundRect">
+            <a:avLst>
+              <a:gd name="adj" fmla="val 8000"/>
+            </a:avLst>
+          </a:prstGeom>
+          <a:solidFill>
+            <a:srgbClr val="FFFFFF"/>
+          </a:solidFill>
+          <a:ln w="12700">
+            <a:solidFill>
+              <a:srgbClr val="C2CBD0"/>
+            </a:solidFill>
+          </a:ln>
+          <a:effectLst/>
+        </p:spPr>
+        <p:style>
+          <a:lnRef idx="1">
+            <a:schemeClr val="accent1"/>
+          </a:lnRef>
+          <a:fillRef idx="3">
+            <a:schemeClr val="accent1"/>
+          </a:fillRef>
+          <a:effectRef idx="2">
+            <a:schemeClr val="accent1"/>
+          </a:effectRef>
+          <a:fontRef idx="minor">
+            <a:schemeClr val="lt1"/>
+          </a:fontRef>
+        </p:style>
+        <p:txBody>
+          <a:bodyPr rtlCol="0" anchor="ctr"/>
+          <a:lstStyle/>
+          <a:p>
+            <a:pPr algn="ctr"/>
+          </a:p>
+        </p:txBody>
+      </p:sp>
+      <p:sp>
+        <p:nvSpPr>
+          <p:cNvPr id="36" name="Rounded Rectangle 35"/>
+          <p:cNvSpPr/>
+          <p:nvPr/>
+        </p:nvSpPr>
+        <p:spPr>
+          <a:xfrm>
+            <a:off x="5303520" y="3529584"/>
+            <a:ext cx="1911095" cy="987552"/>
+          </a:xfrm>
+          <a:prstGeom prst="roundRect">
+            <a:avLst>
+              <a:gd name="adj" fmla="val 8000"/>
+            </a:avLst>
+          </a:prstGeom>
+          <a:solidFill>
+            <a:srgbClr val="FFFFFF"/>
+          </a:solidFill>
+          <a:ln w="12700">
+            <a:solidFill>
+              <a:srgbClr val="C2CBD0"/>
+            </a:solidFill>
+          </a:ln>
+          <a:effectLst/>
+        </p:spPr>
+        <p:style>
+          <a:lnRef idx="1">
+            <a:schemeClr val="accent1"/>
+          </a:lnRef>
+          <a:fillRef idx="3">
+            <a:schemeClr val="accent1"/>
+          </a:fillRef>
+          <a:effectRef idx="2">
+            <a:schemeClr val="accent1"/>
+          </a:effectRef>
+          <a:fontRef idx="minor">
+            <a:schemeClr val="lt1"/>
+          </a:fontRef>
+        </p:style>
+        <p:txBody>
+          <a:bodyPr rtlCol="0" anchor="ctr"/>
+          <a:lstStyle/>
+          <a:p>
+            <a:pPr algn="ctr"/>
+          </a:p>
+        </p:txBody>
+      </p:sp>
+      <p:sp>
+        <p:nvSpPr>
+          <p:cNvPr id="37" name="Rounded Rectangle 36"/>
+          <p:cNvSpPr/>
+          <p:nvPr/>
+        </p:nvSpPr>
+        <p:spPr>
+          <a:xfrm>
+            <a:off x="7269479" y="3529584"/>
+            <a:ext cx="1133856" cy="987552"/>
+          </a:xfrm>
+          <a:prstGeom prst="roundRect">
+            <a:avLst>
+              <a:gd name="adj" fmla="val 8000"/>
+            </a:avLst>
+          </a:prstGeom>
+          <a:solidFill>
+            <a:srgbClr val="FFFFFF"/>
+          </a:solidFill>
+          <a:ln w="12700">
+            <a:solidFill>
+              <a:srgbClr val="C2CBD0"/>
+            </a:solidFill>
+          </a:ln>
+          <a:effectLst/>
+        </p:spPr>
+        <p:style>
+          <a:lnRef idx="1">
+            <a:schemeClr val="accent1"/>
+          </a:lnRef>
+          <a:fillRef idx="3">
+            <a:schemeClr val="accent1"/>
+          </a:fillRef>
+          <a:effectRef idx="2">
+            <a:schemeClr val="accent1"/>
+          </a:effectRef>
+          <a:fontRef idx="minor">
+            <a:schemeClr val="lt1"/>
+          </a:fontRef>
+        </p:style>
+        <p:txBody>
+          <a:bodyPr rtlCol="0" anchor="ctr"/>
+          <a:lstStyle/>
+          <a:p>
+            <a:pPr algn="ctr"/>
+          </a:p>
+        </p:txBody>
+      </p:sp>
+      <p:sp>
+        <p:nvSpPr>
+          <p:cNvPr id="38" name="Rounded Rectangle 37"/>
+          <p:cNvSpPr/>
+          <p:nvPr/>
+        </p:nvSpPr>
+        <p:spPr>
+          <a:xfrm>
+            <a:off x="8458200" y="3529584"/>
+            <a:ext cx="3218688" cy="987552"/>
+          </a:xfrm>
+          <a:prstGeom prst="roundRect">
+            <a:avLst>
+              <a:gd name="adj" fmla="val 8000"/>
+            </a:avLst>
+          </a:prstGeom>
+          <a:solidFill>
+            <a:srgbClr val="FBEBEA"/>
+          </a:solidFill>
+          <a:ln w="12700">
+            <a:solidFill>
+              <a:srgbClr val="D9433B"/>
+            </a:solidFill>
+          </a:ln>
+          <a:effectLst/>
+        </p:spPr>
+        <p:style>
+          <a:lnRef idx="1">
+            <a:schemeClr val="accent1"/>
+          </a:lnRef>
+          <a:fillRef idx="3">
+            <a:schemeClr val="accent1"/>
+          </a:fillRef>
+          <a:effectRef idx="2">
+            <a:schemeClr val="accent1"/>
+          </a:effectRef>
+          <a:fontRef idx="minor">
+            <a:schemeClr val="lt1"/>
+          </a:fontRef>
+        </p:style>
+        <p:txBody>
+          <a:bodyPr rtlCol="0" anchor="ctr"/>
+          <a:lstStyle/>
+          <a:p>
+            <a:pPr algn="ctr"/>
+          </a:p>
+        </p:txBody>
+      </p:sp>
+      <p:sp>
+        <p:nvSpPr>
+          <p:cNvPr id="39" name="TextBox 38"/>
+          <p:cNvSpPr txBox="1"/>
+          <p:nvPr/>
+        </p:nvSpPr>
+        <p:spPr>
+          <a:xfrm>
+            <a:off x="566928" y="3657600"/>
+            <a:ext cx="2240280" cy="320040"/>
+          </a:xfrm>
+          <a:prstGeom prst="rect">
+            <a:avLst/>
+          </a:prstGeom>
+          <a:noFill/>
+        </p:spPr>
+        <p:txBody>
+          <a:bodyPr wrap="square" anchor="t" lIns="0" rIns="0" tIns="0" bIns="0">
+            <a:spAutoFit/>
+          </a:bodyPr>
+          <a:lstStyle/>
+          <a:p>
+            <a:pPr algn="l"/>
+            <a:r>
+              <a:rPr sz="1300" b="1">
+                <a:solidFill>
+                  <a:srgbClr val="D9433B"/>
+                </a:solidFill>
+                <a:latin typeface="Hiragino Sans"/>
+                <a:ea typeface="Hiragino Sans"/>
+                <a:cs typeface="Hiragino Sans"/>
+              </a:rPr>
+              <a:t>script要素の中</a:t>
+            </a:r>
+          </a:p>
+        </p:txBody>
+      </p:sp>
+      <p:sp>
+        <p:nvSpPr>
+          <p:cNvPr id="40" name="TextBox 39"/>
+          <p:cNvSpPr txBox="1"/>
+          <p:nvPr/>
+        </p:nvSpPr>
+        <p:spPr>
+          <a:xfrm>
+            <a:off x="566928" y="4032504"/>
+            <a:ext cx="2240280" cy="365760"/>
+          </a:xfrm>
+          <a:prstGeom prst="rect">
+            <a:avLst/>
+          </a:prstGeom>
+          <a:noFill/>
+        </p:spPr>
+        <p:txBody>
+          <a:bodyPr wrap="square" anchor="t" lIns="0" rIns="0" tIns="0" bIns="0">
+            <a:spAutoFit/>
+          </a:bodyPr>
+          <a:lstStyle/>
+          <a:p>
+            <a:pPr algn="l"/>
+            <a:r>
+              <a:rPr sz="1050" b="0">
+                <a:solidFill>
+                  <a:srgbClr val="24404D"/>
+                </a:solidFill>
+                <a:latin typeface="Menlo"/>
+                <a:ea typeface="Menlo"/>
+                <a:cs typeface="Menlo"/>
+              </a:rPr>
+              <a:t>&lt;script&gt;…{v}…&lt;/script&gt;</a:t>
+            </a:r>
+          </a:p>
+        </p:txBody>
+      </p:sp>
+      <p:sp>
+        <p:nvSpPr>
+          <p:cNvPr id="41" name="TextBox 40"/>
+          <p:cNvSpPr txBox="1"/>
+          <p:nvPr/>
+        </p:nvSpPr>
+        <p:spPr>
+          <a:xfrm>
+            <a:off x="3063240" y="3529584"/>
+            <a:ext cx="2093976" cy="987552"/>
+          </a:xfrm>
+          <a:prstGeom prst="rect">
+            <a:avLst/>
+          </a:prstGeom>
+          <a:noFill/>
+        </p:spPr>
+        <p:txBody>
+          <a:bodyPr wrap="square" anchor="ctr" lIns="0" rIns="0" tIns="0" bIns="0">
+            <a:spAutoFit/>
+          </a:bodyPr>
+          <a:lstStyle/>
+          <a:p>
+            <a:pPr algn="ctr"/>
+            <a:r>
+              <a:rPr sz="1100" b="0">
+                <a:solidFill>
+                  <a:srgbClr val="24404D"/>
+                </a:solidFill>
+                <a:latin typeface="Hiragino Sans"/>
+                <a:ea typeface="Hiragino Sans"/>
+                <a:cs typeface="Hiragino Sans"/>
+              </a:rPr>
+              <a:t>Script data state</a:t>
+            </a:r>
+          </a:p>
+        </p:txBody>
+      </p:sp>
+      <p:sp>
+        <p:nvSpPr>
+          <p:cNvPr id="42" name="TextBox 41"/>
+          <p:cNvSpPr txBox="1"/>
+          <p:nvPr/>
+        </p:nvSpPr>
+        <p:spPr>
+          <a:xfrm>
+            <a:off x="5303520" y="3529584"/>
+            <a:ext cx="1911095" cy="987552"/>
+          </a:xfrm>
+          <a:prstGeom prst="rect">
+            <a:avLst/>
+          </a:prstGeom>
+          <a:noFill/>
+        </p:spPr>
+        <p:txBody>
+          <a:bodyPr wrap="square" anchor="ctr" lIns="0" rIns="0" tIns="0" bIns="0">
+            <a:spAutoFit/>
+          </a:bodyPr>
+          <a:lstStyle/>
+          <a:p>
+            <a:pPr algn="ctr"/>
+            <a:r>
+              <a:rPr sz="1300" b="1">
+                <a:solidFill>
+                  <a:srgbClr val="D9433B"/>
+                </a:solidFill>
+                <a:latin typeface="Menlo"/>
+                <a:ea typeface="Menlo"/>
+                <a:cs typeface="Menlo"/>
+              </a:rPr>
+              <a:t>&lt;/script</a:t>
+            </a:r>
+          </a:p>
+        </p:txBody>
+      </p:sp>
+      <p:sp>
+        <p:nvSpPr>
+          <p:cNvPr id="43" name="TextBox 42"/>
+          <p:cNvSpPr txBox="1"/>
+          <p:nvPr/>
+        </p:nvSpPr>
+        <p:spPr>
+          <a:xfrm>
+            <a:off x="7269479" y="3529584"/>
+            <a:ext cx="1133856" cy="987552"/>
+          </a:xfrm>
+          <a:prstGeom prst="rect">
+            <a:avLst/>
+          </a:prstGeom>
+          <a:noFill/>
+        </p:spPr>
+        <p:txBody>
+          <a:bodyPr wrap="square" anchor="ctr" lIns="0" rIns="0" tIns="0" bIns="0">
+            <a:spAutoFit/>
+          </a:bodyPr>
+          <a:lstStyle/>
+          <a:p>
+            <a:pPr algn="ctr"/>
+            <a:r>
+              <a:rPr sz="1100" b="1">
+                <a:solidFill>
+                  <a:srgbClr val="D9433B"/>
+                </a:solidFill>
+                <a:latin typeface="Hiragino Sans"/>
+                <a:ea typeface="Hiragino Sans"/>
+                <a:cs typeface="Hiragino Sans"/>
+              </a:rPr>
+              <a:t>解釈されない</a:t>
+            </a:r>
+          </a:p>
+        </p:txBody>
+      </p:sp>
+      <p:sp>
+        <p:nvSpPr>
+          <p:cNvPr id="44" name="TextBox 43"/>
+          <p:cNvSpPr txBox="1"/>
+          <p:nvPr/>
+        </p:nvSpPr>
+        <p:spPr>
+          <a:xfrm>
+            <a:off x="8595360" y="3529584"/>
+            <a:ext cx="2944368" cy="987552"/>
+          </a:xfrm>
+          <a:prstGeom prst="rect">
+            <a:avLst/>
+          </a:prstGeom>
+          <a:noFill/>
+        </p:spPr>
+        <p:txBody>
+          <a:bodyPr wrap="square" anchor="ctr" lIns="0" rIns="0" tIns="0" bIns="0">
+            <a:spAutoFit/>
+          </a:bodyPr>
+          <a:lstStyle/>
+          <a:p>
+            <a:pPr algn="l"/>
+            <a:r>
+              <a:rPr sz="1150" b="1">
+                <a:solidFill>
+                  <a:srgbClr val="D9433B"/>
+                </a:solidFill>
+                <a:latin typeface="Hiragino Sans"/>
+                <a:ea typeface="Hiragino Sans"/>
+                <a:cs typeface="Hiragino Sans"/>
+              </a:rPr>
+              <a:t>HTMLエスケープは効かない</a:t>
+            </a:r>
+          </a:p>
+          <a:p>
+            <a:pPr algn="l"/>
+            <a:r>
+              <a:rPr sz="1150" b="1">
+                <a:solidFill>
+                  <a:srgbClr val="D9433B"/>
+                </a:solidFill>
+                <a:latin typeface="Hiragino Sans"/>
+                <a:ea typeface="Hiragino Sans"/>
+                <a:cs typeface="Hiragino Sans"/>
+              </a:rPr>
+              <a:t>JSONにして &lt; を \u003c にする</a:t>
+            </a:r>
+          </a:p>
+        </p:txBody>
+      </p:sp>
+      <p:sp>
+        <p:nvSpPr>
+          <p:cNvPr id="45" name="Rounded Rectangle 44"/>
+          <p:cNvSpPr/>
+          <p:nvPr/>
+        </p:nvSpPr>
+        <p:spPr>
+          <a:xfrm>
+            <a:off x="457200" y="4608576"/>
+            <a:ext cx="2459736" cy="987552"/>
+          </a:xfrm>
+          <a:prstGeom prst="roundRect">
+            <a:avLst>
+              <a:gd name="adj" fmla="val 8000"/>
+            </a:avLst>
+          </a:prstGeom>
+          <a:solidFill>
+            <a:srgbClr val="FBEBEA"/>
+          </a:solidFill>
+          <a:ln w="12700">
+            <a:solidFill>
+              <a:srgbClr val="D9433B"/>
+            </a:solidFill>
+          </a:ln>
+          <a:effectLst/>
+        </p:spPr>
+        <p:style>
+          <a:lnRef idx="1">
+            <a:schemeClr val="accent1"/>
+          </a:lnRef>
+          <a:fillRef idx="3">
+            <a:schemeClr val="accent1"/>
+          </a:fillRef>
+          <a:effectRef idx="2">
+            <a:schemeClr val="accent1"/>
+          </a:effectRef>
+          <a:fontRef idx="minor">
+            <a:schemeClr val="lt1"/>
+          </a:fontRef>
+        </p:style>
+        <p:txBody>
+          <a:bodyPr rtlCol="0" anchor="ctr"/>
+          <a:lstStyle/>
+          <a:p>
+            <a:pPr algn="ctr"/>
+          </a:p>
+        </p:txBody>
+      </p:sp>
+      <p:sp>
+        <p:nvSpPr>
+          <p:cNvPr id="46" name="Rounded Rectangle 45"/>
+          <p:cNvSpPr/>
+          <p:nvPr/>
+        </p:nvSpPr>
+        <p:spPr>
+          <a:xfrm>
+            <a:off x="2971800" y="4608576"/>
+            <a:ext cx="2276856" cy="987552"/>
+          </a:xfrm>
+          <a:prstGeom prst="roundRect">
+            <a:avLst>
+              <a:gd name="adj" fmla="val 8000"/>
+            </a:avLst>
+          </a:prstGeom>
+          <a:solidFill>
+            <a:srgbClr val="FFFFFF"/>
+          </a:solidFill>
+          <a:ln w="12700">
+            <a:solidFill>
+              <a:srgbClr val="C2CBD0"/>
+            </a:solidFill>
+          </a:ln>
+          <a:effectLst/>
+        </p:spPr>
+        <p:style>
+          <a:lnRef idx="1">
+            <a:schemeClr val="accent1"/>
+          </a:lnRef>
+          <a:fillRef idx="3">
+            <a:schemeClr val="accent1"/>
+          </a:fillRef>
+          <a:effectRef idx="2">
+            <a:schemeClr val="accent1"/>
+          </a:effectRef>
+          <a:fontRef idx="minor">
+            <a:schemeClr val="lt1"/>
+          </a:fontRef>
+        </p:style>
+        <p:txBody>
+          <a:bodyPr rtlCol="0" anchor="ctr"/>
+          <a:lstStyle/>
+          <a:p>
+            <a:pPr algn="ctr"/>
+          </a:p>
+        </p:txBody>
+      </p:sp>
+      <p:sp>
+        <p:nvSpPr>
+          <p:cNvPr id="47" name="Rounded Rectangle 46"/>
+          <p:cNvSpPr/>
+          <p:nvPr/>
+        </p:nvSpPr>
+        <p:spPr>
+          <a:xfrm>
+            <a:off x="5303520" y="4608576"/>
+            <a:ext cx="1911095" cy="987552"/>
+          </a:xfrm>
+          <a:prstGeom prst="roundRect">
+            <a:avLst>
+              <a:gd name="adj" fmla="val 8000"/>
+            </a:avLst>
+          </a:prstGeom>
+          <a:solidFill>
+            <a:srgbClr val="FFFFFF"/>
+          </a:solidFill>
+          <a:ln w="12700">
+            <a:solidFill>
+              <a:srgbClr val="C2CBD0"/>
+            </a:solidFill>
+          </a:ln>
+          <a:effectLst/>
+        </p:spPr>
+        <p:style>
+          <a:lnRef idx="1">
+            <a:schemeClr val="accent1"/>
+          </a:lnRef>
+          <a:fillRef idx="3">
+            <a:schemeClr val="accent1"/>
+          </a:fillRef>
+          <a:effectRef idx="2">
+            <a:schemeClr val="accent1"/>
+          </a:effectRef>
+          <a:fontRef idx="minor">
+            <a:schemeClr val="lt1"/>
+          </a:fontRef>
+        </p:style>
+        <p:txBody>
+          <a:bodyPr rtlCol="0" anchor="ctr"/>
+          <a:lstStyle/>
+          <a:p>
+            <a:pPr algn="ctr"/>
+          </a:p>
+        </p:txBody>
+      </p:sp>
+      <p:sp>
+        <p:nvSpPr>
+          <p:cNvPr id="48" name="Rounded Rectangle 47"/>
+          <p:cNvSpPr/>
+          <p:nvPr/>
+        </p:nvSpPr>
+        <p:spPr>
+          <a:xfrm>
+            <a:off x="7269479" y="4608576"/>
+            <a:ext cx="1133856" cy="987552"/>
+          </a:xfrm>
+          <a:prstGeom prst="roundRect">
+            <a:avLst>
+              <a:gd name="adj" fmla="val 8000"/>
+            </a:avLst>
+          </a:prstGeom>
+          <a:solidFill>
+            <a:srgbClr val="FFFFFF"/>
+          </a:solidFill>
+          <a:ln w="12700">
+            <a:solidFill>
+              <a:srgbClr val="C2CBD0"/>
+            </a:solidFill>
+          </a:ln>
+          <a:effectLst/>
+        </p:spPr>
+        <p:style>
+          <a:lnRef idx="1">
+            <a:schemeClr val="accent1"/>
+          </a:lnRef>
+          <a:fillRef idx="3">
+            <a:schemeClr val="accent1"/>
+          </a:fillRef>
+          <a:effectRef idx="2">
+            <a:schemeClr val="accent1"/>
+          </a:effectRef>
+          <a:fontRef idx="minor">
+            <a:schemeClr val="lt1"/>
+          </a:fontRef>
+        </p:style>
+        <p:txBody>
+          <a:bodyPr rtlCol="0" anchor="ctr"/>
+          <a:lstStyle/>
+          <a:p>
+            <a:pPr algn="ctr"/>
+          </a:p>
+        </p:txBody>
+      </p:sp>
+      <p:sp>
+        <p:nvSpPr>
+          <p:cNvPr id="49" name="Rounded Rectangle 48"/>
+          <p:cNvSpPr/>
+          <p:nvPr/>
+        </p:nvSpPr>
+        <p:spPr>
+          <a:xfrm>
+            <a:off x="8458200" y="4608576"/>
+            <a:ext cx="3218688" cy="987552"/>
+          </a:xfrm>
+          <a:prstGeom prst="roundRect">
+            <a:avLst>
+              <a:gd name="adj" fmla="val 8000"/>
+            </a:avLst>
+          </a:prstGeom>
+          <a:solidFill>
+            <a:srgbClr val="FBEBEA"/>
+          </a:solidFill>
+          <a:ln w="12700">
+            <a:solidFill>
+              <a:srgbClr val="D9433B"/>
+            </a:solidFill>
+          </a:ln>
+          <a:effectLst/>
+        </p:spPr>
+        <p:style>
+          <a:lnRef idx="1">
+            <a:schemeClr val="accent1"/>
+          </a:lnRef>
+          <a:fillRef idx="3">
+            <a:schemeClr val="accent1"/>
+          </a:fillRef>
+          <a:effectRef idx="2">
+            <a:schemeClr val="accent1"/>
+          </a:effectRef>
+          <a:fontRef idx="minor">
+            <a:schemeClr val="lt1"/>
+          </a:fontRef>
+        </p:style>
+        <p:txBody>
+          <a:bodyPr rtlCol="0" anchor="ctr"/>
+          <a:lstStyle/>
+          <a:p>
+            <a:pPr algn="ctr"/>
+          </a:p>
+        </p:txBody>
+      </p:sp>
+      <p:sp>
+        <p:nvSpPr>
+          <p:cNvPr id="50" name="TextBox 49"/>
+          <p:cNvSpPr txBox="1"/>
+          <p:nvPr/>
+        </p:nvSpPr>
+        <p:spPr>
+          <a:xfrm>
+            <a:off x="566928" y="4736592"/>
+            <a:ext cx="2240280" cy="320040"/>
+          </a:xfrm>
+          <a:prstGeom prst="rect">
+            <a:avLst/>
+          </a:prstGeom>
+          <a:noFill/>
+        </p:spPr>
+        <p:txBody>
+          <a:bodyPr wrap="square" anchor="t" lIns="0" rIns="0" tIns="0" bIns="0">
+            <a:spAutoFit/>
+          </a:bodyPr>
+          <a:lstStyle/>
+          <a:p>
+            <a:pPr algn="l"/>
+            <a:r>
+              <a:rPr sz="1300" b="1">
+                <a:solidFill>
+                  <a:srgbClr val="D9433B"/>
+                </a:solidFill>
+                <a:latin typeface="Hiragino Sans"/>
+                <a:ea typeface="Hiragino Sans"/>
+                <a:cs typeface="Hiragino Sans"/>
+              </a:rPr>
+              <a:t>URLを入れる属性</a:t>
+            </a:r>
+          </a:p>
+        </p:txBody>
+      </p:sp>
+      <p:sp>
+        <p:nvSpPr>
+          <p:cNvPr id="51" name="TextBox 50"/>
+          <p:cNvSpPr txBox="1"/>
+          <p:nvPr/>
+        </p:nvSpPr>
+        <p:spPr>
+          <a:xfrm>
+            <a:off x="566928" y="5111496"/>
+            <a:ext cx="2240280" cy="365760"/>
+          </a:xfrm>
+          <a:prstGeom prst="rect">
+            <a:avLst/>
+          </a:prstGeom>
+          <a:noFill/>
+        </p:spPr>
+        <p:txBody>
+          <a:bodyPr wrap="square" anchor="t" lIns="0" rIns="0" tIns="0" bIns="0">
+            <a:spAutoFit/>
+          </a:bodyPr>
+          <a:lstStyle/>
+          <a:p>
+            <a:pPr algn="l"/>
+            <a:r>
+              <a:rPr sz="1050" b="0">
+                <a:solidFill>
+                  <a:srgbClr val="24404D"/>
+                </a:solidFill>
+                <a:latin typeface="Menlo"/>
+                <a:ea typeface="Menlo"/>
+                <a:cs typeface="Menlo"/>
+              </a:rPr>
+              <a:t>href="{v}"</a:t>
+            </a:r>
+          </a:p>
+        </p:txBody>
+      </p:sp>
+      <p:sp>
+        <p:nvSpPr>
+          <p:cNvPr id="52" name="TextBox 51"/>
+          <p:cNvSpPr txBox="1"/>
+          <p:nvPr/>
+        </p:nvSpPr>
+        <p:spPr>
+          <a:xfrm>
+            <a:off x="3063240" y="4608576"/>
+            <a:ext cx="2093976" cy="987552"/>
+          </a:xfrm>
+          <a:prstGeom prst="rect">
+            <a:avLst/>
+          </a:prstGeom>
+          <a:noFill/>
+        </p:spPr>
+        <p:txBody>
+          <a:bodyPr wrap="square" anchor="ctr" lIns="0" rIns="0" tIns="0" bIns="0">
+            <a:spAutoFit/>
+          </a:bodyPr>
+          <a:lstStyle/>
+          <a:p>
+            <a:pPr algn="ctr"/>
+            <a:r>
+              <a:rPr sz="1100" b="0">
+                <a:solidFill>
+                  <a:srgbClr val="24404D"/>
+                </a:solidFill>
+                <a:latin typeface="Hiragino Sans"/>
+                <a:ea typeface="Hiragino Sans"/>
+                <a:cs typeface="Hiragino Sans"/>
+              </a:rPr>
+              <a:t>Attribute value state</a:t>
+            </a:r>
+          </a:p>
+          <a:p>
+            <a:pPr algn="ctr"/>
+            <a:r>
+              <a:rPr sz="1100" b="0">
+                <a:solidFill>
+                  <a:srgbClr val="24404D"/>
+                </a:solidFill>
+                <a:latin typeface="Hiragino Sans"/>
+                <a:ea typeface="Hiragino Sans"/>
+                <a:cs typeface="Hiragino Sans"/>
+              </a:rPr>
+              <a:t>→ その後URLとして解釈</a:t>
+            </a:r>
+          </a:p>
+        </p:txBody>
+      </p:sp>
+      <p:sp>
+        <p:nvSpPr>
+          <p:cNvPr id="53" name="TextBox 52"/>
+          <p:cNvSpPr txBox="1"/>
+          <p:nvPr/>
+        </p:nvSpPr>
+        <p:spPr>
+          <a:xfrm>
+            <a:off x="5303520" y="4608576"/>
+            <a:ext cx="1911095" cy="987552"/>
+          </a:xfrm>
+          <a:prstGeom prst="rect">
+            <a:avLst/>
+          </a:prstGeom>
+          <a:noFill/>
+        </p:spPr>
+        <p:txBody>
+          <a:bodyPr wrap="square" anchor="ctr" lIns="0" rIns="0" tIns="0" bIns="0">
+            <a:spAutoFit/>
+          </a:bodyPr>
+          <a:lstStyle/>
+          <a:p>
+            <a:pPr algn="ctr"/>
+            <a:r>
+              <a:rPr sz="1300" b="1">
+                <a:solidFill>
+                  <a:srgbClr val="D9433B"/>
+                </a:solidFill>
+                <a:latin typeface="Hiragino Sans"/>
+                <a:ea typeface="Hiragino Sans"/>
+                <a:cs typeface="Hiragino Sans"/>
+              </a:rPr>
+              <a:t>（抜け出さない）</a:t>
+            </a:r>
+          </a:p>
+        </p:txBody>
+      </p:sp>
+      <p:sp>
+        <p:nvSpPr>
+          <p:cNvPr id="54" name="TextBox 53"/>
+          <p:cNvSpPr txBox="1"/>
+          <p:nvPr/>
+        </p:nvSpPr>
+        <p:spPr>
+          <a:xfrm>
+            <a:off x="7269479" y="4608576"/>
+            <a:ext cx="1133856" cy="987552"/>
+          </a:xfrm>
+          <a:prstGeom prst="rect">
+            <a:avLst/>
+          </a:prstGeom>
+          <a:noFill/>
+        </p:spPr>
+        <p:txBody>
+          <a:bodyPr wrap="square" anchor="ctr" lIns="0" rIns="0" tIns="0" bIns="0">
+            <a:spAutoFit/>
+          </a:bodyPr>
+          <a:lstStyle/>
+          <a:p>
+            <a:pPr algn="ctr"/>
+            <a:r>
+              <a:rPr sz="1100" b="0">
+                <a:solidFill>
+                  <a:srgbClr val="24404D"/>
+                </a:solidFill>
+                <a:latin typeface="Hiragino Sans"/>
+                <a:ea typeface="Hiragino Sans"/>
+                <a:cs typeface="Hiragino Sans"/>
+              </a:rPr>
+              <a:t>解釈される</a:t>
+            </a:r>
+          </a:p>
+        </p:txBody>
+      </p:sp>
+      <p:sp>
+        <p:nvSpPr>
+          <p:cNvPr id="55" name="TextBox 54"/>
+          <p:cNvSpPr txBox="1"/>
+          <p:nvPr/>
+        </p:nvSpPr>
+        <p:spPr>
+          <a:xfrm>
+            <a:off x="8595360" y="4608576"/>
+            <a:ext cx="2944368" cy="987552"/>
+          </a:xfrm>
+          <a:prstGeom prst="rect">
+            <a:avLst/>
+          </a:prstGeom>
+          <a:noFill/>
+        </p:spPr>
+        <p:txBody>
+          <a:bodyPr wrap="square" anchor="ctr" lIns="0" rIns="0" tIns="0" bIns="0">
+            <a:spAutoFit/>
+          </a:bodyPr>
+          <a:lstStyle/>
+          <a:p>
+            <a:pPr algn="l"/>
+            <a:r>
+              <a:rPr sz="1150" b="1">
+                <a:solidFill>
+                  <a:srgbClr val="D9433B"/>
+                </a:solidFill>
+                <a:latin typeface="Hiragino Sans"/>
+                <a:ea typeface="Hiragino Sans"/>
+                <a:cs typeface="Hiragino Sans"/>
+              </a:rPr>
+              <a:t>HTMLエスケープだけでは足りない</a:t>
+            </a:r>
+          </a:p>
+          <a:p>
+            <a:pPr algn="l"/>
+            <a:r>
+              <a:rPr sz="1150" b="1">
+                <a:solidFill>
+                  <a:srgbClr val="D9433B"/>
+                </a:solidFill>
+                <a:latin typeface="Hiragino Sans"/>
+                <a:ea typeface="Hiragino Sans"/>
+                <a:cs typeface="Hiragino Sans"/>
+              </a:rPr>
+              <a:t>スキームを http / https に限定</a:t>
+            </a:r>
+          </a:p>
+        </p:txBody>
+      </p:sp>
+      <p:sp>
+        <p:nvSpPr>
+          <p:cNvPr id="56" name="TextBox 55"/>
+          <p:cNvSpPr txBox="1"/>
+          <p:nvPr/>
+        </p:nvSpPr>
+        <p:spPr>
+          <a:xfrm>
+            <a:off x="457200" y="5760720"/>
+            <a:ext cx="11247120" cy="274320"/>
+          </a:xfrm>
+          <a:prstGeom prst="rect">
+            <a:avLst/>
+          </a:prstGeom>
+          <a:noFill/>
+        </p:spPr>
+        <p:txBody>
+          <a:bodyPr wrap="square" anchor="t" lIns="0" rIns="0" tIns="0" bIns="0">
+            <a:spAutoFit/>
+          </a:bodyPr>
+          <a:lstStyle/>
+          <a:p>
+            <a:pPr algn="l"/>
+            <a:r>
+              <a:rPr sz="1000" b="0">
+                <a:solidFill>
+                  <a:srgbClr val="5E7682"/>
+                </a:solidFill>
+                <a:latin typeface="Hiragino Sans"/>
+                <a:ea typeface="Hiragino Sans"/>
+                <a:cs typeface="Hiragino Sans"/>
+              </a:rPr>
+              <a:t>参考：HTML Living Standard 13.2.5.1 Data state / 13.2.5.4 Script data state / 13.2.5.36 Attribute value (double-quoted) state</a:t>
             </a:r>
           </a:p>
         </p:txBody>

--- a/deep-dive/drafts/no.1-xss/image/HTMLパーサ図.pptx
+++ b/deep-dive/drafts/no.1-xss/image/HTMLパーサ図.pptx
@@ -5,6 +5,8 @@
     <p:sldMasterId id="2147483648" r:id="rId1"/>
   </p:sldMasterIdLst>
   <p:sldIdLst>
+    <p:sldId id="261" r:id="rId12"/>
+    <p:sldId id="262" r:id="rId13"/>
     <p:sldId id="256" r:id="rId7"/>
     <p:sldId id="257" r:id="rId8"/>
     <p:sldId id="258" r:id="rId9"/>
@@ -12611,6 +12613,3922 @@
                 <a:cs typeface="Hiragino Sans"/>
               </a:rPr>
               <a:t>参考：HTML Living Standard 13.2.5.1 Data state / 13.2.5.4 Script data state / 13.2.5.36 Attribute value (double-quoted) state</a:t>
+            </a:r>
+          </a:p>
+        </p:txBody>
+      </p:sp>
+    </p:spTree>
+  </p:cSld>
+  <p:clrMapOvr>
+    <a:masterClrMapping/>
+  </p:clrMapOvr>
+</p:sld>
+</file>
+
+<file path=ppt/slides/slide6.xml><?xml version="1.0" encoding="utf-8"?>
+<p:sld xmlns:a="http://schemas.openxmlformats.org/drawingml/2006/main" xmlns:p="http://schemas.openxmlformats.org/presentationml/2006/main" xmlns:r="http://schemas.openxmlformats.org/officeDocument/2006/relationships">
+  <p:cSld>
+    <p:spTree>
+      <p:nvGrpSpPr>
+        <p:cNvPr id="1" name=""/>
+        <p:cNvGrpSpPr/>
+        <p:nvPr/>
+      </p:nvGrpSpPr>
+      <p:grpSpPr/>
+      <p:sp>
+        <p:nvSpPr>
+          <p:cNvPr id="2" name="Rounded Rectangle 1"/>
+          <p:cNvSpPr/>
+          <p:nvPr/>
+        </p:nvSpPr>
+        <p:spPr>
+          <a:xfrm>
+            <a:off x="914400" y="717804"/>
+            <a:ext cx="2633472" cy="457200"/>
+          </a:xfrm>
+          <a:prstGeom prst="roundRect">
+            <a:avLst>
+              <a:gd name="adj" fmla="val 15000"/>
+            </a:avLst>
+          </a:prstGeom>
+          <a:solidFill>
+            <a:srgbClr val="D9433B"/>
+          </a:solidFill>
+          <a:ln>
+            <a:noFill/>
+          </a:ln>
+          <a:effectLst/>
+        </p:spPr>
+        <p:style>
+          <a:lnRef idx="1">
+            <a:schemeClr val="accent1"/>
+          </a:lnRef>
+          <a:fillRef idx="3">
+            <a:schemeClr val="accent1"/>
+          </a:fillRef>
+          <a:effectRef idx="2">
+            <a:schemeClr val="accent1"/>
+          </a:effectRef>
+          <a:fontRef idx="minor">
+            <a:schemeClr val="lt1"/>
+          </a:fontRef>
+        </p:style>
+        <p:txBody>
+          <a:bodyPr rtlCol="0" anchor="ctr"/>
+          <a:lstStyle/>
+          <a:p>
+            <a:pPr algn="ctr"/>
+          </a:p>
+        </p:txBody>
+      </p:sp>
+      <p:sp>
+        <p:nvSpPr>
+          <p:cNvPr id="3" name="TextBox 2"/>
+          <p:cNvSpPr txBox="1"/>
+          <p:nvPr/>
+        </p:nvSpPr>
+        <p:spPr>
+          <a:xfrm>
+            <a:off x="914400" y="717804"/>
+            <a:ext cx="2633472" cy="457200"/>
+          </a:xfrm>
+          <a:prstGeom prst="rect">
+            <a:avLst/>
+          </a:prstGeom>
+          <a:noFill/>
+        </p:spPr>
+        <p:txBody>
+          <a:bodyPr wrap="square" anchor="ctr" lIns="0" rIns="0" tIns="0" bIns="0">
+            <a:spAutoFit/>
+          </a:bodyPr>
+          <a:lstStyle/>
+          <a:p>
+            <a:pPr algn="ctr"/>
+            <a:r>
+              <a:rPr sz="1300" b="1">
+                <a:solidFill>
+                  <a:srgbClr val="FFFFFF"/>
+                </a:solidFill>
+                <a:latin typeface="Hiragino Sans"/>
+                <a:ea typeface="Hiragino Sans"/>
+                <a:cs typeface="Hiragino Sans"/>
+              </a:rPr>
+              <a:t>攻撃者</a:t>
+            </a:r>
+          </a:p>
+        </p:txBody>
+      </p:sp>
+      <p:sp>
+        <p:nvSpPr>
+          <p:cNvPr id="4" name="Rounded Rectangle 3"/>
+          <p:cNvSpPr/>
+          <p:nvPr/>
+        </p:nvSpPr>
+        <p:spPr>
+          <a:xfrm>
+            <a:off x="3639312" y="717804"/>
+            <a:ext cx="2633472" cy="457200"/>
+          </a:xfrm>
+          <a:prstGeom prst="roundRect">
+            <a:avLst>
+              <a:gd name="adj" fmla="val 15000"/>
+            </a:avLst>
+          </a:prstGeom>
+          <a:solidFill>
+            <a:srgbClr val="0E7C72"/>
+          </a:solidFill>
+          <a:ln>
+            <a:noFill/>
+          </a:ln>
+          <a:effectLst/>
+        </p:spPr>
+        <p:style>
+          <a:lnRef idx="1">
+            <a:schemeClr val="accent1"/>
+          </a:lnRef>
+          <a:fillRef idx="3">
+            <a:schemeClr val="accent1"/>
+          </a:fillRef>
+          <a:effectRef idx="2">
+            <a:schemeClr val="accent1"/>
+          </a:effectRef>
+          <a:fontRef idx="minor">
+            <a:schemeClr val="lt1"/>
+          </a:fontRef>
+        </p:style>
+        <p:txBody>
+          <a:bodyPr rtlCol="0" anchor="ctr"/>
+          <a:lstStyle/>
+          <a:p>
+            <a:pPr algn="ctr"/>
+          </a:p>
+        </p:txBody>
+      </p:sp>
+      <p:sp>
+        <p:nvSpPr>
+          <p:cNvPr id="5" name="TextBox 4"/>
+          <p:cNvSpPr txBox="1"/>
+          <p:nvPr/>
+        </p:nvSpPr>
+        <p:spPr>
+          <a:xfrm>
+            <a:off x="3639312" y="717804"/>
+            <a:ext cx="2633472" cy="457200"/>
+          </a:xfrm>
+          <a:prstGeom prst="rect">
+            <a:avLst/>
+          </a:prstGeom>
+          <a:noFill/>
+        </p:spPr>
+        <p:txBody>
+          <a:bodyPr wrap="square" anchor="ctr" lIns="0" rIns="0" tIns="0" bIns="0">
+            <a:spAutoFit/>
+          </a:bodyPr>
+          <a:lstStyle/>
+          <a:p>
+            <a:pPr algn="ctr"/>
+            <a:r>
+              <a:rPr sz="1300" b="1">
+                <a:solidFill>
+                  <a:srgbClr val="FFFFFF"/>
+                </a:solidFill>
+                <a:latin typeface="Hiragino Sans"/>
+                <a:ea typeface="Hiragino Sans"/>
+                <a:cs typeface="Hiragino Sans"/>
+              </a:rPr>
+              <a:t>Webアプリ（サーバ）</a:t>
+            </a:r>
+          </a:p>
+        </p:txBody>
+      </p:sp>
+      <p:sp>
+        <p:nvSpPr>
+          <p:cNvPr id="6" name="Rounded Rectangle 5"/>
+          <p:cNvSpPr/>
+          <p:nvPr/>
+        </p:nvSpPr>
+        <p:spPr>
+          <a:xfrm>
+            <a:off x="6364224" y="717804"/>
+            <a:ext cx="2633472" cy="457200"/>
+          </a:xfrm>
+          <a:prstGeom prst="roundRect">
+            <a:avLst>
+              <a:gd name="adj" fmla="val 15000"/>
+            </a:avLst>
+          </a:prstGeom>
+          <a:solidFill>
+            <a:srgbClr val="24404D"/>
+          </a:solidFill>
+          <a:ln>
+            <a:noFill/>
+          </a:ln>
+          <a:effectLst/>
+        </p:spPr>
+        <p:style>
+          <a:lnRef idx="1">
+            <a:schemeClr val="accent1"/>
+          </a:lnRef>
+          <a:fillRef idx="3">
+            <a:schemeClr val="accent1"/>
+          </a:fillRef>
+          <a:effectRef idx="2">
+            <a:schemeClr val="accent1"/>
+          </a:effectRef>
+          <a:fontRef idx="minor">
+            <a:schemeClr val="lt1"/>
+          </a:fontRef>
+        </p:style>
+        <p:txBody>
+          <a:bodyPr rtlCol="0" anchor="ctr"/>
+          <a:lstStyle/>
+          <a:p>
+            <a:pPr algn="ctr"/>
+          </a:p>
+        </p:txBody>
+      </p:sp>
+      <p:sp>
+        <p:nvSpPr>
+          <p:cNvPr id="7" name="TextBox 6"/>
+          <p:cNvSpPr txBox="1"/>
+          <p:nvPr/>
+        </p:nvSpPr>
+        <p:spPr>
+          <a:xfrm>
+            <a:off x="6364224" y="717804"/>
+            <a:ext cx="2633472" cy="457200"/>
+          </a:xfrm>
+          <a:prstGeom prst="rect">
+            <a:avLst/>
+          </a:prstGeom>
+          <a:noFill/>
+        </p:spPr>
+        <p:txBody>
+          <a:bodyPr wrap="square" anchor="ctr" lIns="0" rIns="0" tIns="0" bIns="0">
+            <a:spAutoFit/>
+          </a:bodyPr>
+          <a:lstStyle/>
+          <a:p>
+            <a:pPr algn="ctr"/>
+            <a:r>
+              <a:rPr sz="1300" b="1">
+                <a:solidFill>
+                  <a:srgbClr val="FFFFFF"/>
+                </a:solidFill>
+                <a:latin typeface="Hiragino Sans"/>
+                <a:ea typeface="Hiragino Sans"/>
+                <a:cs typeface="Hiragino Sans"/>
+              </a:rPr>
+              <a:t>被害者のブラウザの中</a:t>
+            </a:r>
+          </a:p>
+        </p:txBody>
+      </p:sp>
+      <p:sp>
+        <p:nvSpPr>
+          <p:cNvPr id="8" name="Rounded Rectangle 7"/>
+          <p:cNvSpPr/>
+          <p:nvPr/>
+        </p:nvSpPr>
+        <p:spPr>
+          <a:xfrm>
+            <a:off x="9089136" y="717804"/>
+            <a:ext cx="2633472" cy="457200"/>
+          </a:xfrm>
+          <a:prstGeom prst="roundRect">
+            <a:avLst>
+              <a:gd name="adj" fmla="val 15000"/>
+            </a:avLst>
+          </a:prstGeom>
+          <a:solidFill>
+            <a:srgbClr val="F08A24"/>
+          </a:solidFill>
+          <a:ln>
+            <a:noFill/>
+          </a:ln>
+          <a:effectLst/>
+        </p:spPr>
+        <p:style>
+          <a:lnRef idx="1">
+            <a:schemeClr val="accent1"/>
+          </a:lnRef>
+          <a:fillRef idx="3">
+            <a:schemeClr val="accent1"/>
+          </a:fillRef>
+          <a:effectRef idx="2">
+            <a:schemeClr val="accent1"/>
+          </a:effectRef>
+          <a:fontRef idx="minor">
+            <a:schemeClr val="lt1"/>
+          </a:fontRef>
+        </p:style>
+        <p:txBody>
+          <a:bodyPr rtlCol="0" anchor="ctr"/>
+          <a:lstStyle/>
+          <a:p>
+            <a:pPr algn="ctr"/>
+          </a:p>
+        </p:txBody>
+      </p:sp>
+      <p:sp>
+        <p:nvSpPr>
+          <p:cNvPr id="9" name="TextBox 8"/>
+          <p:cNvSpPr txBox="1"/>
+          <p:nvPr/>
+        </p:nvSpPr>
+        <p:spPr>
+          <a:xfrm>
+            <a:off x="9089136" y="717804"/>
+            <a:ext cx="2633472" cy="457200"/>
+          </a:xfrm>
+          <a:prstGeom prst="rect">
+            <a:avLst/>
+          </a:prstGeom>
+          <a:noFill/>
+        </p:spPr>
+        <p:txBody>
+          <a:bodyPr wrap="square" anchor="ctr" lIns="0" rIns="0" tIns="0" bIns="0">
+            <a:spAutoFit/>
+          </a:bodyPr>
+          <a:lstStyle/>
+          <a:p>
+            <a:pPr algn="ctr"/>
+            <a:r>
+              <a:rPr sz="1300" b="1">
+                <a:solidFill>
+                  <a:srgbClr val="FFFFFF"/>
+                </a:solidFill>
+                <a:latin typeface="Hiragino Sans"/>
+                <a:ea typeface="Hiragino Sans"/>
+                <a:cs typeface="Hiragino Sans"/>
+              </a:rPr>
+              <a:t>被害者に見えていること</a:t>
+            </a:r>
+          </a:p>
+        </p:txBody>
+      </p:sp>
+      <p:sp>
+        <p:nvSpPr>
+          <p:cNvPr id="10" name="Rounded Rectangle 9"/>
+          <p:cNvSpPr/>
+          <p:nvPr/>
+        </p:nvSpPr>
+        <p:spPr>
+          <a:xfrm>
+            <a:off x="411480" y="1549908"/>
+            <a:ext cx="384048" cy="384048"/>
+          </a:xfrm>
+          <a:prstGeom prst="roundRect">
+            <a:avLst>
+              <a:gd name="adj" fmla="val 50000"/>
+            </a:avLst>
+          </a:prstGeom>
+          <a:solidFill>
+            <a:srgbClr val="24404D"/>
+          </a:solidFill>
+          <a:ln>
+            <a:noFill/>
+          </a:ln>
+          <a:effectLst/>
+        </p:spPr>
+        <p:style>
+          <a:lnRef idx="1">
+            <a:schemeClr val="accent1"/>
+          </a:lnRef>
+          <a:fillRef idx="3">
+            <a:schemeClr val="accent1"/>
+          </a:fillRef>
+          <a:effectRef idx="2">
+            <a:schemeClr val="accent1"/>
+          </a:effectRef>
+          <a:fontRef idx="minor">
+            <a:schemeClr val="lt1"/>
+          </a:fontRef>
+        </p:style>
+        <p:txBody>
+          <a:bodyPr rtlCol="0" anchor="ctr"/>
+          <a:lstStyle/>
+          <a:p>
+            <a:pPr algn="ctr"/>
+          </a:p>
+        </p:txBody>
+      </p:sp>
+      <p:sp>
+        <p:nvSpPr>
+          <p:cNvPr id="11" name="TextBox 10"/>
+          <p:cNvSpPr txBox="1"/>
+          <p:nvPr/>
+        </p:nvSpPr>
+        <p:spPr>
+          <a:xfrm>
+            <a:off x="411480" y="1549908"/>
+            <a:ext cx="384048" cy="384048"/>
+          </a:xfrm>
+          <a:prstGeom prst="rect">
+            <a:avLst/>
+          </a:prstGeom>
+          <a:noFill/>
+        </p:spPr>
+        <p:txBody>
+          <a:bodyPr wrap="square" anchor="ctr" lIns="0" rIns="0" tIns="0" bIns="0">
+            <a:spAutoFit/>
+          </a:bodyPr>
+          <a:lstStyle/>
+          <a:p>
+            <a:pPr algn="ctr"/>
+            <a:r>
+              <a:rPr sz="1400" b="1">
+                <a:solidFill>
+                  <a:srgbClr val="FFFFFF"/>
+                </a:solidFill>
+                <a:latin typeface="Hiragino Sans"/>
+                <a:ea typeface="Hiragino Sans"/>
+                <a:cs typeface="Hiragino Sans"/>
+              </a:rPr>
+              <a:t>1</a:t>
+            </a:r>
+          </a:p>
+        </p:txBody>
+      </p:sp>
+      <p:sp>
+        <p:nvSpPr>
+          <p:cNvPr id="12" name="Rounded Rectangle 11"/>
+          <p:cNvSpPr/>
+          <p:nvPr/>
+        </p:nvSpPr>
+        <p:spPr>
+          <a:xfrm>
+            <a:off x="914400" y="1293876"/>
+            <a:ext cx="2633472" cy="896112"/>
+          </a:xfrm>
+          <a:prstGeom prst="roundRect">
+            <a:avLst>
+              <a:gd name="adj" fmla="val 10000"/>
+            </a:avLst>
+          </a:prstGeom>
+          <a:solidFill>
+            <a:srgbClr val="FBEBEA"/>
+          </a:solidFill>
+          <a:ln w="19050">
+            <a:solidFill>
+              <a:srgbClr val="D9433B"/>
+            </a:solidFill>
+          </a:ln>
+          <a:effectLst/>
+        </p:spPr>
+        <p:style>
+          <a:lnRef idx="1">
+            <a:schemeClr val="accent1"/>
+          </a:lnRef>
+          <a:fillRef idx="3">
+            <a:schemeClr val="accent1"/>
+          </a:fillRef>
+          <a:effectRef idx="2">
+            <a:schemeClr val="accent1"/>
+          </a:effectRef>
+          <a:fontRef idx="minor">
+            <a:schemeClr val="lt1"/>
+          </a:fontRef>
+        </p:style>
+        <p:txBody>
+          <a:bodyPr rtlCol="0" anchor="ctr"/>
+          <a:lstStyle/>
+          <a:p>
+            <a:pPr algn="ctr"/>
+          </a:p>
+        </p:txBody>
+      </p:sp>
+      <p:sp>
+        <p:nvSpPr>
+          <p:cNvPr id="13" name="TextBox 12"/>
+          <p:cNvSpPr txBox="1"/>
+          <p:nvPr/>
+        </p:nvSpPr>
+        <p:spPr>
+          <a:xfrm>
+            <a:off x="1005840" y="1293876"/>
+            <a:ext cx="2450591" cy="896112"/>
+          </a:xfrm>
+          <a:prstGeom prst="rect">
+            <a:avLst/>
+          </a:prstGeom>
+          <a:noFill/>
+        </p:spPr>
+        <p:txBody>
+          <a:bodyPr wrap="square" anchor="ctr" lIns="0" rIns="0" tIns="0" bIns="0">
+            <a:spAutoFit/>
+          </a:bodyPr>
+          <a:lstStyle/>
+          <a:p>
+            <a:pPr algn="ctr"/>
+            <a:r>
+              <a:rPr sz="1150" b="0">
+                <a:solidFill>
+                  <a:srgbClr val="D9433B"/>
+                </a:solidFill>
+                <a:latin typeface="Hiragino Sans"/>
+                <a:ea typeface="Hiragino Sans"/>
+                <a:cs typeface="Hiragino Sans"/>
+              </a:rPr>
+              <a:t>掲示板に、スクリプトを</a:t>
+            </a:r>
+          </a:p>
+          <a:p>
+            <a:pPr algn="ctr"/>
+            <a:r>
+              <a:rPr sz="1150" b="0">
+                <a:solidFill>
+                  <a:srgbClr val="D9433B"/>
+                </a:solidFill>
+                <a:latin typeface="Hiragino Sans"/>
+                <a:ea typeface="Hiragino Sans"/>
+                <a:cs typeface="Hiragino Sans"/>
+              </a:rPr>
+              <a:t>含む文字列を投稿する</a:t>
+            </a:r>
+          </a:p>
+        </p:txBody>
+      </p:sp>
+      <p:sp>
+        <p:nvSpPr>
+          <p:cNvPr id="14" name="Rounded Rectangle 13"/>
+          <p:cNvSpPr/>
+          <p:nvPr/>
+        </p:nvSpPr>
+        <p:spPr>
+          <a:xfrm>
+            <a:off x="3639312" y="1293876"/>
+            <a:ext cx="2633472" cy="896112"/>
+          </a:xfrm>
+          <a:prstGeom prst="roundRect">
+            <a:avLst>
+              <a:gd name="adj" fmla="val 10000"/>
+            </a:avLst>
+          </a:prstGeom>
+          <a:solidFill>
+            <a:srgbClr val="E6F5F2"/>
+          </a:solidFill>
+          <a:ln w="19050">
+            <a:solidFill>
+              <a:srgbClr val="1AA69A"/>
+            </a:solidFill>
+          </a:ln>
+          <a:effectLst/>
+        </p:spPr>
+        <p:style>
+          <a:lnRef idx="1">
+            <a:schemeClr val="accent1"/>
+          </a:lnRef>
+          <a:fillRef idx="3">
+            <a:schemeClr val="accent1"/>
+          </a:fillRef>
+          <a:effectRef idx="2">
+            <a:schemeClr val="accent1"/>
+          </a:effectRef>
+          <a:fontRef idx="minor">
+            <a:schemeClr val="lt1"/>
+          </a:fontRef>
+        </p:style>
+        <p:txBody>
+          <a:bodyPr rtlCol="0" anchor="ctr"/>
+          <a:lstStyle/>
+          <a:p>
+            <a:pPr algn="ctr"/>
+          </a:p>
+        </p:txBody>
+      </p:sp>
+      <p:sp>
+        <p:nvSpPr>
+          <p:cNvPr id="15" name="TextBox 14"/>
+          <p:cNvSpPr txBox="1"/>
+          <p:nvPr/>
+        </p:nvSpPr>
+        <p:spPr>
+          <a:xfrm>
+            <a:off x="3730752" y="1293876"/>
+            <a:ext cx="2450591" cy="896112"/>
+          </a:xfrm>
+          <a:prstGeom prst="rect">
+            <a:avLst/>
+          </a:prstGeom>
+          <a:noFill/>
+        </p:spPr>
+        <p:txBody>
+          <a:bodyPr wrap="square" anchor="ctr" lIns="0" rIns="0" tIns="0" bIns="0">
+            <a:spAutoFit/>
+          </a:bodyPr>
+          <a:lstStyle/>
+          <a:p>
+            <a:pPr algn="ctr"/>
+            <a:r>
+              <a:rPr sz="1150" b="0">
+                <a:solidFill>
+                  <a:srgbClr val="0E7C72"/>
+                </a:solidFill>
+                <a:latin typeface="Hiragino Sans"/>
+                <a:ea typeface="Hiragino Sans"/>
+                <a:cs typeface="Hiragino Sans"/>
+              </a:rPr>
+              <a:t>投稿をそのまま</a:t>
+            </a:r>
+          </a:p>
+          <a:p>
+            <a:pPr algn="ctr"/>
+            <a:r>
+              <a:rPr sz="1150" b="0">
+                <a:solidFill>
+                  <a:srgbClr val="0E7C72"/>
+                </a:solidFill>
+                <a:latin typeface="Hiragino Sans"/>
+                <a:ea typeface="Hiragino Sans"/>
+                <a:cs typeface="Hiragino Sans"/>
+              </a:rPr>
+              <a:t>DBに保存する</a:t>
+            </a:r>
+          </a:p>
+        </p:txBody>
+      </p:sp>
+      <p:sp>
+        <p:nvSpPr>
+          <p:cNvPr id="16" name="Rounded Rectangle 15"/>
+          <p:cNvSpPr/>
+          <p:nvPr/>
+        </p:nvSpPr>
+        <p:spPr>
+          <a:xfrm>
+            <a:off x="6364224" y="1293876"/>
+            <a:ext cx="2633472" cy="896112"/>
+          </a:xfrm>
+          <a:prstGeom prst="roundRect">
+            <a:avLst>
+              <a:gd name="adj" fmla="val 10000"/>
+            </a:avLst>
+          </a:prstGeom>
+          <a:noFill/>
+          <a:ln w="9525">
+            <a:solidFill>
+              <a:srgbClr val="E4E8EA"/>
+            </a:solidFill>
+          </a:ln>
+          <a:effectLst/>
+        </p:spPr>
+        <p:style>
+          <a:lnRef idx="1">
+            <a:schemeClr val="accent1"/>
+          </a:lnRef>
+          <a:fillRef idx="3">
+            <a:schemeClr val="accent1"/>
+          </a:fillRef>
+          <a:effectRef idx="2">
+            <a:schemeClr val="accent1"/>
+          </a:effectRef>
+          <a:fontRef idx="minor">
+            <a:schemeClr val="lt1"/>
+          </a:fontRef>
+        </p:style>
+        <p:txBody>
+          <a:bodyPr rtlCol="0" anchor="ctr"/>
+          <a:lstStyle/>
+          <a:p>
+            <a:pPr algn="ctr"/>
+          </a:p>
+        </p:txBody>
+      </p:sp>
+      <p:sp>
+        <p:nvSpPr>
+          <p:cNvPr id="17" name="Rounded Rectangle 16"/>
+          <p:cNvSpPr/>
+          <p:nvPr/>
+        </p:nvSpPr>
+        <p:spPr>
+          <a:xfrm>
+            <a:off x="9089136" y="1293876"/>
+            <a:ext cx="2633472" cy="896112"/>
+          </a:xfrm>
+          <a:prstGeom prst="roundRect">
+            <a:avLst>
+              <a:gd name="adj" fmla="val 10000"/>
+            </a:avLst>
+          </a:prstGeom>
+          <a:noFill/>
+          <a:ln w="9525">
+            <a:solidFill>
+              <a:srgbClr val="E4E8EA"/>
+            </a:solidFill>
+          </a:ln>
+          <a:effectLst/>
+        </p:spPr>
+        <p:style>
+          <a:lnRef idx="1">
+            <a:schemeClr val="accent1"/>
+          </a:lnRef>
+          <a:fillRef idx="3">
+            <a:schemeClr val="accent1"/>
+          </a:fillRef>
+          <a:effectRef idx="2">
+            <a:schemeClr val="accent1"/>
+          </a:effectRef>
+          <a:fontRef idx="minor">
+            <a:schemeClr val="lt1"/>
+          </a:fontRef>
+        </p:style>
+        <p:txBody>
+          <a:bodyPr rtlCol="0" anchor="ctr"/>
+          <a:lstStyle/>
+          <a:p>
+            <a:pPr algn="ctr"/>
+          </a:p>
+        </p:txBody>
+      </p:sp>
+      <p:sp>
+        <p:nvSpPr>
+          <p:cNvPr id="18" name="Rounded Rectangle 17"/>
+          <p:cNvSpPr/>
+          <p:nvPr/>
+        </p:nvSpPr>
+        <p:spPr>
+          <a:xfrm>
+            <a:off x="411480" y="2537460"/>
+            <a:ext cx="384048" cy="384048"/>
+          </a:xfrm>
+          <a:prstGeom prst="roundRect">
+            <a:avLst>
+              <a:gd name="adj" fmla="val 50000"/>
+            </a:avLst>
+          </a:prstGeom>
+          <a:solidFill>
+            <a:srgbClr val="24404D"/>
+          </a:solidFill>
+          <a:ln>
+            <a:noFill/>
+          </a:ln>
+          <a:effectLst/>
+        </p:spPr>
+        <p:style>
+          <a:lnRef idx="1">
+            <a:schemeClr val="accent1"/>
+          </a:lnRef>
+          <a:fillRef idx="3">
+            <a:schemeClr val="accent1"/>
+          </a:fillRef>
+          <a:effectRef idx="2">
+            <a:schemeClr val="accent1"/>
+          </a:effectRef>
+          <a:fontRef idx="minor">
+            <a:schemeClr val="lt1"/>
+          </a:fontRef>
+        </p:style>
+        <p:txBody>
+          <a:bodyPr rtlCol="0" anchor="ctr"/>
+          <a:lstStyle/>
+          <a:p>
+            <a:pPr algn="ctr"/>
+          </a:p>
+        </p:txBody>
+      </p:sp>
+      <p:sp>
+        <p:nvSpPr>
+          <p:cNvPr id="19" name="TextBox 18"/>
+          <p:cNvSpPr txBox="1"/>
+          <p:nvPr/>
+        </p:nvSpPr>
+        <p:spPr>
+          <a:xfrm>
+            <a:off x="411480" y="2537460"/>
+            <a:ext cx="384048" cy="384048"/>
+          </a:xfrm>
+          <a:prstGeom prst="rect">
+            <a:avLst/>
+          </a:prstGeom>
+          <a:noFill/>
+        </p:spPr>
+        <p:txBody>
+          <a:bodyPr wrap="square" anchor="ctr" lIns="0" rIns="0" tIns="0" bIns="0">
+            <a:spAutoFit/>
+          </a:bodyPr>
+          <a:lstStyle/>
+          <a:p>
+            <a:pPr algn="ctr"/>
+            <a:r>
+              <a:rPr sz="1400" b="1">
+                <a:solidFill>
+                  <a:srgbClr val="FFFFFF"/>
+                </a:solidFill>
+                <a:latin typeface="Hiragino Sans"/>
+                <a:ea typeface="Hiragino Sans"/>
+                <a:cs typeface="Hiragino Sans"/>
+              </a:rPr>
+              <a:t>2</a:t>
+            </a:r>
+          </a:p>
+        </p:txBody>
+      </p:sp>
+      <p:sp>
+        <p:nvSpPr>
+          <p:cNvPr id="20" name="Rounded Rectangle 19"/>
+          <p:cNvSpPr/>
+          <p:nvPr/>
+        </p:nvSpPr>
+        <p:spPr>
+          <a:xfrm>
+            <a:off x="914400" y="2281428"/>
+            <a:ext cx="2633472" cy="896112"/>
+          </a:xfrm>
+          <a:prstGeom prst="roundRect">
+            <a:avLst>
+              <a:gd name="adj" fmla="val 10000"/>
+            </a:avLst>
+          </a:prstGeom>
+          <a:solidFill>
+            <a:srgbClr val="FBEBEA"/>
+          </a:solidFill>
+          <a:ln w="19050">
+            <a:solidFill>
+              <a:srgbClr val="D9433B"/>
+            </a:solidFill>
+          </a:ln>
+          <a:effectLst/>
+        </p:spPr>
+        <p:style>
+          <a:lnRef idx="1">
+            <a:schemeClr val="accent1"/>
+          </a:lnRef>
+          <a:fillRef idx="3">
+            <a:schemeClr val="accent1"/>
+          </a:fillRef>
+          <a:effectRef idx="2">
+            <a:schemeClr val="accent1"/>
+          </a:effectRef>
+          <a:fontRef idx="minor">
+            <a:schemeClr val="lt1"/>
+          </a:fontRef>
+        </p:style>
+        <p:txBody>
+          <a:bodyPr rtlCol="0" anchor="ctr"/>
+          <a:lstStyle/>
+          <a:p>
+            <a:pPr algn="ctr"/>
+          </a:p>
+        </p:txBody>
+      </p:sp>
+      <p:sp>
+        <p:nvSpPr>
+          <p:cNvPr id="21" name="TextBox 20"/>
+          <p:cNvSpPr txBox="1"/>
+          <p:nvPr/>
+        </p:nvSpPr>
+        <p:spPr>
+          <a:xfrm>
+            <a:off x="1005840" y="2281428"/>
+            <a:ext cx="2450591" cy="896112"/>
+          </a:xfrm>
+          <a:prstGeom prst="rect">
+            <a:avLst/>
+          </a:prstGeom>
+          <a:noFill/>
+        </p:spPr>
+        <p:txBody>
+          <a:bodyPr wrap="square" anchor="ctr" lIns="0" rIns="0" tIns="0" bIns="0">
+            <a:spAutoFit/>
+          </a:bodyPr>
+          <a:lstStyle/>
+          <a:p>
+            <a:pPr algn="ctr"/>
+            <a:r>
+              <a:rPr sz="1150" b="0">
+                <a:solidFill>
+                  <a:srgbClr val="D9433B"/>
+                </a:solidFill>
+                <a:latin typeface="Hiragino Sans"/>
+                <a:ea typeface="Hiragino Sans"/>
+                <a:cs typeface="Hiragino Sans"/>
+              </a:rPr>
+              <a:t>あとは待つだけ</a:t>
+            </a:r>
+          </a:p>
+        </p:txBody>
+      </p:sp>
+      <p:sp>
+        <p:nvSpPr>
+          <p:cNvPr id="22" name="Rounded Rectangle 21"/>
+          <p:cNvSpPr/>
+          <p:nvPr/>
+        </p:nvSpPr>
+        <p:spPr>
+          <a:xfrm>
+            <a:off x="3639312" y="2281428"/>
+            <a:ext cx="2633472" cy="896112"/>
+          </a:xfrm>
+          <a:prstGeom prst="roundRect">
+            <a:avLst>
+              <a:gd name="adj" fmla="val 10000"/>
+            </a:avLst>
+          </a:prstGeom>
+          <a:noFill/>
+          <a:ln w="9525">
+            <a:solidFill>
+              <a:srgbClr val="E4E8EA"/>
+            </a:solidFill>
+          </a:ln>
+          <a:effectLst/>
+        </p:spPr>
+        <p:style>
+          <a:lnRef idx="1">
+            <a:schemeClr val="accent1"/>
+          </a:lnRef>
+          <a:fillRef idx="3">
+            <a:schemeClr val="accent1"/>
+          </a:fillRef>
+          <a:effectRef idx="2">
+            <a:schemeClr val="accent1"/>
+          </a:effectRef>
+          <a:fontRef idx="minor">
+            <a:schemeClr val="lt1"/>
+          </a:fontRef>
+        </p:style>
+        <p:txBody>
+          <a:bodyPr rtlCol="0" anchor="ctr"/>
+          <a:lstStyle/>
+          <a:p>
+            <a:pPr algn="ctr"/>
+          </a:p>
+        </p:txBody>
+      </p:sp>
+      <p:sp>
+        <p:nvSpPr>
+          <p:cNvPr id="23" name="Rounded Rectangle 22"/>
+          <p:cNvSpPr/>
+          <p:nvPr/>
+        </p:nvSpPr>
+        <p:spPr>
+          <a:xfrm>
+            <a:off x="6364224" y="2281428"/>
+            <a:ext cx="2633472" cy="896112"/>
+          </a:xfrm>
+          <a:prstGeom prst="roundRect">
+            <a:avLst>
+              <a:gd name="adj" fmla="val 10000"/>
+            </a:avLst>
+          </a:prstGeom>
+          <a:noFill/>
+          <a:ln w="9525">
+            <a:solidFill>
+              <a:srgbClr val="E4E8EA"/>
+            </a:solidFill>
+          </a:ln>
+          <a:effectLst/>
+        </p:spPr>
+        <p:style>
+          <a:lnRef idx="1">
+            <a:schemeClr val="accent1"/>
+          </a:lnRef>
+          <a:fillRef idx="3">
+            <a:schemeClr val="accent1"/>
+          </a:fillRef>
+          <a:effectRef idx="2">
+            <a:schemeClr val="accent1"/>
+          </a:effectRef>
+          <a:fontRef idx="minor">
+            <a:schemeClr val="lt1"/>
+          </a:fontRef>
+        </p:style>
+        <p:txBody>
+          <a:bodyPr rtlCol="0" anchor="ctr"/>
+          <a:lstStyle/>
+          <a:p>
+            <a:pPr algn="ctr"/>
+          </a:p>
+        </p:txBody>
+      </p:sp>
+      <p:sp>
+        <p:nvSpPr>
+          <p:cNvPr id="24" name="Rounded Rectangle 23"/>
+          <p:cNvSpPr/>
+          <p:nvPr/>
+        </p:nvSpPr>
+        <p:spPr>
+          <a:xfrm>
+            <a:off x="9089136" y="2281428"/>
+            <a:ext cx="2633472" cy="896112"/>
+          </a:xfrm>
+          <a:prstGeom prst="roundRect">
+            <a:avLst>
+              <a:gd name="adj" fmla="val 10000"/>
+            </a:avLst>
+          </a:prstGeom>
+          <a:solidFill>
+            <a:srgbClr val="FFFFFF"/>
+          </a:solidFill>
+          <a:ln w="19050">
+            <a:solidFill>
+              <a:srgbClr val="F08A24"/>
+            </a:solidFill>
+          </a:ln>
+          <a:effectLst/>
+        </p:spPr>
+        <p:style>
+          <a:lnRef idx="1">
+            <a:schemeClr val="accent1"/>
+          </a:lnRef>
+          <a:fillRef idx="3">
+            <a:schemeClr val="accent1"/>
+          </a:fillRef>
+          <a:effectRef idx="2">
+            <a:schemeClr val="accent1"/>
+          </a:effectRef>
+          <a:fontRef idx="minor">
+            <a:schemeClr val="lt1"/>
+          </a:fontRef>
+        </p:style>
+        <p:txBody>
+          <a:bodyPr rtlCol="0" anchor="ctr"/>
+          <a:lstStyle/>
+          <a:p>
+            <a:pPr algn="ctr"/>
+          </a:p>
+        </p:txBody>
+      </p:sp>
+      <p:sp>
+        <p:nvSpPr>
+          <p:cNvPr id="25" name="TextBox 24"/>
+          <p:cNvSpPr txBox="1"/>
+          <p:nvPr/>
+        </p:nvSpPr>
+        <p:spPr>
+          <a:xfrm>
+            <a:off x="9180576" y="2281428"/>
+            <a:ext cx="2450591" cy="896112"/>
+          </a:xfrm>
+          <a:prstGeom prst="rect">
+            <a:avLst/>
+          </a:prstGeom>
+          <a:noFill/>
+        </p:spPr>
+        <p:txBody>
+          <a:bodyPr wrap="square" anchor="ctr" lIns="0" rIns="0" tIns="0" bIns="0">
+            <a:spAutoFit/>
+          </a:bodyPr>
+          <a:lstStyle/>
+          <a:p>
+            <a:pPr algn="ctr"/>
+            <a:r>
+              <a:rPr sz="1150" b="1">
+                <a:solidFill>
+                  <a:srgbClr val="F08A24"/>
+                </a:solidFill>
+                <a:latin typeface="Hiragino Sans"/>
+                <a:ea typeface="Hiragino Sans"/>
+                <a:cs typeface="Hiragino Sans"/>
+              </a:rPr>
+              <a:t>いつもの掲示板を</a:t>
+            </a:r>
+          </a:p>
+          <a:p>
+            <a:pPr algn="ctr"/>
+            <a:r>
+              <a:rPr sz="1150" b="1">
+                <a:solidFill>
+                  <a:srgbClr val="F08A24"/>
+                </a:solidFill>
+                <a:latin typeface="Hiragino Sans"/>
+                <a:ea typeface="Hiragino Sans"/>
+                <a:cs typeface="Hiragino Sans"/>
+              </a:rPr>
+              <a:t>開く</a:t>
+            </a:r>
+          </a:p>
+        </p:txBody>
+      </p:sp>
+      <p:sp>
+        <p:nvSpPr>
+          <p:cNvPr id="26" name="Rounded Rectangle 25"/>
+          <p:cNvSpPr/>
+          <p:nvPr/>
+        </p:nvSpPr>
+        <p:spPr>
+          <a:xfrm>
+            <a:off x="411480" y="3525012"/>
+            <a:ext cx="384048" cy="384048"/>
+          </a:xfrm>
+          <a:prstGeom prst="roundRect">
+            <a:avLst>
+              <a:gd name="adj" fmla="val 50000"/>
+            </a:avLst>
+          </a:prstGeom>
+          <a:solidFill>
+            <a:srgbClr val="24404D"/>
+          </a:solidFill>
+          <a:ln>
+            <a:noFill/>
+          </a:ln>
+          <a:effectLst/>
+        </p:spPr>
+        <p:style>
+          <a:lnRef idx="1">
+            <a:schemeClr val="accent1"/>
+          </a:lnRef>
+          <a:fillRef idx="3">
+            <a:schemeClr val="accent1"/>
+          </a:fillRef>
+          <a:effectRef idx="2">
+            <a:schemeClr val="accent1"/>
+          </a:effectRef>
+          <a:fontRef idx="minor">
+            <a:schemeClr val="lt1"/>
+          </a:fontRef>
+        </p:style>
+        <p:txBody>
+          <a:bodyPr rtlCol="0" anchor="ctr"/>
+          <a:lstStyle/>
+          <a:p>
+            <a:pPr algn="ctr"/>
+          </a:p>
+        </p:txBody>
+      </p:sp>
+      <p:sp>
+        <p:nvSpPr>
+          <p:cNvPr id="27" name="TextBox 26"/>
+          <p:cNvSpPr txBox="1"/>
+          <p:nvPr/>
+        </p:nvSpPr>
+        <p:spPr>
+          <a:xfrm>
+            <a:off x="411480" y="3525012"/>
+            <a:ext cx="384048" cy="384048"/>
+          </a:xfrm>
+          <a:prstGeom prst="rect">
+            <a:avLst/>
+          </a:prstGeom>
+          <a:noFill/>
+        </p:spPr>
+        <p:txBody>
+          <a:bodyPr wrap="square" anchor="ctr" lIns="0" rIns="0" tIns="0" bIns="0">
+            <a:spAutoFit/>
+          </a:bodyPr>
+          <a:lstStyle/>
+          <a:p>
+            <a:pPr algn="ctr"/>
+            <a:r>
+              <a:rPr sz="1400" b="1">
+                <a:solidFill>
+                  <a:srgbClr val="FFFFFF"/>
+                </a:solidFill>
+                <a:latin typeface="Hiragino Sans"/>
+                <a:ea typeface="Hiragino Sans"/>
+                <a:cs typeface="Hiragino Sans"/>
+              </a:rPr>
+              <a:t>3</a:t>
+            </a:r>
+          </a:p>
+        </p:txBody>
+      </p:sp>
+      <p:sp>
+        <p:nvSpPr>
+          <p:cNvPr id="28" name="Rounded Rectangle 27"/>
+          <p:cNvSpPr/>
+          <p:nvPr/>
+        </p:nvSpPr>
+        <p:spPr>
+          <a:xfrm>
+            <a:off x="914400" y="3268980"/>
+            <a:ext cx="2633472" cy="896112"/>
+          </a:xfrm>
+          <a:prstGeom prst="roundRect">
+            <a:avLst>
+              <a:gd name="adj" fmla="val 10000"/>
+            </a:avLst>
+          </a:prstGeom>
+          <a:noFill/>
+          <a:ln w="9525">
+            <a:solidFill>
+              <a:srgbClr val="E4E8EA"/>
+            </a:solidFill>
+          </a:ln>
+          <a:effectLst/>
+        </p:spPr>
+        <p:style>
+          <a:lnRef idx="1">
+            <a:schemeClr val="accent1"/>
+          </a:lnRef>
+          <a:fillRef idx="3">
+            <a:schemeClr val="accent1"/>
+          </a:fillRef>
+          <a:effectRef idx="2">
+            <a:schemeClr val="accent1"/>
+          </a:effectRef>
+          <a:fontRef idx="minor">
+            <a:schemeClr val="lt1"/>
+          </a:fontRef>
+        </p:style>
+        <p:txBody>
+          <a:bodyPr rtlCol="0" anchor="ctr"/>
+          <a:lstStyle/>
+          <a:p>
+            <a:pPr algn="ctr"/>
+          </a:p>
+        </p:txBody>
+      </p:sp>
+      <p:sp>
+        <p:nvSpPr>
+          <p:cNvPr id="29" name="Rounded Rectangle 28"/>
+          <p:cNvSpPr/>
+          <p:nvPr/>
+        </p:nvSpPr>
+        <p:spPr>
+          <a:xfrm>
+            <a:off x="3639312" y="3268980"/>
+            <a:ext cx="2633472" cy="896112"/>
+          </a:xfrm>
+          <a:prstGeom prst="roundRect">
+            <a:avLst>
+              <a:gd name="adj" fmla="val 10000"/>
+            </a:avLst>
+          </a:prstGeom>
+          <a:solidFill>
+            <a:srgbClr val="E6F5F2"/>
+          </a:solidFill>
+          <a:ln w="19050">
+            <a:solidFill>
+              <a:srgbClr val="1AA69A"/>
+            </a:solidFill>
+          </a:ln>
+          <a:effectLst/>
+        </p:spPr>
+        <p:style>
+          <a:lnRef idx="1">
+            <a:schemeClr val="accent1"/>
+          </a:lnRef>
+          <a:fillRef idx="3">
+            <a:schemeClr val="accent1"/>
+          </a:fillRef>
+          <a:effectRef idx="2">
+            <a:schemeClr val="accent1"/>
+          </a:effectRef>
+          <a:fontRef idx="minor">
+            <a:schemeClr val="lt1"/>
+          </a:fontRef>
+        </p:style>
+        <p:txBody>
+          <a:bodyPr rtlCol="0" anchor="ctr"/>
+          <a:lstStyle/>
+          <a:p>
+            <a:pPr algn="ctr"/>
+          </a:p>
+        </p:txBody>
+      </p:sp>
+      <p:sp>
+        <p:nvSpPr>
+          <p:cNvPr id="30" name="TextBox 29"/>
+          <p:cNvSpPr txBox="1"/>
+          <p:nvPr/>
+        </p:nvSpPr>
+        <p:spPr>
+          <a:xfrm>
+            <a:off x="3730752" y="3268980"/>
+            <a:ext cx="2450591" cy="896112"/>
+          </a:xfrm>
+          <a:prstGeom prst="rect">
+            <a:avLst/>
+          </a:prstGeom>
+          <a:noFill/>
+        </p:spPr>
+        <p:txBody>
+          <a:bodyPr wrap="square" anchor="ctr" lIns="0" rIns="0" tIns="0" bIns="0">
+            <a:spAutoFit/>
+          </a:bodyPr>
+          <a:lstStyle/>
+          <a:p>
+            <a:pPr algn="ctr"/>
+            <a:r>
+              <a:rPr sz="1150" b="0">
+                <a:solidFill>
+                  <a:srgbClr val="0E7C72"/>
+                </a:solidFill>
+                <a:latin typeface="Hiragino Sans"/>
+                <a:ea typeface="Hiragino Sans"/>
+                <a:cs typeface="Hiragino Sans"/>
+              </a:rPr>
+              <a:t>保存された投稿を</a:t>
+            </a:r>
+          </a:p>
+          <a:p>
+            <a:pPr algn="ctr"/>
+            <a:r>
+              <a:rPr sz="1150" b="0">
+                <a:solidFill>
+                  <a:srgbClr val="0E7C72"/>
+                </a:solidFill>
+                <a:latin typeface="Hiragino Sans"/>
+                <a:ea typeface="Hiragino Sans"/>
+                <a:cs typeface="Hiragino Sans"/>
+              </a:rPr>
+              <a:t>エスケープせずに</a:t>
+            </a:r>
+          </a:p>
+          <a:p>
+            <a:pPr algn="ctr"/>
+            <a:r>
+              <a:rPr sz="1150" b="0">
+                <a:solidFill>
+                  <a:srgbClr val="0E7C72"/>
+                </a:solidFill>
+                <a:latin typeface="Hiragino Sans"/>
+                <a:ea typeface="Hiragino Sans"/>
+                <a:cs typeface="Hiragino Sans"/>
+              </a:rPr>
+              <a:t>HTMLへ埋め込んで返す</a:t>
+            </a:r>
+          </a:p>
+        </p:txBody>
+      </p:sp>
+      <p:sp>
+        <p:nvSpPr>
+          <p:cNvPr id="31" name="Rounded Rectangle 30"/>
+          <p:cNvSpPr/>
+          <p:nvPr/>
+        </p:nvSpPr>
+        <p:spPr>
+          <a:xfrm>
+            <a:off x="6364224" y="3268980"/>
+            <a:ext cx="2633472" cy="896112"/>
+          </a:xfrm>
+          <a:prstGeom prst="roundRect">
+            <a:avLst>
+              <a:gd name="adj" fmla="val 10000"/>
+            </a:avLst>
+          </a:prstGeom>
+          <a:solidFill>
+            <a:srgbClr val="F1F3F4"/>
+          </a:solidFill>
+          <a:ln w="19050">
+            <a:solidFill>
+              <a:srgbClr val="C2CBD0"/>
+            </a:solidFill>
+          </a:ln>
+          <a:effectLst/>
+        </p:spPr>
+        <p:style>
+          <a:lnRef idx="1">
+            <a:schemeClr val="accent1"/>
+          </a:lnRef>
+          <a:fillRef idx="3">
+            <a:schemeClr val="accent1"/>
+          </a:fillRef>
+          <a:effectRef idx="2">
+            <a:schemeClr val="accent1"/>
+          </a:effectRef>
+          <a:fontRef idx="minor">
+            <a:schemeClr val="lt1"/>
+          </a:fontRef>
+        </p:style>
+        <p:txBody>
+          <a:bodyPr rtlCol="0" anchor="ctr"/>
+          <a:lstStyle/>
+          <a:p>
+            <a:pPr algn="ctr"/>
+          </a:p>
+        </p:txBody>
+      </p:sp>
+      <p:sp>
+        <p:nvSpPr>
+          <p:cNvPr id="32" name="TextBox 31"/>
+          <p:cNvSpPr txBox="1"/>
+          <p:nvPr/>
+        </p:nvSpPr>
+        <p:spPr>
+          <a:xfrm>
+            <a:off x="6455664" y="3268980"/>
+            <a:ext cx="2450591" cy="896112"/>
+          </a:xfrm>
+          <a:prstGeom prst="rect">
+            <a:avLst/>
+          </a:prstGeom>
+          <a:noFill/>
+        </p:spPr>
+        <p:txBody>
+          <a:bodyPr wrap="square" anchor="ctr" lIns="0" rIns="0" tIns="0" bIns="0">
+            <a:spAutoFit/>
+          </a:bodyPr>
+          <a:lstStyle/>
+          <a:p>
+            <a:pPr algn="ctr"/>
+            <a:r>
+              <a:rPr sz="1150" b="0">
+                <a:solidFill>
+                  <a:srgbClr val="24404D"/>
+                </a:solidFill>
+                <a:latin typeface="Hiragino Sans"/>
+                <a:ea typeface="Hiragino Sans"/>
+                <a:cs typeface="Hiragino Sans"/>
+              </a:rPr>
+              <a:t>トークナイザが生の &lt; を</a:t>
+            </a:r>
+          </a:p>
+          <a:p>
+            <a:pPr algn="ctr"/>
+            <a:r>
+              <a:rPr sz="1150" b="0">
+                <a:solidFill>
+                  <a:srgbClr val="24404D"/>
+                </a:solidFill>
+                <a:latin typeface="Hiragino Sans"/>
+                <a:ea typeface="Hiragino Sans"/>
+                <a:cs typeface="Hiragino Sans"/>
+              </a:rPr>
+              <a:t>読み、script要素ができる</a:t>
+            </a:r>
+          </a:p>
+        </p:txBody>
+      </p:sp>
+      <p:sp>
+        <p:nvSpPr>
+          <p:cNvPr id="33" name="Rounded Rectangle 32"/>
+          <p:cNvSpPr/>
+          <p:nvPr/>
+        </p:nvSpPr>
+        <p:spPr>
+          <a:xfrm>
+            <a:off x="9089136" y="3268980"/>
+            <a:ext cx="2633472" cy="896112"/>
+          </a:xfrm>
+          <a:prstGeom prst="roundRect">
+            <a:avLst>
+              <a:gd name="adj" fmla="val 10000"/>
+            </a:avLst>
+          </a:prstGeom>
+          <a:solidFill>
+            <a:srgbClr val="FFFFFF"/>
+          </a:solidFill>
+          <a:ln w="19050">
+            <a:solidFill>
+              <a:srgbClr val="F08A24"/>
+            </a:solidFill>
+          </a:ln>
+          <a:effectLst/>
+        </p:spPr>
+        <p:style>
+          <a:lnRef idx="1">
+            <a:schemeClr val="accent1"/>
+          </a:lnRef>
+          <a:fillRef idx="3">
+            <a:schemeClr val="accent1"/>
+          </a:fillRef>
+          <a:effectRef idx="2">
+            <a:schemeClr val="accent1"/>
+          </a:effectRef>
+          <a:fontRef idx="minor">
+            <a:schemeClr val="lt1"/>
+          </a:fontRef>
+        </p:style>
+        <p:txBody>
+          <a:bodyPr rtlCol="0" anchor="ctr"/>
+          <a:lstStyle/>
+          <a:p>
+            <a:pPr algn="ctr"/>
+          </a:p>
+        </p:txBody>
+      </p:sp>
+      <p:sp>
+        <p:nvSpPr>
+          <p:cNvPr id="34" name="TextBox 33"/>
+          <p:cNvSpPr txBox="1"/>
+          <p:nvPr/>
+        </p:nvSpPr>
+        <p:spPr>
+          <a:xfrm>
+            <a:off x="9180576" y="3268980"/>
+            <a:ext cx="2450591" cy="896112"/>
+          </a:xfrm>
+          <a:prstGeom prst="rect">
+            <a:avLst/>
+          </a:prstGeom>
+          <a:noFill/>
+        </p:spPr>
+        <p:txBody>
+          <a:bodyPr wrap="square" anchor="ctr" lIns="0" rIns="0" tIns="0" bIns="0">
+            <a:spAutoFit/>
+          </a:bodyPr>
+          <a:lstStyle/>
+          <a:p>
+            <a:pPr algn="ctr"/>
+            <a:r>
+              <a:rPr sz="1150" b="1">
+                <a:solidFill>
+                  <a:srgbClr val="F08A24"/>
+                </a:solidFill>
+                <a:latin typeface="Hiragino Sans"/>
+                <a:ea typeface="Hiragino Sans"/>
+                <a:cs typeface="Hiragino Sans"/>
+              </a:rPr>
+              <a:t>いつも通りのページ</a:t>
+            </a:r>
+          </a:p>
+        </p:txBody>
+      </p:sp>
+      <p:sp>
+        <p:nvSpPr>
+          <p:cNvPr id="35" name="Rounded Rectangle 34"/>
+          <p:cNvSpPr/>
+          <p:nvPr/>
+        </p:nvSpPr>
+        <p:spPr>
+          <a:xfrm>
+            <a:off x="411480" y="4512564"/>
+            <a:ext cx="384048" cy="384048"/>
+          </a:xfrm>
+          <a:prstGeom prst="roundRect">
+            <a:avLst>
+              <a:gd name="adj" fmla="val 50000"/>
+            </a:avLst>
+          </a:prstGeom>
+          <a:solidFill>
+            <a:srgbClr val="24404D"/>
+          </a:solidFill>
+          <a:ln>
+            <a:noFill/>
+          </a:ln>
+          <a:effectLst/>
+        </p:spPr>
+        <p:style>
+          <a:lnRef idx="1">
+            <a:schemeClr val="accent1"/>
+          </a:lnRef>
+          <a:fillRef idx="3">
+            <a:schemeClr val="accent1"/>
+          </a:fillRef>
+          <a:effectRef idx="2">
+            <a:schemeClr val="accent1"/>
+          </a:effectRef>
+          <a:fontRef idx="minor">
+            <a:schemeClr val="lt1"/>
+          </a:fontRef>
+        </p:style>
+        <p:txBody>
+          <a:bodyPr rtlCol="0" anchor="ctr"/>
+          <a:lstStyle/>
+          <a:p>
+            <a:pPr algn="ctr"/>
+          </a:p>
+        </p:txBody>
+      </p:sp>
+      <p:sp>
+        <p:nvSpPr>
+          <p:cNvPr id="36" name="TextBox 35"/>
+          <p:cNvSpPr txBox="1"/>
+          <p:nvPr/>
+        </p:nvSpPr>
+        <p:spPr>
+          <a:xfrm>
+            <a:off x="411480" y="4512564"/>
+            <a:ext cx="384048" cy="384048"/>
+          </a:xfrm>
+          <a:prstGeom prst="rect">
+            <a:avLst/>
+          </a:prstGeom>
+          <a:noFill/>
+        </p:spPr>
+        <p:txBody>
+          <a:bodyPr wrap="square" anchor="ctr" lIns="0" rIns="0" tIns="0" bIns="0">
+            <a:spAutoFit/>
+          </a:bodyPr>
+          <a:lstStyle/>
+          <a:p>
+            <a:pPr algn="ctr"/>
+            <a:r>
+              <a:rPr sz="1400" b="1">
+                <a:solidFill>
+                  <a:srgbClr val="FFFFFF"/>
+                </a:solidFill>
+                <a:latin typeface="Hiragino Sans"/>
+                <a:ea typeface="Hiragino Sans"/>
+                <a:cs typeface="Hiragino Sans"/>
+              </a:rPr>
+              <a:t>4</a:t>
+            </a:r>
+          </a:p>
+        </p:txBody>
+      </p:sp>
+      <p:sp>
+        <p:nvSpPr>
+          <p:cNvPr id="37" name="Rounded Rectangle 36"/>
+          <p:cNvSpPr/>
+          <p:nvPr/>
+        </p:nvSpPr>
+        <p:spPr>
+          <a:xfrm>
+            <a:off x="914400" y="4256532"/>
+            <a:ext cx="2633472" cy="896112"/>
+          </a:xfrm>
+          <a:prstGeom prst="roundRect">
+            <a:avLst>
+              <a:gd name="adj" fmla="val 10000"/>
+            </a:avLst>
+          </a:prstGeom>
+          <a:noFill/>
+          <a:ln w="9525">
+            <a:solidFill>
+              <a:srgbClr val="E4E8EA"/>
+            </a:solidFill>
+          </a:ln>
+          <a:effectLst/>
+        </p:spPr>
+        <p:style>
+          <a:lnRef idx="1">
+            <a:schemeClr val="accent1"/>
+          </a:lnRef>
+          <a:fillRef idx="3">
+            <a:schemeClr val="accent1"/>
+          </a:fillRef>
+          <a:effectRef idx="2">
+            <a:schemeClr val="accent1"/>
+          </a:effectRef>
+          <a:fontRef idx="minor">
+            <a:schemeClr val="lt1"/>
+          </a:fontRef>
+        </p:style>
+        <p:txBody>
+          <a:bodyPr rtlCol="0" anchor="ctr"/>
+          <a:lstStyle/>
+          <a:p>
+            <a:pPr algn="ctr"/>
+          </a:p>
+        </p:txBody>
+      </p:sp>
+      <p:sp>
+        <p:nvSpPr>
+          <p:cNvPr id="38" name="Rounded Rectangle 37"/>
+          <p:cNvSpPr/>
+          <p:nvPr/>
+        </p:nvSpPr>
+        <p:spPr>
+          <a:xfrm>
+            <a:off x="3639312" y="4256532"/>
+            <a:ext cx="2633472" cy="896112"/>
+          </a:xfrm>
+          <a:prstGeom prst="roundRect">
+            <a:avLst>
+              <a:gd name="adj" fmla="val 10000"/>
+            </a:avLst>
+          </a:prstGeom>
+          <a:noFill/>
+          <a:ln w="9525">
+            <a:solidFill>
+              <a:srgbClr val="E4E8EA"/>
+            </a:solidFill>
+          </a:ln>
+          <a:effectLst/>
+        </p:spPr>
+        <p:style>
+          <a:lnRef idx="1">
+            <a:schemeClr val="accent1"/>
+          </a:lnRef>
+          <a:fillRef idx="3">
+            <a:schemeClr val="accent1"/>
+          </a:fillRef>
+          <a:effectRef idx="2">
+            <a:schemeClr val="accent1"/>
+          </a:effectRef>
+          <a:fontRef idx="minor">
+            <a:schemeClr val="lt1"/>
+          </a:fontRef>
+        </p:style>
+        <p:txBody>
+          <a:bodyPr rtlCol="0" anchor="ctr"/>
+          <a:lstStyle/>
+          <a:p>
+            <a:pPr algn="ctr"/>
+          </a:p>
+        </p:txBody>
+      </p:sp>
+      <p:sp>
+        <p:nvSpPr>
+          <p:cNvPr id="39" name="Rounded Rectangle 38"/>
+          <p:cNvSpPr/>
+          <p:nvPr/>
+        </p:nvSpPr>
+        <p:spPr>
+          <a:xfrm>
+            <a:off x="6364224" y="4256532"/>
+            <a:ext cx="2633472" cy="896112"/>
+          </a:xfrm>
+          <a:prstGeom prst="roundRect">
+            <a:avLst>
+              <a:gd name="adj" fmla="val 10000"/>
+            </a:avLst>
+          </a:prstGeom>
+          <a:solidFill>
+            <a:srgbClr val="F1F3F4"/>
+          </a:solidFill>
+          <a:ln w="19050">
+            <a:solidFill>
+              <a:srgbClr val="C2CBD0"/>
+            </a:solidFill>
+          </a:ln>
+          <a:effectLst/>
+        </p:spPr>
+        <p:style>
+          <a:lnRef idx="1">
+            <a:schemeClr val="accent1"/>
+          </a:lnRef>
+          <a:fillRef idx="3">
+            <a:schemeClr val="accent1"/>
+          </a:fillRef>
+          <a:effectRef idx="2">
+            <a:schemeClr val="accent1"/>
+          </a:effectRef>
+          <a:fontRef idx="minor">
+            <a:schemeClr val="lt1"/>
+          </a:fontRef>
+        </p:style>
+        <p:txBody>
+          <a:bodyPr rtlCol="0" anchor="ctr"/>
+          <a:lstStyle/>
+          <a:p>
+            <a:pPr algn="ctr"/>
+          </a:p>
+        </p:txBody>
+      </p:sp>
+      <p:sp>
+        <p:nvSpPr>
+          <p:cNvPr id="40" name="TextBox 39"/>
+          <p:cNvSpPr txBox="1"/>
+          <p:nvPr/>
+        </p:nvSpPr>
+        <p:spPr>
+          <a:xfrm>
+            <a:off x="6455664" y="4256532"/>
+            <a:ext cx="2450591" cy="896112"/>
+          </a:xfrm>
+          <a:prstGeom prst="rect">
+            <a:avLst/>
+          </a:prstGeom>
+          <a:noFill/>
+        </p:spPr>
+        <p:txBody>
+          <a:bodyPr wrap="square" anchor="ctr" lIns="0" rIns="0" tIns="0" bIns="0">
+            <a:spAutoFit/>
+          </a:bodyPr>
+          <a:lstStyle/>
+          <a:p>
+            <a:pPr algn="ctr"/>
+            <a:r>
+              <a:rPr sz="1150" b="0">
+                <a:solidFill>
+                  <a:srgbClr val="24404D"/>
+                </a:solidFill>
+                <a:latin typeface="Hiragino Sans"/>
+                <a:ea typeface="Hiragino Sans"/>
+                <a:cs typeface="Hiragino Sans"/>
+              </a:rPr>
+              <a:t>スクリプトが「そのサイトの</a:t>
+            </a:r>
+          </a:p>
+          <a:p>
+            <a:pPr algn="ctr"/>
+            <a:r>
+              <a:rPr sz="1150" b="0">
+                <a:solidFill>
+                  <a:srgbClr val="24404D"/>
+                </a:solidFill>
+                <a:latin typeface="Hiragino Sans"/>
+                <a:ea typeface="Hiragino Sans"/>
+                <a:cs typeface="Hiragino Sans"/>
+              </a:rPr>
+              <a:t>ページの一部」として動き、</a:t>
+            </a:r>
+          </a:p>
+          <a:p>
+            <a:pPr algn="ctr"/>
+            <a:r>
+              <a:rPr sz="1150" b="0">
+                <a:solidFill>
+                  <a:srgbClr val="24404D"/>
+                </a:solidFill>
+                <a:latin typeface="Hiragino Sans"/>
+                <a:ea typeface="Hiragino Sans"/>
+                <a:cs typeface="Hiragino Sans"/>
+              </a:rPr>
+              <a:t>Cookieや画面の情報を読む</a:t>
+            </a:r>
+          </a:p>
+        </p:txBody>
+      </p:sp>
+      <p:sp>
+        <p:nvSpPr>
+          <p:cNvPr id="41" name="Rounded Rectangle 40"/>
+          <p:cNvSpPr/>
+          <p:nvPr/>
+        </p:nvSpPr>
+        <p:spPr>
+          <a:xfrm>
+            <a:off x="9089136" y="4256532"/>
+            <a:ext cx="2633472" cy="896112"/>
+          </a:xfrm>
+          <a:prstGeom prst="roundRect">
+            <a:avLst>
+              <a:gd name="adj" fmla="val 10000"/>
+            </a:avLst>
+          </a:prstGeom>
+          <a:solidFill>
+            <a:srgbClr val="FFFFFF"/>
+          </a:solidFill>
+          <a:ln w="19050">
+            <a:solidFill>
+              <a:srgbClr val="F08A24"/>
+            </a:solidFill>
+          </a:ln>
+          <a:effectLst/>
+        </p:spPr>
+        <p:style>
+          <a:lnRef idx="1">
+            <a:schemeClr val="accent1"/>
+          </a:lnRef>
+          <a:fillRef idx="3">
+            <a:schemeClr val="accent1"/>
+          </a:fillRef>
+          <a:effectRef idx="2">
+            <a:schemeClr val="accent1"/>
+          </a:effectRef>
+          <a:fontRef idx="minor">
+            <a:schemeClr val="lt1"/>
+          </a:fontRef>
+        </p:style>
+        <p:txBody>
+          <a:bodyPr rtlCol="0" anchor="ctr"/>
+          <a:lstStyle/>
+          <a:p>
+            <a:pPr algn="ctr"/>
+          </a:p>
+        </p:txBody>
+      </p:sp>
+      <p:sp>
+        <p:nvSpPr>
+          <p:cNvPr id="42" name="TextBox 41"/>
+          <p:cNvSpPr txBox="1"/>
+          <p:nvPr/>
+        </p:nvSpPr>
+        <p:spPr>
+          <a:xfrm>
+            <a:off x="9180576" y="4256532"/>
+            <a:ext cx="2450591" cy="896112"/>
+          </a:xfrm>
+          <a:prstGeom prst="rect">
+            <a:avLst/>
+          </a:prstGeom>
+          <a:noFill/>
+        </p:spPr>
+        <p:txBody>
+          <a:bodyPr wrap="square" anchor="ctr" lIns="0" rIns="0" tIns="0" bIns="0">
+            <a:spAutoFit/>
+          </a:bodyPr>
+          <a:lstStyle/>
+          <a:p>
+            <a:pPr algn="ctr"/>
+            <a:r>
+              <a:rPr sz="1150" b="1">
+                <a:solidFill>
+                  <a:srgbClr val="F08A24"/>
+                </a:solidFill>
+                <a:latin typeface="Hiragino Sans"/>
+                <a:ea typeface="Hiragino Sans"/>
+                <a:cs typeface="Hiragino Sans"/>
+              </a:rPr>
+              <a:t>何も起きていない</a:t>
+            </a:r>
+          </a:p>
+          <a:p>
+            <a:pPr algn="ctr"/>
+            <a:r>
+              <a:rPr sz="1150" b="1">
+                <a:solidFill>
+                  <a:srgbClr val="F08A24"/>
+                </a:solidFill>
+                <a:latin typeface="Hiragino Sans"/>
+                <a:ea typeface="Hiragino Sans"/>
+                <a:cs typeface="Hiragino Sans"/>
+              </a:rPr>
+              <a:t>ように見える</a:t>
+            </a:r>
+          </a:p>
+        </p:txBody>
+      </p:sp>
+      <p:sp>
+        <p:nvSpPr>
+          <p:cNvPr id="43" name="Rounded Rectangle 42"/>
+          <p:cNvSpPr/>
+          <p:nvPr/>
+        </p:nvSpPr>
+        <p:spPr>
+          <a:xfrm>
+            <a:off x="411480" y="5500116"/>
+            <a:ext cx="384048" cy="384048"/>
+          </a:xfrm>
+          <a:prstGeom prst="roundRect">
+            <a:avLst>
+              <a:gd name="adj" fmla="val 50000"/>
+            </a:avLst>
+          </a:prstGeom>
+          <a:solidFill>
+            <a:srgbClr val="24404D"/>
+          </a:solidFill>
+          <a:ln>
+            <a:noFill/>
+          </a:ln>
+          <a:effectLst/>
+        </p:spPr>
+        <p:style>
+          <a:lnRef idx="1">
+            <a:schemeClr val="accent1"/>
+          </a:lnRef>
+          <a:fillRef idx="3">
+            <a:schemeClr val="accent1"/>
+          </a:fillRef>
+          <a:effectRef idx="2">
+            <a:schemeClr val="accent1"/>
+          </a:effectRef>
+          <a:fontRef idx="minor">
+            <a:schemeClr val="lt1"/>
+          </a:fontRef>
+        </p:style>
+        <p:txBody>
+          <a:bodyPr rtlCol="0" anchor="ctr"/>
+          <a:lstStyle/>
+          <a:p>
+            <a:pPr algn="ctr"/>
+          </a:p>
+        </p:txBody>
+      </p:sp>
+      <p:sp>
+        <p:nvSpPr>
+          <p:cNvPr id="44" name="TextBox 43"/>
+          <p:cNvSpPr txBox="1"/>
+          <p:nvPr/>
+        </p:nvSpPr>
+        <p:spPr>
+          <a:xfrm>
+            <a:off x="411480" y="5500116"/>
+            <a:ext cx="384048" cy="384048"/>
+          </a:xfrm>
+          <a:prstGeom prst="rect">
+            <a:avLst/>
+          </a:prstGeom>
+          <a:noFill/>
+        </p:spPr>
+        <p:txBody>
+          <a:bodyPr wrap="square" anchor="ctr" lIns="0" rIns="0" tIns="0" bIns="0">
+            <a:spAutoFit/>
+          </a:bodyPr>
+          <a:lstStyle/>
+          <a:p>
+            <a:pPr algn="ctr"/>
+            <a:r>
+              <a:rPr sz="1400" b="1">
+                <a:solidFill>
+                  <a:srgbClr val="FFFFFF"/>
+                </a:solidFill>
+                <a:latin typeface="Hiragino Sans"/>
+                <a:ea typeface="Hiragino Sans"/>
+                <a:cs typeface="Hiragino Sans"/>
+              </a:rPr>
+              <a:t>5</a:t>
+            </a:r>
+          </a:p>
+        </p:txBody>
+      </p:sp>
+      <p:sp>
+        <p:nvSpPr>
+          <p:cNvPr id="45" name="Rounded Rectangle 44"/>
+          <p:cNvSpPr/>
+          <p:nvPr/>
+        </p:nvSpPr>
+        <p:spPr>
+          <a:xfrm>
+            <a:off x="914400" y="5244084"/>
+            <a:ext cx="2633472" cy="896112"/>
+          </a:xfrm>
+          <a:prstGeom prst="roundRect">
+            <a:avLst>
+              <a:gd name="adj" fmla="val 10000"/>
+            </a:avLst>
+          </a:prstGeom>
+          <a:solidFill>
+            <a:srgbClr val="FBEBEA"/>
+          </a:solidFill>
+          <a:ln w="19050">
+            <a:solidFill>
+              <a:srgbClr val="D9433B"/>
+            </a:solidFill>
+          </a:ln>
+          <a:effectLst/>
+        </p:spPr>
+        <p:style>
+          <a:lnRef idx="1">
+            <a:schemeClr val="accent1"/>
+          </a:lnRef>
+          <a:fillRef idx="3">
+            <a:schemeClr val="accent1"/>
+          </a:fillRef>
+          <a:effectRef idx="2">
+            <a:schemeClr val="accent1"/>
+          </a:effectRef>
+          <a:fontRef idx="minor">
+            <a:schemeClr val="lt1"/>
+          </a:fontRef>
+        </p:style>
+        <p:txBody>
+          <a:bodyPr rtlCol="0" anchor="ctr"/>
+          <a:lstStyle/>
+          <a:p>
+            <a:pPr algn="ctr"/>
+          </a:p>
+        </p:txBody>
+      </p:sp>
+      <p:sp>
+        <p:nvSpPr>
+          <p:cNvPr id="46" name="TextBox 45"/>
+          <p:cNvSpPr txBox="1"/>
+          <p:nvPr/>
+        </p:nvSpPr>
+        <p:spPr>
+          <a:xfrm>
+            <a:off x="1005840" y="5244084"/>
+            <a:ext cx="2450591" cy="896112"/>
+          </a:xfrm>
+          <a:prstGeom prst="rect">
+            <a:avLst/>
+          </a:prstGeom>
+          <a:noFill/>
+        </p:spPr>
+        <p:txBody>
+          <a:bodyPr wrap="square" anchor="ctr" lIns="0" rIns="0" tIns="0" bIns="0">
+            <a:spAutoFit/>
+          </a:bodyPr>
+          <a:lstStyle/>
+          <a:p>
+            <a:pPr algn="ctr"/>
+            <a:r>
+              <a:rPr sz="1150" b="0">
+                <a:solidFill>
+                  <a:srgbClr val="D9433B"/>
+                </a:solidFill>
+                <a:latin typeface="Hiragino Sans"/>
+                <a:ea typeface="Hiragino Sans"/>
+                <a:cs typeface="Hiragino Sans"/>
+              </a:rPr>
+              <a:t>受け取った情報で</a:t>
+            </a:r>
+          </a:p>
+          <a:p>
+            <a:pPr algn="ctr"/>
+            <a:r>
+              <a:rPr sz="1150" b="0">
+                <a:solidFill>
+                  <a:srgbClr val="D9433B"/>
+                </a:solidFill>
+                <a:latin typeface="Hiragino Sans"/>
+                <a:ea typeface="Hiragino Sans"/>
+                <a:cs typeface="Hiragino Sans"/>
+              </a:rPr>
+              <a:t>被害者になりすます</a:t>
+            </a:r>
+          </a:p>
+        </p:txBody>
+      </p:sp>
+      <p:sp>
+        <p:nvSpPr>
+          <p:cNvPr id="47" name="Rounded Rectangle 46"/>
+          <p:cNvSpPr/>
+          <p:nvPr/>
+        </p:nvSpPr>
+        <p:spPr>
+          <a:xfrm>
+            <a:off x="3639312" y="5244084"/>
+            <a:ext cx="2633472" cy="896112"/>
+          </a:xfrm>
+          <a:prstGeom prst="roundRect">
+            <a:avLst>
+              <a:gd name="adj" fmla="val 10000"/>
+            </a:avLst>
+          </a:prstGeom>
+          <a:noFill/>
+          <a:ln w="9525">
+            <a:solidFill>
+              <a:srgbClr val="E4E8EA"/>
+            </a:solidFill>
+          </a:ln>
+          <a:effectLst/>
+        </p:spPr>
+        <p:style>
+          <a:lnRef idx="1">
+            <a:schemeClr val="accent1"/>
+          </a:lnRef>
+          <a:fillRef idx="3">
+            <a:schemeClr val="accent1"/>
+          </a:fillRef>
+          <a:effectRef idx="2">
+            <a:schemeClr val="accent1"/>
+          </a:effectRef>
+          <a:fontRef idx="minor">
+            <a:schemeClr val="lt1"/>
+          </a:fontRef>
+        </p:style>
+        <p:txBody>
+          <a:bodyPr rtlCol="0" anchor="ctr"/>
+          <a:lstStyle/>
+          <a:p>
+            <a:pPr algn="ctr"/>
+          </a:p>
+        </p:txBody>
+      </p:sp>
+      <p:sp>
+        <p:nvSpPr>
+          <p:cNvPr id="48" name="Rounded Rectangle 47"/>
+          <p:cNvSpPr/>
+          <p:nvPr/>
+        </p:nvSpPr>
+        <p:spPr>
+          <a:xfrm>
+            <a:off x="6364224" y="5244084"/>
+            <a:ext cx="2633472" cy="896112"/>
+          </a:xfrm>
+          <a:prstGeom prst="roundRect">
+            <a:avLst>
+              <a:gd name="adj" fmla="val 10000"/>
+            </a:avLst>
+          </a:prstGeom>
+          <a:solidFill>
+            <a:srgbClr val="F1F3F4"/>
+          </a:solidFill>
+          <a:ln w="19050">
+            <a:solidFill>
+              <a:srgbClr val="C2CBD0"/>
+            </a:solidFill>
+          </a:ln>
+          <a:effectLst/>
+        </p:spPr>
+        <p:style>
+          <a:lnRef idx="1">
+            <a:schemeClr val="accent1"/>
+          </a:lnRef>
+          <a:fillRef idx="3">
+            <a:schemeClr val="accent1"/>
+          </a:fillRef>
+          <a:effectRef idx="2">
+            <a:schemeClr val="accent1"/>
+          </a:effectRef>
+          <a:fontRef idx="minor">
+            <a:schemeClr val="lt1"/>
+          </a:fontRef>
+        </p:style>
+        <p:txBody>
+          <a:bodyPr rtlCol="0" anchor="ctr"/>
+          <a:lstStyle/>
+          <a:p>
+            <a:pPr algn="ctr"/>
+          </a:p>
+        </p:txBody>
+      </p:sp>
+      <p:sp>
+        <p:nvSpPr>
+          <p:cNvPr id="49" name="TextBox 48"/>
+          <p:cNvSpPr txBox="1"/>
+          <p:nvPr/>
+        </p:nvSpPr>
+        <p:spPr>
+          <a:xfrm>
+            <a:off x="6455664" y="5244084"/>
+            <a:ext cx="2450591" cy="896112"/>
+          </a:xfrm>
+          <a:prstGeom prst="rect">
+            <a:avLst/>
+          </a:prstGeom>
+          <a:noFill/>
+        </p:spPr>
+        <p:txBody>
+          <a:bodyPr wrap="square" anchor="ctr" lIns="0" rIns="0" tIns="0" bIns="0">
+            <a:spAutoFit/>
+          </a:bodyPr>
+          <a:lstStyle/>
+          <a:p>
+            <a:pPr algn="ctr"/>
+            <a:r>
+              <a:rPr sz="1150" b="0">
+                <a:solidFill>
+                  <a:srgbClr val="24404D"/>
+                </a:solidFill>
+                <a:latin typeface="Hiragino Sans"/>
+                <a:ea typeface="Hiragino Sans"/>
+                <a:cs typeface="Hiragino Sans"/>
+              </a:rPr>
+              <a:t>読んだ情報を、</a:t>
+            </a:r>
+          </a:p>
+          <a:p>
+            <a:pPr algn="ctr"/>
+            <a:r>
+              <a:rPr sz="1150" b="0">
+                <a:solidFill>
+                  <a:srgbClr val="24404D"/>
+                </a:solidFill>
+                <a:latin typeface="Hiragino Sans"/>
+                <a:ea typeface="Hiragino Sans"/>
+                <a:cs typeface="Hiragino Sans"/>
+              </a:rPr>
+              <a:t>攻撃者のサーバへ送る</a:t>
+            </a:r>
+          </a:p>
+        </p:txBody>
+      </p:sp>
+      <p:sp>
+        <p:nvSpPr>
+          <p:cNvPr id="50" name="Rounded Rectangle 49"/>
+          <p:cNvSpPr/>
+          <p:nvPr/>
+        </p:nvSpPr>
+        <p:spPr>
+          <a:xfrm>
+            <a:off x="9089136" y="5244084"/>
+            <a:ext cx="2633472" cy="896112"/>
+          </a:xfrm>
+          <a:prstGeom prst="roundRect">
+            <a:avLst>
+              <a:gd name="adj" fmla="val 10000"/>
+            </a:avLst>
+          </a:prstGeom>
+          <a:solidFill>
+            <a:srgbClr val="FFFFFF"/>
+          </a:solidFill>
+          <a:ln w="19050">
+            <a:solidFill>
+              <a:srgbClr val="F08A24"/>
+            </a:solidFill>
+          </a:ln>
+          <a:effectLst/>
+        </p:spPr>
+        <p:style>
+          <a:lnRef idx="1">
+            <a:schemeClr val="accent1"/>
+          </a:lnRef>
+          <a:fillRef idx="3">
+            <a:schemeClr val="accent1"/>
+          </a:fillRef>
+          <a:effectRef idx="2">
+            <a:schemeClr val="accent1"/>
+          </a:effectRef>
+          <a:fontRef idx="minor">
+            <a:schemeClr val="lt1"/>
+          </a:fontRef>
+        </p:style>
+        <p:txBody>
+          <a:bodyPr rtlCol="0" anchor="ctr"/>
+          <a:lstStyle/>
+          <a:p>
+            <a:pPr algn="ctr"/>
+          </a:p>
+        </p:txBody>
+      </p:sp>
+      <p:sp>
+        <p:nvSpPr>
+          <p:cNvPr id="51" name="TextBox 50"/>
+          <p:cNvSpPr txBox="1"/>
+          <p:nvPr/>
+        </p:nvSpPr>
+        <p:spPr>
+          <a:xfrm>
+            <a:off x="9180576" y="5244084"/>
+            <a:ext cx="2450591" cy="896112"/>
+          </a:xfrm>
+          <a:prstGeom prst="rect">
+            <a:avLst/>
+          </a:prstGeom>
+          <a:noFill/>
+        </p:spPr>
+        <p:txBody>
+          <a:bodyPr wrap="square" anchor="ctr" lIns="0" rIns="0" tIns="0" bIns="0">
+            <a:spAutoFit/>
+          </a:bodyPr>
+          <a:lstStyle/>
+          <a:p>
+            <a:pPr algn="ctr"/>
+            <a:r>
+              <a:rPr sz="1150" b="1">
+                <a:solidFill>
+                  <a:srgbClr val="F08A24"/>
+                </a:solidFill>
+                <a:latin typeface="Hiragino Sans"/>
+                <a:ea typeface="Hiragino Sans"/>
+                <a:cs typeface="Hiragino Sans"/>
+              </a:rPr>
+              <a:t>気づかない</a:t>
+            </a:r>
+          </a:p>
+        </p:txBody>
+      </p:sp>
+    </p:spTree>
+  </p:cSld>
+  <p:clrMapOvr>
+    <a:masterClrMapping/>
+  </p:clrMapOvr>
+</p:sld>
+</file>
+
+<file path=ppt/slides/slide7.xml><?xml version="1.0" encoding="utf-8"?>
+<p:sld xmlns:a="http://schemas.openxmlformats.org/drawingml/2006/main" xmlns:p="http://schemas.openxmlformats.org/presentationml/2006/main" xmlns:r="http://schemas.openxmlformats.org/officeDocument/2006/relationships">
+  <p:cSld>
+    <p:spTree>
+      <p:nvGrpSpPr>
+        <p:cNvPr id="1" name=""/>
+        <p:cNvGrpSpPr/>
+        <p:nvPr/>
+      </p:nvGrpSpPr>
+      <p:grpSpPr/>
+      <p:sp>
+        <p:nvSpPr>
+          <p:cNvPr id="2" name="Rounded Rectangle 1"/>
+          <p:cNvSpPr/>
+          <p:nvPr/>
+        </p:nvSpPr>
+        <p:spPr>
+          <a:xfrm>
+            <a:off x="457200" y="996696"/>
+            <a:ext cx="1682495" cy="457200"/>
+          </a:xfrm>
+          <a:prstGeom prst="roundRect">
+            <a:avLst>
+              <a:gd name="adj" fmla="val 12000"/>
+            </a:avLst>
+          </a:prstGeom>
+          <a:solidFill>
+            <a:srgbClr val="24404D"/>
+          </a:solidFill>
+          <a:ln>
+            <a:noFill/>
+          </a:ln>
+          <a:effectLst/>
+        </p:spPr>
+        <p:style>
+          <a:lnRef idx="1">
+            <a:schemeClr val="accent1"/>
+          </a:lnRef>
+          <a:fillRef idx="3">
+            <a:schemeClr val="accent1"/>
+          </a:fillRef>
+          <a:effectRef idx="2">
+            <a:schemeClr val="accent1"/>
+          </a:effectRef>
+          <a:fontRef idx="minor">
+            <a:schemeClr val="lt1"/>
+          </a:fontRef>
+        </p:style>
+        <p:txBody>
+          <a:bodyPr rtlCol="0" anchor="ctr"/>
+          <a:lstStyle/>
+          <a:p>
+            <a:pPr algn="ctr"/>
+          </a:p>
+        </p:txBody>
+      </p:sp>
+      <p:sp>
+        <p:nvSpPr>
+          <p:cNvPr id="3" name="TextBox 2"/>
+          <p:cNvSpPr txBox="1"/>
+          <p:nvPr/>
+        </p:nvSpPr>
+        <p:spPr>
+          <a:xfrm>
+            <a:off x="457200" y="996696"/>
+            <a:ext cx="1682495" cy="457200"/>
+          </a:xfrm>
+          <a:prstGeom prst="rect">
+            <a:avLst/>
+          </a:prstGeom>
+          <a:noFill/>
+        </p:spPr>
+        <p:txBody>
+          <a:bodyPr wrap="square" anchor="ctr" lIns="0" rIns="0" tIns="0" bIns="0">
+            <a:spAutoFit/>
+          </a:bodyPr>
+          <a:lstStyle/>
+          <a:p>
+            <a:pPr algn="ctr"/>
+            <a:r>
+              <a:rPr sz="1200" b="1">
+                <a:solidFill>
+                  <a:srgbClr val="FFFFFF"/>
+                </a:solidFill>
+                <a:latin typeface="Hiragino Sans"/>
+                <a:ea typeface="Hiragino Sans"/>
+                <a:cs typeface="Hiragino Sans"/>
+              </a:rPr>
+              <a:t>種類</a:t>
+            </a:r>
+          </a:p>
+        </p:txBody>
+      </p:sp>
+      <p:sp>
+        <p:nvSpPr>
+          <p:cNvPr id="4" name="Rounded Rectangle 3"/>
+          <p:cNvSpPr/>
+          <p:nvPr/>
+        </p:nvSpPr>
+        <p:spPr>
+          <a:xfrm>
+            <a:off x="2194560" y="996696"/>
+            <a:ext cx="2962656" cy="457200"/>
+          </a:xfrm>
+          <a:prstGeom prst="roundRect">
+            <a:avLst>
+              <a:gd name="adj" fmla="val 12000"/>
+            </a:avLst>
+          </a:prstGeom>
+          <a:solidFill>
+            <a:srgbClr val="24404D"/>
+          </a:solidFill>
+          <a:ln>
+            <a:noFill/>
+          </a:ln>
+          <a:effectLst/>
+        </p:spPr>
+        <p:style>
+          <a:lnRef idx="1">
+            <a:schemeClr val="accent1"/>
+          </a:lnRef>
+          <a:fillRef idx="3">
+            <a:schemeClr val="accent1"/>
+          </a:fillRef>
+          <a:effectRef idx="2">
+            <a:schemeClr val="accent1"/>
+          </a:effectRef>
+          <a:fontRef idx="minor">
+            <a:schemeClr val="lt1"/>
+          </a:fontRef>
+        </p:style>
+        <p:txBody>
+          <a:bodyPr rtlCol="0" anchor="ctr"/>
+          <a:lstStyle/>
+          <a:p>
+            <a:pPr algn="ctr"/>
+          </a:p>
+        </p:txBody>
+      </p:sp>
+      <p:sp>
+        <p:nvSpPr>
+          <p:cNvPr id="5" name="TextBox 4"/>
+          <p:cNvSpPr txBox="1"/>
+          <p:nvPr/>
+        </p:nvSpPr>
+        <p:spPr>
+          <a:xfrm>
+            <a:off x="2194560" y="996696"/>
+            <a:ext cx="2962656" cy="457200"/>
+          </a:xfrm>
+          <a:prstGeom prst="rect">
+            <a:avLst/>
+          </a:prstGeom>
+          <a:noFill/>
+        </p:spPr>
+        <p:txBody>
+          <a:bodyPr wrap="square" anchor="ctr" lIns="0" rIns="0" tIns="0" bIns="0">
+            <a:spAutoFit/>
+          </a:bodyPr>
+          <a:lstStyle/>
+          <a:p>
+            <a:pPr algn="ctr"/>
+            <a:r>
+              <a:rPr sz="1200" b="1">
+                <a:solidFill>
+                  <a:srgbClr val="FFFFFF"/>
+                </a:solidFill>
+                <a:latin typeface="Hiragino Sans"/>
+                <a:ea typeface="Hiragino Sans"/>
+                <a:cs typeface="Hiragino Sans"/>
+              </a:rPr>
+              <a:t>罠を仕込む場所</a:t>
+            </a:r>
+          </a:p>
+        </p:txBody>
+      </p:sp>
+      <p:sp>
+        <p:nvSpPr>
+          <p:cNvPr id="6" name="Rounded Rectangle 5"/>
+          <p:cNvSpPr/>
+          <p:nvPr/>
+        </p:nvSpPr>
+        <p:spPr>
+          <a:xfrm>
+            <a:off x="5212079" y="996696"/>
+            <a:ext cx="3054096" cy="457200"/>
+          </a:xfrm>
+          <a:prstGeom prst="roundRect">
+            <a:avLst>
+              <a:gd name="adj" fmla="val 12000"/>
+            </a:avLst>
+          </a:prstGeom>
+          <a:solidFill>
+            <a:srgbClr val="24404D"/>
+          </a:solidFill>
+          <a:ln>
+            <a:noFill/>
+          </a:ln>
+          <a:effectLst/>
+        </p:spPr>
+        <p:style>
+          <a:lnRef idx="1">
+            <a:schemeClr val="accent1"/>
+          </a:lnRef>
+          <a:fillRef idx="3">
+            <a:schemeClr val="accent1"/>
+          </a:fillRef>
+          <a:effectRef idx="2">
+            <a:schemeClr val="accent1"/>
+          </a:effectRef>
+          <a:fontRef idx="minor">
+            <a:schemeClr val="lt1"/>
+          </a:fontRef>
+        </p:style>
+        <p:txBody>
+          <a:bodyPr rtlCol="0" anchor="ctr"/>
+          <a:lstStyle/>
+          <a:p>
+            <a:pPr algn="ctr"/>
+          </a:p>
+        </p:txBody>
+      </p:sp>
+      <p:sp>
+        <p:nvSpPr>
+          <p:cNvPr id="7" name="TextBox 6"/>
+          <p:cNvSpPr txBox="1"/>
+          <p:nvPr/>
+        </p:nvSpPr>
+        <p:spPr>
+          <a:xfrm>
+            <a:off x="5212079" y="996696"/>
+            <a:ext cx="3054096" cy="457200"/>
+          </a:xfrm>
+          <a:prstGeom prst="rect">
+            <a:avLst/>
+          </a:prstGeom>
+          <a:noFill/>
+        </p:spPr>
+        <p:txBody>
+          <a:bodyPr wrap="square" anchor="ctr" lIns="0" rIns="0" tIns="0" bIns="0">
+            <a:spAutoFit/>
+          </a:bodyPr>
+          <a:lstStyle/>
+          <a:p>
+            <a:pPr algn="ctr"/>
+            <a:r>
+              <a:rPr sz="1200" b="1">
+                <a:solidFill>
+                  <a:srgbClr val="FFFFFF"/>
+                </a:solidFill>
+                <a:latin typeface="Hiragino Sans"/>
+                <a:ea typeface="Hiragino Sans"/>
+                <a:cs typeface="Hiragino Sans"/>
+              </a:rPr>
+              <a:t>文字列をHTMLに入れるのは</a:t>
+            </a:r>
+          </a:p>
+        </p:txBody>
+      </p:sp>
+      <p:sp>
+        <p:nvSpPr>
+          <p:cNvPr id="8" name="Rounded Rectangle 7"/>
+          <p:cNvSpPr/>
+          <p:nvPr/>
+        </p:nvSpPr>
+        <p:spPr>
+          <a:xfrm>
+            <a:off x="8321040" y="996696"/>
+            <a:ext cx="3355848" cy="457200"/>
+          </a:xfrm>
+          <a:prstGeom prst="roundRect">
+            <a:avLst>
+              <a:gd name="adj" fmla="val 12000"/>
+            </a:avLst>
+          </a:prstGeom>
+          <a:solidFill>
+            <a:srgbClr val="24404D"/>
+          </a:solidFill>
+          <a:ln>
+            <a:noFill/>
+          </a:ln>
+          <a:effectLst/>
+        </p:spPr>
+        <p:style>
+          <a:lnRef idx="1">
+            <a:schemeClr val="accent1"/>
+          </a:lnRef>
+          <a:fillRef idx="3">
+            <a:schemeClr val="accent1"/>
+          </a:fillRef>
+          <a:effectRef idx="2">
+            <a:schemeClr val="accent1"/>
+          </a:effectRef>
+          <a:fontRef idx="minor">
+            <a:schemeClr val="lt1"/>
+          </a:fontRef>
+        </p:style>
+        <p:txBody>
+          <a:bodyPr rtlCol="0" anchor="ctr"/>
+          <a:lstStyle/>
+          <a:p>
+            <a:pPr algn="ctr"/>
+          </a:p>
+        </p:txBody>
+      </p:sp>
+      <p:sp>
+        <p:nvSpPr>
+          <p:cNvPr id="9" name="TextBox 8"/>
+          <p:cNvSpPr txBox="1"/>
+          <p:nvPr/>
+        </p:nvSpPr>
+        <p:spPr>
+          <a:xfrm>
+            <a:off x="8321040" y="996696"/>
+            <a:ext cx="3355848" cy="457200"/>
+          </a:xfrm>
+          <a:prstGeom prst="rect">
+            <a:avLst/>
+          </a:prstGeom>
+          <a:noFill/>
+        </p:spPr>
+        <p:txBody>
+          <a:bodyPr wrap="square" anchor="ctr" lIns="0" rIns="0" tIns="0" bIns="0">
+            <a:spAutoFit/>
+          </a:bodyPr>
+          <a:lstStyle/>
+          <a:p>
+            <a:pPr algn="ctr"/>
+            <a:r>
+              <a:rPr sz="1200" b="1">
+                <a:solidFill>
+                  <a:srgbClr val="FFFFFF"/>
+                </a:solidFill>
+                <a:latin typeface="Hiragino Sans"/>
+                <a:ea typeface="Hiragino Sans"/>
+                <a:cs typeface="Hiragino Sans"/>
+              </a:rPr>
+              <a:t>被害者が踏むきっかけ</a:t>
+            </a:r>
+          </a:p>
+        </p:txBody>
+      </p:sp>
+      <p:sp>
+        <p:nvSpPr>
+          <p:cNvPr id="10" name="Rounded Rectangle 9"/>
+          <p:cNvSpPr/>
+          <p:nvPr/>
+        </p:nvSpPr>
+        <p:spPr>
+          <a:xfrm>
+            <a:off x="457200" y="1545336"/>
+            <a:ext cx="1682495" cy="1143000"/>
+          </a:xfrm>
+          <a:prstGeom prst="roundRect">
+            <a:avLst>
+              <a:gd name="adj" fmla="val 10000"/>
+            </a:avLst>
+          </a:prstGeom>
+          <a:solidFill>
+            <a:srgbClr val="FBEBEA"/>
+          </a:solidFill>
+          <a:ln w="19050">
+            <a:solidFill>
+              <a:srgbClr val="D9433B"/>
+            </a:solidFill>
+          </a:ln>
+          <a:effectLst/>
+        </p:spPr>
+        <p:style>
+          <a:lnRef idx="1">
+            <a:schemeClr val="accent1"/>
+          </a:lnRef>
+          <a:fillRef idx="3">
+            <a:schemeClr val="accent1"/>
+          </a:fillRef>
+          <a:effectRef idx="2">
+            <a:schemeClr val="accent1"/>
+          </a:effectRef>
+          <a:fontRef idx="minor">
+            <a:schemeClr val="lt1"/>
+          </a:fontRef>
+        </p:style>
+        <p:txBody>
+          <a:bodyPr rtlCol="0" anchor="ctr"/>
+          <a:lstStyle/>
+          <a:p>
+            <a:pPr algn="ctr"/>
+          </a:p>
+        </p:txBody>
+      </p:sp>
+      <p:sp>
+        <p:nvSpPr>
+          <p:cNvPr id="11" name="TextBox 10"/>
+          <p:cNvSpPr txBox="1"/>
+          <p:nvPr/>
+        </p:nvSpPr>
+        <p:spPr>
+          <a:xfrm>
+            <a:off x="457200" y="1545336"/>
+            <a:ext cx="1682495" cy="1143000"/>
+          </a:xfrm>
+          <a:prstGeom prst="rect">
+            <a:avLst/>
+          </a:prstGeom>
+          <a:noFill/>
+        </p:spPr>
+        <p:txBody>
+          <a:bodyPr wrap="square" anchor="ctr" lIns="0" rIns="0" tIns="0" bIns="0">
+            <a:spAutoFit/>
+          </a:bodyPr>
+          <a:lstStyle/>
+          <a:p>
+            <a:pPr algn="ctr"/>
+            <a:r>
+              <a:rPr sz="1600" b="1">
+                <a:solidFill>
+                  <a:srgbClr val="D9433B"/>
+                </a:solidFill>
+                <a:latin typeface="Hiragino Sans"/>
+                <a:ea typeface="Hiragino Sans"/>
+                <a:cs typeface="Hiragino Sans"/>
+              </a:rPr>
+              <a:t>反射型</a:t>
+            </a:r>
+          </a:p>
+        </p:txBody>
+      </p:sp>
+      <p:sp>
+        <p:nvSpPr>
+          <p:cNvPr id="12" name="Rounded Rectangle 11"/>
+          <p:cNvSpPr/>
+          <p:nvPr/>
+        </p:nvSpPr>
+        <p:spPr>
+          <a:xfrm>
+            <a:off x="2194560" y="1545336"/>
+            <a:ext cx="2962656" cy="1143000"/>
+          </a:xfrm>
+          <a:prstGeom prst="roundRect">
+            <a:avLst>
+              <a:gd name="adj" fmla="val 8000"/>
+            </a:avLst>
+          </a:prstGeom>
+          <a:solidFill>
+            <a:srgbClr val="FFFFFF"/>
+          </a:solidFill>
+          <a:ln w="12700">
+            <a:solidFill>
+              <a:srgbClr val="C2CBD0"/>
+            </a:solidFill>
+          </a:ln>
+          <a:effectLst/>
+        </p:spPr>
+        <p:style>
+          <a:lnRef idx="1">
+            <a:schemeClr val="accent1"/>
+          </a:lnRef>
+          <a:fillRef idx="3">
+            <a:schemeClr val="accent1"/>
+          </a:fillRef>
+          <a:effectRef idx="2">
+            <a:schemeClr val="accent1"/>
+          </a:effectRef>
+          <a:fontRef idx="minor">
+            <a:schemeClr val="lt1"/>
+          </a:fontRef>
+        </p:style>
+        <p:txBody>
+          <a:bodyPr rtlCol="0" anchor="ctr"/>
+          <a:lstStyle/>
+          <a:p>
+            <a:pPr algn="ctr"/>
+          </a:p>
+        </p:txBody>
+      </p:sp>
+      <p:sp>
+        <p:nvSpPr>
+          <p:cNvPr id="13" name="TextBox 12"/>
+          <p:cNvSpPr txBox="1"/>
+          <p:nvPr/>
+        </p:nvSpPr>
+        <p:spPr>
+          <a:xfrm>
+            <a:off x="2331720" y="1545336"/>
+            <a:ext cx="2688336" cy="1143000"/>
+          </a:xfrm>
+          <a:prstGeom prst="rect">
+            <a:avLst/>
+          </a:prstGeom>
+          <a:noFill/>
+        </p:spPr>
+        <p:txBody>
+          <a:bodyPr wrap="square" anchor="ctr" lIns="0" rIns="0" tIns="0" bIns="0">
+            <a:spAutoFit/>
+          </a:bodyPr>
+          <a:lstStyle/>
+          <a:p>
+            <a:pPr algn="l"/>
+            <a:r>
+              <a:rPr sz="1200" b="0">
+                <a:solidFill>
+                  <a:srgbClr val="24404D"/>
+                </a:solidFill>
+                <a:latin typeface="Hiragino Sans"/>
+                <a:ea typeface="Hiragino Sans"/>
+                <a:cs typeface="Hiragino Sans"/>
+              </a:rPr>
+              <a:t>罠URLのクエリ（? 以降）</a:t>
+            </a:r>
+          </a:p>
+        </p:txBody>
+      </p:sp>
+      <p:sp>
+        <p:nvSpPr>
+          <p:cNvPr id="14" name="Rounded Rectangle 13"/>
+          <p:cNvSpPr/>
+          <p:nvPr/>
+        </p:nvSpPr>
+        <p:spPr>
+          <a:xfrm>
+            <a:off x="5212079" y="1545336"/>
+            <a:ext cx="3054096" cy="1143000"/>
+          </a:xfrm>
+          <a:prstGeom prst="roundRect">
+            <a:avLst>
+              <a:gd name="adj" fmla="val 8000"/>
+            </a:avLst>
+          </a:prstGeom>
+          <a:solidFill>
+            <a:srgbClr val="E6F5F2"/>
+          </a:solidFill>
+          <a:ln w="19050">
+            <a:solidFill>
+              <a:srgbClr val="1AA69A"/>
+            </a:solidFill>
+          </a:ln>
+          <a:effectLst/>
+        </p:spPr>
+        <p:style>
+          <a:lnRef idx="1">
+            <a:schemeClr val="accent1"/>
+          </a:lnRef>
+          <a:fillRef idx="3">
+            <a:schemeClr val="accent1"/>
+          </a:fillRef>
+          <a:effectRef idx="2">
+            <a:schemeClr val="accent1"/>
+          </a:effectRef>
+          <a:fontRef idx="minor">
+            <a:schemeClr val="lt1"/>
+          </a:fontRef>
+        </p:style>
+        <p:txBody>
+          <a:bodyPr rtlCol="0" anchor="ctr"/>
+          <a:lstStyle/>
+          <a:p>
+            <a:pPr algn="ctr"/>
+          </a:p>
+        </p:txBody>
+      </p:sp>
+      <p:sp>
+        <p:nvSpPr>
+          <p:cNvPr id="15" name="TextBox 14"/>
+          <p:cNvSpPr txBox="1"/>
+          <p:nvPr/>
+        </p:nvSpPr>
+        <p:spPr>
+          <a:xfrm>
+            <a:off x="5349240" y="1545336"/>
+            <a:ext cx="2779776" cy="1143000"/>
+          </a:xfrm>
+          <a:prstGeom prst="rect">
+            <a:avLst/>
+          </a:prstGeom>
+          <a:noFill/>
+        </p:spPr>
+        <p:txBody>
+          <a:bodyPr wrap="square" anchor="ctr" lIns="0" rIns="0" tIns="0" bIns="0">
+            <a:spAutoFit/>
+          </a:bodyPr>
+          <a:lstStyle/>
+          <a:p>
+            <a:pPr algn="l"/>
+            <a:r>
+              <a:rPr sz="1300" b="1">
+                <a:solidFill>
+                  <a:srgbClr val="0E7C72"/>
+                </a:solidFill>
+                <a:latin typeface="Hiragino Sans"/>
+                <a:ea typeface="Hiragino Sans"/>
+                <a:cs typeface="Hiragino Sans"/>
+              </a:rPr>
+              <a:t>サーバ</a:t>
+            </a:r>
+          </a:p>
+          <a:p>
+            <a:pPr algn="l"/>
+            <a:r>
+              <a:rPr sz="1100" b="0">
+                <a:solidFill>
+                  <a:srgbClr val="24404D"/>
+                </a:solidFill>
+                <a:latin typeface="Hiragino Sans"/>
+                <a:ea typeface="Hiragino Sans"/>
+                <a:cs typeface="Hiragino Sans"/>
+              </a:rPr>
+              <a:t>リクエストの値を、</a:t>
+            </a:r>
+          </a:p>
+          <a:p>
+            <a:pPr algn="l"/>
+            <a:r>
+              <a:rPr sz="1100" b="0">
+                <a:solidFill>
+                  <a:srgbClr val="24404D"/>
+                </a:solidFill>
+                <a:latin typeface="Hiragino Sans"/>
+                <a:ea typeface="Hiragino Sans"/>
+                <a:cs typeface="Hiragino Sans"/>
+              </a:rPr>
+              <a:t>そのまま応答のHTMLに入れる</a:t>
+            </a:r>
+          </a:p>
+        </p:txBody>
+      </p:sp>
+      <p:sp>
+        <p:nvSpPr>
+          <p:cNvPr id="16" name="Rounded Rectangle 15"/>
+          <p:cNvSpPr/>
+          <p:nvPr/>
+        </p:nvSpPr>
+        <p:spPr>
+          <a:xfrm>
+            <a:off x="8321040" y="1545336"/>
+            <a:ext cx="3355848" cy="1143000"/>
+          </a:xfrm>
+          <a:prstGeom prst="roundRect">
+            <a:avLst>
+              <a:gd name="adj" fmla="val 8000"/>
+            </a:avLst>
+          </a:prstGeom>
+          <a:solidFill>
+            <a:srgbClr val="FFFFFF"/>
+          </a:solidFill>
+          <a:ln w="12700">
+            <a:solidFill>
+              <a:srgbClr val="C2CBD0"/>
+            </a:solidFill>
+          </a:ln>
+          <a:effectLst/>
+        </p:spPr>
+        <p:style>
+          <a:lnRef idx="1">
+            <a:schemeClr val="accent1"/>
+          </a:lnRef>
+          <a:fillRef idx="3">
+            <a:schemeClr val="accent1"/>
+          </a:fillRef>
+          <a:effectRef idx="2">
+            <a:schemeClr val="accent1"/>
+          </a:effectRef>
+          <a:fontRef idx="minor">
+            <a:schemeClr val="lt1"/>
+          </a:fontRef>
+        </p:style>
+        <p:txBody>
+          <a:bodyPr rtlCol="0" anchor="ctr"/>
+          <a:lstStyle/>
+          <a:p>
+            <a:pPr algn="ctr"/>
+          </a:p>
+        </p:txBody>
+      </p:sp>
+      <p:sp>
+        <p:nvSpPr>
+          <p:cNvPr id="17" name="TextBox 16"/>
+          <p:cNvSpPr txBox="1"/>
+          <p:nvPr/>
+        </p:nvSpPr>
+        <p:spPr>
+          <a:xfrm>
+            <a:off x="8458200" y="1545336"/>
+            <a:ext cx="3081528" cy="1143000"/>
+          </a:xfrm>
+          <a:prstGeom prst="rect">
+            <a:avLst/>
+          </a:prstGeom>
+          <a:noFill/>
+        </p:spPr>
+        <p:txBody>
+          <a:bodyPr wrap="square" anchor="ctr" lIns="0" rIns="0" tIns="0" bIns="0">
+            <a:spAutoFit/>
+          </a:bodyPr>
+          <a:lstStyle/>
+          <a:p>
+            <a:pPr algn="l"/>
+            <a:r>
+              <a:rPr sz="1200" b="0">
+                <a:solidFill>
+                  <a:srgbClr val="24404D"/>
+                </a:solidFill>
+                <a:latin typeface="Hiragino Sans"/>
+                <a:ea typeface="Hiragino Sans"/>
+                <a:cs typeface="Hiragino Sans"/>
+              </a:rPr>
+              <a:t>攻撃者が送った罠URLを</a:t>
+            </a:r>
+          </a:p>
+          <a:p>
+            <a:pPr algn="l"/>
+            <a:r>
+              <a:rPr sz="1200" b="0">
+                <a:solidFill>
+                  <a:srgbClr val="24404D"/>
+                </a:solidFill>
+                <a:latin typeface="Hiragino Sans"/>
+                <a:ea typeface="Hiragino Sans"/>
+                <a:cs typeface="Hiragino Sans"/>
+              </a:rPr>
+              <a:t>被害者がクリックする</a:t>
+            </a:r>
+          </a:p>
+        </p:txBody>
+      </p:sp>
+      <p:sp>
+        <p:nvSpPr>
+          <p:cNvPr id="18" name="Rounded Rectangle 17"/>
+          <p:cNvSpPr/>
+          <p:nvPr/>
+        </p:nvSpPr>
+        <p:spPr>
+          <a:xfrm>
+            <a:off x="457200" y="2779776"/>
+            <a:ext cx="1682495" cy="1143000"/>
+          </a:xfrm>
+          <a:prstGeom prst="roundRect">
+            <a:avLst>
+              <a:gd name="adj" fmla="val 10000"/>
+            </a:avLst>
+          </a:prstGeom>
+          <a:solidFill>
+            <a:srgbClr val="FBEBEA"/>
+          </a:solidFill>
+          <a:ln w="19050">
+            <a:solidFill>
+              <a:srgbClr val="D9433B"/>
+            </a:solidFill>
+          </a:ln>
+          <a:effectLst/>
+        </p:spPr>
+        <p:style>
+          <a:lnRef idx="1">
+            <a:schemeClr val="accent1"/>
+          </a:lnRef>
+          <a:fillRef idx="3">
+            <a:schemeClr val="accent1"/>
+          </a:fillRef>
+          <a:effectRef idx="2">
+            <a:schemeClr val="accent1"/>
+          </a:effectRef>
+          <a:fontRef idx="minor">
+            <a:schemeClr val="lt1"/>
+          </a:fontRef>
+        </p:style>
+        <p:txBody>
+          <a:bodyPr rtlCol="0" anchor="ctr"/>
+          <a:lstStyle/>
+          <a:p>
+            <a:pPr algn="ctr"/>
+          </a:p>
+        </p:txBody>
+      </p:sp>
+      <p:sp>
+        <p:nvSpPr>
+          <p:cNvPr id="19" name="TextBox 18"/>
+          <p:cNvSpPr txBox="1"/>
+          <p:nvPr/>
+        </p:nvSpPr>
+        <p:spPr>
+          <a:xfrm>
+            <a:off x="457200" y="2779776"/>
+            <a:ext cx="1682495" cy="1143000"/>
+          </a:xfrm>
+          <a:prstGeom prst="rect">
+            <a:avLst/>
+          </a:prstGeom>
+          <a:noFill/>
+        </p:spPr>
+        <p:txBody>
+          <a:bodyPr wrap="square" anchor="ctr" lIns="0" rIns="0" tIns="0" bIns="0">
+            <a:spAutoFit/>
+          </a:bodyPr>
+          <a:lstStyle/>
+          <a:p>
+            <a:pPr algn="ctr"/>
+            <a:r>
+              <a:rPr sz="1600" b="1">
+                <a:solidFill>
+                  <a:srgbClr val="D9433B"/>
+                </a:solidFill>
+                <a:latin typeface="Hiragino Sans"/>
+                <a:ea typeface="Hiragino Sans"/>
+                <a:cs typeface="Hiragino Sans"/>
+              </a:rPr>
+              <a:t>格納型</a:t>
+            </a:r>
+          </a:p>
+        </p:txBody>
+      </p:sp>
+      <p:sp>
+        <p:nvSpPr>
+          <p:cNvPr id="20" name="Rounded Rectangle 19"/>
+          <p:cNvSpPr/>
+          <p:nvPr/>
+        </p:nvSpPr>
+        <p:spPr>
+          <a:xfrm>
+            <a:off x="2194560" y="2779776"/>
+            <a:ext cx="2962656" cy="1143000"/>
+          </a:xfrm>
+          <a:prstGeom prst="roundRect">
+            <a:avLst>
+              <a:gd name="adj" fmla="val 8000"/>
+            </a:avLst>
+          </a:prstGeom>
+          <a:solidFill>
+            <a:srgbClr val="FFFFFF"/>
+          </a:solidFill>
+          <a:ln w="12700">
+            <a:solidFill>
+              <a:srgbClr val="C2CBD0"/>
+            </a:solidFill>
+          </a:ln>
+          <a:effectLst/>
+        </p:spPr>
+        <p:style>
+          <a:lnRef idx="1">
+            <a:schemeClr val="accent1"/>
+          </a:lnRef>
+          <a:fillRef idx="3">
+            <a:schemeClr val="accent1"/>
+          </a:fillRef>
+          <a:effectRef idx="2">
+            <a:schemeClr val="accent1"/>
+          </a:effectRef>
+          <a:fontRef idx="minor">
+            <a:schemeClr val="lt1"/>
+          </a:fontRef>
+        </p:style>
+        <p:txBody>
+          <a:bodyPr rtlCol="0" anchor="ctr"/>
+          <a:lstStyle/>
+          <a:p>
+            <a:pPr algn="ctr"/>
+          </a:p>
+        </p:txBody>
+      </p:sp>
+      <p:sp>
+        <p:nvSpPr>
+          <p:cNvPr id="21" name="TextBox 20"/>
+          <p:cNvSpPr txBox="1"/>
+          <p:nvPr/>
+        </p:nvSpPr>
+        <p:spPr>
+          <a:xfrm>
+            <a:off x="2331720" y="2779776"/>
+            <a:ext cx="2688336" cy="1143000"/>
+          </a:xfrm>
+          <a:prstGeom prst="rect">
+            <a:avLst/>
+          </a:prstGeom>
+          <a:noFill/>
+        </p:spPr>
+        <p:txBody>
+          <a:bodyPr wrap="square" anchor="ctr" lIns="0" rIns="0" tIns="0" bIns="0">
+            <a:spAutoFit/>
+          </a:bodyPr>
+          <a:lstStyle/>
+          <a:p>
+            <a:pPr algn="l"/>
+            <a:r>
+              <a:rPr sz="1200" b="0">
+                <a:solidFill>
+                  <a:srgbClr val="24404D"/>
+                </a:solidFill>
+                <a:latin typeface="Hiragino Sans"/>
+                <a:ea typeface="Hiragino Sans"/>
+                <a:cs typeface="Hiragino Sans"/>
+              </a:rPr>
+              <a:t>掲示板の投稿など、</a:t>
+            </a:r>
+          </a:p>
+          <a:p>
+            <a:pPr algn="l"/>
+            <a:r>
+              <a:rPr sz="1200" b="0">
+                <a:solidFill>
+                  <a:srgbClr val="24404D"/>
+                </a:solidFill>
+                <a:latin typeface="Hiragino Sans"/>
+                <a:ea typeface="Hiragino Sans"/>
+                <a:cs typeface="Hiragino Sans"/>
+              </a:rPr>
+              <a:t>サーバに保存されるデータ</a:t>
+            </a:r>
+          </a:p>
+        </p:txBody>
+      </p:sp>
+      <p:sp>
+        <p:nvSpPr>
+          <p:cNvPr id="22" name="Rounded Rectangle 21"/>
+          <p:cNvSpPr/>
+          <p:nvPr/>
+        </p:nvSpPr>
+        <p:spPr>
+          <a:xfrm>
+            <a:off x="5212079" y="2779776"/>
+            <a:ext cx="3054096" cy="1143000"/>
+          </a:xfrm>
+          <a:prstGeom prst="roundRect">
+            <a:avLst>
+              <a:gd name="adj" fmla="val 8000"/>
+            </a:avLst>
+          </a:prstGeom>
+          <a:solidFill>
+            <a:srgbClr val="E6F5F2"/>
+          </a:solidFill>
+          <a:ln w="19050">
+            <a:solidFill>
+              <a:srgbClr val="1AA69A"/>
+            </a:solidFill>
+          </a:ln>
+          <a:effectLst/>
+        </p:spPr>
+        <p:style>
+          <a:lnRef idx="1">
+            <a:schemeClr val="accent1"/>
+          </a:lnRef>
+          <a:fillRef idx="3">
+            <a:schemeClr val="accent1"/>
+          </a:fillRef>
+          <a:effectRef idx="2">
+            <a:schemeClr val="accent1"/>
+          </a:effectRef>
+          <a:fontRef idx="minor">
+            <a:schemeClr val="lt1"/>
+          </a:fontRef>
+        </p:style>
+        <p:txBody>
+          <a:bodyPr rtlCol="0" anchor="ctr"/>
+          <a:lstStyle/>
+          <a:p>
+            <a:pPr algn="ctr"/>
+          </a:p>
+        </p:txBody>
+      </p:sp>
+      <p:sp>
+        <p:nvSpPr>
+          <p:cNvPr id="23" name="TextBox 22"/>
+          <p:cNvSpPr txBox="1"/>
+          <p:nvPr/>
+        </p:nvSpPr>
+        <p:spPr>
+          <a:xfrm>
+            <a:off x="5349240" y="2779776"/>
+            <a:ext cx="2779776" cy="1143000"/>
+          </a:xfrm>
+          <a:prstGeom prst="rect">
+            <a:avLst/>
+          </a:prstGeom>
+          <a:noFill/>
+        </p:spPr>
+        <p:txBody>
+          <a:bodyPr wrap="square" anchor="ctr" lIns="0" rIns="0" tIns="0" bIns="0">
+            <a:spAutoFit/>
+          </a:bodyPr>
+          <a:lstStyle/>
+          <a:p>
+            <a:pPr algn="l"/>
+            <a:r>
+              <a:rPr sz="1300" b="1">
+                <a:solidFill>
+                  <a:srgbClr val="0E7C72"/>
+                </a:solidFill>
+                <a:latin typeface="Hiragino Sans"/>
+                <a:ea typeface="Hiragino Sans"/>
+                <a:cs typeface="Hiragino Sans"/>
+              </a:rPr>
+              <a:t>サーバ</a:t>
+            </a:r>
+          </a:p>
+          <a:p>
+            <a:pPr algn="l"/>
+            <a:r>
+              <a:rPr sz="1100" b="0">
+                <a:solidFill>
+                  <a:srgbClr val="24404D"/>
+                </a:solidFill>
+                <a:latin typeface="Hiragino Sans"/>
+                <a:ea typeface="Hiragino Sans"/>
+                <a:cs typeface="Hiragino Sans"/>
+              </a:rPr>
+              <a:t>保存したデータを、</a:t>
+            </a:r>
+          </a:p>
+          <a:p>
+            <a:pPr algn="l"/>
+            <a:r>
+              <a:rPr sz="1100" b="0">
+                <a:solidFill>
+                  <a:srgbClr val="24404D"/>
+                </a:solidFill>
+                <a:latin typeface="Hiragino Sans"/>
+                <a:ea typeface="Hiragino Sans"/>
+                <a:cs typeface="Hiragino Sans"/>
+              </a:rPr>
+              <a:t>ページのHTMLに入れる</a:t>
+            </a:r>
+          </a:p>
+        </p:txBody>
+      </p:sp>
+      <p:sp>
+        <p:nvSpPr>
+          <p:cNvPr id="24" name="Rounded Rectangle 23"/>
+          <p:cNvSpPr/>
+          <p:nvPr/>
+        </p:nvSpPr>
+        <p:spPr>
+          <a:xfrm>
+            <a:off x="8321040" y="2779776"/>
+            <a:ext cx="3355848" cy="1143000"/>
+          </a:xfrm>
+          <a:prstGeom prst="roundRect">
+            <a:avLst>
+              <a:gd name="adj" fmla="val 8000"/>
+            </a:avLst>
+          </a:prstGeom>
+          <a:solidFill>
+            <a:srgbClr val="FFFFFF"/>
+          </a:solidFill>
+          <a:ln w="12700">
+            <a:solidFill>
+              <a:srgbClr val="C2CBD0"/>
+            </a:solidFill>
+          </a:ln>
+          <a:effectLst/>
+        </p:spPr>
+        <p:style>
+          <a:lnRef idx="1">
+            <a:schemeClr val="accent1"/>
+          </a:lnRef>
+          <a:fillRef idx="3">
+            <a:schemeClr val="accent1"/>
+          </a:fillRef>
+          <a:effectRef idx="2">
+            <a:schemeClr val="accent1"/>
+          </a:effectRef>
+          <a:fontRef idx="minor">
+            <a:schemeClr val="lt1"/>
+          </a:fontRef>
+        </p:style>
+        <p:txBody>
+          <a:bodyPr rtlCol="0" anchor="ctr"/>
+          <a:lstStyle/>
+          <a:p>
+            <a:pPr algn="ctr"/>
+          </a:p>
+        </p:txBody>
+      </p:sp>
+      <p:sp>
+        <p:nvSpPr>
+          <p:cNvPr id="25" name="TextBox 24"/>
+          <p:cNvSpPr txBox="1"/>
+          <p:nvPr/>
+        </p:nvSpPr>
+        <p:spPr>
+          <a:xfrm>
+            <a:off x="8458200" y="2779776"/>
+            <a:ext cx="3081528" cy="1143000"/>
+          </a:xfrm>
+          <a:prstGeom prst="rect">
+            <a:avLst/>
+          </a:prstGeom>
+          <a:noFill/>
+        </p:spPr>
+        <p:txBody>
+          <a:bodyPr wrap="square" anchor="ctr" lIns="0" rIns="0" tIns="0" bIns="0">
+            <a:spAutoFit/>
+          </a:bodyPr>
+          <a:lstStyle/>
+          <a:p>
+            <a:pPr algn="l"/>
+            <a:r>
+              <a:rPr sz="1200" b="0">
+                <a:solidFill>
+                  <a:srgbClr val="24404D"/>
+                </a:solidFill>
+                <a:latin typeface="Hiragino Sans"/>
+                <a:ea typeface="Hiragino Sans"/>
+                <a:cs typeface="Hiragino Sans"/>
+              </a:rPr>
+              <a:t>いつものページを開くだけ</a:t>
+            </a:r>
+          </a:p>
+          <a:p>
+            <a:pPr algn="l"/>
+            <a:r>
+              <a:rPr sz="1200" b="0">
+                <a:solidFill>
+                  <a:srgbClr val="24404D"/>
+                </a:solidFill>
+                <a:latin typeface="Hiragino Sans"/>
+                <a:ea typeface="Hiragino Sans"/>
+                <a:cs typeface="Hiragino Sans"/>
+              </a:rPr>
+              <a:t>（罠URLすら要らない）</a:t>
+            </a:r>
+          </a:p>
+        </p:txBody>
+      </p:sp>
+      <p:sp>
+        <p:nvSpPr>
+          <p:cNvPr id="26" name="Rounded Rectangle 25"/>
+          <p:cNvSpPr/>
+          <p:nvPr/>
+        </p:nvSpPr>
+        <p:spPr>
+          <a:xfrm>
+            <a:off x="457200" y="4014216"/>
+            <a:ext cx="1682495" cy="1143000"/>
+          </a:xfrm>
+          <a:prstGeom prst="roundRect">
+            <a:avLst>
+              <a:gd name="adj" fmla="val 10000"/>
+            </a:avLst>
+          </a:prstGeom>
+          <a:solidFill>
+            <a:srgbClr val="FBEBEA"/>
+          </a:solidFill>
+          <a:ln w="19050">
+            <a:solidFill>
+              <a:srgbClr val="D9433B"/>
+            </a:solidFill>
+          </a:ln>
+          <a:effectLst/>
+        </p:spPr>
+        <p:style>
+          <a:lnRef idx="1">
+            <a:schemeClr val="accent1"/>
+          </a:lnRef>
+          <a:fillRef idx="3">
+            <a:schemeClr val="accent1"/>
+          </a:fillRef>
+          <a:effectRef idx="2">
+            <a:schemeClr val="accent1"/>
+          </a:effectRef>
+          <a:fontRef idx="minor">
+            <a:schemeClr val="lt1"/>
+          </a:fontRef>
+        </p:style>
+        <p:txBody>
+          <a:bodyPr rtlCol="0" anchor="ctr"/>
+          <a:lstStyle/>
+          <a:p>
+            <a:pPr algn="ctr"/>
+          </a:p>
+        </p:txBody>
+      </p:sp>
+      <p:sp>
+        <p:nvSpPr>
+          <p:cNvPr id="27" name="TextBox 26"/>
+          <p:cNvSpPr txBox="1"/>
+          <p:nvPr/>
+        </p:nvSpPr>
+        <p:spPr>
+          <a:xfrm>
+            <a:off x="457200" y="4014216"/>
+            <a:ext cx="1682495" cy="1143000"/>
+          </a:xfrm>
+          <a:prstGeom prst="rect">
+            <a:avLst/>
+          </a:prstGeom>
+          <a:noFill/>
+        </p:spPr>
+        <p:txBody>
+          <a:bodyPr wrap="square" anchor="ctr" lIns="0" rIns="0" tIns="0" bIns="0">
+            <a:spAutoFit/>
+          </a:bodyPr>
+          <a:lstStyle/>
+          <a:p>
+            <a:pPr algn="ctr"/>
+            <a:r>
+              <a:rPr sz="1600" b="1">
+                <a:solidFill>
+                  <a:srgbClr val="D9433B"/>
+                </a:solidFill>
+                <a:latin typeface="Hiragino Sans"/>
+                <a:ea typeface="Hiragino Sans"/>
+                <a:cs typeface="Hiragino Sans"/>
+              </a:rPr>
+              <a:t>DOM型</a:t>
+            </a:r>
+          </a:p>
+        </p:txBody>
+      </p:sp>
+      <p:sp>
+        <p:nvSpPr>
+          <p:cNvPr id="28" name="Rounded Rectangle 27"/>
+          <p:cNvSpPr/>
+          <p:nvPr/>
+        </p:nvSpPr>
+        <p:spPr>
+          <a:xfrm>
+            <a:off x="2194560" y="4014216"/>
+            <a:ext cx="2962656" cy="1143000"/>
+          </a:xfrm>
+          <a:prstGeom prst="roundRect">
+            <a:avLst>
+              <a:gd name="adj" fmla="val 8000"/>
+            </a:avLst>
+          </a:prstGeom>
+          <a:solidFill>
+            <a:srgbClr val="FFFFFF"/>
+          </a:solidFill>
+          <a:ln w="12700">
+            <a:solidFill>
+              <a:srgbClr val="C2CBD0"/>
+            </a:solidFill>
+          </a:ln>
+          <a:effectLst/>
+        </p:spPr>
+        <p:style>
+          <a:lnRef idx="1">
+            <a:schemeClr val="accent1"/>
+          </a:lnRef>
+          <a:fillRef idx="3">
+            <a:schemeClr val="accent1"/>
+          </a:fillRef>
+          <a:effectRef idx="2">
+            <a:schemeClr val="accent1"/>
+          </a:effectRef>
+          <a:fontRef idx="minor">
+            <a:schemeClr val="lt1"/>
+          </a:fontRef>
+        </p:style>
+        <p:txBody>
+          <a:bodyPr rtlCol="0" anchor="ctr"/>
+          <a:lstStyle/>
+          <a:p>
+            <a:pPr algn="ctr"/>
+          </a:p>
+        </p:txBody>
+      </p:sp>
+      <p:sp>
+        <p:nvSpPr>
+          <p:cNvPr id="29" name="TextBox 28"/>
+          <p:cNvSpPr txBox="1"/>
+          <p:nvPr/>
+        </p:nvSpPr>
+        <p:spPr>
+          <a:xfrm>
+            <a:off x="2331720" y="4014216"/>
+            <a:ext cx="2688336" cy="1143000"/>
+          </a:xfrm>
+          <a:prstGeom prst="rect">
+            <a:avLst/>
+          </a:prstGeom>
+          <a:noFill/>
+        </p:spPr>
+        <p:txBody>
+          <a:bodyPr wrap="square" anchor="ctr" lIns="0" rIns="0" tIns="0" bIns="0">
+            <a:spAutoFit/>
+          </a:bodyPr>
+          <a:lstStyle/>
+          <a:p>
+            <a:pPr algn="l"/>
+            <a:r>
+              <a:rPr sz="1200" b="0">
+                <a:solidFill>
+                  <a:srgbClr val="24404D"/>
+                </a:solidFill>
+                <a:latin typeface="Hiragino Sans"/>
+                <a:ea typeface="Hiragino Sans"/>
+                <a:cs typeface="Hiragino Sans"/>
+              </a:rPr>
+              <a:t>URLの # 以降など、</a:t>
+            </a:r>
+          </a:p>
+          <a:p>
+            <a:pPr algn="l"/>
+            <a:r>
+              <a:rPr sz="1200" b="0">
+                <a:solidFill>
+                  <a:srgbClr val="24404D"/>
+                </a:solidFill>
+                <a:latin typeface="Hiragino Sans"/>
+                <a:ea typeface="Hiragino Sans"/>
+                <a:cs typeface="Hiragino Sans"/>
+              </a:rPr>
+              <a:t>ページ内のJSが読む場所</a:t>
+            </a:r>
+          </a:p>
+        </p:txBody>
+      </p:sp>
+      <p:sp>
+        <p:nvSpPr>
+          <p:cNvPr id="30" name="Rounded Rectangle 29"/>
+          <p:cNvSpPr/>
+          <p:nvPr/>
+        </p:nvSpPr>
+        <p:spPr>
+          <a:xfrm>
+            <a:off x="5212079" y="4014216"/>
+            <a:ext cx="3054096" cy="1143000"/>
+          </a:xfrm>
+          <a:prstGeom prst="roundRect">
+            <a:avLst>
+              <a:gd name="adj" fmla="val 8000"/>
+            </a:avLst>
+          </a:prstGeom>
+          <a:solidFill>
+            <a:srgbClr val="F1F3F4"/>
+          </a:solidFill>
+          <a:ln w="19050">
+            <a:solidFill>
+              <a:srgbClr val="24404D"/>
+            </a:solidFill>
+          </a:ln>
+          <a:effectLst/>
+        </p:spPr>
+        <p:style>
+          <a:lnRef idx="1">
+            <a:schemeClr val="accent1"/>
+          </a:lnRef>
+          <a:fillRef idx="3">
+            <a:schemeClr val="accent1"/>
+          </a:fillRef>
+          <a:effectRef idx="2">
+            <a:schemeClr val="accent1"/>
+          </a:effectRef>
+          <a:fontRef idx="minor">
+            <a:schemeClr val="lt1"/>
+          </a:fontRef>
+        </p:style>
+        <p:txBody>
+          <a:bodyPr rtlCol="0" anchor="ctr"/>
+          <a:lstStyle/>
+          <a:p>
+            <a:pPr algn="ctr"/>
+          </a:p>
+        </p:txBody>
+      </p:sp>
+      <p:sp>
+        <p:nvSpPr>
+          <p:cNvPr id="31" name="TextBox 30"/>
+          <p:cNvSpPr txBox="1"/>
+          <p:nvPr/>
+        </p:nvSpPr>
+        <p:spPr>
+          <a:xfrm>
+            <a:off x="5349240" y="4014216"/>
+            <a:ext cx="2779776" cy="1143000"/>
+          </a:xfrm>
+          <a:prstGeom prst="rect">
+            <a:avLst/>
+          </a:prstGeom>
+          <a:noFill/>
+        </p:spPr>
+        <p:txBody>
+          <a:bodyPr wrap="square" anchor="ctr" lIns="0" rIns="0" tIns="0" bIns="0">
+            <a:spAutoFit/>
+          </a:bodyPr>
+          <a:lstStyle/>
+          <a:p>
+            <a:pPr algn="l"/>
+            <a:r>
+              <a:rPr sz="1300" b="1">
+                <a:solidFill>
+                  <a:srgbClr val="24404D"/>
+                </a:solidFill>
+                <a:latin typeface="Hiragino Sans"/>
+                <a:ea typeface="Hiragino Sans"/>
+                <a:cs typeface="Hiragino Sans"/>
+              </a:rPr>
+              <a:t>ブラウザ上のJavaScript</a:t>
+            </a:r>
+          </a:p>
+          <a:p>
+            <a:pPr algn="l"/>
+            <a:r>
+              <a:rPr sz="1100" b="0">
+                <a:solidFill>
+                  <a:srgbClr val="24404D"/>
+                </a:solidFill>
+                <a:latin typeface="Hiragino Sans"/>
+                <a:ea typeface="Hiragino Sans"/>
+                <a:cs typeface="Hiragino Sans"/>
+              </a:rPr>
+              <a:t>読んだ値を、</a:t>
+            </a:r>
+          </a:p>
+          <a:p>
+            <a:pPr algn="l"/>
+            <a:r>
+              <a:rPr sz="1100" b="0">
+                <a:solidFill>
+                  <a:srgbClr val="24404D"/>
+                </a:solidFill>
+                <a:latin typeface="Hiragino Sans"/>
+                <a:ea typeface="Hiragino Sans"/>
+                <a:cs typeface="Hiragino Sans"/>
+              </a:rPr>
+              <a:t>innerHTML などでDOMに入れる</a:t>
+            </a:r>
+          </a:p>
+        </p:txBody>
+      </p:sp>
+      <p:sp>
+        <p:nvSpPr>
+          <p:cNvPr id="32" name="Rounded Rectangle 31"/>
+          <p:cNvSpPr/>
+          <p:nvPr/>
+        </p:nvSpPr>
+        <p:spPr>
+          <a:xfrm>
+            <a:off x="8321040" y="4014216"/>
+            <a:ext cx="3355848" cy="1143000"/>
+          </a:xfrm>
+          <a:prstGeom prst="roundRect">
+            <a:avLst>
+              <a:gd name="adj" fmla="val 8000"/>
+            </a:avLst>
+          </a:prstGeom>
+          <a:solidFill>
+            <a:srgbClr val="FFFFFF"/>
+          </a:solidFill>
+          <a:ln w="12700">
+            <a:solidFill>
+              <a:srgbClr val="C2CBD0"/>
+            </a:solidFill>
+          </a:ln>
+          <a:effectLst/>
+        </p:spPr>
+        <p:style>
+          <a:lnRef idx="1">
+            <a:schemeClr val="accent1"/>
+          </a:lnRef>
+          <a:fillRef idx="3">
+            <a:schemeClr val="accent1"/>
+          </a:fillRef>
+          <a:effectRef idx="2">
+            <a:schemeClr val="accent1"/>
+          </a:effectRef>
+          <a:fontRef idx="minor">
+            <a:schemeClr val="lt1"/>
+          </a:fontRef>
+        </p:style>
+        <p:txBody>
+          <a:bodyPr rtlCol="0" anchor="ctr"/>
+          <a:lstStyle/>
+          <a:p>
+            <a:pPr algn="ctr"/>
+          </a:p>
+        </p:txBody>
+      </p:sp>
+      <p:sp>
+        <p:nvSpPr>
+          <p:cNvPr id="33" name="TextBox 32"/>
+          <p:cNvSpPr txBox="1"/>
+          <p:nvPr/>
+        </p:nvSpPr>
+        <p:spPr>
+          <a:xfrm>
+            <a:off x="8458200" y="4014216"/>
+            <a:ext cx="3081528" cy="1143000"/>
+          </a:xfrm>
+          <a:prstGeom prst="rect">
+            <a:avLst/>
+          </a:prstGeom>
+          <a:noFill/>
+        </p:spPr>
+        <p:txBody>
+          <a:bodyPr wrap="square" anchor="ctr" lIns="0" rIns="0" tIns="0" bIns="0">
+            <a:spAutoFit/>
+          </a:bodyPr>
+          <a:lstStyle/>
+          <a:p>
+            <a:pPr algn="l"/>
+            <a:r>
+              <a:rPr sz="1200" b="0">
+                <a:solidFill>
+                  <a:srgbClr val="24404D"/>
+                </a:solidFill>
+                <a:latin typeface="Hiragino Sans"/>
+                <a:ea typeface="Hiragino Sans"/>
+                <a:cs typeface="Hiragino Sans"/>
+              </a:rPr>
+              <a:t>罠URLをクリックする</a:t>
+            </a:r>
+          </a:p>
+          <a:p>
+            <a:pPr algn="l"/>
+            <a:r>
+              <a:rPr sz="1200" b="0">
+                <a:solidFill>
+                  <a:srgbClr val="24404D"/>
+                </a:solidFill>
+                <a:latin typeface="Hiragino Sans"/>
+                <a:ea typeface="Hiragino Sans"/>
+                <a:cs typeface="Hiragino Sans"/>
+              </a:rPr>
+              <a:t>（# 以降はサーバに送られない）</a:t>
+            </a:r>
+          </a:p>
+        </p:txBody>
+      </p:sp>
+      <p:sp>
+        <p:nvSpPr>
+          <p:cNvPr id="34" name="Rounded Rectangle 33"/>
+          <p:cNvSpPr/>
+          <p:nvPr/>
+        </p:nvSpPr>
+        <p:spPr>
+          <a:xfrm>
+            <a:off x="457200" y="5294376"/>
+            <a:ext cx="11247120" cy="566928"/>
+          </a:xfrm>
+          <a:prstGeom prst="roundRect">
+            <a:avLst>
+              <a:gd name="adj" fmla="val 20000"/>
+            </a:avLst>
+          </a:prstGeom>
+          <a:solidFill>
+            <a:srgbClr val="FFFFFF"/>
+          </a:solidFill>
+          <a:ln w="19050">
+            <a:solidFill>
+              <a:srgbClr val="F08A24"/>
+            </a:solidFill>
+          </a:ln>
+          <a:effectLst/>
+        </p:spPr>
+        <p:style>
+          <a:lnRef idx="1">
+            <a:schemeClr val="accent1"/>
+          </a:lnRef>
+          <a:fillRef idx="3">
+            <a:schemeClr val="accent1"/>
+          </a:fillRef>
+          <a:effectRef idx="2">
+            <a:schemeClr val="accent1"/>
+          </a:effectRef>
+          <a:fontRef idx="minor">
+            <a:schemeClr val="lt1"/>
+          </a:fontRef>
+        </p:style>
+        <p:txBody>
+          <a:bodyPr rtlCol="0" anchor="ctr"/>
+          <a:lstStyle/>
+          <a:p>
+            <a:pPr algn="ctr"/>
+          </a:p>
+        </p:txBody>
+      </p:sp>
+      <p:sp>
+        <p:nvSpPr>
+          <p:cNvPr id="35" name="TextBox 34"/>
+          <p:cNvSpPr txBox="1"/>
+          <p:nvPr/>
+        </p:nvSpPr>
+        <p:spPr>
+          <a:xfrm>
+            <a:off x="685800" y="5294376"/>
+            <a:ext cx="10789920" cy="566928"/>
+          </a:xfrm>
+          <a:prstGeom prst="rect">
+            <a:avLst/>
+          </a:prstGeom>
+          <a:noFill/>
+        </p:spPr>
+        <p:txBody>
+          <a:bodyPr wrap="square" anchor="ctr" lIns="0" rIns="0" tIns="0" bIns="0">
+            <a:spAutoFit/>
+          </a:bodyPr>
+          <a:lstStyle/>
+          <a:p>
+            <a:pPr algn="l"/>
+            <a:r>
+              <a:rPr sz="1300" b="1">
+                <a:solidFill>
+                  <a:srgbClr val="24404D"/>
+                </a:solidFill>
+                <a:latin typeface="Hiragino Sans"/>
+                <a:ea typeface="Hiragino Sans"/>
+                <a:cs typeface="Hiragino Sans"/>
+              </a:rPr>
+              <a:t>どの型でも、最後にスクリプトが動くのは被害者のブラウザの中。違うのは「罠の置き場所」と「誰がHTMLに入れるか」</a:t>
             </a:r>
           </a:p>
         </p:txBody>

--- a/deep-dive/drafts/no.1-xss/image/HTMLパーサ図.pptx
+++ b/deep-dive/drafts/no.1-xss/image/HTMLパーサ図.pptx
@@ -7,6 +7,9 @@
   <p:sldIdLst>
     <p:sldId id="261" r:id="rId12"/>
     <p:sldId id="262" r:id="rId13"/>
+    <p:sldId id="263" r:id="rId14"/>
+    <p:sldId id="264" r:id="rId15"/>
+    <p:sldId id="265" r:id="rId16"/>
     <p:sldId id="256" r:id="rId7"/>
     <p:sldId id="257" r:id="rId8"/>
     <p:sldId id="258" r:id="rId9"/>
@@ -4522,6 +4525,1171 @@
 </p:sld>
 </file>
 
+<file path=ppt/slides/slide10.xml><?xml version="1.0" encoding="utf-8"?>
+<p:sld xmlns:a="http://schemas.openxmlformats.org/drawingml/2006/main" xmlns:p="http://schemas.openxmlformats.org/presentationml/2006/main" xmlns:r="http://schemas.openxmlformats.org/officeDocument/2006/relationships">
+  <p:cSld>
+    <p:spTree>
+      <p:nvGrpSpPr>
+        <p:cNvPr id="1" name=""/>
+        <p:cNvGrpSpPr/>
+        <p:nvPr/>
+      </p:nvGrpSpPr>
+      <p:grpSpPr/>
+      <p:sp>
+        <p:nvSpPr>
+          <p:cNvPr id="2" name="Rounded Rectangle 1"/>
+          <p:cNvSpPr/>
+          <p:nvPr/>
+        </p:nvSpPr>
+        <p:spPr>
+          <a:xfrm>
+            <a:off x="4526280" y="777240"/>
+            <a:ext cx="1920240" cy="960120"/>
+          </a:xfrm>
+          <a:prstGeom prst="roundRect">
+            <a:avLst>
+              <a:gd name="adj" fmla="val 12000"/>
+            </a:avLst>
+          </a:prstGeom>
+          <a:solidFill>
+            <a:srgbClr val="E6F5F2"/>
+          </a:solidFill>
+          <a:ln w="25400">
+            <a:solidFill>
+              <a:srgbClr val="1AA69A"/>
+            </a:solidFill>
+          </a:ln>
+          <a:effectLst/>
+        </p:spPr>
+        <p:style>
+          <a:lnRef idx="1">
+            <a:schemeClr val="accent1"/>
+          </a:lnRef>
+          <a:fillRef idx="3">
+            <a:schemeClr val="accent1"/>
+          </a:fillRef>
+          <a:effectRef idx="2">
+            <a:schemeClr val="accent1"/>
+          </a:effectRef>
+          <a:fontRef idx="minor">
+            <a:schemeClr val="lt1"/>
+          </a:fontRef>
+        </p:style>
+        <p:txBody>
+          <a:bodyPr rtlCol="0" anchor="ctr"/>
+          <a:lstStyle/>
+          <a:p>
+            <a:pPr algn="ctr"/>
+          </a:p>
+        </p:txBody>
+      </p:sp>
+      <p:sp>
+        <p:nvSpPr>
+          <p:cNvPr id="3" name="TextBox 2"/>
+          <p:cNvSpPr txBox="1"/>
+          <p:nvPr/>
+        </p:nvSpPr>
+        <p:spPr>
+          <a:xfrm>
+            <a:off x="4526280" y="777240"/>
+            <a:ext cx="1920240" cy="960120"/>
+          </a:xfrm>
+          <a:prstGeom prst="rect">
+            <a:avLst/>
+          </a:prstGeom>
+          <a:noFill/>
+        </p:spPr>
+        <p:txBody>
+          <a:bodyPr wrap="square" anchor="ctr" lIns="0" rIns="0" tIns="0" bIns="0">
+            <a:spAutoFit/>
+          </a:bodyPr>
+          <a:lstStyle/>
+          <a:p>
+            <a:pPr algn="ctr"/>
+            <a:r>
+              <a:rPr sz="1400" b="1">
+                <a:solidFill>
+                  <a:srgbClr val="0E7C72"/>
+                </a:solidFill>
+                <a:latin typeface="Hiragino Sans"/>
+                <a:ea typeface="Hiragino Sans"/>
+                <a:cs typeface="Hiragino Sans"/>
+              </a:rPr>
+              <a:t>Webサーバ</a:t>
+            </a:r>
+          </a:p>
+        </p:txBody>
+      </p:sp>
+      <p:sp>
+        <p:nvSpPr>
+          <p:cNvPr id="4" name="Rounded Rectangle 3"/>
+          <p:cNvSpPr/>
+          <p:nvPr/>
+        </p:nvSpPr>
+        <p:spPr>
+          <a:xfrm>
+            <a:off x="6720840" y="777240"/>
+            <a:ext cx="1371600" cy="960120"/>
+          </a:xfrm>
+          <a:prstGeom prst="roundRect">
+            <a:avLst>
+              <a:gd name="adj" fmla="val 12000"/>
+            </a:avLst>
+          </a:prstGeom>
+          <a:solidFill>
+            <a:srgbClr val="F1F3F4"/>
+          </a:solidFill>
+          <a:ln w="25400">
+            <a:solidFill>
+              <a:srgbClr val="C2CBD0"/>
+            </a:solidFill>
+          </a:ln>
+          <a:effectLst/>
+        </p:spPr>
+        <p:style>
+          <a:lnRef idx="1">
+            <a:schemeClr val="accent1"/>
+          </a:lnRef>
+          <a:fillRef idx="3">
+            <a:schemeClr val="accent1"/>
+          </a:fillRef>
+          <a:effectRef idx="2">
+            <a:schemeClr val="accent1"/>
+          </a:effectRef>
+          <a:fontRef idx="minor">
+            <a:schemeClr val="lt1"/>
+          </a:fontRef>
+        </p:style>
+        <p:txBody>
+          <a:bodyPr rtlCol="0" anchor="ctr"/>
+          <a:lstStyle/>
+          <a:p>
+            <a:pPr algn="ctr"/>
+          </a:p>
+        </p:txBody>
+      </p:sp>
+      <p:sp>
+        <p:nvSpPr>
+          <p:cNvPr id="5" name="TextBox 4"/>
+          <p:cNvSpPr txBox="1"/>
+          <p:nvPr/>
+        </p:nvSpPr>
+        <p:spPr>
+          <a:xfrm>
+            <a:off x="6720840" y="777240"/>
+            <a:ext cx="1371600" cy="960120"/>
+          </a:xfrm>
+          <a:prstGeom prst="rect">
+            <a:avLst/>
+          </a:prstGeom>
+          <a:noFill/>
+        </p:spPr>
+        <p:txBody>
+          <a:bodyPr wrap="square" anchor="ctr" lIns="0" rIns="0" tIns="0" bIns="0">
+            <a:spAutoFit/>
+          </a:bodyPr>
+          <a:lstStyle/>
+          <a:p>
+            <a:pPr algn="ctr"/>
+            <a:r>
+              <a:rPr sz="1400" b="1">
+                <a:solidFill>
+                  <a:srgbClr val="5E7682"/>
+                </a:solidFill>
+                <a:latin typeface="Hiragino Sans"/>
+                <a:ea typeface="Hiragino Sans"/>
+                <a:cs typeface="Hiragino Sans"/>
+              </a:rPr>
+              <a:t>DB</a:t>
+            </a:r>
+          </a:p>
+        </p:txBody>
+      </p:sp>
+      <p:sp>
+        <p:nvSpPr>
+          <p:cNvPr id="6" name="Rounded Rectangle 5"/>
+          <p:cNvSpPr/>
+          <p:nvPr/>
+        </p:nvSpPr>
+        <p:spPr>
+          <a:xfrm>
+            <a:off x="502920" y="3931920"/>
+            <a:ext cx="2103120" cy="960120"/>
+          </a:xfrm>
+          <a:prstGeom prst="roundRect">
+            <a:avLst>
+              <a:gd name="adj" fmla="val 12000"/>
+            </a:avLst>
+          </a:prstGeom>
+          <a:solidFill>
+            <a:srgbClr val="FBEBEA"/>
+          </a:solidFill>
+          <a:ln w="25400">
+            <a:solidFill>
+              <a:srgbClr val="D9433B"/>
+            </a:solidFill>
+          </a:ln>
+          <a:effectLst/>
+        </p:spPr>
+        <p:style>
+          <a:lnRef idx="1">
+            <a:schemeClr val="accent1"/>
+          </a:lnRef>
+          <a:fillRef idx="3">
+            <a:schemeClr val="accent1"/>
+          </a:fillRef>
+          <a:effectRef idx="2">
+            <a:schemeClr val="accent1"/>
+          </a:effectRef>
+          <a:fontRef idx="minor">
+            <a:schemeClr val="lt1"/>
+          </a:fontRef>
+        </p:style>
+        <p:txBody>
+          <a:bodyPr rtlCol="0" anchor="ctr"/>
+          <a:lstStyle/>
+          <a:p>
+            <a:pPr algn="ctr"/>
+          </a:p>
+        </p:txBody>
+      </p:sp>
+      <p:sp>
+        <p:nvSpPr>
+          <p:cNvPr id="7" name="TextBox 6"/>
+          <p:cNvSpPr txBox="1"/>
+          <p:nvPr/>
+        </p:nvSpPr>
+        <p:spPr>
+          <a:xfrm>
+            <a:off x="502920" y="3931920"/>
+            <a:ext cx="2103120" cy="960120"/>
+          </a:xfrm>
+          <a:prstGeom prst="rect">
+            <a:avLst/>
+          </a:prstGeom>
+          <a:noFill/>
+        </p:spPr>
+        <p:txBody>
+          <a:bodyPr wrap="square" anchor="ctr" lIns="0" rIns="0" tIns="0" bIns="0">
+            <a:spAutoFit/>
+          </a:bodyPr>
+          <a:lstStyle/>
+          <a:p>
+            <a:pPr algn="ctr"/>
+            <a:r>
+              <a:rPr sz="1400" b="1">
+                <a:solidFill>
+                  <a:srgbClr val="D9433B"/>
+                </a:solidFill>
+                <a:latin typeface="Hiragino Sans"/>
+                <a:ea typeface="Hiragino Sans"/>
+                <a:cs typeface="Hiragino Sans"/>
+              </a:rPr>
+              <a:t>攻撃者</a:t>
+            </a:r>
+          </a:p>
+        </p:txBody>
+      </p:sp>
+      <p:sp>
+        <p:nvSpPr>
+          <p:cNvPr id="8" name="Rounded Rectangle 7"/>
+          <p:cNvSpPr/>
+          <p:nvPr/>
+        </p:nvSpPr>
+        <p:spPr>
+          <a:xfrm>
+            <a:off x="502920" y="5577840"/>
+            <a:ext cx="2468880" cy="914400"/>
+          </a:xfrm>
+          <a:prstGeom prst="roundRect">
+            <a:avLst>
+              <a:gd name="adj" fmla="val 12000"/>
+            </a:avLst>
+          </a:prstGeom>
+          <a:solidFill>
+            <a:srgbClr val="FBEBEA"/>
+          </a:solidFill>
+          <a:ln w="25400">
+            <a:solidFill>
+              <a:srgbClr val="D9433B"/>
+            </a:solidFill>
+          </a:ln>
+          <a:effectLst/>
+        </p:spPr>
+        <p:style>
+          <a:lnRef idx="1">
+            <a:schemeClr val="accent1"/>
+          </a:lnRef>
+          <a:fillRef idx="3">
+            <a:schemeClr val="accent1"/>
+          </a:fillRef>
+          <a:effectRef idx="2">
+            <a:schemeClr val="accent1"/>
+          </a:effectRef>
+          <a:fontRef idx="minor">
+            <a:schemeClr val="lt1"/>
+          </a:fontRef>
+        </p:style>
+        <p:txBody>
+          <a:bodyPr rtlCol="0" anchor="ctr"/>
+          <a:lstStyle/>
+          <a:p>
+            <a:pPr algn="ctr"/>
+          </a:p>
+        </p:txBody>
+      </p:sp>
+      <p:sp>
+        <p:nvSpPr>
+          <p:cNvPr id="9" name="TextBox 8"/>
+          <p:cNvSpPr txBox="1"/>
+          <p:nvPr/>
+        </p:nvSpPr>
+        <p:spPr>
+          <a:xfrm>
+            <a:off x="502920" y="5577840"/>
+            <a:ext cx="2468880" cy="914400"/>
+          </a:xfrm>
+          <a:prstGeom prst="rect">
+            <a:avLst/>
+          </a:prstGeom>
+          <a:noFill/>
+        </p:spPr>
+        <p:txBody>
+          <a:bodyPr wrap="square" anchor="ctr" lIns="0" rIns="0" tIns="0" bIns="0">
+            <a:spAutoFit/>
+          </a:bodyPr>
+          <a:lstStyle/>
+          <a:p>
+            <a:pPr algn="ctr"/>
+            <a:r>
+              <a:rPr sz="1300" b="1">
+                <a:solidFill>
+                  <a:srgbClr val="D9433B"/>
+                </a:solidFill>
+                <a:latin typeface="Hiragino Sans"/>
+                <a:ea typeface="Hiragino Sans"/>
+                <a:cs typeface="Hiragino Sans"/>
+              </a:rPr>
+              <a:t>攻撃者の回収サーバ</a:t>
+            </a:r>
+          </a:p>
+        </p:txBody>
+      </p:sp>
+      <p:sp>
+        <p:nvSpPr>
+          <p:cNvPr id="10" name="Rounded Rectangle 9"/>
+          <p:cNvSpPr/>
+          <p:nvPr/>
+        </p:nvSpPr>
+        <p:spPr>
+          <a:xfrm>
+            <a:off x="7772400" y="3154680"/>
+            <a:ext cx="3931920" cy="3337560"/>
+          </a:xfrm>
+          <a:prstGeom prst="roundRect">
+            <a:avLst>
+              <a:gd name="adj" fmla="val 6000"/>
+            </a:avLst>
+          </a:prstGeom>
+          <a:solidFill>
+            <a:srgbClr val="F1F3F4"/>
+          </a:solidFill>
+          <a:ln w="25400">
+            <a:solidFill>
+              <a:srgbClr val="24404D"/>
+            </a:solidFill>
+          </a:ln>
+          <a:effectLst/>
+        </p:spPr>
+        <p:style>
+          <a:lnRef idx="1">
+            <a:schemeClr val="accent1"/>
+          </a:lnRef>
+          <a:fillRef idx="3">
+            <a:schemeClr val="accent1"/>
+          </a:fillRef>
+          <a:effectRef idx="2">
+            <a:schemeClr val="accent1"/>
+          </a:effectRef>
+          <a:fontRef idx="minor">
+            <a:schemeClr val="lt1"/>
+          </a:fontRef>
+        </p:style>
+        <p:txBody>
+          <a:bodyPr rtlCol="0" anchor="ctr"/>
+          <a:lstStyle/>
+          <a:p>
+            <a:pPr algn="ctr"/>
+          </a:p>
+        </p:txBody>
+      </p:sp>
+      <p:sp>
+        <p:nvSpPr>
+          <p:cNvPr id="11" name="TextBox 10"/>
+          <p:cNvSpPr txBox="1"/>
+          <p:nvPr/>
+        </p:nvSpPr>
+        <p:spPr>
+          <a:xfrm>
+            <a:off x="7772400" y="3291840"/>
+            <a:ext cx="3931920" cy="365760"/>
+          </a:xfrm>
+          <a:prstGeom prst="rect">
+            <a:avLst/>
+          </a:prstGeom>
+          <a:noFill/>
+        </p:spPr>
+        <p:txBody>
+          <a:bodyPr wrap="square" anchor="t" lIns="0" rIns="0" tIns="0" bIns="0">
+            <a:spAutoFit/>
+          </a:bodyPr>
+          <a:lstStyle/>
+          <a:p>
+            <a:pPr algn="ctr"/>
+            <a:r>
+              <a:rPr sz="1400" b="1">
+                <a:solidFill>
+                  <a:srgbClr val="24404D"/>
+                </a:solidFill>
+                <a:latin typeface="Hiragino Sans"/>
+                <a:ea typeface="Hiragino Sans"/>
+                <a:cs typeface="Hiragino Sans"/>
+              </a:rPr>
+              <a:t>被害者のブラウザ</a:t>
+            </a:r>
+          </a:p>
+        </p:txBody>
+      </p:sp>
+      <p:cxnSp>
+        <p:nvCxnSpPr>
+          <p:cNvPr id="12" name="Connector 11"/>
+          <p:cNvCxnSpPr/>
+          <p:nvPr/>
+        </p:nvCxnSpPr>
+        <p:spPr>
+          <a:xfrm>
+            <a:off x="2651760" y="4251960"/>
+            <a:ext cx="5120640" cy="182880"/>
+          </a:xfrm>
+          <a:prstGeom prst="line">
+            <a:avLst/>
+          </a:prstGeom>
+          <a:ln w="25400">
+            <a:solidFill>
+              <a:srgbClr val="D9433B"/>
+            </a:solidFill>
+            <a:tailEnd type="triangle" w="med" len="med"/>
+          </a:ln>
+        </p:spPr>
+        <p:style>
+          <a:lnRef idx="2">
+            <a:schemeClr val="accent1"/>
+          </a:lnRef>
+          <a:fillRef idx="0">
+            <a:schemeClr val="accent1"/>
+          </a:fillRef>
+          <a:effectRef idx="1">
+            <a:schemeClr val="accent1"/>
+          </a:effectRef>
+          <a:fontRef idx="minor">
+            <a:schemeClr val="tx1"/>
+          </a:fontRef>
+        </p:style>
+      </p:cxnSp>
+      <p:sp>
+        <p:nvSpPr>
+          <p:cNvPr id="13" name="Rounded Rectangle 12"/>
+          <p:cNvSpPr/>
+          <p:nvPr/>
+        </p:nvSpPr>
+        <p:spPr>
+          <a:xfrm>
+            <a:off x="2834640" y="3246120"/>
+            <a:ext cx="3108960" cy="621792"/>
+          </a:xfrm>
+          <a:prstGeom prst="roundRect">
+            <a:avLst>
+              <a:gd name="adj" fmla="val 20000"/>
+            </a:avLst>
+          </a:prstGeom>
+          <a:solidFill>
+            <a:srgbClr val="FFFFFF"/>
+          </a:solidFill>
+          <a:ln w="15240">
+            <a:solidFill>
+              <a:srgbClr val="D9433B"/>
+            </a:solidFill>
+          </a:ln>
+          <a:effectLst/>
+        </p:spPr>
+        <p:style>
+          <a:lnRef idx="1">
+            <a:schemeClr val="accent1"/>
+          </a:lnRef>
+          <a:fillRef idx="3">
+            <a:schemeClr val="accent1"/>
+          </a:fillRef>
+          <a:effectRef idx="2">
+            <a:schemeClr val="accent1"/>
+          </a:effectRef>
+          <a:fontRef idx="minor">
+            <a:schemeClr val="lt1"/>
+          </a:fontRef>
+        </p:style>
+        <p:txBody>
+          <a:bodyPr rtlCol="0" anchor="ctr"/>
+          <a:lstStyle/>
+          <a:p>
+            <a:pPr algn="ctr"/>
+          </a:p>
+        </p:txBody>
+      </p:sp>
+      <p:sp>
+        <p:nvSpPr>
+          <p:cNvPr id="14" name="TextBox 13"/>
+          <p:cNvSpPr txBox="1"/>
+          <p:nvPr/>
+        </p:nvSpPr>
+        <p:spPr>
+          <a:xfrm>
+            <a:off x="2907792" y="3246120"/>
+            <a:ext cx="2962656" cy="621792"/>
+          </a:xfrm>
+          <a:prstGeom prst="rect">
+            <a:avLst/>
+          </a:prstGeom>
+          <a:noFill/>
+        </p:spPr>
+        <p:txBody>
+          <a:bodyPr wrap="square" anchor="ctr" lIns="0" rIns="0" tIns="0" bIns="0">
+            <a:spAutoFit/>
+          </a:bodyPr>
+          <a:lstStyle/>
+          <a:p>
+            <a:pPr algn="ctr"/>
+            <a:r>
+              <a:rPr sz="1100" b="0">
+                <a:solidFill>
+                  <a:srgbClr val="24404D"/>
+                </a:solidFill>
+                <a:latin typeface="Hiragino Sans"/>
+                <a:ea typeface="Hiragino Sans"/>
+                <a:cs typeface="Hiragino Sans"/>
+              </a:rPr>
+              <a:t>① 罠URL（#スクリプト）を</a:t>
+            </a:r>
+          </a:p>
+          <a:p>
+            <a:pPr algn="ctr"/>
+            <a:r>
+              <a:rPr sz="1100" b="0">
+                <a:solidFill>
+                  <a:srgbClr val="24404D"/>
+                </a:solidFill>
+                <a:latin typeface="Hiragino Sans"/>
+                <a:ea typeface="Hiragino Sans"/>
+                <a:cs typeface="Hiragino Sans"/>
+              </a:rPr>
+              <a:t>メールやSNSで送る</a:t>
+            </a:r>
+          </a:p>
+        </p:txBody>
+      </p:sp>
+      <p:cxnSp>
+        <p:nvCxnSpPr>
+          <p:cNvPr id="15" name="Connector 14"/>
+          <p:cNvCxnSpPr/>
+          <p:nvPr/>
+        </p:nvCxnSpPr>
+        <p:spPr>
+          <a:xfrm flipH="1" flipV="1">
+            <a:off x="6035040" y="1737360"/>
+            <a:ext cx="2743200" cy="1417320"/>
+          </a:xfrm>
+          <a:prstGeom prst="line">
+            <a:avLst/>
+          </a:prstGeom>
+          <a:ln w="25400">
+            <a:solidFill>
+              <a:srgbClr val="5E7682"/>
+            </a:solidFill>
+            <a:tailEnd type="triangle" w="med" len="med"/>
+          </a:ln>
+        </p:spPr>
+        <p:style>
+          <a:lnRef idx="2">
+            <a:schemeClr val="accent1"/>
+          </a:lnRef>
+          <a:fillRef idx="0">
+            <a:schemeClr val="accent1"/>
+          </a:fillRef>
+          <a:effectRef idx="1">
+            <a:schemeClr val="accent1"/>
+          </a:effectRef>
+          <a:fontRef idx="minor">
+            <a:schemeClr val="tx1"/>
+          </a:fontRef>
+        </p:style>
+      </p:cxnSp>
+      <p:sp>
+        <p:nvSpPr>
+          <p:cNvPr id="16" name="Rounded Rectangle 15"/>
+          <p:cNvSpPr/>
+          <p:nvPr/>
+        </p:nvSpPr>
+        <p:spPr>
+          <a:xfrm>
+            <a:off x="7223760" y="2240280"/>
+            <a:ext cx="3291840" cy="384048"/>
+          </a:xfrm>
+          <a:prstGeom prst="roundRect">
+            <a:avLst>
+              <a:gd name="adj" fmla="val 20000"/>
+            </a:avLst>
+          </a:prstGeom>
+          <a:solidFill>
+            <a:srgbClr val="FFFFFF"/>
+          </a:solidFill>
+          <a:ln w="15240">
+            <a:solidFill>
+              <a:srgbClr val="5E7682"/>
+            </a:solidFill>
+          </a:ln>
+          <a:effectLst/>
+        </p:spPr>
+        <p:style>
+          <a:lnRef idx="1">
+            <a:schemeClr val="accent1"/>
+          </a:lnRef>
+          <a:fillRef idx="3">
+            <a:schemeClr val="accent1"/>
+          </a:fillRef>
+          <a:effectRef idx="2">
+            <a:schemeClr val="accent1"/>
+          </a:effectRef>
+          <a:fontRef idx="minor">
+            <a:schemeClr val="lt1"/>
+          </a:fontRef>
+        </p:style>
+        <p:txBody>
+          <a:bodyPr rtlCol="0" anchor="ctr"/>
+          <a:lstStyle/>
+          <a:p>
+            <a:pPr algn="ctr"/>
+          </a:p>
+        </p:txBody>
+      </p:sp>
+      <p:sp>
+        <p:nvSpPr>
+          <p:cNvPr id="17" name="TextBox 16"/>
+          <p:cNvSpPr txBox="1"/>
+          <p:nvPr/>
+        </p:nvSpPr>
+        <p:spPr>
+          <a:xfrm>
+            <a:off x="7296912" y="2240280"/>
+            <a:ext cx="3145536" cy="384048"/>
+          </a:xfrm>
+          <a:prstGeom prst="rect">
+            <a:avLst/>
+          </a:prstGeom>
+          <a:noFill/>
+        </p:spPr>
+        <p:txBody>
+          <a:bodyPr wrap="square" anchor="ctr" lIns="0" rIns="0" tIns="0" bIns="0">
+            <a:spAutoFit/>
+          </a:bodyPr>
+          <a:lstStyle/>
+          <a:p>
+            <a:pPr algn="ctr"/>
+            <a:r>
+              <a:rPr sz="1100" b="0">
+                <a:solidFill>
+                  <a:srgbClr val="24404D"/>
+                </a:solidFill>
+                <a:latin typeface="Hiragino Sans"/>
+                <a:ea typeface="Hiragino Sans"/>
+                <a:cs typeface="Hiragino Sans"/>
+              </a:rPr>
+              <a:t>② ページを取得（# 以降は送らない）</a:t>
+            </a:r>
+          </a:p>
+        </p:txBody>
+      </p:sp>
+      <p:cxnSp>
+        <p:nvCxnSpPr>
+          <p:cNvPr id="18" name="Connector 17"/>
+          <p:cNvCxnSpPr/>
+          <p:nvPr/>
+        </p:nvCxnSpPr>
+        <p:spPr>
+          <a:xfrm>
+            <a:off x="5394960" y="1737360"/>
+            <a:ext cx="2743200" cy="1417320"/>
+          </a:xfrm>
+          <a:prstGeom prst="line">
+            <a:avLst/>
+          </a:prstGeom>
+          <a:ln w="25400">
+            <a:solidFill>
+              <a:srgbClr val="5E7682"/>
+            </a:solidFill>
+            <a:tailEnd type="triangle" w="med" len="med"/>
+          </a:ln>
+        </p:spPr>
+        <p:style>
+          <a:lnRef idx="2">
+            <a:schemeClr val="accent1"/>
+          </a:lnRef>
+          <a:fillRef idx="0">
+            <a:schemeClr val="accent1"/>
+          </a:fillRef>
+          <a:effectRef idx="1">
+            <a:schemeClr val="accent1"/>
+          </a:effectRef>
+          <a:fontRef idx="minor">
+            <a:schemeClr val="tx1"/>
+          </a:fontRef>
+        </p:style>
+      </p:cxnSp>
+      <p:sp>
+        <p:nvSpPr>
+          <p:cNvPr id="19" name="Rounded Rectangle 18"/>
+          <p:cNvSpPr/>
+          <p:nvPr/>
+        </p:nvSpPr>
+        <p:spPr>
+          <a:xfrm>
+            <a:off x="3291840" y="2011680"/>
+            <a:ext cx="3657600" cy="384048"/>
+          </a:xfrm>
+          <a:prstGeom prst="roundRect">
+            <a:avLst>
+              <a:gd name="adj" fmla="val 20000"/>
+            </a:avLst>
+          </a:prstGeom>
+          <a:solidFill>
+            <a:srgbClr val="FFFFFF"/>
+          </a:solidFill>
+          <a:ln w="15240">
+            <a:solidFill>
+              <a:srgbClr val="5E7682"/>
+            </a:solidFill>
+          </a:ln>
+          <a:effectLst/>
+        </p:spPr>
+        <p:style>
+          <a:lnRef idx="1">
+            <a:schemeClr val="accent1"/>
+          </a:lnRef>
+          <a:fillRef idx="3">
+            <a:schemeClr val="accent1"/>
+          </a:fillRef>
+          <a:effectRef idx="2">
+            <a:schemeClr val="accent1"/>
+          </a:effectRef>
+          <a:fontRef idx="minor">
+            <a:schemeClr val="lt1"/>
+          </a:fontRef>
+        </p:style>
+        <p:txBody>
+          <a:bodyPr rtlCol="0" anchor="ctr"/>
+          <a:lstStyle/>
+          <a:p>
+            <a:pPr algn="ctr"/>
+          </a:p>
+        </p:txBody>
+      </p:sp>
+      <p:sp>
+        <p:nvSpPr>
+          <p:cNvPr id="20" name="TextBox 19"/>
+          <p:cNvSpPr txBox="1"/>
+          <p:nvPr/>
+        </p:nvSpPr>
+        <p:spPr>
+          <a:xfrm>
+            <a:off x="3364992" y="2011680"/>
+            <a:ext cx="3511296" cy="384048"/>
+          </a:xfrm>
+          <a:prstGeom prst="rect">
+            <a:avLst/>
+          </a:prstGeom>
+          <a:noFill/>
+        </p:spPr>
+        <p:txBody>
+          <a:bodyPr wrap="square" anchor="ctr" lIns="0" rIns="0" tIns="0" bIns="0">
+            <a:spAutoFit/>
+          </a:bodyPr>
+          <a:lstStyle/>
+          <a:p>
+            <a:pPr algn="ctr"/>
+            <a:r>
+              <a:rPr sz="1100" b="0">
+                <a:solidFill>
+                  <a:srgbClr val="24404D"/>
+                </a:solidFill>
+                <a:latin typeface="Hiragino Sans"/>
+                <a:ea typeface="Hiragino Sans"/>
+                <a:cs typeface="Hiragino Sans"/>
+              </a:rPr>
+              <a:t>③ 普通のページ（JS入り）を応答</a:t>
+            </a:r>
+          </a:p>
+        </p:txBody>
+      </p:sp>
+      <p:sp>
+        <p:nvSpPr>
+          <p:cNvPr id="21" name="Rounded Rectangle 20"/>
+          <p:cNvSpPr/>
+          <p:nvPr/>
+        </p:nvSpPr>
+        <p:spPr>
+          <a:xfrm>
+            <a:off x="8046720" y="3840480"/>
+            <a:ext cx="3383280" cy="1417320"/>
+          </a:xfrm>
+          <a:prstGeom prst="roundRect">
+            <a:avLst>
+              <a:gd name="adj" fmla="val 10000"/>
+            </a:avLst>
+          </a:prstGeom>
+          <a:solidFill>
+            <a:srgbClr val="FBEBEA"/>
+          </a:solidFill>
+          <a:ln w="22860">
+            <a:solidFill>
+              <a:srgbClr val="D9433B"/>
+            </a:solidFill>
+          </a:ln>
+          <a:effectLst/>
+        </p:spPr>
+        <p:style>
+          <a:lnRef idx="1">
+            <a:schemeClr val="accent1"/>
+          </a:lnRef>
+          <a:fillRef idx="3">
+            <a:schemeClr val="accent1"/>
+          </a:fillRef>
+          <a:effectRef idx="2">
+            <a:schemeClr val="accent1"/>
+          </a:effectRef>
+          <a:fontRef idx="minor">
+            <a:schemeClr val="lt1"/>
+          </a:fontRef>
+        </p:style>
+        <p:txBody>
+          <a:bodyPr rtlCol="0" anchor="ctr"/>
+          <a:lstStyle/>
+          <a:p>
+            <a:pPr algn="ctr"/>
+          </a:p>
+        </p:txBody>
+      </p:sp>
+      <p:sp>
+        <p:nvSpPr>
+          <p:cNvPr id="22" name="TextBox 21"/>
+          <p:cNvSpPr txBox="1"/>
+          <p:nvPr/>
+        </p:nvSpPr>
+        <p:spPr>
+          <a:xfrm>
+            <a:off x="8183879" y="3931920"/>
+            <a:ext cx="3108960" cy="320040"/>
+          </a:xfrm>
+          <a:prstGeom prst="rect">
+            <a:avLst/>
+          </a:prstGeom>
+          <a:noFill/>
+        </p:spPr>
+        <p:txBody>
+          <a:bodyPr wrap="square" anchor="t" lIns="0" rIns="0" tIns="0" bIns="0">
+            <a:spAutoFit/>
+          </a:bodyPr>
+          <a:lstStyle/>
+          <a:p>
+            <a:pPr algn="l"/>
+            <a:r>
+              <a:rPr sz="1200" b="1">
+                <a:solidFill>
+                  <a:srgbClr val="D9433B"/>
+                </a:solidFill>
+                <a:latin typeface="Hiragino Sans"/>
+                <a:ea typeface="Hiragino Sans"/>
+                <a:cs typeface="Hiragino Sans"/>
+              </a:rPr>
+              <a:t>④ ページ内のJSが # を読み、innerHTML でDOMに入れて実行</a:t>
+            </a:r>
+          </a:p>
+        </p:txBody>
+      </p:sp>
+      <p:sp>
+        <p:nvSpPr>
+          <p:cNvPr id="23" name="TextBox 22"/>
+          <p:cNvSpPr txBox="1"/>
+          <p:nvPr/>
+        </p:nvSpPr>
+        <p:spPr>
+          <a:xfrm>
+            <a:off x="8183879" y="4297680"/>
+            <a:ext cx="3108960" cy="914400"/>
+          </a:xfrm>
+          <a:prstGeom prst="rect">
+            <a:avLst/>
+          </a:prstGeom>
+          <a:noFill/>
+        </p:spPr>
+        <p:txBody>
+          <a:bodyPr wrap="square" anchor="ctr" lIns="0" rIns="0" tIns="0" bIns="0">
+            <a:spAutoFit/>
+          </a:bodyPr>
+          <a:lstStyle/>
+          <a:p>
+            <a:pPr algn="l"/>
+            <a:r>
+              <a:rPr sz="1100" b="0">
+                <a:solidFill>
+                  <a:srgbClr val="24404D"/>
+                </a:solidFill>
+                <a:latin typeface="Hiragino Sans"/>
+                <a:ea typeface="Hiragino Sans"/>
+                <a:cs typeface="Hiragino Sans"/>
+              </a:rPr>
+              <a:t>文字列をHTMLに入れるのは</a:t>
+            </a:r>
+          </a:p>
+          <a:p>
+            <a:pPr algn="l"/>
+            <a:r>
+              <a:rPr sz="1100" b="0">
+                <a:solidFill>
+                  <a:srgbClr val="24404D"/>
+                </a:solidFill>
+                <a:latin typeface="Hiragino Sans"/>
+                <a:ea typeface="Hiragino Sans"/>
+                <a:cs typeface="Hiragino Sans"/>
+              </a:rPr>
+              <a:t>サーバではなくブラウザ上のJS</a:t>
+            </a:r>
+          </a:p>
+        </p:txBody>
+      </p:sp>
+      <p:sp>
+        <p:nvSpPr>
+          <p:cNvPr id="24" name="TextBox 23"/>
+          <p:cNvSpPr txBox="1"/>
+          <p:nvPr/>
+        </p:nvSpPr>
+        <p:spPr>
+          <a:xfrm>
+            <a:off x="7909560" y="5394960"/>
+            <a:ext cx="3657600" cy="822960"/>
+          </a:xfrm>
+          <a:prstGeom prst="rect">
+            <a:avLst/>
+          </a:prstGeom>
+          <a:noFill/>
+        </p:spPr>
+        <p:txBody>
+          <a:bodyPr wrap="square" anchor="t" lIns="0" rIns="0" tIns="0" bIns="0">
+            <a:spAutoFit/>
+          </a:bodyPr>
+          <a:lstStyle/>
+          <a:p>
+            <a:pPr algn="ctr"/>
+            <a:r>
+              <a:rPr sz="1100" b="0">
+                <a:solidFill>
+                  <a:srgbClr val="24404D"/>
+                </a:solidFill>
+                <a:latin typeface="Hiragino Sans"/>
+                <a:ea typeface="Hiragino Sans"/>
+                <a:cs typeface="Hiragino Sans"/>
+              </a:rPr>
+              <a:t>→ Cookie・画面の情報を読み、</a:t>
+            </a:r>
+          </a:p>
+          <a:p>
+            <a:pPr algn="ctr"/>
+            <a:r>
+              <a:rPr sz="1100" b="0">
+                <a:solidFill>
+                  <a:srgbClr val="24404D"/>
+                </a:solidFill>
+                <a:latin typeface="Hiragino Sans"/>
+                <a:ea typeface="Hiragino Sans"/>
+                <a:cs typeface="Hiragino Sans"/>
+              </a:rPr>
+              <a:t>   攻撃者の回収サーバへ送る</a:t>
+            </a:r>
+          </a:p>
+        </p:txBody>
+      </p:sp>
+      <p:cxnSp>
+        <p:nvCxnSpPr>
+          <p:cNvPr id="25" name="Connector 24"/>
+          <p:cNvCxnSpPr/>
+          <p:nvPr/>
+        </p:nvCxnSpPr>
+        <p:spPr>
+          <a:xfrm flipH="1" flipV="1">
+            <a:off x="3017520" y="6080760"/>
+            <a:ext cx="5212080" cy="411480"/>
+          </a:xfrm>
+          <a:prstGeom prst="line">
+            <a:avLst/>
+          </a:prstGeom>
+          <a:ln w="25400">
+            <a:solidFill>
+              <a:srgbClr val="D9433B"/>
+            </a:solidFill>
+            <a:tailEnd type="triangle" w="med" len="med"/>
+          </a:ln>
+        </p:spPr>
+        <p:style>
+          <a:lnRef idx="2">
+            <a:schemeClr val="accent1"/>
+          </a:lnRef>
+          <a:fillRef idx="0">
+            <a:schemeClr val="accent1"/>
+          </a:fillRef>
+          <a:effectRef idx="1">
+            <a:schemeClr val="accent1"/>
+          </a:effectRef>
+          <a:fontRef idx="minor">
+            <a:schemeClr val="tx1"/>
+          </a:fontRef>
+        </p:style>
+      </p:cxnSp>
+      <p:sp>
+        <p:nvSpPr>
+          <p:cNvPr id="26" name="Rounded Rectangle 25"/>
+          <p:cNvSpPr/>
+          <p:nvPr/>
+        </p:nvSpPr>
+        <p:spPr>
+          <a:xfrm>
+            <a:off x="3931920" y="5669280"/>
+            <a:ext cx="3108960" cy="384048"/>
+          </a:xfrm>
+          <a:prstGeom prst="roundRect">
+            <a:avLst>
+              <a:gd name="adj" fmla="val 20000"/>
+            </a:avLst>
+          </a:prstGeom>
+          <a:solidFill>
+            <a:srgbClr val="FFFFFF"/>
+          </a:solidFill>
+          <a:ln w="15240">
+            <a:solidFill>
+              <a:srgbClr val="D9433B"/>
+            </a:solidFill>
+          </a:ln>
+          <a:effectLst/>
+        </p:spPr>
+        <p:style>
+          <a:lnRef idx="1">
+            <a:schemeClr val="accent1"/>
+          </a:lnRef>
+          <a:fillRef idx="3">
+            <a:schemeClr val="accent1"/>
+          </a:fillRef>
+          <a:effectRef idx="2">
+            <a:schemeClr val="accent1"/>
+          </a:effectRef>
+          <a:fontRef idx="minor">
+            <a:schemeClr val="lt1"/>
+          </a:fontRef>
+        </p:style>
+        <p:txBody>
+          <a:bodyPr rtlCol="0" anchor="ctr"/>
+          <a:lstStyle/>
+          <a:p>
+            <a:pPr algn="ctr"/>
+          </a:p>
+        </p:txBody>
+      </p:sp>
+      <p:sp>
+        <p:nvSpPr>
+          <p:cNvPr id="27" name="TextBox 26"/>
+          <p:cNvSpPr txBox="1"/>
+          <p:nvPr/>
+        </p:nvSpPr>
+        <p:spPr>
+          <a:xfrm>
+            <a:off x="4005072" y="5669280"/>
+            <a:ext cx="2962656" cy="384048"/>
+          </a:xfrm>
+          <a:prstGeom prst="rect">
+            <a:avLst/>
+          </a:prstGeom>
+          <a:noFill/>
+        </p:spPr>
+        <p:txBody>
+          <a:bodyPr wrap="square" anchor="ctr" lIns="0" rIns="0" tIns="0" bIns="0">
+            <a:spAutoFit/>
+          </a:bodyPr>
+          <a:lstStyle/>
+          <a:p>
+            <a:pPr algn="ctr"/>
+            <a:r>
+              <a:rPr sz="1100" b="0">
+                <a:solidFill>
+                  <a:srgbClr val="24404D"/>
+                </a:solidFill>
+                <a:latin typeface="Hiragino Sans"/>
+                <a:ea typeface="Hiragino Sans"/>
+                <a:cs typeface="Hiragino Sans"/>
+              </a:rPr>
+              <a:t>⑤ 盗んだ情報を攻撃者へ送信</a:t>
+            </a:r>
+          </a:p>
+        </p:txBody>
+      </p:sp>
+      <p:sp>
+        <p:nvSpPr>
+          <p:cNvPr id="28" name="TextBox 27"/>
+          <p:cNvSpPr txBox="1"/>
+          <p:nvPr/>
+        </p:nvSpPr>
+        <p:spPr>
+          <a:xfrm>
+            <a:off x="457200" y="365760"/>
+            <a:ext cx="11247120" cy="274320"/>
+          </a:xfrm>
+          <a:prstGeom prst="rect">
+            <a:avLst/>
+          </a:prstGeom>
+          <a:noFill/>
+        </p:spPr>
+        <p:txBody>
+          <a:bodyPr wrap="square" anchor="t" lIns="0" rIns="0" tIns="0" bIns="0">
+            <a:spAutoFit/>
+          </a:bodyPr>
+          <a:lstStyle/>
+          <a:p>
+            <a:pPr algn="l"/>
+            <a:r>
+              <a:rPr sz="1100" b="0">
+                <a:solidFill>
+                  <a:srgbClr val="5E7682"/>
+                </a:solidFill>
+                <a:latin typeface="Hiragino Sans"/>
+                <a:ea typeface="Hiragino Sans"/>
+                <a:cs typeface="Hiragino Sans"/>
+              </a:rPr>
+              <a:t>文字列をHTMLに入れるのはサーバではなくブラウザ上のJavaScript。# 以降はサーバに届かない</a:t>
+            </a:r>
+          </a:p>
+        </p:txBody>
+      </p:sp>
+    </p:spTree>
+  </p:cSld>
+  <p:clrMapOvr>
+    <a:masterClrMapping/>
+  </p:clrMapOvr>
+</p:sld>
+</file>
+
 <file path=ppt/slides/slide2.xml><?xml version="1.0" encoding="utf-8"?>
 <p:sld xmlns:a="http://schemas.openxmlformats.org/drawingml/2006/main" xmlns:p="http://schemas.openxmlformats.org/presentationml/2006/main" xmlns:r="http://schemas.openxmlformats.org/officeDocument/2006/relationships">
   <p:cSld>
@@ -16529,6 +17697,2457 @@
                 <a:cs typeface="Hiragino Sans"/>
               </a:rPr>
               <a:t>どの型でも、最後にスクリプトが動くのは被害者のブラウザの中。違うのは「罠の置き場所」と「誰がHTMLに入れるか」</a:t>
+            </a:r>
+          </a:p>
+        </p:txBody>
+      </p:sp>
+    </p:spTree>
+  </p:cSld>
+  <p:clrMapOvr>
+    <a:masterClrMapping/>
+  </p:clrMapOvr>
+</p:sld>
+</file>
+
+<file path=ppt/slides/slide8.xml><?xml version="1.0" encoding="utf-8"?>
+<p:sld xmlns:a="http://schemas.openxmlformats.org/drawingml/2006/main" xmlns:p="http://schemas.openxmlformats.org/presentationml/2006/main" xmlns:r="http://schemas.openxmlformats.org/officeDocument/2006/relationships">
+  <p:cSld>
+    <p:spTree>
+      <p:nvGrpSpPr>
+        <p:cNvPr id="1" name=""/>
+        <p:cNvGrpSpPr/>
+        <p:nvPr/>
+      </p:nvGrpSpPr>
+      <p:grpSpPr/>
+      <p:sp>
+        <p:nvSpPr>
+          <p:cNvPr id="2" name="Rounded Rectangle 1"/>
+          <p:cNvSpPr/>
+          <p:nvPr/>
+        </p:nvSpPr>
+        <p:spPr>
+          <a:xfrm>
+            <a:off x="4526280" y="777240"/>
+            <a:ext cx="1920240" cy="960120"/>
+          </a:xfrm>
+          <a:prstGeom prst="roundRect">
+            <a:avLst>
+              <a:gd name="adj" fmla="val 12000"/>
+            </a:avLst>
+          </a:prstGeom>
+          <a:solidFill>
+            <a:srgbClr val="E6F5F2"/>
+          </a:solidFill>
+          <a:ln w="25400">
+            <a:solidFill>
+              <a:srgbClr val="1AA69A"/>
+            </a:solidFill>
+          </a:ln>
+          <a:effectLst/>
+        </p:spPr>
+        <p:style>
+          <a:lnRef idx="1">
+            <a:schemeClr val="accent1"/>
+          </a:lnRef>
+          <a:fillRef idx="3">
+            <a:schemeClr val="accent1"/>
+          </a:fillRef>
+          <a:effectRef idx="2">
+            <a:schemeClr val="accent1"/>
+          </a:effectRef>
+          <a:fontRef idx="minor">
+            <a:schemeClr val="lt1"/>
+          </a:fontRef>
+        </p:style>
+        <p:txBody>
+          <a:bodyPr rtlCol="0" anchor="ctr"/>
+          <a:lstStyle/>
+          <a:p>
+            <a:pPr algn="ctr"/>
+          </a:p>
+        </p:txBody>
+      </p:sp>
+      <p:sp>
+        <p:nvSpPr>
+          <p:cNvPr id="3" name="TextBox 2"/>
+          <p:cNvSpPr txBox="1"/>
+          <p:nvPr/>
+        </p:nvSpPr>
+        <p:spPr>
+          <a:xfrm>
+            <a:off x="4526280" y="777240"/>
+            <a:ext cx="1920240" cy="960120"/>
+          </a:xfrm>
+          <a:prstGeom prst="rect">
+            <a:avLst/>
+          </a:prstGeom>
+          <a:noFill/>
+        </p:spPr>
+        <p:txBody>
+          <a:bodyPr wrap="square" anchor="ctr" lIns="0" rIns="0" tIns="0" bIns="0">
+            <a:spAutoFit/>
+          </a:bodyPr>
+          <a:lstStyle/>
+          <a:p>
+            <a:pPr algn="ctr"/>
+            <a:r>
+              <a:rPr sz="1400" b="1">
+                <a:solidFill>
+                  <a:srgbClr val="0E7C72"/>
+                </a:solidFill>
+                <a:latin typeface="Hiragino Sans"/>
+                <a:ea typeface="Hiragino Sans"/>
+                <a:cs typeface="Hiragino Sans"/>
+              </a:rPr>
+              <a:t>Webサーバ</a:t>
+            </a:r>
+          </a:p>
+        </p:txBody>
+      </p:sp>
+      <p:sp>
+        <p:nvSpPr>
+          <p:cNvPr id="4" name="Rounded Rectangle 3"/>
+          <p:cNvSpPr/>
+          <p:nvPr/>
+        </p:nvSpPr>
+        <p:spPr>
+          <a:xfrm>
+            <a:off x="6720840" y="777240"/>
+            <a:ext cx="1371600" cy="960120"/>
+          </a:xfrm>
+          <a:prstGeom prst="roundRect">
+            <a:avLst>
+              <a:gd name="adj" fmla="val 12000"/>
+            </a:avLst>
+          </a:prstGeom>
+          <a:solidFill>
+            <a:srgbClr val="F1F3F4"/>
+          </a:solidFill>
+          <a:ln w="25400">
+            <a:solidFill>
+              <a:srgbClr val="C2CBD0"/>
+            </a:solidFill>
+          </a:ln>
+          <a:effectLst/>
+        </p:spPr>
+        <p:style>
+          <a:lnRef idx="1">
+            <a:schemeClr val="accent1"/>
+          </a:lnRef>
+          <a:fillRef idx="3">
+            <a:schemeClr val="accent1"/>
+          </a:fillRef>
+          <a:effectRef idx="2">
+            <a:schemeClr val="accent1"/>
+          </a:effectRef>
+          <a:fontRef idx="minor">
+            <a:schemeClr val="lt1"/>
+          </a:fontRef>
+        </p:style>
+        <p:txBody>
+          <a:bodyPr rtlCol="0" anchor="ctr"/>
+          <a:lstStyle/>
+          <a:p>
+            <a:pPr algn="ctr"/>
+          </a:p>
+        </p:txBody>
+      </p:sp>
+      <p:sp>
+        <p:nvSpPr>
+          <p:cNvPr id="5" name="TextBox 4"/>
+          <p:cNvSpPr txBox="1"/>
+          <p:nvPr/>
+        </p:nvSpPr>
+        <p:spPr>
+          <a:xfrm>
+            <a:off x="6720840" y="777240"/>
+            <a:ext cx="1371600" cy="960120"/>
+          </a:xfrm>
+          <a:prstGeom prst="rect">
+            <a:avLst/>
+          </a:prstGeom>
+          <a:noFill/>
+        </p:spPr>
+        <p:txBody>
+          <a:bodyPr wrap="square" anchor="ctr" lIns="0" rIns="0" tIns="0" bIns="0">
+            <a:spAutoFit/>
+          </a:bodyPr>
+          <a:lstStyle/>
+          <a:p>
+            <a:pPr algn="ctr"/>
+            <a:r>
+              <a:rPr sz="1400" b="1">
+                <a:solidFill>
+                  <a:srgbClr val="5E7682"/>
+                </a:solidFill>
+                <a:latin typeface="Hiragino Sans"/>
+                <a:ea typeface="Hiragino Sans"/>
+                <a:cs typeface="Hiragino Sans"/>
+              </a:rPr>
+              <a:t>DB</a:t>
+            </a:r>
+          </a:p>
+        </p:txBody>
+      </p:sp>
+      <p:sp>
+        <p:nvSpPr>
+          <p:cNvPr id="6" name="Rounded Rectangle 5"/>
+          <p:cNvSpPr/>
+          <p:nvPr/>
+        </p:nvSpPr>
+        <p:spPr>
+          <a:xfrm>
+            <a:off x="502920" y="3931920"/>
+            <a:ext cx="2103120" cy="960120"/>
+          </a:xfrm>
+          <a:prstGeom prst="roundRect">
+            <a:avLst>
+              <a:gd name="adj" fmla="val 12000"/>
+            </a:avLst>
+          </a:prstGeom>
+          <a:solidFill>
+            <a:srgbClr val="FBEBEA"/>
+          </a:solidFill>
+          <a:ln w="25400">
+            <a:solidFill>
+              <a:srgbClr val="D9433B"/>
+            </a:solidFill>
+          </a:ln>
+          <a:effectLst/>
+        </p:spPr>
+        <p:style>
+          <a:lnRef idx="1">
+            <a:schemeClr val="accent1"/>
+          </a:lnRef>
+          <a:fillRef idx="3">
+            <a:schemeClr val="accent1"/>
+          </a:fillRef>
+          <a:effectRef idx="2">
+            <a:schemeClr val="accent1"/>
+          </a:effectRef>
+          <a:fontRef idx="minor">
+            <a:schemeClr val="lt1"/>
+          </a:fontRef>
+        </p:style>
+        <p:txBody>
+          <a:bodyPr rtlCol="0" anchor="ctr"/>
+          <a:lstStyle/>
+          <a:p>
+            <a:pPr algn="ctr"/>
+          </a:p>
+        </p:txBody>
+      </p:sp>
+      <p:sp>
+        <p:nvSpPr>
+          <p:cNvPr id="7" name="TextBox 6"/>
+          <p:cNvSpPr txBox="1"/>
+          <p:nvPr/>
+        </p:nvSpPr>
+        <p:spPr>
+          <a:xfrm>
+            <a:off x="502920" y="3931920"/>
+            <a:ext cx="2103120" cy="960120"/>
+          </a:xfrm>
+          <a:prstGeom prst="rect">
+            <a:avLst/>
+          </a:prstGeom>
+          <a:noFill/>
+        </p:spPr>
+        <p:txBody>
+          <a:bodyPr wrap="square" anchor="ctr" lIns="0" rIns="0" tIns="0" bIns="0">
+            <a:spAutoFit/>
+          </a:bodyPr>
+          <a:lstStyle/>
+          <a:p>
+            <a:pPr algn="ctr"/>
+            <a:r>
+              <a:rPr sz="1400" b="1">
+                <a:solidFill>
+                  <a:srgbClr val="D9433B"/>
+                </a:solidFill>
+                <a:latin typeface="Hiragino Sans"/>
+                <a:ea typeface="Hiragino Sans"/>
+                <a:cs typeface="Hiragino Sans"/>
+              </a:rPr>
+              <a:t>攻撃者</a:t>
+            </a:r>
+          </a:p>
+        </p:txBody>
+      </p:sp>
+      <p:sp>
+        <p:nvSpPr>
+          <p:cNvPr id="8" name="Rounded Rectangle 7"/>
+          <p:cNvSpPr/>
+          <p:nvPr/>
+        </p:nvSpPr>
+        <p:spPr>
+          <a:xfrm>
+            <a:off x="502920" y="5577840"/>
+            <a:ext cx="2468880" cy="914400"/>
+          </a:xfrm>
+          <a:prstGeom prst="roundRect">
+            <a:avLst>
+              <a:gd name="adj" fmla="val 12000"/>
+            </a:avLst>
+          </a:prstGeom>
+          <a:solidFill>
+            <a:srgbClr val="FBEBEA"/>
+          </a:solidFill>
+          <a:ln w="25400">
+            <a:solidFill>
+              <a:srgbClr val="D9433B"/>
+            </a:solidFill>
+          </a:ln>
+          <a:effectLst/>
+        </p:spPr>
+        <p:style>
+          <a:lnRef idx="1">
+            <a:schemeClr val="accent1"/>
+          </a:lnRef>
+          <a:fillRef idx="3">
+            <a:schemeClr val="accent1"/>
+          </a:fillRef>
+          <a:effectRef idx="2">
+            <a:schemeClr val="accent1"/>
+          </a:effectRef>
+          <a:fontRef idx="minor">
+            <a:schemeClr val="lt1"/>
+          </a:fontRef>
+        </p:style>
+        <p:txBody>
+          <a:bodyPr rtlCol="0" anchor="ctr"/>
+          <a:lstStyle/>
+          <a:p>
+            <a:pPr algn="ctr"/>
+          </a:p>
+        </p:txBody>
+      </p:sp>
+      <p:sp>
+        <p:nvSpPr>
+          <p:cNvPr id="9" name="TextBox 8"/>
+          <p:cNvSpPr txBox="1"/>
+          <p:nvPr/>
+        </p:nvSpPr>
+        <p:spPr>
+          <a:xfrm>
+            <a:off x="502920" y="5577840"/>
+            <a:ext cx="2468880" cy="914400"/>
+          </a:xfrm>
+          <a:prstGeom prst="rect">
+            <a:avLst/>
+          </a:prstGeom>
+          <a:noFill/>
+        </p:spPr>
+        <p:txBody>
+          <a:bodyPr wrap="square" anchor="ctr" lIns="0" rIns="0" tIns="0" bIns="0">
+            <a:spAutoFit/>
+          </a:bodyPr>
+          <a:lstStyle/>
+          <a:p>
+            <a:pPr algn="ctr"/>
+            <a:r>
+              <a:rPr sz="1300" b="1">
+                <a:solidFill>
+                  <a:srgbClr val="D9433B"/>
+                </a:solidFill>
+                <a:latin typeface="Hiragino Sans"/>
+                <a:ea typeface="Hiragino Sans"/>
+                <a:cs typeface="Hiragino Sans"/>
+              </a:rPr>
+              <a:t>攻撃者の回収サーバ</a:t>
+            </a:r>
+          </a:p>
+        </p:txBody>
+      </p:sp>
+      <p:sp>
+        <p:nvSpPr>
+          <p:cNvPr id="10" name="Rounded Rectangle 9"/>
+          <p:cNvSpPr/>
+          <p:nvPr/>
+        </p:nvSpPr>
+        <p:spPr>
+          <a:xfrm>
+            <a:off x="7772400" y="3154680"/>
+            <a:ext cx="3931920" cy="3337560"/>
+          </a:xfrm>
+          <a:prstGeom prst="roundRect">
+            <a:avLst>
+              <a:gd name="adj" fmla="val 6000"/>
+            </a:avLst>
+          </a:prstGeom>
+          <a:solidFill>
+            <a:srgbClr val="F1F3F4"/>
+          </a:solidFill>
+          <a:ln w="25400">
+            <a:solidFill>
+              <a:srgbClr val="24404D"/>
+            </a:solidFill>
+          </a:ln>
+          <a:effectLst/>
+        </p:spPr>
+        <p:style>
+          <a:lnRef idx="1">
+            <a:schemeClr val="accent1"/>
+          </a:lnRef>
+          <a:fillRef idx="3">
+            <a:schemeClr val="accent1"/>
+          </a:fillRef>
+          <a:effectRef idx="2">
+            <a:schemeClr val="accent1"/>
+          </a:effectRef>
+          <a:fontRef idx="minor">
+            <a:schemeClr val="lt1"/>
+          </a:fontRef>
+        </p:style>
+        <p:txBody>
+          <a:bodyPr rtlCol="0" anchor="ctr"/>
+          <a:lstStyle/>
+          <a:p>
+            <a:pPr algn="ctr"/>
+          </a:p>
+        </p:txBody>
+      </p:sp>
+      <p:sp>
+        <p:nvSpPr>
+          <p:cNvPr id="11" name="TextBox 10"/>
+          <p:cNvSpPr txBox="1"/>
+          <p:nvPr/>
+        </p:nvSpPr>
+        <p:spPr>
+          <a:xfrm>
+            <a:off x="7772400" y="3291840"/>
+            <a:ext cx="3931920" cy="365760"/>
+          </a:xfrm>
+          <a:prstGeom prst="rect">
+            <a:avLst/>
+          </a:prstGeom>
+          <a:noFill/>
+        </p:spPr>
+        <p:txBody>
+          <a:bodyPr wrap="square" anchor="t" lIns="0" rIns="0" tIns="0" bIns="0">
+            <a:spAutoFit/>
+          </a:bodyPr>
+          <a:lstStyle/>
+          <a:p>
+            <a:pPr algn="ctr"/>
+            <a:r>
+              <a:rPr sz="1400" b="1">
+                <a:solidFill>
+                  <a:srgbClr val="24404D"/>
+                </a:solidFill>
+                <a:latin typeface="Hiragino Sans"/>
+                <a:ea typeface="Hiragino Sans"/>
+                <a:cs typeface="Hiragino Sans"/>
+              </a:rPr>
+              <a:t>被害者のブラウザ</a:t>
+            </a:r>
+          </a:p>
+        </p:txBody>
+      </p:sp>
+      <p:cxnSp>
+        <p:nvCxnSpPr>
+          <p:cNvPr id="12" name="Connector 11"/>
+          <p:cNvCxnSpPr/>
+          <p:nvPr/>
+        </p:nvCxnSpPr>
+        <p:spPr>
+          <a:xfrm>
+            <a:off x="2651760" y="4251960"/>
+            <a:ext cx="5120640" cy="182880"/>
+          </a:xfrm>
+          <a:prstGeom prst="line">
+            <a:avLst/>
+          </a:prstGeom>
+          <a:ln w="25400">
+            <a:solidFill>
+              <a:srgbClr val="D9433B"/>
+            </a:solidFill>
+            <a:tailEnd type="triangle" w="med" len="med"/>
+          </a:ln>
+        </p:spPr>
+        <p:style>
+          <a:lnRef idx="2">
+            <a:schemeClr val="accent1"/>
+          </a:lnRef>
+          <a:fillRef idx="0">
+            <a:schemeClr val="accent1"/>
+          </a:fillRef>
+          <a:effectRef idx="1">
+            <a:schemeClr val="accent1"/>
+          </a:effectRef>
+          <a:fontRef idx="minor">
+            <a:schemeClr val="tx1"/>
+          </a:fontRef>
+        </p:style>
+      </p:cxnSp>
+      <p:sp>
+        <p:nvSpPr>
+          <p:cNvPr id="13" name="Rounded Rectangle 12"/>
+          <p:cNvSpPr/>
+          <p:nvPr/>
+        </p:nvSpPr>
+        <p:spPr>
+          <a:xfrm>
+            <a:off x="2834640" y="3246120"/>
+            <a:ext cx="3108960" cy="621792"/>
+          </a:xfrm>
+          <a:prstGeom prst="roundRect">
+            <a:avLst>
+              <a:gd name="adj" fmla="val 20000"/>
+            </a:avLst>
+          </a:prstGeom>
+          <a:solidFill>
+            <a:srgbClr val="FFFFFF"/>
+          </a:solidFill>
+          <a:ln w="15240">
+            <a:solidFill>
+              <a:srgbClr val="D9433B"/>
+            </a:solidFill>
+          </a:ln>
+          <a:effectLst/>
+        </p:spPr>
+        <p:style>
+          <a:lnRef idx="1">
+            <a:schemeClr val="accent1"/>
+          </a:lnRef>
+          <a:fillRef idx="3">
+            <a:schemeClr val="accent1"/>
+          </a:fillRef>
+          <a:effectRef idx="2">
+            <a:schemeClr val="accent1"/>
+          </a:effectRef>
+          <a:fontRef idx="minor">
+            <a:schemeClr val="lt1"/>
+          </a:fontRef>
+        </p:style>
+        <p:txBody>
+          <a:bodyPr rtlCol="0" anchor="ctr"/>
+          <a:lstStyle/>
+          <a:p>
+            <a:pPr algn="ctr"/>
+          </a:p>
+        </p:txBody>
+      </p:sp>
+      <p:sp>
+        <p:nvSpPr>
+          <p:cNvPr id="14" name="TextBox 13"/>
+          <p:cNvSpPr txBox="1"/>
+          <p:nvPr/>
+        </p:nvSpPr>
+        <p:spPr>
+          <a:xfrm>
+            <a:off x="2907792" y="3246120"/>
+            <a:ext cx="2962656" cy="621792"/>
+          </a:xfrm>
+          <a:prstGeom prst="rect">
+            <a:avLst/>
+          </a:prstGeom>
+          <a:noFill/>
+        </p:spPr>
+        <p:txBody>
+          <a:bodyPr wrap="square" anchor="ctr" lIns="0" rIns="0" tIns="0" bIns="0">
+            <a:spAutoFit/>
+          </a:bodyPr>
+          <a:lstStyle/>
+          <a:p>
+            <a:pPr algn="ctr"/>
+            <a:r>
+              <a:rPr sz="1100" b="0">
+                <a:solidFill>
+                  <a:srgbClr val="24404D"/>
+                </a:solidFill>
+                <a:latin typeface="Hiragino Sans"/>
+                <a:ea typeface="Hiragino Sans"/>
+                <a:cs typeface="Hiragino Sans"/>
+              </a:rPr>
+              <a:t>① 罠URL（?q=スクリプト）を</a:t>
+            </a:r>
+          </a:p>
+          <a:p>
+            <a:pPr algn="ctr"/>
+            <a:r>
+              <a:rPr sz="1100" b="0">
+                <a:solidFill>
+                  <a:srgbClr val="24404D"/>
+                </a:solidFill>
+                <a:latin typeface="Hiragino Sans"/>
+                <a:ea typeface="Hiragino Sans"/>
+                <a:cs typeface="Hiragino Sans"/>
+              </a:rPr>
+              <a:t>メールやSNSで送る</a:t>
+            </a:r>
+          </a:p>
+        </p:txBody>
+      </p:sp>
+      <p:cxnSp>
+        <p:nvCxnSpPr>
+          <p:cNvPr id="15" name="Connector 14"/>
+          <p:cNvCxnSpPr/>
+          <p:nvPr/>
+        </p:nvCxnSpPr>
+        <p:spPr>
+          <a:xfrm flipH="1" flipV="1">
+            <a:off x="6035040" y="1737360"/>
+            <a:ext cx="2743200" cy="1417320"/>
+          </a:xfrm>
+          <a:prstGeom prst="line">
+            <a:avLst/>
+          </a:prstGeom>
+          <a:ln w="25400">
+            <a:solidFill>
+              <a:srgbClr val="5E7682"/>
+            </a:solidFill>
+            <a:tailEnd type="triangle" w="med" len="med"/>
+          </a:ln>
+        </p:spPr>
+        <p:style>
+          <a:lnRef idx="2">
+            <a:schemeClr val="accent1"/>
+          </a:lnRef>
+          <a:fillRef idx="0">
+            <a:schemeClr val="accent1"/>
+          </a:fillRef>
+          <a:effectRef idx="1">
+            <a:schemeClr val="accent1"/>
+          </a:effectRef>
+          <a:fontRef idx="minor">
+            <a:schemeClr val="tx1"/>
+          </a:fontRef>
+        </p:style>
+      </p:cxnSp>
+      <p:sp>
+        <p:nvSpPr>
+          <p:cNvPr id="16" name="Rounded Rectangle 15"/>
+          <p:cNvSpPr/>
+          <p:nvPr/>
+        </p:nvSpPr>
+        <p:spPr>
+          <a:xfrm>
+            <a:off x="7772400" y="2286000"/>
+            <a:ext cx="2743200" cy="384048"/>
+          </a:xfrm>
+          <a:prstGeom prst="roundRect">
+            <a:avLst>
+              <a:gd name="adj" fmla="val 20000"/>
+            </a:avLst>
+          </a:prstGeom>
+          <a:solidFill>
+            <a:srgbClr val="FFFFFF"/>
+          </a:solidFill>
+          <a:ln w="15240">
+            <a:solidFill>
+              <a:srgbClr val="5E7682"/>
+            </a:solidFill>
+          </a:ln>
+          <a:effectLst/>
+        </p:spPr>
+        <p:style>
+          <a:lnRef idx="1">
+            <a:schemeClr val="accent1"/>
+          </a:lnRef>
+          <a:fillRef idx="3">
+            <a:schemeClr val="accent1"/>
+          </a:fillRef>
+          <a:effectRef idx="2">
+            <a:schemeClr val="accent1"/>
+          </a:effectRef>
+          <a:fontRef idx="minor">
+            <a:schemeClr val="lt1"/>
+          </a:fontRef>
+        </p:style>
+        <p:txBody>
+          <a:bodyPr rtlCol="0" anchor="ctr"/>
+          <a:lstStyle/>
+          <a:p>
+            <a:pPr algn="ctr"/>
+          </a:p>
+        </p:txBody>
+      </p:sp>
+      <p:sp>
+        <p:nvSpPr>
+          <p:cNvPr id="17" name="TextBox 16"/>
+          <p:cNvSpPr txBox="1"/>
+          <p:nvPr/>
+        </p:nvSpPr>
+        <p:spPr>
+          <a:xfrm>
+            <a:off x="7845552" y="2286000"/>
+            <a:ext cx="2596896" cy="384048"/>
+          </a:xfrm>
+          <a:prstGeom prst="rect">
+            <a:avLst/>
+          </a:prstGeom>
+          <a:noFill/>
+        </p:spPr>
+        <p:txBody>
+          <a:bodyPr wrap="square" anchor="ctr" lIns="0" rIns="0" tIns="0" bIns="0">
+            <a:spAutoFit/>
+          </a:bodyPr>
+          <a:lstStyle/>
+          <a:p>
+            <a:pPr algn="ctr"/>
+            <a:r>
+              <a:rPr sz="1100" b="0">
+                <a:solidFill>
+                  <a:srgbClr val="24404D"/>
+                </a:solidFill>
+                <a:latin typeface="Hiragino Sans"/>
+                <a:ea typeface="Hiragino Sans"/>
+                <a:cs typeface="Hiragino Sans"/>
+              </a:rPr>
+              <a:t>② 罠URLでアクセス</a:t>
+            </a:r>
+          </a:p>
+        </p:txBody>
+      </p:sp>
+      <p:cxnSp>
+        <p:nvCxnSpPr>
+          <p:cNvPr id="18" name="Connector 17"/>
+          <p:cNvCxnSpPr/>
+          <p:nvPr/>
+        </p:nvCxnSpPr>
+        <p:spPr>
+          <a:xfrm>
+            <a:off x="5394960" y="1737360"/>
+            <a:ext cx="2743200" cy="1417320"/>
+          </a:xfrm>
+          <a:prstGeom prst="line">
+            <a:avLst/>
+          </a:prstGeom>
+          <a:ln w="25400">
+            <a:solidFill>
+              <a:srgbClr val="D9433B"/>
+            </a:solidFill>
+            <a:tailEnd type="triangle" w="med" len="med"/>
+          </a:ln>
+        </p:spPr>
+        <p:style>
+          <a:lnRef idx="2">
+            <a:schemeClr val="accent1"/>
+          </a:lnRef>
+          <a:fillRef idx="0">
+            <a:schemeClr val="accent1"/>
+          </a:fillRef>
+          <a:effectRef idx="1">
+            <a:schemeClr val="accent1"/>
+          </a:effectRef>
+          <a:fontRef idx="minor">
+            <a:schemeClr val="tx1"/>
+          </a:fontRef>
+        </p:style>
+      </p:cxnSp>
+      <p:sp>
+        <p:nvSpPr>
+          <p:cNvPr id="19" name="Rounded Rectangle 18"/>
+          <p:cNvSpPr/>
+          <p:nvPr/>
+        </p:nvSpPr>
+        <p:spPr>
+          <a:xfrm>
+            <a:off x="3566160" y="2011680"/>
+            <a:ext cx="3566160" cy="384048"/>
+          </a:xfrm>
+          <a:prstGeom prst="roundRect">
+            <a:avLst>
+              <a:gd name="adj" fmla="val 20000"/>
+            </a:avLst>
+          </a:prstGeom>
+          <a:solidFill>
+            <a:srgbClr val="FFFFFF"/>
+          </a:solidFill>
+          <a:ln w="15240">
+            <a:solidFill>
+              <a:srgbClr val="D9433B"/>
+            </a:solidFill>
+          </a:ln>
+          <a:effectLst/>
+        </p:spPr>
+        <p:style>
+          <a:lnRef idx="1">
+            <a:schemeClr val="accent1"/>
+          </a:lnRef>
+          <a:fillRef idx="3">
+            <a:schemeClr val="accent1"/>
+          </a:fillRef>
+          <a:effectRef idx="2">
+            <a:schemeClr val="accent1"/>
+          </a:effectRef>
+          <a:fontRef idx="minor">
+            <a:schemeClr val="lt1"/>
+          </a:fontRef>
+        </p:style>
+        <p:txBody>
+          <a:bodyPr rtlCol="0" anchor="ctr"/>
+          <a:lstStyle/>
+          <a:p>
+            <a:pPr algn="ctr"/>
+          </a:p>
+        </p:txBody>
+      </p:sp>
+      <p:sp>
+        <p:nvSpPr>
+          <p:cNvPr id="20" name="TextBox 19"/>
+          <p:cNvSpPr txBox="1"/>
+          <p:nvPr/>
+        </p:nvSpPr>
+        <p:spPr>
+          <a:xfrm>
+            <a:off x="3639312" y="2011680"/>
+            <a:ext cx="3419856" cy="384048"/>
+          </a:xfrm>
+          <a:prstGeom prst="rect">
+            <a:avLst/>
+          </a:prstGeom>
+          <a:noFill/>
+        </p:spPr>
+        <p:txBody>
+          <a:bodyPr wrap="square" anchor="ctr" lIns="0" rIns="0" tIns="0" bIns="0">
+            <a:spAutoFit/>
+          </a:bodyPr>
+          <a:lstStyle/>
+          <a:p>
+            <a:pPr algn="ctr"/>
+            <a:r>
+              <a:rPr sz="1100" b="0">
+                <a:solidFill>
+                  <a:srgbClr val="24404D"/>
+                </a:solidFill>
+                <a:latin typeface="Hiragino Sans"/>
+                <a:ea typeface="Hiragino Sans"/>
+                <a:cs typeface="Hiragino Sans"/>
+              </a:rPr>
+              <a:t>③ クエリの値をそのまま応答のHTMLに入れて返す</a:t>
+            </a:r>
+          </a:p>
+        </p:txBody>
+      </p:sp>
+      <p:sp>
+        <p:nvSpPr>
+          <p:cNvPr id="21" name="Rounded Rectangle 20"/>
+          <p:cNvSpPr/>
+          <p:nvPr/>
+        </p:nvSpPr>
+        <p:spPr>
+          <a:xfrm>
+            <a:off x="8046720" y="3840480"/>
+            <a:ext cx="3383280" cy="1417320"/>
+          </a:xfrm>
+          <a:prstGeom prst="roundRect">
+            <a:avLst>
+              <a:gd name="adj" fmla="val 10000"/>
+            </a:avLst>
+          </a:prstGeom>
+          <a:solidFill>
+            <a:srgbClr val="FBEBEA"/>
+          </a:solidFill>
+          <a:ln w="22860">
+            <a:solidFill>
+              <a:srgbClr val="D9433B"/>
+            </a:solidFill>
+          </a:ln>
+          <a:effectLst/>
+        </p:spPr>
+        <p:style>
+          <a:lnRef idx="1">
+            <a:schemeClr val="accent1"/>
+          </a:lnRef>
+          <a:fillRef idx="3">
+            <a:schemeClr val="accent1"/>
+          </a:fillRef>
+          <a:effectRef idx="2">
+            <a:schemeClr val="accent1"/>
+          </a:effectRef>
+          <a:fontRef idx="minor">
+            <a:schemeClr val="lt1"/>
+          </a:fontRef>
+        </p:style>
+        <p:txBody>
+          <a:bodyPr rtlCol="0" anchor="ctr"/>
+          <a:lstStyle/>
+          <a:p>
+            <a:pPr algn="ctr"/>
+          </a:p>
+        </p:txBody>
+      </p:sp>
+      <p:sp>
+        <p:nvSpPr>
+          <p:cNvPr id="22" name="TextBox 21"/>
+          <p:cNvSpPr txBox="1"/>
+          <p:nvPr/>
+        </p:nvSpPr>
+        <p:spPr>
+          <a:xfrm>
+            <a:off x="8183879" y="3931920"/>
+            <a:ext cx="3108960" cy="320040"/>
+          </a:xfrm>
+          <a:prstGeom prst="rect">
+            <a:avLst/>
+          </a:prstGeom>
+          <a:noFill/>
+        </p:spPr>
+        <p:txBody>
+          <a:bodyPr wrap="square" anchor="t" lIns="0" rIns="0" tIns="0" bIns="0">
+            <a:spAutoFit/>
+          </a:bodyPr>
+          <a:lstStyle/>
+          <a:p>
+            <a:pPr algn="l"/>
+            <a:r>
+              <a:rPr sz="1200" b="1">
+                <a:solidFill>
+                  <a:srgbClr val="D9433B"/>
+                </a:solidFill>
+                <a:latin typeface="Hiragino Sans"/>
+                <a:ea typeface="Hiragino Sans"/>
+                <a:cs typeface="Hiragino Sans"/>
+              </a:rPr>
+              <a:t>④ HTMLパーサがscript要素を作り実行</a:t>
+            </a:r>
+          </a:p>
+        </p:txBody>
+      </p:sp>
+      <p:sp>
+        <p:nvSpPr>
+          <p:cNvPr id="23" name="TextBox 22"/>
+          <p:cNvSpPr txBox="1"/>
+          <p:nvPr/>
+        </p:nvSpPr>
+        <p:spPr>
+          <a:xfrm>
+            <a:off x="8183879" y="4297680"/>
+            <a:ext cx="3108960" cy="914400"/>
+          </a:xfrm>
+          <a:prstGeom prst="rect">
+            <a:avLst/>
+          </a:prstGeom>
+          <a:noFill/>
+        </p:spPr>
+        <p:txBody>
+          <a:bodyPr wrap="square" anchor="ctr" lIns="0" rIns="0" tIns="0" bIns="0">
+            <a:spAutoFit/>
+          </a:bodyPr>
+          <a:lstStyle/>
+          <a:p>
+            <a:pPr algn="l"/>
+            <a:r>
+              <a:rPr sz="1100" b="0">
+                <a:solidFill>
+                  <a:srgbClr val="24404D"/>
+                </a:solidFill>
+                <a:latin typeface="Hiragino Sans"/>
+                <a:ea typeface="Hiragino Sans"/>
+                <a:cs typeface="Hiragino Sans"/>
+              </a:rPr>
+              <a:t>届いたHTMLの中に</a:t>
+            </a:r>
+          </a:p>
+          <a:p>
+            <a:pPr algn="l"/>
+            <a:r>
+              <a:rPr sz="1100" b="0">
+                <a:solidFill>
+                  <a:srgbClr val="24404D"/>
+                </a:solidFill>
+                <a:latin typeface="Hiragino Sans"/>
+                <a:ea typeface="Hiragino Sans"/>
+                <a:cs typeface="Hiragino Sans"/>
+              </a:rPr>
+              <a:t>script要素ができてしまう</a:t>
+            </a:r>
+          </a:p>
+        </p:txBody>
+      </p:sp>
+      <p:sp>
+        <p:nvSpPr>
+          <p:cNvPr id="24" name="TextBox 23"/>
+          <p:cNvSpPr txBox="1"/>
+          <p:nvPr/>
+        </p:nvSpPr>
+        <p:spPr>
+          <a:xfrm>
+            <a:off x="7909560" y="5394960"/>
+            <a:ext cx="3657600" cy="822960"/>
+          </a:xfrm>
+          <a:prstGeom prst="rect">
+            <a:avLst/>
+          </a:prstGeom>
+          <a:noFill/>
+        </p:spPr>
+        <p:txBody>
+          <a:bodyPr wrap="square" anchor="t" lIns="0" rIns="0" tIns="0" bIns="0">
+            <a:spAutoFit/>
+          </a:bodyPr>
+          <a:lstStyle/>
+          <a:p>
+            <a:pPr algn="ctr"/>
+            <a:r>
+              <a:rPr sz="1100" b="0">
+                <a:solidFill>
+                  <a:srgbClr val="24404D"/>
+                </a:solidFill>
+                <a:latin typeface="Hiragino Sans"/>
+                <a:ea typeface="Hiragino Sans"/>
+                <a:cs typeface="Hiragino Sans"/>
+              </a:rPr>
+              <a:t>→ Cookie・画面の情報を読み、</a:t>
+            </a:r>
+          </a:p>
+          <a:p>
+            <a:pPr algn="ctr"/>
+            <a:r>
+              <a:rPr sz="1100" b="0">
+                <a:solidFill>
+                  <a:srgbClr val="24404D"/>
+                </a:solidFill>
+                <a:latin typeface="Hiragino Sans"/>
+                <a:ea typeface="Hiragino Sans"/>
+                <a:cs typeface="Hiragino Sans"/>
+              </a:rPr>
+              <a:t>   攻撃者の回収サーバへ送る</a:t>
+            </a:r>
+          </a:p>
+        </p:txBody>
+      </p:sp>
+      <p:cxnSp>
+        <p:nvCxnSpPr>
+          <p:cNvPr id="25" name="Connector 24"/>
+          <p:cNvCxnSpPr/>
+          <p:nvPr/>
+        </p:nvCxnSpPr>
+        <p:spPr>
+          <a:xfrm flipH="1" flipV="1">
+            <a:off x="3017520" y="6080760"/>
+            <a:ext cx="5212080" cy="411480"/>
+          </a:xfrm>
+          <a:prstGeom prst="line">
+            <a:avLst/>
+          </a:prstGeom>
+          <a:ln w="25400">
+            <a:solidFill>
+              <a:srgbClr val="D9433B"/>
+            </a:solidFill>
+            <a:tailEnd type="triangle" w="med" len="med"/>
+          </a:ln>
+        </p:spPr>
+        <p:style>
+          <a:lnRef idx="2">
+            <a:schemeClr val="accent1"/>
+          </a:lnRef>
+          <a:fillRef idx="0">
+            <a:schemeClr val="accent1"/>
+          </a:fillRef>
+          <a:effectRef idx="1">
+            <a:schemeClr val="accent1"/>
+          </a:effectRef>
+          <a:fontRef idx="minor">
+            <a:schemeClr val="tx1"/>
+          </a:fontRef>
+        </p:style>
+      </p:cxnSp>
+      <p:sp>
+        <p:nvSpPr>
+          <p:cNvPr id="26" name="Rounded Rectangle 25"/>
+          <p:cNvSpPr/>
+          <p:nvPr/>
+        </p:nvSpPr>
+        <p:spPr>
+          <a:xfrm>
+            <a:off x="3931920" y="5669280"/>
+            <a:ext cx="3108960" cy="384048"/>
+          </a:xfrm>
+          <a:prstGeom prst="roundRect">
+            <a:avLst>
+              <a:gd name="adj" fmla="val 20000"/>
+            </a:avLst>
+          </a:prstGeom>
+          <a:solidFill>
+            <a:srgbClr val="FFFFFF"/>
+          </a:solidFill>
+          <a:ln w="15240">
+            <a:solidFill>
+              <a:srgbClr val="D9433B"/>
+            </a:solidFill>
+          </a:ln>
+          <a:effectLst/>
+        </p:spPr>
+        <p:style>
+          <a:lnRef idx="1">
+            <a:schemeClr val="accent1"/>
+          </a:lnRef>
+          <a:fillRef idx="3">
+            <a:schemeClr val="accent1"/>
+          </a:fillRef>
+          <a:effectRef idx="2">
+            <a:schemeClr val="accent1"/>
+          </a:effectRef>
+          <a:fontRef idx="minor">
+            <a:schemeClr val="lt1"/>
+          </a:fontRef>
+        </p:style>
+        <p:txBody>
+          <a:bodyPr rtlCol="0" anchor="ctr"/>
+          <a:lstStyle/>
+          <a:p>
+            <a:pPr algn="ctr"/>
+          </a:p>
+        </p:txBody>
+      </p:sp>
+      <p:sp>
+        <p:nvSpPr>
+          <p:cNvPr id="27" name="TextBox 26"/>
+          <p:cNvSpPr txBox="1"/>
+          <p:nvPr/>
+        </p:nvSpPr>
+        <p:spPr>
+          <a:xfrm>
+            <a:off x="4005072" y="5669280"/>
+            <a:ext cx="2962656" cy="384048"/>
+          </a:xfrm>
+          <a:prstGeom prst="rect">
+            <a:avLst/>
+          </a:prstGeom>
+          <a:noFill/>
+        </p:spPr>
+        <p:txBody>
+          <a:bodyPr wrap="square" anchor="ctr" lIns="0" rIns="0" tIns="0" bIns="0">
+            <a:spAutoFit/>
+          </a:bodyPr>
+          <a:lstStyle/>
+          <a:p>
+            <a:pPr algn="ctr"/>
+            <a:r>
+              <a:rPr sz="1100" b="0">
+                <a:solidFill>
+                  <a:srgbClr val="24404D"/>
+                </a:solidFill>
+                <a:latin typeface="Hiragino Sans"/>
+                <a:ea typeface="Hiragino Sans"/>
+                <a:cs typeface="Hiragino Sans"/>
+              </a:rPr>
+              <a:t>⑤ 盗んだ情報を攻撃者へ送信</a:t>
+            </a:r>
+          </a:p>
+        </p:txBody>
+      </p:sp>
+      <p:sp>
+        <p:nvSpPr>
+          <p:cNvPr id="28" name="TextBox 27"/>
+          <p:cNvSpPr txBox="1"/>
+          <p:nvPr/>
+        </p:nvSpPr>
+        <p:spPr>
+          <a:xfrm>
+            <a:off x="457200" y="365760"/>
+            <a:ext cx="11247120" cy="274320"/>
+          </a:xfrm>
+          <a:prstGeom prst="rect">
+            <a:avLst/>
+          </a:prstGeom>
+          <a:noFill/>
+        </p:spPr>
+        <p:txBody>
+          <a:bodyPr wrap="square" anchor="t" lIns="0" rIns="0" tIns="0" bIns="0">
+            <a:spAutoFit/>
+          </a:bodyPr>
+          <a:lstStyle/>
+          <a:p>
+            <a:pPr algn="l"/>
+            <a:r>
+              <a:rPr sz="1100" b="0">
+                <a:solidFill>
+                  <a:srgbClr val="5E7682"/>
+                </a:solidFill>
+                <a:latin typeface="Hiragino Sans"/>
+                <a:ea typeface="Hiragino Sans"/>
+                <a:cs typeface="Hiragino Sans"/>
+              </a:rPr>
+              <a:t>点線の DB はこの型では使われない。罠の文字列はサーバを素通りして（保存されず）すぐ応答に反射される</a:t>
+            </a:r>
+          </a:p>
+        </p:txBody>
+      </p:sp>
+    </p:spTree>
+  </p:cSld>
+  <p:clrMapOvr>
+    <a:masterClrMapping/>
+  </p:clrMapOvr>
+</p:sld>
+</file>
+
+<file path=ppt/slides/slide9.xml><?xml version="1.0" encoding="utf-8"?>
+<p:sld xmlns:a="http://schemas.openxmlformats.org/drawingml/2006/main" xmlns:p="http://schemas.openxmlformats.org/presentationml/2006/main" xmlns:r="http://schemas.openxmlformats.org/officeDocument/2006/relationships">
+  <p:cSld>
+    <p:spTree>
+      <p:nvGrpSpPr>
+        <p:cNvPr id="1" name=""/>
+        <p:cNvGrpSpPr/>
+        <p:nvPr/>
+      </p:nvGrpSpPr>
+      <p:grpSpPr/>
+      <p:sp>
+        <p:nvSpPr>
+          <p:cNvPr id="2" name="Rounded Rectangle 1"/>
+          <p:cNvSpPr/>
+          <p:nvPr/>
+        </p:nvSpPr>
+        <p:spPr>
+          <a:xfrm>
+            <a:off x="4526280" y="777240"/>
+            <a:ext cx="1920240" cy="960120"/>
+          </a:xfrm>
+          <a:prstGeom prst="roundRect">
+            <a:avLst>
+              <a:gd name="adj" fmla="val 12000"/>
+            </a:avLst>
+          </a:prstGeom>
+          <a:solidFill>
+            <a:srgbClr val="E6F5F2"/>
+          </a:solidFill>
+          <a:ln w="25400">
+            <a:solidFill>
+              <a:srgbClr val="1AA69A"/>
+            </a:solidFill>
+          </a:ln>
+          <a:effectLst/>
+        </p:spPr>
+        <p:style>
+          <a:lnRef idx="1">
+            <a:schemeClr val="accent1"/>
+          </a:lnRef>
+          <a:fillRef idx="3">
+            <a:schemeClr val="accent1"/>
+          </a:fillRef>
+          <a:effectRef idx="2">
+            <a:schemeClr val="accent1"/>
+          </a:effectRef>
+          <a:fontRef idx="minor">
+            <a:schemeClr val="lt1"/>
+          </a:fontRef>
+        </p:style>
+        <p:txBody>
+          <a:bodyPr rtlCol="0" anchor="ctr"/>
+          <a:lstStyle/>
+          <a:p>
+            <a:pPr algn="ctr"/>
+          </a:p>
+        </p:txBody>
+      </p:sp>
+      <p:sp>
+        <p:nvSpPr>
+          <p:cNvPr id="3" name="TextBox 2"/>
+          <p:cNvSpPr txBox="1"/>
+          <p:nvPr/>
+        </p:nvSpPr>
+        <p:spPr>
+          <a:xfrm>
+            <a:off x="4526280" y="777240"/>
+            <a:ext cx="1920240" cy="960120"/>
+          </a:xfrm>
+          <a:prstGeom prst="rect">
+            <a:avLst/>
+          </a:prstGeom>
+          <a:noFill/>
+        </p:spPr>
+        <p:txBody>
+          <a:bodyPr wrap="square" anchor="ctr" lIns="0" rIns="0" tIns="0" bIns="0">
+            <a:spAutoFit/>
+          </a:bodyPr>
+          <a:lstStyle/>
+          <a:p>
+            <a:pPr algn="ctr"/>
+            <a:r>
+              <a:rPr sz="1400" b="1">
+                <a:solidFill>
+                  <a:srgbClr val="0E7C72"/>
+                </a:solidFill>
+                <a:latin typeface="Hiragino Sans"/>
+                <a:ea typeface="Hiragino Sans"/>
+                <a:cs typeface="Hiragino Sans"/>
+              </a:rPr>
+              <a:t>Webサーバ</a:t>
+            </a:r>
+          </a:p>
+        </p:txBody>
+      </p:sp>
+      <p:sp>
+        <p:nvSpPr>
+          <p:cNvPr id="4" name="Rounded Rectangle 3"/>
+          <p:cNvSpPr/>
+          <p:nvPr/>
+        </p:nvSpPr>
+        <p:spPr>
+          <a:xfrm>
+            <a:off x="6720840" y="777240"/>
+            <a:ext cx="1371600" cy="960120"/>
+          </a:xfrm>
+          <a:prstGeom prst="roundRect">
+            <a:avLst>
+              <a:gd name="adj" fmla="val 12000"/>
+            </a:avLst>
+          </a:prstGeom>
+          <a:solidFill>
+            <a:srgbClr val="E6F5F2"/>
+          </a:solidFill>
+          <a:ln w="25400">
+            <a:solidFill>
+              <a:srgbClr val="1AA69A"/>
+            </a:solidFill>
+          </a:ln>
+          <a:effectLst/>
+        </p:spPr>
+        <p:style>
+          <a:lnRef idx="1">
+            <a:schemeClr val="accent1"/>
+          </a:lnRef>
+          <a:fillRef idx="3">
+            <a:schemeClr val="accent1"/>
+          </a:fillRef>
+          <a:effectRef idx="2">
+            <a:schemeClr val="accent1"/>
+          </a:effectRef>
+          <a:fontRef idx="minor">
+            <a:schemeClr val="lt1"/>
+          </a:fontRef>
+        </p:style>
+        <p:txBody>
+          <a:bodyPr rtlCol="0" anchor="ctr"/>
+          <a:lstStyle/>
+          <a:p>
+            <a:pPr algn="ctr"/>
+          </a:p>
+        </p:txBody>
+      </p:sp>
+      <p:sp>
+        <p:nvSpPr>
+          <p:cNvPr id="5" name="TextBox 4"/>
+          <p:cNvSpPr txBox="1"/>
+          <p:nvPr/>
+        </p:nvSpPr>
+        <p:spPr>
+          <a:xfrm>
+            <a:off x="6720840" y="777240"/>
+            <a:ext cx="1371600" cy="960120"/>
+          </a:xfrm>
+          <a:prstGeom prst="rect">
+            <a:avLst/>
+          </a:prstGeom>
+          <a:noFill/>
+        </p:spPr>
+        <p:txBody>
+          <a:bodyPr wrap="square" anchor="ctr" lIns="0" rIns="0" tIns="0" bIns="0">
+            <a:spAutoFit/>
+          </a:bodyPr>
+          <a:lstStyle/>
+          <a:p>
+            <a:pPr algn="ctr"/>
+            <a:r>
+              <a:rPr sz="1400" b="1">
+                <a:solidFill>
+                  <a:srgbClr val="0E7C72"/>
+                </a:solidFill>
+                <a:latin typeface="Hiragino Sans"/>
+                <a:ea typeface="Hiragino Sans"/>
+                <a:cs typeface="Hiragino Sans"/>
+              </a:rPr>
+              <a:t>DB</a:t>
+            </a:r>
+          </a:p>
+        </p:txBody>
+      </p:sp>
+      <p:sp>
+        <p:nvSpPr>
+          <p:cNvPr id="6" name="Rounded Rectangle 5"/>
+          <p:cNvSpPr/>
+          <p:nvPr/>
+        </p:nvSpPr>
+        <p:spPr>
+          <a:xfrm>
+            <a:off x="502920" y="3931920"/>
+            <a:ext cx="2103120" cy="960120"/>
+          </a:xfrm>
+          <a:prstGeom prst="roundRect">
+            <a:avLst>
+              <a:gd name="adj" fmla="val 12000"/>
+            </a:avLst>
+          </a:prstGeom>
+          <a:solidFill>
+            <a:srgbClr val="FBEBEA"/>
+          </a:solidFill>
+          <a:ln w="25400">
+            <a:solidFill>
+              <a:srgbClr val="D9433B"/>
+            </a:solidFill>
+          </a:ln>
+          <a:effectLst/>
+        </p:spPr>
+        <p:style>
+          <a:lnRef idx="1">
+            <a:schemeClr val="accent1"/>
+          </a:lnRef>
+          <a:fillRef idx="3">
+            <a:schemeClr val="accent1"/>
+          </a:fillRef>
+          <a:effectRef idx="2">
+            <a:schemeClr val="accent1"/>
+          </a:effectRef>
+          <a:fontRef idx="minor">
+            <a:schemeClr val="lt1"/>
+          </a:fontRef>
+        </p:style>
+        <p:txBody>
+          <a:bodyPr rtlCol="0" anchor="ctr"/>
+          <a:lstStyle/>
+          <a:p>
+            <a:pPr algn="ctr"/>
+          </a:p>
+        </p:txBody>
+      </p:sp>
+      <p:sp>
+        <p:nvSpPr>
+          <p:cNvPr id="7" name="TextBox 6"/>
+          <p:cNvSpPr txBox="1"/>
+          <p:nvPr/>
+        </p:nvSpPr>
+        <p:spPr>
+          <a:xfrm>
+            <a:off x="502920" y="3931920"/>
+            <a:ext cx="2103120" cy="960120"/>
+          </a:xfrm>
+          <a:prstGeom prst="rect">
+            <a:avLst/>
+          </a:prstGeom>
+          <a:noFill/>
+        </p:spPr>
+        <p:txBody>
+          <a:bodyPr wrap="square" anchor="ctr" lIns="0" rIns="0" tIns="0" bIns="0">
+            <a:spAutoFit/>
+          </a:bodyPr>
+          <a:lstStyle/>
+          <a:p>
+            <a:pPr algn="ctr"/>
+            <a:r>
+              <a:rPr sz="1400" b="1">
+                <a:solidFill>
+                  <a:srgbClr val="D9433B"/>
+                </a:solidFill>
+                <a:latin typeface="Hiragino Sans"/>
+                <a:ea typeface="Hiragino Sans"/>
+                <a:cs typeface="Hiragino Sans"/>
+              </a:rPr>
+              <a:t>攻撃者</a:t>
+            </a:r>
+          </a:p>
+        </p:txBody>
+      </p:sp>
+      <p:sp>
+        <p:nvSpPr>
+          <p:cNvPr id="8" name="Rounded Rectangle 7"/>
+          <p:cNvSpPr/>
+          <p:nvPr/>
+        </p:nvSpPr>
+        <p:spPr>
+          <a:xfrm>
+            <a:off x="502920" y="5577840"/>
+            <a:ext cx="2468880" cy="914400"/>
+          </a:xfrm>
+          <a:prstGeom prst="roundRect">
+            <a:avLst>
+              <a:gd name="adj" fmla="val 12000"/>
+            </a:avLst>
+          </a:prstGeom>
+          <a:solidFill>
+            <a:srgbClr val="FBEBEA"/>
+          </a:solidFill>
+          <a:ln w="25400">
+            <a:solidFill>
+              <a:srgbClr val="D9433B"/>
+            </a:solidFill>
+          </a:ln>
+          <a:effectLst/>
+        </p:spPr>
+        <p:style>
+          <a:lnRef idx="1">
+            <a:schemeClr val="accent1"/>
+          </a:lnRef>
+          <a:fillRef idx="3">
+            <a:schemeClr val="accent1"/>
+          </a:fillRef>
+          <a:effectRef idx="2">
+            <a:schemeClr val="accent1"/>
+          </a:effectRef>
+          <a:fontRef idx="minor">
+            <a:schemeClr val="lt1"/>
+          </a:fontRef>
+        </p:style>
+        <p:txBody>
+          <a:bodyPr rtlCol="0" anchor="ctr"/>
+          <a:lstStyle/>
+          <a:p>
+            <a:pPr algn="ctr"/>
+          </a:p>
+        </p:txBody>
+      </p:sp>
+      <p:sp>
+        <p:nvSpPr>
+          <p:cNvPr id="9" name="TextBox 8"/>
+          <p:cNvSpPr txBox="1"/>
+          <p:nvPr/>
+        </p:nvSpPr>
+        <p:spPr>
+          <a:xfrm>
+            <a:off x="502920" y="5577840"/>
+            <a:ext cx="2468880" cy="914400"/>
+          </a:xfrm>
+          <a:prstGeom prst="rect">
+            <a:avLst/>
+          </a:prstGeom>
+          <a:noFill/>
+        </p:spPr>
+        <p:txBody>
+          <a:bodyPr wrap="square" anchor="ctr" lIns="0" rIns="0" tIns="0" bIns="0">
+            <a:spAutoFit/>
+          </a:bodyPr>
+          <a:lstStyle/>
+          <a:p>
+            <a:pPr algn="ctr"/>
+            <a:r>
+              <a:rPr sz="1300" b="1">
+                <a:solidFill>
+                  <a:srgbClr val="D9433B"/>
+                </a:solidFill>
+                <a:latin typeface="Hiragino Sans"/>
+                <a:ea typeface="Hiragino Sans"/>
+                <a:cs typeface="Hiragino Sans"/>
+              </a:rPr>
+              <a:t>攻撃者の回収サーバ</a:t>
+            </a:r>
+          </a:p>
+        </p:txBody>
+      </p:sp>
+      <p:sp>
+        <p:nvSpPr>
+          <p:cNvPr id="10" name="Rounded Rectangle 9"/>
+          <p:cNvSpPr/>
+          <p:nvPr/>
+        </p:nvSpPr>
+        <p:spPr>
+          <a:xfrm>
+            <a:off x="7772400" y="3154680"/>
+            <a:ext cx="3931920" cy="3337560"/>
+          </a:xfrm>
+          <a:prstGeom prst="roundRect">
+            <a:avLst>
+              <a:gd name="adj" fmla="val 6000"/>
+            </a:avLst>
+          </a:prstGeom>
+          <a:solidFill>
+            <a:srgbClr val="F1F3F4"/>
+          </a:solidFill>
+          <a:ln w="25400">
+            <a:solidFill>
+              <a:srgbClr val="24404D"/>
+            </a:solidFill>
+          </a:ln>
+          <a:effectLst/>
+        </p:spPr>
+        <p:style>
+          <a:lnRef idx="1">
+            <a:schemeClr val="accent1"/>
+          </a:lnRef>
+          <a:fillRef idx="3">
+            <a:schemeClr val="accent1"/>
+          </a:fillRef>
+          <a:effectRef idx="2">
+            <a:schemeClr val="accent1"/>
+          </a:effectRef>
+          <a:fontRef idx="minor">
+            <a:schemeClr val="lt1"/>
+          </a:fontRef>
+        </p:style>
+        <p:txBody>
+          <a:bodyPr rtlCol="0" anchor="ctr"/>
+          <a:lstStyle/>
+          <a:p>
+            <a:pPr algn="ctr"/>
+          </a:p>
+        </p:txBody>
+      </p:sp>
+      <p:sp>
+        <p:nvSpPr>
+          <p:cNvPr id="11" name="TextBox 10"/>
+          <p:cNvSpPr txBox="1"/>
+          <p:nvPr/>
+        </p:nvSpPr>
+        <p:spPr>
+          <a:xfrm>
+            <a:off x="7772400" y="3291840"/>
+            <a:ext cx="3931920" cy="365760"/>
+          </a:xfrm>
+          <a:prstGeom prst="rect">
+            <a:avLst/>
+          </a:prstGeom>
+          <a:noFill/>
+        </p:spPr>
+        <p:txBody>
+          <a:bodyPr wrap="square" anchor="t" lIns="0" rIns="0" tIns="0" bIns="0">
+            <a:spAutoFit/>
+          </a:bodyPr>
+          <a:lstStyle/>
+          <a:p>
+            <a:pPr algn="ctr"/>
+            <a:r>
+              <a:rPr sz="1400" b="1">
+                <a:solidFill>
+                  <a:srgbClr val="24404D"/>
+                </a:solidFill>
+                <a:latin typeface="Hiragino Sans"/>
+                <a:ea typeface="Hiragino Sans"/>
+                <a:cs typeface="Hiragino Sans"/>
+              </a:rPr>
+              <a:t>被害者のブラウザ</a:t>
+            </a:r>
+          </a:p>
+        </p:txBody>
+      </p:sp>
+      <p:cxnSp>
+        <p:nvCxnSpPr>
+          <p:cNvPr id="12" name="Connector 11"/>
+          <p:cNvCxnSpPr/>
+          <p:nvPr/>
+        </p:nvCxnSpPr>
+        <p:spPr>
+          <a:xfrm flipV="1">
+            <a:off x="2651760" y="1737360"/>
+            <a:ext cx="2103120" cy="2331720"/>
+          </a:xfrm>
+          <a:prstGeom prst="line">
+            <a:avLst/>
+          </a:prstGeom>
+          <a:ln w="25400">
+            <a:solidFill>
+              <a:srgbClr val="D9433B"/>
+            </a:solidFill>
+            <a:tailEnd type="triangle" w="med" len="med"/>
+          </a:ln>
+        </p:spPr>
+        <p:style>
+          <a:lnRef idx="2">
+            <a:schemeClr val="accent1"/>
+          </a:lnRef>
+          <a:fillRef idx="0">
+            <a:schemeClr val="accent1"/>
+          </a:fillRef>
+          <a:effectRef idx="1">
+            <a:schemeClr val="accent1"/>
+          </a:effectRef>
+          <a:fontRef idx="minor">
+            <a:schemeClr val="tx1"/>
+          </a:fontRef>
+        </p:style>
+      </p:cxnSp>
+      <p:sp>
+        <p:nvSpPr>
+          <p:cNvPr id="13" name="Rounded Rectangle 12"/>
+          <p:cNvSpPr/>
+          <p:nvPr/>
+        </p:nvSpPr>
+        <p:spPr>
+          <a:xfrm>
+            <a:off x="914400" y="2606040"/>
+            <a:ext cx="2743200" cy="621792"/>
+          </a:xfrm>
+          <a:prstGeom prst="roundRect">
+            <a:avLst>
+              <a:gd name="adj" fmla="val 20000"/>
+            </a:avLst>
+          </a:prstGeom>
+          <a:solidFill>
+            <a:srgbClr val="FFFFFF"/>
+          </a:solidFill>
+          <a:ln w="15240">
+            <a:solidFill>
+              <a:srgbClr val="D9433B"/>
+            </a:solidFill>
+          </a:ln>
+          <a:effectLst/>
+        </p:spPr>
+        <p:style>
+          <a:lnRef idx="1">
+            <a:schemeClr val="accent1"/>
+          </a:lnRef>
+          <a:fillRef idx="3">
+            <a:schemeClr val="accent1"/>
+          </a:fillRef>
+          <a:effectRef idx="2">
+            <a:schemeClr val="accent1"/>
+          </a:effectRef>
+          <a:fontRef idx="minor">
+            <a:schemeClr val="lt1"/>
+          </a:fontRef>
+        </p:style>
+        <p:txBody>
+          <a:bodyPr rtlCol="0" anchor="ctr"/>
+          <a:lstStyle/>
+          <a:p>
+            <a:pPr algn="ctr"/>
+          </a:p>
+        </p:txBody>
+      </p:sp>
+      <p:sp>
+        <p:nvSpPr>
+          <p:cNvPr id="14" name="TextBox 13"/>
+          <p:cNvSpPr txBox="1"/>
+          <p:nvPr/>
+        </p:nvSpPr>
+        <p:spPr>
+          <a:xfrm>
+            <a:off x="987552" y="2606040"/>
+            <a:ext cx="2596896" cy="621792"/>
+          </a:xfrm>
+          <a:prstGeom prst="rect">
+            <a:avLst/>
+          </a:prstGeom>
+          <a:noFill/>
+        </p:spPr>
+        <p:txBody>
+          <a:bodyPr wrap="square" anchor="ctr" lIns="0" rIns="0" tIns="0" bIns="0">
+            <a:spAutoFit/>
+          </a:bodyPr>
+          <a:lstStyle/>
+          <a:p>
+            <a:pPr algn="ctr"/>
+            <a:r>
+              <a:rPr sz="1100" b="0">
+                <a:solidFill>
+                  <a:srgbClr val="24404D"/>
+                </a:solidFill>
+                <a:latin typeface="Hiragino Sans"/>
+                <a:ea typeface="Hiragino Sans"/>
+                <a:cs typeface="Hiragino Sans"/>
+              </a:rPr>
+              <a:t>① スクリプトを含む</a:t>
+            </a:r>
+          </a:p>
+          <a:p>
+            <a:pPr algn="ctr"/>
+            <a:r>
+              <a:rPr sz="1100" b="0">
+                <a:solidFill>
+                  <a:srgbClr val="24404D"/>
+                </a:solidFill>
+                <a:latin typeface="Hiragino Sans"/>
+                <a:ea typeface="Hiragino Sans"/>
+                <a:cs typeface="Hiragino Sans"/>
+              </a:rPr>
+              <a:t>投稿を送る</a:t>
+            </a:r>
+          </a:p>
+        </p:txBody>
+      </p:sp>
+      <p:cxnSp>
+        <p:nvCxnSpPr>
+          <p:cNvPr id="15" name="Connector 14"/>
+          <p:cNvCxnSpPr/>
+          <p:nvPr/>
+        </p:nvCxnSpPr>
+        <p:spPr>
+          <a:xfrm flipV="1">
+            <a:off x="6446520" y="1252728"/>
+            <a:ext cx="274320" cy="0"/>
+          </a:xfrm>
+          <a:prstGeom prst="line">
+            <a:avLst/>
+          </a:prstGeom>
+          <a:ln w="25400">
+            <a:solidFill>
+              <a:srgbClr val="D9433B"/>
+            </a:solidFill>
+            <a:tailEnd type="triangle" w="med" len="med"/>
+          </a:ln>
+        </p:spPr>
+        <p:style>
+          <a:lnRef idx="2">
+            <a:schemeClr val="accent1"/>
+          </a:lnRef>
+          <a:fillRef idx="0">
+            <a:schemeClr val="accent1"/>
+          </a:fillRef>
+          <a:effectRef idx="1">
+            <a:schemeClr val="accent1"/>
+          </a:effectRef>
+          <a:fontRef idx="minor">
+            <a:schemeClr val="tx1"/>
+          </a:fontRef>
+        </p:style>
+      </p:cxnSp>
+      <p:sp>
+        <p:nvSpPr>
+          <p:cNvPr id="16" name="Rounded Rectangle 15"/>
+          <p:cNvSpPr/>
+          <p:nvPr/>
+        </p:nvSpPr>
+        <p:spPr>
+          <a:xfrm>
+            <a:off x="5760720" y="1965960"/>
+            <a:ext cx="2377440" cy="384048"/>
+          </a:xfrm>
+          <a:prstGeom prst="roundRect">
+            <a:avLst>
+              <a:gd name="adj" fmla="val 20000"/>
+            </a:avLst>
+          </a:prstGeom>
+          <a:solidFill>
+            <a:srgbClr val="FFFFFF"/>
+          </a:solidFill>
+          <a:ln w="15240">
+            <a:solidFill>
+              <a:srgbClr val="D9433B"/>
+            </a:solidFill>
+          </a:ln>
+          <a:effectLst/>
+        </p:spPr>
+        <p:style>
+          <a:lnRef idx="1">
+            <a:schemeClr val="accent1"/>
+          </a:lnRef>
+          <a:fillRef idx="3">
+            <a:schemeClr val="accent1"/>
+          </a:fillRef>
+          <a:effectRef idx="2">
+            <a:schemeClr val="accent1"/>
+          </a:effectRef>
+          <a:fontRef idx="minor">
+            <a:schemeClr val="lt1"/>
+          </a:fontRef>
+        </p:style>
+        <p:txBody>
+          <a:bodyPr rtlCol="0" anchor="ctr"/>
+          <a:lstStyle/>
+          <a:p>
+            <a:pPr algn="ctr"/>
+          </a:p>
+        </p:txBody>
+      </p:sp>
+      <p:sp>
+        <p:nvSpPr>
+          <p:cNvPr id="17" name="TextBox 16"/>
+          <p:cNvSpPr txBox="1"/>
+          <p:nvPr/>
+        </p:nvSpPr>
+        <p:spPr>
+          <a:xfrm>
+            <a:off x="5833872" y="1965960"/>
+            <a:ext cx="2231136" cy="384048"/>
+          </a:xfrm>
+          <a:prstGeom prst="rect">
+            <a:avLst/>
+          </a:prstGeom>
+          <a:noFill/>
+        </p:spPr>
+        <p:txBody>
+          <a:bodyPr wrap="square" anchor="ctr" lIns="0" rIns="0" tIns="0" bIns="0">
+            <a:spAutoFit/>
+          </a:bodyPr>
+          <a:lstStyle/>
+          <a:p>
+            <a:pPr algn="ctr"/>
+            <a:r>
+              <a:rPr sz="1100" b="0">
+                <a:solidFill>
+                  <a:srgbClr val="24404D"/>
+                </a:solidFill>
+                <a:latin typeface="Hiragino Sans"/>
+                <a:ea typeface="Hiragino Sans"/>
+                <a:cs typeface="Hiragino Sans"/>
+              </a:rPr>
+              <a:t>② そのまま保存</a:t>
+            </a:r>
+          </a:p>
+        </p:txBody>
+      </p:sp>
+      <p:cxnSp>
+        <p:nvCxnSpPr>
+          <p:cNvPr id="18" name="Connector 17"/>
+          <p:cNvCxnSpPr/>
+          <p:nvPr/>
+        </p:nvCxnSpPr>
+        <p:spPr>
+          <a:xfrm flipH="1" flipV="1">
+            <a:off x="6126480" y="1737360"/>
+            <a:ext cx="2834640" cy="1417320"/>
+          </a:xfrm>
+          <a:prstGeom prst="line">
+            <a:avLst/>
+          </a:prstGeom>
+          <a:ln w="25400">
+            <a:solidFill>
+              <a:srgbClr val="5E7682"/>
+            </a:solidFill>
+            <a:tailEnd type="triangle" w="med" len="med"/>
+          </a:ln>
+        </p:spPr>
+        <p:style>
+          <a:lnRef idx="2">
+            <a:schemeClr val="accent1"/>
+          </a:lnRef>
+          <a:fillRef idx="0">
+            <a:schemeClr val="accent1"/>
+          </a:fillRef>
+          <a:effectRef idx="1">
+            <a:schemeClr val="accent1"/>
+          </a:effectRef>
+          <a:fontRef idx="minor">
+            <a:schemeClr val="tx1"/>
+          </a:fontRef>
+        </p:style>
+      </p:cxnSp>
+      <p:sp>
+        <p:nvSpPr>
+          <p:cNvPr id="19" name="Rounded Rectangle 18"/>
+          <p:cNvSpPr/>
+          <p:nvPr/>
+        </p:nvSpPr>
+        <p:spPr>
+          <a:xfrm>
+            <a:off x="7863840" y="2377440"/>
+            <a:ext cx="2926080" cy="384048"/>
+          </a:xfrm>
+          <a:prstGeom prst="roundRect">
+            <a:avLst>
+              <a:gd name="adj" fmla="val 20000"/>
+            </a:avLst>
+          </a:prstGeom>
+          <a:solidFill>
+            <a:srgbClr val="FFFFFF"/>
+          </a:solidFill>
+          <a:ln w="15240">
+            <a:solidFill>
+              <a:srgbClr val="5E7682"/>
+            </a:solidFill>
+          </a:ln>
+          <a:effectLst/>
+        </p:spPr>
+        <p:style>
+          <a:lnRef idx="1">
+            <a:schemeClr val="accent1"/>
+          </a:lnRef>
+          <a:fillRef idx="3">
+            <a:schemeClr val="accent1"/>
+          </a:fillRef>
+          <a:effectRef idx="2">
+            <a:schemeClr val="accent1"/>
+          </a:effectRef>
+          <a:fontRef idx="minor">
+            <a:schemeClr val="lt1"/>
+          </a:fontRef>
+        </p:style>
+        <p:txBody>
+          <a:bodyPr rtlCol="0" anchor="ctr"/>
+          <a:lstStyle/>
+          <a:p>
+            <a:pPr algn="ctr"/>
+          </a:p>
+        </p:txBody>
+      </p:sp>
+      <p:sp>
+        <p:nvSpPr>
+          <p:cNvPr id="20" name="TextBox 19"/>
+          <p:cNvSpPr txBox="1"/>
+          <p:nvPr/>
+        </p:nvSpPr>
+        <p:spPr>
+          <a:xfrm>
+            <a:off x="7936992" y="2377440"/>
+            <a:ext cx="2779776" cy="384048"/>
+          </a:xfrm>
+          <a:prstGeom prst="rect">
+            <a:avLst/>
+          </a:prstGeom>
+          <a:noFill/>
+        </p:spPr>
+        <p:txBody>
+          <a:bodyPr wrap="square" anchor="ctr" lIns="0" rIns="0" tIns="0" bIns="0">
+            <a:spAutoFit/>
+          </a:bodyPr>
+          <a:lstStyle/>
+          <a:p>
+            <a:pPr algn="ctr"/>
+            <a:r>
+              <a:rPr sz="1100" b="0">
+                <a:solidFill>
+                  <a:srgbClr val="24404D"/>
+                </a:solidFill>
+                <a:latin typeface="Hiragino Sans"/>
+                <a:ea typeface="Hiragino Sans"/>
+                <a:cs typeface="Hiragino Sans"/>
+              </a:rPr>
+              <a:t>③ いつものページを開く</a:t>
+            </a:r>
+          </a:p>
+        </p:txBody>
+      </p:sp>
+      <p:cxnSp>
+        <p:nvCxnSpPr>
+          <p:cNvPr id="21" name="Connector 20"/>
+          <p:cNvCxnSpPr/>
+          <p:nvPr/>
+        </p:nvCxnSpPr>
+        <p:spPr>
+          <a:xfrm>
+            <a:off x="5394960" y="1737360"/>
+            <a:ext cx="2743200" cy="1417320"/>
+          </a:xfrm>
+          <a:prstGeom prst="line">
+            <a:avLst/>
+          </a:prstGeom>
+          <a:ln w="25400">
+            <a:solidFill>
+              <a:srgbClr val="D9433B"/>
+            </a:solidFill>
+            <a:tailEnd type="triangle" w="med" len="med"/>
+          </a:ln>
+        </p:spPr>
+        <p:style>
+          <a:lnRef idx="2">
+            <a:schemeClr val="accent1"/>
+          </a:lnRef>
+          <a:fillRef idx="0">
+            <a:schemeClr val="accent1"/>
+          </a:fillRef>
+          <a:effectRef idx="1">
+            <a:schemeClr val="accent1"/>
+          </a:effectRef>
+          <a:fontRef idx="minor">
+            <a:schemeClr val="tx1"/>
+          </a:fontRef>
+        </p:style>
+      </p:cxnSp>
+      <p:sp>
+        <p:nvSpPr>
+          <p:cNvPr id="22" name="Rounded Rectangle 21"/>
+          <p:cNvSpPr/>
+          <p:nvPr/>
+        </p:nvSpPr>
+        <p:spPr>
+          <a:xfrm>
+            <a:off x="3291840" y="3108960"/>
+            <a:ext cx="3840480" cy="384048"/>
+          </a:xfrm>
+          <a:prstGeom prst="roundRect">
+            <a:avLst>
+              <a:gd name="adj" fmla="val 20000"/>
+            </a:avLst>
+          </a:prstGeom>
+          <a:solidFill>
+            <a:srgbClr val="FFFFFF"/>
+          </a:solidFill>
+          <a:ln w="15240">
+            <a:solidFill>
+              <a:srgbClr val="D9433B"/>
+            </a:solidFill>
+          </a:ln>
+          <a:effectLst/>
+        </p:spPr>
+        <p:style>
+          <a:lnRef idx="1">
+            <a:schemeClr val="accent1"/>
+          </a:lnRef>
+          <a:fillRef idx="3">
+            <a:schemeClr val="accent1"/>
+          </a:fillRef>
+          <a:effectRef idx="2">
+            <a:schemeClr val="accent1"/>
+          </a:effectRef>
+          <a:fontRef idx="minor">
+            <a:schemeClr val="lt1"/>
+          </a:fontRef>
+        </p:style>
+        <p:txBody>
+          <a:bodyPr rtlCol="0" anchor="ctr"/>
+          <a:lstStyle/>
+          <a:p>
+            <a:pPr algn="ctr"/>
+          </a:p>
+        </p:txBody>
+      </p:sp>
+      <p:sp>
+        <p:nvSpPr>
+          <p:cNvPr id="23" name="TextBox 22"/>
+          <p:cNvSpPr txBox="1"/>
+          <p:nvPr/>
+        </p:nvSpPr>
+        <p:spPr>
+          <a:xfrm>
+            <a:off x="3364992" y="3108960"/>
+            <a:ext cx="3694176" cy="384048"/>
+          </a:xfrm>
+          <a:prstGeom prst="rect">
+            <a:avLst/>
+          </a:prstGeom>
+          <a:noFill/>
+        </p:spPr>
+        <p:txBody>
+          <a:bodyPr wrap="square" anchor="ctr" lIns="0" rIns="0" tIns="0" bIns="0">
+            <a:spAutoFit/>
+          </a:bodyPr>
+          <a:lstStyle/>
+          <a:p>
+            <a:pPr algn="ctr"/>
+            <a:r>
+              <a:rPr sz="1100" b="0">
+                <a:solidFill>
+                  <a:srgbClr val="24404D"/>
+                </a:solidFill>
+                <a:latin typeface="Hiragino Sans"/>
+                <a:ea typeface="Hiragino Sans"/>
+                <a:cs typeface="Hiragino Sans"/>
+              </a:rPr>
+              <a:t>④ 保存データをHTMLに入れて応答</a:t>
+            </a:r>
+          </a:p>
+        </p:txBody>
+      </p:sp>
+      <p:sp>
+        <p:nvSpPr>
+          <p:cNvPr id="24" name="Rounded Rectangle 23"/>
+          <p:cNvSpPr/>
+          <p:nvPr/>
+        </p:nvSpPr>
+        <p:spPr>
+          <a:xfrm>
+            <a:off x="8046720" y="3840480"/>
+            <a:ext cx="3383280" cy="1417320"/>
+          </a:xfrm>
+          <a:prstGeom prst="roundRect">
+            <a:avLst>
+              <a:gd name="adj" fmla="val 10000"/>
+            </a:avLst>
+          </a:prstGeom>
+          <a:solidFill>
+            <a:srgbClr val="FBEBEA"/>
+          </a:solidFill>
+          <a:ln w="22860">
+            <a:solidFill>
+              <a:srgbClr val="D9433B"/>
+            </a:solidFill>
+          </a:ln>
+          <a:effectLst/>
+        </p:spPr>
+        <p:style>
+          <a:lnRef idx="1">
+            <a:schemeClr val="accent1"/>
+          </a:lnRef>
+          <a:fillRef idx="3">
+            <a:schemeClr val="accent1"/>
+          </a:fillRef>
+          <a:effectRef idx="2">
+            <a:schemeClr val="accent1"/>
+          </a:effectRef>
+          <a:fontRef idx="minor">
+            <a:schemeClr val="lt1"/>
+          </a:fontRef>
+        </p:style>
+        <p:txBody>
+          <a:bodyPr rtlCol="0" anchor="ctr"/>
+          <a:lstStyle/>
+          <a:p>
+            <a:pPr algn="ctr"/>
+          </a:p>
+        </p:txBody>
+      </p:sp>
+      <p:sp>
+        <p:nvSpPr>
+          <p:cNvPr id="25" name="TextBox 24"/>
+          <p:cNvSpPr txBox="1"/>
+          <p:nvPr/>
+        </p:nvSpPr>
+        <p:spPr>
+          <a:xfrm>
+            <a:off x="8183879" y="3931920"/>
+            <a:ext cx="3108960" cy="320040"/>
+          </a:xfrm>
+          <a:prstGeom prst="rect">
+            <a:avLst/>
+          </a:prstGeom>
+          <a:noFill/>
+        </p:spPr>
+        <p:txBody>
+          <a:bodyPr wrap="square" anchor="t" lIns="0" rIns="0" tIns="0" bIns="0">
+            <a:spAutoFit/>
+          </a:bodyPr>
+          <a:lstStyle/>
+          <a:p>
+            <a:pPr algn="l"/>
+            <a:r>
+              <a:rPr sz="1200" b="1">
+                <a:solidFill>
+                  <a:srgbClr val="D9433B"/>
+                </a:solidFill>
+                <a:latin typeface="Hiragino Sans"/>
+                <a:ea typeface="Hiragino Sans"/>
+                <a:cs typeface="Hiragino Sans"/>
+              </a:rPr>
+              <a:t>⑤ HTMLパーサがscript要素を作り実行</a:t>
+            </a:r>
+          </a:p>
+        </p:txBody>
+      </p:sp>
+      <p:sp>
+        <p:nvSpPr>
+          <p:cNvPr id="26" name="TextBox 25"/>
+          <p:cNvSpPr txBox="1"/>
+          <p:nvPr/>
+        </p:nvSpPr>
+        <p:spPr>
+          <a:xfrm>
+            <a:off x="8183879" y="4297680"/>
+            <a:ext cx="3108960" cy="914400"/>
+          </a:xfrm>
+          <a:prstGeom prst="rect">
+            <a:avLst/>
+          </a:prstGeom>
+          <a:noFill/>
+        </p:spPr>
+        <p:txBody>
+          <a:bodyPr wrap="square" anchor="ctr" lIns="0" rIns="0" tIns="0" bIns="0">
+            <a:spAutoFit/>
+          </a:bodyPr>
+          <a:lstStyle/>
+          <a:p>
+            <a:pPr algn="l"/>
+            <a:r>
+              <a:rPr sz="1100" b="0">
+                <a:solidFill>
+                  <a:srgbClr val="24404D"/>
+                </a:solidFill>
+                <a:latin typeface="Hiragino Sans"/>
+                <a:ea typeface="Hiragino Sans"/>
+                <a:cs typeface="Hiragino Sans"/>
+              </a:rPr>
+              <a:t>保存された投稿が</a:t>
+            </a:r>
+          </a:p>
+          <a:p>
+            <a:pPr algn="l"/>
+            <a:r>
+              <a:rPr sz="1100" b="0">
+                <a:solidFill>
+                  <a:srgbClr val="24404D"/>
+                </a:solidFill>
+                <a:latin typeface="Hiragino Sans"/>
+                <a:ea typeface="Hiragino Sans"/>
+                <a:cs typeface="Hiragino Sans"/>
+              </a:rPr>
+              <a:t>script要素になる</a:t>
+            </a:r>
+          </a:p>
+        </p:txBody>
+      </p:sp>
+      <p:sp>
+        <p:nvSpPr>
+          <p:cNvPr id="27" name="TextBox 26"/>
+          <p:cNvSpPr txBox="1"/>
+          <p:nvPr/>
+        </p:nvSpPr>
+        <p:spPr>
+          <a:xfrm>
+            <a:off x="7909560" y="5394960"/>
+            <a:ext cx="3657600" cy="822960"/>
+          </a:xfrm>
+          <a:prstGeom prst="rect">
+            <a:avLst/>
+          </a:prstGeom>
+          <a:noFill/>
+        </p:spPr>
+        <p:txBody>
+          <a:bodyPr wrap="square" anchor="t" lIns="0" rIns="0" tIns="0" bIns="0">
+            <a:spAutoFit/>
+          </a:bodyPr>
+          <a:lstStyle/>
+          <a:p>
+            <a:pPr algn="ctr"/>
+            <a:r>
+              <a:rPr sz="1100" b="0">
+                <a:solidFill>
+                  <a:srgbClr val="24404D"/>
+                </a:solidFill>
+                <a:latin typeface="Hiragino Sans"/>
+                <a:ea typeface="Hiragino Sans"/>
+                <a:cs typeface="Hiragino Sans"/>
+              </a:rPr>
+              <a:t>→ Cookie・画面の情報を読み、</a:t>
+            </a:r>
+          </a:p>
+          <a:p>
+            <a:pPr algn="ctr"/>
+            <a:r>
+              <a:rPr sz="1100" b="0">
+                <a:solidFill>
+                  <a:srgbClr val="24404D"/>
+                </a:solidFill>
+                <a:latin typeface="Hiragino Sans"/>
+                <a:ea typeface="Hiragino Sans"/>
+                <a:cs typeface="Hiragino Sans"/>
+              </a:rPr>
+              <a:t>   攻撃者の回収サーバへ送る</a:t>
+            </a:r>
+          </a:p>
+        </p:txBody>
+      </p:sp>
+      <p:cxnSp>
+        <p:nvCxnSpPr>
+          <p:cNvPr id="28" name="Connector 27"/>
+          <p:cNvCxnSpPr/>
+          <p:nvPr/>
+        </p:nvCxnSpPr>
+        <p:spPr>
+          <a:xfrm flipH="1" flipV="1">
+            <a:off x="3017520" y="6080760"/>
+            <a:ext cx="5212080" cy="411480"/>
+          </a:xfrm>
+          <a:prstGeom prst="line">
+            <a:avLst/>
+          </a:prstGeom>
+          <a:ln w="25400">
+            <a:solidFill>
+              <a:srgbClr val="D9433B"/>
+            </a:solidFill>
+            <a:tailEnd type="triangle" w="med" len="med"/>
+          </a:ln>
+        </p:spPr>
+        <p:style>
+          <a:lnRef idx="2">
+            <a:schemeClr val="accent1"/>
+          </a:lnRef>
+          <a:fillRef idx="0">
+            <a:schemeClr val="accent1"/>
+          </a:fillRef>
+          <a:effectRef idx="1">
+            <a:schemeClr val="accent1"/>
+          </a:effectRef>
+          <a:fontRef idx="minor">
+            <a:schemeClr val="tx1"/>
+          </a:fontRef>
+        </p:style>
+      </p:cxnSp>
+      <p:sp>
+        <p:nvSpPr>
+          <p:cNvPr id="29" name="Rounded Rectangle 28"/>
+          <p:cNvSpPr/>
+          <p:nvPr/>
+        </p:nvSpPr>
+        <p:spPr>
+          <a:xfrm>
+            <a:off x="3931920" y="5669280"/>
+            <a:ext cx="3108960" cy="384048"/>
+          </a:xfrm>
+          <a:prstGeom prst="roundRect">
+            <a:avLst>
+              <a:gd name="adj" fmla="val 20000"/>
+            </a:avLst>
+          </a:prstGeom>
+          <a:solidFill>
+            <a:srgbClr val="FFFFFF"/>
+          </a:solidFill>
+          <a:ln w="15240">
+            <a:solidFill>
+              <a:srgbClr val="D9433B"/>
+            </a:solidFill>
+          </a:ln>
+          <a:effectLst/>
+        </p:spPr>
+        <p:style>
+          <a:lnRef idx="1">
+            <a:schemeClr val="accent1"/>
+          </a:lnRef>
+          <a:fillRef idx="3">
+            <a:schemeClr val="accent1"/>
+          </a:fillRef>
+          <a:effectRef idx="2">
+            <a:schemeClr val="accent1"/>
+          </a:effectRef>
+          <a:fontRef idx="minor">
+            <a:schemeClr val="lt1"/>
+          </a:fontRef>
+        </p:style>
+        <p:txBody>
+          <a:bodyPr rtlCol="0" anchor="ctr"/>
+          <a:lstStyle/>
+          <a:p>
+            <a:pPr algn="ctr"/>
+          </a:p>
+        </p:txBody>
+      </p:sp>
+      <p:sp>
+        <p:nvSpPr>
+          <p:cNvPr id="30" name="TextBox 29"/>
+          <p:cNvSpPr txBox="1"/>
+          <p:nvPr/>
+        </p:nvSpPr>
+        <p:spPr>
+          <a:xfrm>
+            <a:off x="4005072" y="5669280"/>
+            <a:ext cx="2962656" cy="384048"/>
+          </a:xfrm>
+          <a:prstGeom prst="rect">
+            <a:avLst/>
+          </a:prstGeom>
+          <a:noFill/>
+        </p:spPr>
+        <p:txBody>
+          <a:bodyPr wrap="square" anchor="ctr" lIns="0" rIns="0" tIns="0" bIns="0">
+            <a:spAutoFit/>
+          </a:bodyPr>
+          <a:lstStyle/>
+          <a:p>
+            <a:pPr algn="ctr"/>
+            <a:r>
+              <a:rPr sz="1100" b="0">
+                <a:solidFill>
+                  <a:srgbClr val="24404D"/>
+                </a:solidFill>
+                <a:latin typeface="Hiragino Sans"/>
+                <a:ea typeface="Hiragino Sans"/>
+                <a:cs typeface="Hiragino Sans"/>
+              </a:rPr>
+              <a:t>⑥ 盗んだ情報を攻撃者へ送信</a:t>
+            </a:r>
+          </a:p>
+        </p:txBody>
+      </p:sp>
+      <p:sp>
+        <p:nvSpPr>
+          <p:cNvPr id="31" name="TextBox 30"/>
+          <p:cNvSpPr txBox="1"/>
+          <p:nvPr/>
+        </p:nvSpPr>
+        <p:spPr>
+          <a:xfrm>
+            <a:off x="457200" y="365760"/>
+            <a:ext cx="11247120" cy="274320"/>
+          </a:xfrm>
+          <a:prstGeom prst="rect">
+            <a:avLst/>
+          </a:prstGeom>
+          <a:noFill/>
+        </p:spPr>
+        <p:txBody>
+          <a:bodyPr wrap="square" anchor="t" lIns="0" rIns="0" tIns="0" bIns="0">
+            <a:spAutoFit/>
+          </a:bodyPr>
+          <a:lstStyle/>
+          <a:p>
+            <a:pPr algn="l"/>
+            <a:r>
+              <a:rPr sz="1100" b="0">
+                <a:solidFill>
+                  <a:srgbClr val="5E7682"/>
+                </a:solidFill>
+                <a:latin typeface="Hiragino Sans"/>
+                <a:ea typeface="Hiragino Sans"/>
+                <a:cs typeface="Hiragino Sans"/>
+              </a:rPr>
+              <a:t>罠は DB に保存される。被害者は罠URLすら踏まず、普通にページを開くだけで発動する</a:t>
             </a:r>
           </a:p>
         </p:txBody>

--- a/deep-dive/drafts/no.1-xss/image/HTMLパーサ図.pptx
+++ b/deep-dive/drafts/no.1-xss/image/HTMLパーサ図.pptx
@@ -4543,8 +4543,8 @@
         </p:nvSpPr>
         <p:spPr>
           <a:xfrm>
-            <a:off x="4526280" y="777240"/>
-            <a:ext cx="1920240" cy="960120"/>
+            <a:off x="3931920" y="777240"/>
+            <a:ext cx="1737360" cy="960120"/>
           </a:xfrm>
           <a:prstGeom prst="roundRect">
             <a:avLst>
@@ -4591,8 +4591,8 @@
         </p:nvSpPr>
         <p:spPr>
           <a:xfrm>
-            <a:off x="4526280" y="777240"/>
-            <a:ext cx="1920240" cy="960120"/>
+            <a:off x="3931920" y="777240"/>
+            <a:ext cx="1737360" cy="960120"/>
           </a:xfrm>
           <a:prstGeom prst="rect">
             <a:avLst/>
@@ -4628,8 +4628,8 @@
         </p:nvSpPr>
         <p:spPr>
           <a:xfrm>
-            <a:off x="6720840" y="777240"/>
-            <a:ext cx="1371600" cy="960120"/>
+            <a:off x="6629400" y="777240"/>
+            <a:ext cx="1188720" cy="960120"/>
           </a:xfrm>
           <a:prstGeom prst="roundRect">
             <a:avLst>
@@ -4676,8 +4676,8 @@
         </p:nvSpPr>
         <p:spPr>
           <a:xfrm>
-            <a:off x="6720840" y="777240"/>
-            <a:ext cx="1371600" cy="960120"/>
+            <a:off x="6629400" y="777240"/>
+            <a:ext cx="1188720" cy="960120"/>
           </a:xfrm>
           <a:prstGeom prst="rect">
             <a:avLst/>
@@ -4883,8 +4883,8 @@
         </p:nvSpPr>
         <p:spPr>
           <a:xfrm>
-            <a:off x="7772400" y="3154680"/>
-            <a:ext cx="3931920" cy="3337560"/>
+            <a:off x="7955279" y="3154680"/>
+            <a:ext cx="3749039" cy="3337560"/>
           </a:xfrm>
           <a:prstGeom prst="roundRect">
             <a:avLst>
@@ -4931,8 +4931,8 @@
         </p:nvSpPr>
         <p:spPr>
           <a:xfrm>
-            <a:off x="7772400" y="3291840"/>
-            <a:ext cx="3931920" cy="365760"/>
+            <a:off x="7955279" y="3291840"/>
+            <a:ext cx="3749039" cy="365760"/>
           </a:xfrm>
           <a:prstGeom prst="rect">
             <a:avLst/>
@@ -4968,8 +4968,8 @@
         </p:nvCxnSpPr>
         <p:spPr>
           <a:xfrm>
-            <a:off x="2651760" y="4251960"/>
-            <a:ext cx="5120640" cy="182880"/>
+            <a:off x="2606040" y="4343400"/>
+            <a:ext cx="5349239" cy="365760"/>
           </a:xfrm>
           <a:prstGeom prst="line">
             <a:avLst/>
@@ -4996,9 +4996,304 @@
           </a:fontRef>
         </p:style>
       </p:cxnSp>
-      <p:sp>
-        <p:nvSpPr>
-          <p:cNvPr id="13" name="Rounded Rectangle 12"/>
+      <p:cxnSp>
+        <p:nvCxnSpPr>
+          <p:cNvPr id="13" name="Connector 12"/>
+          <p:cNvCxnSpPr/>
+          <p:nvPr/>
+        </p:nvCxnSpPr>
+        <p:spPr>
+          <a:xfrm flipH="1" flipV="1">
+            <a:off x="5394960" y="1737360"/>
+            <a:ext cx="3291840" cy="1417320"/>
+          </a:xfrm>
+          <a:prstGeom prst="line">
+            <a:avLst/>
+          </a:prstGeom>
+          <a:ln w="25400">
+            <a:solidFill>
+              <a:srgbClr val="5E7682"/>
+            </a:solidFill>
+            <a:tailEnd type="triangle" w="med" len="med"/>
+          </a:ln>
+        </p:spPr>
+        <p:style>
+          <a:lnRef idx="2">
+            <a:schemeClr val="accent1"/>
+          </a:lnRef>
+          <a:fillRef idx="0">
+            <a:schemeClr val="accent1"/>
+          </a:fillRef>
+          <a:effectRef idx="1">
+            <a:schemeClr val="accent1"/>
+          </a:effectRef>
+          <a:fontRef idx="minor">
+            <a:schemeClr val="tx1"/>
+          </a:fontRef>
+        </p:style>
+      </p:cxnSp>
+      <p:cxnSp>
+        <p:nvCxnSpPr>
+          <p:cNvPr id="14" name="Connector 13"/>
+          <p:cNvCxnSpPr/>
+          <p:nvPr/>
+        </p:nvCxnSpPr>
+        <p:spPr>
+          <a:xfrm>
+            <a:off x="5120640" y="1737360"/>
+            <a:ext cx="3108960" cy="1417320"/>
+          </a:xfrm>
+          <a:prstGeom prst="line">
+            <a:avLst/>
+          </a:prstGeom>
+          <a:ln w="25400">
+            <a:solidFill>
+              <a:srgbClr val="5E7682"/>
+            </a:solidFill>
+            <a:tailEnd type="triangle" w="med" len="med"/>
+          </a:ln>
+        </p:spPr>
+        <p:style>
+          <a:lnRef idx="2">
+            <a:schemeClr val="accent1"/>
+          </a:lnRef>
+          <a:fillRef idx="0">
+            <a:schemeClr val="accent1"/>
+          </a:fillRef>
+          <a:effectRef idx="1">
+            <a:schemeClr val="accent1"/>
+          </a:effectRef>
+          <a:fontRef idx="minor">
+            <a:schemeClr val="tx1"/>
+          </a:fontRef>
+        </p:style>
+      </p:cxnSp>
+      <p:cxnSp>
+        <p:nvCxnSpPr>
+          <p:cNvPr id="15" name="Connector 14"/>
+          <p:cNvCxnSpPr/>
+          <p:nvPr/>
+        </p:nvCxnSpPr>
+        <p:spPr>
+          <a:xfrm flipH="1" flipV="1">
+            <a:off x="2971800" y="6080760"/>
+            <a:ext cx="5623560" cy="411480"/>
+          </a:xfrm>
+          <a:prstGeom prst="line">
+            <a:avLst/>
+          </a:prstGeom>
+          <a:ln w="25400">
+            <a:solidFill>
+              <a:srgbClr val="D9433B"/>
+            </a:solidFill>
+            <a:tailEnd type="triangle" w="med" len="med"/>
+          </a:ln>
+        </p:spPr>
+        <p:style>
+          <a:lnRef idx="2">
+            <a:schemeClr val="accent1"/>
+          </a:lnRef>
+          <a:fillRef idx="0">
+            <a:schemeClr val="accent1"/>
+          </a:fillRef>
+          <a:effectRef idx="1">
+            <a:schemeClr val="accent1"/>
+          </a:effectRef>
+          <a:fontRef idx="minor">
+            <a:schemeClr val="tx1"/>
+          </a:fontRef>
+        </p:style>
+      </p:cxnSp>
+      <p:sp>
+        <p:nvSpPr>
+          <p:cNvPr id="16" name="Rounded Rectangle 15"/>
+          <p:cNvSpPr/>
+          <p:nvPr/>
+        </p:nvSpPr>
+        <p:spPr>
+          <a:xfrm>
+            <a:off x="8183879" y="3840480"/>
+            <a:ext cx="3291840" cy="1417320"/>
+          </a:xfrm>
+          <a:prstGeom prst="roundRect">
+            <a:avLst>
+              <a:gd name="adj" fmla="val 10000"/>
+            </a:avLst>
+          </a:prstGeom>
+          <a:solidFill>
+            <a:srgbClr val="FBEBEA"/>
+          </a:solidFill>
+          <a:ln w="22860">
+            <a:solidFill>
+              <a:srgbClr val="D9433B"/>
+            </a:solidFill>
+          </a:ln>
+          <a:effectLst/>
+        </p:spPr>
+        <p:style>
+          <a:lnRef idx="1">
+            <a:schemeClr val="accent1"/>
+          </a:lnRef>
+          <a:fillRef idx="3">
+            <a:schemeClr val="accent1"/>
+          </a:fillRef>
+          <a:effectRef idx="2">
+            <a:schemeClr val="accent1"/>
+          </a:effectRef>
+          <a:fontRef idx="minor">
+            <a:schemeClr val="lt1"/>
+          </a:fontRef>
+        </p:style>
+        <p:txBody>
+          <a:bodyPr rtlCol="0" anchor="ctr"/>
+          <a:lstStyle/>
+          <a:p>
+            <a:pPr algn="ctr"/>
+          </a:p>
+        </p:txBody>
+      </p:sp>
+      <p:sp>
+        <p:nvSpPr>
+          <p:cNvPr id="17" name="TextBox 16"/>
+          <p:cNvSpPr txBox="1"/>
+          <p:nvPr/>
+        </p:nvSpPr>
+        <p:spPr>
+          <a:xfrm>
+            <a:off x="8321040" y="3931920"/>
+            <a:ext cx="3017520" cy="640080"/>
+          </a:xfrm>
+          <a:prstGeom prst="rect">
+            <a:avLst/>
+          </a:prstGeom>
+          <a:noFill/>
+        </p:spPr>
+        <p:txBody>
+          <a:bodyPr wrap="square" anchor="t" lIns="0" rIns="0" tIns="0" bIns="0">
+            <a:spAutoFit/>
+          </a:bodyPr>
+          <a:lstStyle/>
+          <a:p>
+            <a:pPr algn="l"/>
+            <a:r>
+              <a:rPr sz="1200" b="1">
+                <a:solidFill>
+                  <a:srgbClr val="D9433B"/>
+                </a:solidFill>
+                <a:latin typeface="Hiragino Sans"/>
+                <a:ea typeface="Hiragino Sans"/>
+                <a:cs typeface="Hiragino Sans"/>
+              </a:rPr>
+              <a:t>④ ページ内のJSが # を読み、innerHTML でDOMに入れて実行</a:t>
+            </a:r>
+          </a:p>
+        </p:txBody>
+      </p:sp>
+      <p:sp>
+        <p:nvSpPr>
+          <p:cNvPr id="18" name="TextBox 17"/>
+          <p:cNvSpPr txBox="1"/>
+          <p:nvPr/>
+        </p:nvSpPr>
+        <p:spPr>
+          <a:xfrm>
+            <a:off x="8321040" y="4590288"/>
+            <a:ext cx="3017520" cy="594360"/>
+          </a:xfrm>
+          <a:prstGeom prst="rect">
+            <a:avLst/>
+          </a:prstGeom>
+          <a:noFill/>
+        </p:spPr>
+        <p:txBody>
+          <a:bodyPr wrap="square" anchor="ctr" lIns="0" rIns="0" tIns="0" bIns="0">
+            <a:spAutoFit/>
+          </a:bodyPr>
+          <a:lstStyle/>
+          <a:p>
+            <a:pPr algn="l"/>
+            <a:r>
+              <a:rPr sz="1100" b="0">
+                <a:solidFill>
+                  <a:srgbClr val="24404D"/>
+                </a:solidFill>
+                <a:latin typeface="Hiragino Sans"/>
+                <a:ea typeface="Hiragino Sans"/>
+                <a:cs typeface="Hiragino Sans"/>
+              </a:rPr>
+              <a:t>文字列をHTMLに入れるのは</a:t>
+            </a:r>
+          </a:p>
+          <a:p>
+            <a:pPr algn="l"/>
+            <a:r>
+              <a:rPr sz="1100" b="0">
+                <a:solidFill>
+                  <a:srgbClr val="24404D"/>
+                </a:solidFill>
+                <a:latin typeface="Hiragino Sans"/>
+                <a:ea typeface="Hiragino Sans"/>
+                <a:cs typeface="Hiragino Sans"/>
+              </a:rPr>
+              <a:t>サーバではなくブラウザ上のJS</a:t>
+            </a:r>
+          </a:p>
+        </p:txBody>
+      </p:sp>
+      <p:sp>
+        <p:nvSpPr>
+          <p:cNvPr id="19" name="TextBox 18"/>
+          <p:cNvSpPr txBox="1"/>
+          <p:nvPr/>
+        </p:nvSpPr>
+        <p:spPr>
+          <a:xfrm>
+            <a:off x="8001000" y="5440680"/>
+            <a:ext cx="3657599" cy="822960"/>
+          </a:xfrm>
+          <a:prstGeom prst="rect">
+            <a:avLst/>
+          </a:prstGeom>
+          <a:noFill/>
+        </p:spPr>
+        <p:txBody>
+          <a:bodyPr wrap="square" anchor="t" lIns="0" rIns="0" tIns="0" bIns="0">
+            <a:spAutoFit/>
+          </a:bodyPr>
+          <a:lstStyle/>
+          <a:p>
+            <a:pPr algn="ctr"/>
+            <a:r>
+              <a:rPr sz="1100" b="0">
+                <a:solidFill>
+                  <a:srgbClr val="24404D"/>
+                </a:solidFill>
+                <a:latin typeface="Hiragino Sans"/>
+                <a:ea typeface="Hiragino Sans"/>
+                <a:cs typeface="Hiragino Sans"/>
+              </a:rPr>
+              <a:t>→ Cookie・画面の情報を読み、</a:t>
+            </a:r>
+          </a:p>
+          <a:p>
+            <a:pPr algn="ctr"/>
+            <a:r>
+              <a:rPr sz="1100" b="0">
+                <a:solidFill>
+                  <a:srgbClr val="24404D"/>
+                </a:solidFill>
+                <a:latin typeface="Hiragino Sans"/>
+                <a:ea typeface="Hiragino Sans"/>
+                <a:cs typeface="Hiragino Sans"/>
+              </a:rPr>
+              <a:t>   攻撃者の回収サーバへ送る</a:t>
+            </a:r>
+          </a:p>
+        </p:txBody>
+      </p:sp>
+      <p:sp>
+        <p:nvSpPr>
+          <p:cNvPr id="20" name="Rounded Rectangle 19"/>
           <p:cNvSpPr/>
           <p:nvPr/>
         </p:nvSpPr>
@@ -5046,7 +5341,7 @@
       </p:sp>
       <p:sp>
         <p:nvSpPr>
-          <p:cNvPr id="14" name="TextBox 13"/>
+          <p:cNvPr id="21" name="TextBox 20"/>
           <p:cNvSpPr txBox="1"/>
           <p:nvPr/>
         </p:nvSpPr>
@@ -5095,51 +5390,15 @@
           </a:p>
         </p:txBody>
       </p:sp>
-      <p:cxnSp>
-        <p:nvCxnSpPr>
-          <p:cNvPr id="15" name="Connector 14"/>
-          <p:cNvCxnSpPr/>
-          <p:nvPr/>
-        </p:nvCxnSpPr>
-        <p:spPr>
-          <a:xfrm flipH="1" flipV="1">
-            <a:off x="6035040" y="1737360"/>
-            <a:ext cx="2743200" cy="1417320"/>
-          </a:xfrm>
-          <a:prstGeom prst="line">
-            <a:avLst/>
-          </a:prstGeom>
-          <a:ln w="25400">
-            <a:solidFill>
-              <a:srgbClr val="5E7682"/>
-            </a:solidFill>
-            <a:tailEnd type="triangle" w="med" len="med"/>
-          </a:ln>
-        </p:spPr>
-        <p:style>
-          <a:lnRef idx="2">
-            <a:schemeClr val="accent1"/>
-          </a:lnRef>
-          <a:fillRef idx="0">
-            <a:schemeClr val="accent1"/>
-          </a:fillRef>
-          <a:effectRef idx="1">
-            <a:schemeClr val="accent1"/>
-          </a:effectRef>
-          <a:fontRef idx="minor">
-            <a:schemeClr val="tx1"/>
-          </a:fontRef>
-        </p:style>
-      </p:cxnSp>
-      <p:sp>
-        <p:nvSpPr>
-          <p:cNvPr id="16" name="Rounded Rectangle 15"/>
+      <p:sp>
+        <p:nvSpPr>
+          <p:cNvPr id="22" name="Rounded Rectangle 21"/>
           <p:cNvSpPr/>
           <p:nvPr/>
         </p:nvSpPr>
         <p:spPr>
           <a:xfrm>
-            <a:off x="7223760" y="2240280"/>
+            <a:off x="7772400" y="2240280"/>
             <a:ext cx="3291840" cy="384048"/>
           </a:xfrm>
           <a:prstGeom prst="roundRect">
@@ -5181,13 +5440,13 @@
       </p:sp>
       <p:sp>
         <p:nvSpPr>
-          <p:cNvPr id="17" name="TextBox 16"/>
+          <p:cNvPr id="23" name="TextBox 22"/>
           <p:cNvSpPr txBox="1"/>
           <p:nvPr/>
         </p:nvSpPr>
         <p:spPr>
           <a:xfrm>
-            <a:off x="7296912" y="2240280"/>
+            <a:off x="7845552" y="2240280"/>
             <a:ext cx="3145536" cy="384048"/>
           </a:xfrm>
           <a:prstGeom prst="rect">
@@ -5216,51 +5475,15 @@
           </a:p>
         </p:txBody>
       </p:sp>
-      <p:cxnSp>
-        <p:nvCxnSpPr>
-          <p:cNvPr id="18" name="Connector 17"/>
-          <p:cNvCxnSpPr/>
-          <p:nvPr/>
-        </p:nvCxnSpPr>
-        <p:spPr>
-          <a:xfrm>
-            <a:off x="5394960" y="1737360"/>
-            <a:ext cx="2743200" cy="1417320"/>
-          </a:xfrm>
-          <a:prstGeom prst="line">
-            <a:avLst/>
-          </a:prstGeom>
-          <a:ln w="25400">
-            <a:solidFill>
-              <a:srgbClr val="5E7682"/>
-            </a:solidFill>
-            <a:tailEnd type="triangle" w="med" len="med"/>
-          </a:ln>
-        </p:spPr>
-        <p:style>
-          <a:lnRef idx="2">
-            <a:schemeClr val="accent1"/>
-          </a:lnRef>
-          <a:fillRef idx="0">
-            <a:schemeClr val="accent1"/>
-          </a:fillRef>
-          <a:effectRef idx="1">
-            <a:schemeClr val="accent1"/>
-          </a:effectRef>
-          <a:fontRef idx="minor">
-            <a:schemeClr val="tx1"/>
-          </a:fontRef>
-        </p:style>
-      </p:cxnSp>
-      <p:sp>
-        <p:nvSpPr>
-          <p:cNvPr id="19" name="Rounded Rectangle 18"/>
+      <p:sp>
+        <p:nvSpPr>
+          <p:cNvPr id="24" name="Rounded Rectangle 23"/>
           <p:cNvSpPr/>
           <p:nvPr/>
         </p:nvSpPr>
         <p:spPr>
           <a:xfrm>
-            <a:off x="3291840" y="2011680"/>
+            <a:off x="3108960" y="2011680"/>
             <a:ext cx="3657600" cy="384048"/>
           </a:xfrm>
           <a:prstGeom prst="roundRect">
@@ -5302,13 +5525,13 @@
       </p:sp>
       <p:sp>
         <p:nvSpPr>
-          <p:cNvPr id="20" name="TextBox 19"/>
+          <p:cNvPr id="25" name="TextBox 24"/>
           <p:cNvSpPr txBox="1"/>
           <p:nvPr/>
         </p:nvSpPr>
         <p:spPr>
           <a:xfrm>
-            <a:off x="3364992" y="2011680"/>
+            <a:off x="3182112" y="2011680"/>
             <a:ext cx="3511296" cy="384048"/>
           </a:xfrm>
           <a:prstGeom prst="rect">
@@ -5339,236 +5562,13 @@
       </p:sp>
       <p:sp>
         <p:nvSpPr>
-          <p:cNvPr id="21" name="Rounded Rectangle 20"/>
-          <p:cNvSpPr/>
-          <p:nvPr/>
-        </p:nvSpPr>
-        <p:spPr>
-          <a:xfrm>
-            <a:off x="8046720" y="3840480"/>
-            <a:ext cx="3383280" cy="1417320"/>
-          </a:xfrm>
-          <a:prstGeom prst="roundRect">
-            <a:avLst>
-              <a:gd name="adj" fmla="val 10000"/>
-            </a:avLst>
-          </a:prstGeom>
-          <a:solidFill>
-            <a:srgbClr val="FBEBEA"/>
-          </a:solidFill>
-          <a:ln w="22860">
-            <a:solidFill>
-              <a:srgbClr val="D9433B"/>
-            </a:solidFill>
-          </a:ln>
-          <a:effectLst/>
-        </p:spPr>
-        <p:style>
-          <a:lnRef idx="1">
-            <a:schemeClr val="accent1"/>
-          </a:lnRef>
-          <a:fillRef idx="3">
-            <a:schemeClr val="accent1"/>
-          </a:fillRef>
-          <a:effectRef idx="2">
-            <a:schemeClr val="accent1"/>
-          </a:effectRef>
-          <a:fontRef idx="minor">
-            <a:schemeClr val="lt1"/>
-          </a:fontRef>
-        </p:style>
-        <p:txBody>
-          <a:bodyPr rtlCol="0" anchor="ctr"/>
-          <a:lstStyle/>
-          <a:p>
-            <a:pPr algn="ctr"/>
-          </a:p>
-        </p:txBody>
-      </p:sp>
-      <p:sp>
-        <p:nvSpPr>
-          <p:cNvPr id="22" name="TextBox 21"/>
-          <p:cNvSpPr txBox="1"/>
-          <p:nvPr/>
-        </p:nvSpPr>
-        <p:spPr>
-          <a:xfrm>
-            <a:off x="8183879" y="3931920"/>
-            <a:ext cx="3108960" cy="320040"/>
-          </a:xfrm>
-          <a:prstGeom prst="rect">
-            <a:avLst/>
-          </a:prstGeom>
-          <a:noFill/>
-        </p:spPr>
-        <p:txBody>
-          <a:bodyPr wrap="square" anchor="t" lIns="0" rIns="0" tIns="0" bIns="0">
-            <a:spAutoFit/>
-          </a:bodyPr>
-          <a:lstStyle/>
-          <a:p>
-            <a:pPr algn="l"/>
-            <a:r>
-              <a:rPr sz="1200" b="1">
-                <a:solidFill>
-                  <a:srgbClr val="D9433B"/>
-                </a:solidFill>
-                <a:latin typeface="Hiragino Sans"/>
-                <a:ea typeface="Hiragino Sans"/>
-                <a:cs typeface="Hiragino Sans"/>
-              </a:rPr>
-              <a:t>④ ページ内のJSが # を読み、innerHTML でDOMに入れて実行</a:t>
-            </a:r>
-          </a:p>
-        </p:txBody>
-      </p:sp>
-      <p:sp>
-        <p:nvSpPr>
-          <p:cNvPr id="23" name="TextBox 22"/>
-          <p:cNvSpPr txBox="1"/>
-          <p:nvPr/>
-        </p:nvSpPr>
-        <p:spPr>
-          <a:xfrm>
-            <a:off x="8183879" y="4297680"/>
-            <a:ext cx="3108960" cy="914400"/>
-          </a:xfrm>
-          <a:prstGeom prst="rect">
-            <a:avLst/>
-          </a:prstGeom>
-          <a:noFill/>
-        </p:spPr>
-        <p:txBody>
-          <a:bodyPr wrap="square" anchor="ctr" lIns="0" rIns="0" tIns="0" bIns="0">
-            <a:spAutoFit/>
-          </a:bodyPr>
-          <a:lstStyle/>
-          <a:p>
-            <a:pPr algn="l"/>
-            <a:r>
-              <a:rPr sz="1100" b="0">
-                <a:solidFill>
-                  <a:srgbClr val="24404D"/>
-                </a:solidFill>
-                <a:latin typeface="Hiragino Sans"/>
-                <a:ea typeface="Hiragino Sans"/>
-                <a:cs typeface="Hiragino Sans"/>
-              </a:rPr>
-              <a:t>文字列をHTMLに入れるのは</a:t>
-            </a:r>
-          </a:p>
-          <a:p>
-            <a:pPr algn="l"/>
-            <a:r>
-              <a:rPr sz="1100" b="0">
-                <a:solidFill>
-                  <a:srgbClr val="24404D"/>
-                </a:solidFill>
-                <a:latin typeface="Hiragino Sans"/>
-                <a:ea typeface="Hiragino Sans"/>
-                <a:cs typeface="Hiragino Sans"/>
-              </a:rPr>
-              <a:t>サーバではなくブラウザ上のJS</a:t>
-            </a:r>
-          </a:p>
-        </p:txBody>
-      </p:sp>
-      <p:sp>
-        <p:nvSpPr>
-          <p:cNvPr id="24" name="TextBox 23"/>
-          <p:cNvSpPr txBox="1"/>
-          <p:nvPr/>
-        </p:nvSpPr>
-        <p:spPr>
-          <a:xfrm>
-            <a:off x="7909560" y="5394960"/>
-            <a:ext cx="3657600" cy="822960"/>
-          </a:xfrm>
-          <a:prstGeom prst="rect">
-            <a:avLst/>
-          </a:prstGeom>
-          <a:noFill/>
-        </p:spPr>
-        <p:txBody>
-          <a:bodyPr wrap="square" anchor="t" lIns="0" rIns="0" tIns="0" bIns="0">
-            <a:spAutoFit/>
-          </a:bodyPr>
-          <a:lstStyle/>
-          <a:p>
-            <a:pPr algn="ctr"/>
-            <a:r>
-              <a:rPr sz="1100" b="0">
-                <a:solidFill>
-                  <a:srgbClr val="24404D"/>
-                </a:solidFill>
-                <a:latin typeface="Hiragino Sans"/>
-                <a:ea typeface="Hiragino Sans"/>
-                <a:cs typeface="Hiragino Sans"/>
-              </a:rPr>
-              <a:t>→ Cookie・画面の情報を読み、</a:t>
-            </a:r>
-          </a:p>
-          <a:p>
-            <a:pPr algn="ctr"/>
-            <a:r>
-              <a:rPr sz="1100" b="0">
-                <a:solidFill>
-                  <a:srgbClr val="24404D"/>
-                </a:solidFill>
-                <a:latin typeface="Hiragino Sans"/>
-                <a:ea typeface="Hiragino Sans"/>
-                <a:cs typeface="Hiragino Sans"/>
-              </a:rPr>
-              <a:t>   攻撃者の回収サーバへ送る</a:t>
-            </a:r>
-          </a:p>
-        </p:txBody>
-      </p:sp>
-      <p:cxnSp>
-        <p:nvCxnSpPr>
-          <p:cNvPr id="25" name="Connector 24"/>
-          <p:cNvCxnSpPr/>
-          <p:nvPr/>
-        </p:nvCxnSpPr>
-        <p:spPr>
-          <a:xfrm flipH="1" flipV="1">
-            <a:off x="3017520" y="6080760"/>
-            <a:ext cx="5212080" cy="411480"/>
-          </a:xfrm>
-          <a:prstGeom prst="line">
-            <a:avLst/>
-          </a:prstGeom>
-          <a:ln w="25400">
-            <a:solidFill>
-              <a:srgbClr val="D9433B"/>
-            </a:solidFill>
-            <a:tailEnd type="triangle" w="med" len="med"/>
-          </a:ln>
-        </p:spPr>
-        <p:style>
-          <a:lnRef idx="2">
-            <a:schemeClr val="accent1"/>
-          </a:lnRef>
-          <a:fillRef idx="0">
-            <a:schemeClr val="accent1"/>
-          </a:fillRef>
-          <a:effectRef idx="1">
-            <a:schemeClr val="accent1"/>
-          </a:effectRef>
-          <a:fontRef idx="minor">
-            <a:schemeClr val="tx1"/>
-          </a:fontRef>
-        </p:style>
-      </p:cxnSp>
-      <p:sp>
-        <p:nvSpPr>
           <p:cNvPr id="26" name="Rounded Rectangle 25"/>
           <p:cNvSpPr/>
           <p:nvPr/>
         </p:nvSpPr>
         <p:spPr>
           <a:xfrm>
-            <a:off x="3931920" y="5669280"/>
+            <a:off x="4023360" y="5669280"/>
             <a:ext cx="3108960" cy="384048"/>
           </a:xfrm>
           <a:prstGeom prst="roundRect">
@@ -5616,7 +5616,7 @@
         </p:nvSpPr>
         <p:spPr>
           <a:xfrm>
-            <a:off x="4005072" y="5669280"/>
+            <a:off x="4096512" y="5669280"/>
             <a:ext cx="2962656" cy="384048"/>
           </a:xfrm>
           <a:prstGeom prst="rect">
@@ -17727,8 +17727,8 @@
         </p:nvSpPr>
         <p:spPr>
           <a:xfrm>
-            <a:off x="4526280" y="777240"/>
-            <a:ext cx="1920240" cy="960120"/>
+            <a:off x="3931920" y="777240"/>
+            <a:ext cx="1737360" cy="960120"/>
           </a:xfrm>
           <a:prstGeom prst="roundRect">
             <a:avLst>
@@ -17775,8 +17775,8 @@
         </p:nvSpPr>
         <p:spPr>
           <a:xfrm>
-            <a:off x="4526280" y="777240"/>
-            <a:ext cx="1920240" cy="960120"/>
+            <a:off x="3931920" y="777240"/>
+            <a:ext cx="1737360" cy="960120"/>
           </a:xfrm>
           <a:prstGeom prst="rect">
             <a:avLst/>
@@ -17812,8 +17812,8 @@
         </p:nvSpPr>
         <p:spPr>
           <a:xfrm>
-            <a:off x="6720840" y="777240"/>
-            <a:ext cx="1371600" cy="960120"/>
+            <a:off x="6629400" y="777240"/>
+            <a:ext cx="1188720" cy="960120"/>
           </a:xfrm>
           <a:prstGeom prst="roundRect">
             <a:avLst>
@@ -17860,8 +17860,8 @@
         </p:nvSpPr>
         <p:spPr>
           <a:xfrm>
-            <a:off x="6720840" y="777240"/>
-            <a:ext cx="1371600" cy="960120"/>
+            <a:off x="6629400" y="777240"/>
+            <a:ext cx="1188720" cy="960120"/>
           </a:xfrm>
           <a:prstGeom prst="rect">
             <a:avLst/>
@@ -18067,8 +18067,8 @@
         </p:nvSpPr>
         <p:spPr>
           <a:xfrm>
-            <a:off x="7772400" y="3154680"/>
-            <a:ext cx="3931920" cy="3337560"/>
+            <a:off x="7955279" y="3154680"/>
+            <a:ext cx="3749039" cy="3337560"/>
           </a:xfrm>
           <a:prstGeom prst="roundRect">
             <a:avLst>
@@ -18115,8 +18115,8 @@
         </p:nvSpPr>
         <p:spPr>
           <a:xfrm>
-            <a:off x="7772400" y="3291840"/>
-            <a:ext cx="3931920" cy="365760"/>
+            <a:off x="7955279" y="3291840"/>
+            <a:ext cx="3749039" cy="365760"/>
           </a:xfrm>
           <a:prstGeom prst="rect">
             <a:avLst/>
@@ -18152,8 +18152,8 @@
         </p:nvCxnSpPr>
         <p:spPr>
           <a:xfrm>
-            <a:off x="2651760" y="4251960"/>
-            <a:ext cx="5120640" cy="182880"/>
+            <a:off x="2606040" y="4343400"/>
+            <a:ext cx="5349239" cy="365760"/>
           </a:xfrm>
           <a:prstGeom prst="line">
             <a:avLst/>
@@ -18180,9 +18180,304 @@
           </a:fontRef>
         </p:style>
       </p:cxnSp>
-      <p:sp>
-        <p:nvSpPr>
-          <p:cNvPr id="13" name="Rounded Rectangle 12"/>
+      <p:cxnSp>
+        <p:nvCxnSpPr>
+          <p:cNvPr id="13" name="Connector 12"/>
+          <p:cNvCxnSpPr/>
+          <p:nvPr/>
+        </p:nvCxnSpPr>
+        <p:spPr>
+          <a:xfrm flipH="1" flipV="1">
+            <a:off x="5394960" y="1737360"/>
+            <a:ext cx="3291840" cy="1417320"/>
+          </a:xfrm>
+          <a:prstGeom prst="line">
+            <a:avLst/>
+          </a:prstGeom>
+          <a:ln w="25400">
+            <a:solidFill>
+              <a:srgbClr val="5E7682"/>
+            </a:solidFill>
+            <a:tailEnd type="triangle" w="med" len="med"/>
+          </a:ln>
+        </p:spPr>
+        <p:style>
+          <a:lnRef idx="2">
+            <a:schemeClr val="accent1"/>
+          </a:lnRef>
+          <a:fillRef idx="0">
+            <a:schemeClr val="accent1"/>
+          </a:fillRef>
+          <a:effectRef idx="1">
+            <a:schemeClr val="accent1"/>
+          </a:effectRef>
+          <a:fontRef idx="minor">
+            <a:schemeClr val="tx1"/>
+          </a:fontRef>
+        </p:style>
+      </p:cxnSp>
+      <p:cxnSp>
+        <p:nvCxnSpPr>
+          <p:cNvPr id="14" name="Connector 13"/>
+          <p:cNvCxnSpPr/>
+          <p:nvPr/>
+        </p:nvCxnSpPr>
+        <p:spPr>
+          <a:xfrm>
+            <a:off x="5120640" y="1737360"/>
+            <a:ext cx="3108960" cy="1417320"/>
+          </a:xfrm>
+          <a:prstGeom prst="line">
+            <a:avLst/>
+          </a:prstGeom>
+          <a:ln w="25400">
+            <a:solidFill>
+              <a:srgbClr val="D9433B"/>
+            </a:solidFill>
+            <a:tailEnd type="triangle" w="med" len="med"/>
+          </a:ln>
+        </p:spPr>
+        <p:style>
+          <a:lnRef idx="2">
+            <a:schemeClr val="accent1"/>
+          </a:lnRef>
+          <a:fillRef idx="0">
+            <a:schemeClr val="accent1"/>
+          </a:fillRef>
+          <a:effectRef idx="1">
+            <a:schemeClr val="accent1"/>
+          </a:effectRef>
+          <a:fontRef idx="minor">
+            <a:schemeClr val="tx1"/>
+          </a:fontRef>
+        </p:style>
+      </p:cxnSp>
+      <p:cxnSp>
+        <p:nvCxnSpPr>
+          <p:cNvPr id="15" name="Connector 14"/>
+          <p:cNvCxnSpPr/>
+          <p:nvPr/>
+        </p:nvCxnSpPr>
+        <p:spPr>
+          <a:xfrm flipH="1" flipV="1">
+            <a:off x="2971800" y="6080760"/>
+            <a:ext cx="5623560" cy="411480"/>
+          </a:xfrm>
+          <a:prstGeom prst="line">
+            <a:avLst/>
+          </a:prstGeom>
+          <a:ln w="25400">
+            <a:solidFill>
+              <a:srgbClr val="D9433B"/>
+            </a:solidFill>
+            <a:tailEnd type="triangle" w="med" len="med"/>
+          </a:ln>
+        </p:spPr>
+        <p:style>
+          <a:lnRef idx="2">
+            <a:schemeClr val="accent1"/>
+          </a:lnRef>
+          <a:fillRef idx="0">
+            <a:schemeClr val="accent1"/>
+          </a:fillRef>
+          <a:effectRef idx="1">
+            <a:schemeClr val="accent1"/>
+          </a:effectRef>
+          <a:fontRef idx="minor">
+            <a:schemeClr val="tx1"/>
+          </a:fontRef>
+        </p:style>
+      </p:cxnSp>
+      <p:sp>
+        <p:nvSpPr>
+          <p:cNvPr id="16" name="Rounded Rectangle 15"/>
+          <p:cNvSpPr/>
+          <p:nvPr/>
+        </p:nvSpPr>
+        <p:spPr>
+          <a:xfrm>
+            <a:off x="8183879" y="3840480"/>
+            <a:ext cx="3291840" cy="1417320"/>
+          </a:xfrm>
+          <a:prstGeom prst="roundRect">
+            <a:avLst>
+              <a:gd name="adj" fmla="val 10000"/>
+            </a:avLst>
+          </a:prstGeom>
+          <a:solidFill>
+            <a:srgbClr val="FBEBEA"/>
+          </a:solidFill>
+          <a:ln w="22860">
+            <a:solidFill>
+              <a:srgbClr val="D9433B"/>
+            </a:solidFill>
+          </a:ln>
+          <a:effectLst/>
+        </p:spPr>
+        <p:style>
+          <a:lnRef idx="1">
+            <a:schemeClr val="accent1"/>
+          </a:lnRef>
+          <a:fillRef idx="3">
+            <a:schemeClr val="accent1"/>
+          </a:fillRef>
+          <a:effectRef idx="2">
+            <a:schemeClr val="accent1"/>
+          </a:effectRef>
+          <a:fontRef idx="minor">
+            <a:schemeClr val="lt1"/>
+          </a:fontRef>
+        </p:style>
+        <p:txBody>
+          <a:bodyPr rtlCol="0" anchor="ctr"/>
+          <a:lstStyle/>
+          <a:p>
+            <a:pPr algn="ctr"/>
+          </a:p>
+        </p:txBody>
+      </p:sp>
+      <p:sp>
+        <p:nvSpPr>
+          <p:cNvPr id="17" name="TextBox 16"/>
+          <p:cNvSpPr txBox="1"/>
+          <p:nvPr/>
+        </p:nvSpPr>
+        <p:spPr>
+          <a:xfrm>
+            <a:off x="8321040" y="3931920"/>
+            <a:ext cx="3017520" cy="640080"/>
+          </a:xfrm>
+          <a:prstGeom prst="rect">
+            <a:avLst/>
+          </a:prstGeom>
+          <a:noFill/>
+        </p:spPr>
+        <p:txBody>
+          <a:bodyPr wrap="square" anchor="t" lIns="0" rIns="0" tIns="0" bIns="0">
+            <a:spAutoFit/>
+          </a:bodyPr>
+          <a:lstStyle/>
+          <a:p>
+            <a:pPr algn="l"/>
+            <a:r>
+              <a:rPr sz="1200" b="1">
+                <a:solidFill>
+                  <a:srgbClr val="D9433B"/>
+                </a:solidFill>
+                <a:latin typeface="Hiragino Sans"/>
+                <a:ea typeface="Hiragino Sans"/>
+                <a:cs typeface="Hiragino Sans"/>
+              </a:rPr>
+              <a:t>④ HTMLパーサがscript要素を作り実行</a:t>
+            </a:r>
+          </a:p>
+        </p:txBody>
+      </p:sp>
+      <p:sp>
+        <p:nvSpPr>
+          <p:cNvPr id="18" name="TextBox 17"/>
+          <p:cNvSpPr txBox="1"/>
+          <p:nvPr/>
+        </p:nvSpPr>
+        <p:spPr>
+          <a:xfrm>
+            <a:off x="8321040" y="4590288"/>
+            <a:ext cx="3017520" cy="594360"/>
+          </a:xfrm>
+          <a:prstGeom prst="rect">
+            <a:avLst/>
+          </a:prstGeom>
+          <a:noFill/>
+        </p:spPr>
+        <p:txBody>
+          <a:bodyPr wrap="square" anchor="ctr" lIns="0" rIns="0" tIns="0" bIns="0">
+            <a:spAutoFit/>
+          </a:bodyPr>
+          <a:lstStyle/>
+          <a:p>
+            <a:pPr algn="l"/>
+            <a:r>
+              <a:rPr sz="1100" b="0">
+                <a:solidFill>
+                  <a:srgbClr val="24404D"/>
+                </a:solidFill>
+                <a:latin typeface="Hiragino Sans"/>
+                <a:ea typeface="Hiragino Sans"/>
+                <a:cs typeface="Hiragino Sans"/>
+              </a:rPr>
+              <a:t>届いたHTMLの中に</a:t>
+            </a:r>
+          </a:p>
+          <a:p>
+            <a:pPr algn="l"/>
+            <a:r>
+              <a:rPr sz="1100" b="0">
+                <a:solidFill>
+                  <a:srgbClr val="24404D"/>
+                </a:solidFill>
+                <a:latin typeface="Hiragino Sans"/>
+                <a:ea typeface="Hiragino Sans"/>
+                <a:cs typeface="Hiragino Sans"/>
+              </a:rPr>
+              <a:t>script要素ができてしまう</a:t>
+            </a:r>
+          </a:p>
+        </p:txBody>
+      </p:sp>
+      <p:sp>
+        <p:nvSpPr>
+          <p:cNvPr id="19" name="TextBox 18"/>
+          <p:cNvSpPr txBox="1"/>
+          <p:nvPr/>
+        </p:nvSpPr>
+        <p:spPr>
+          <a:xfrm>
+            <a:off x="8001000" y="5440680"/>
+            <a:ext cx="3657599" cy="822960"/>
+          </a:xfrm>
+          <a:prstGeom prst="rect">
+            <a:avLst/>
+          </a:prstGeom>
+          <a:noFill/>
+        </p:spPr>
+        <p:txBody>
+          <a:bodyPr wrap="square" anchor="t" lIns="0" rIns="0" tIns="0" bIns="0">
+            <a:spAutoFit/>
+          </a:bodyPr>
+          <a:lstStyle/>
+          <a:p>
+            <a:pPr algn="ctr"/>
+            <a:r>
+              <a:rPr sz="1100" b="0">
+                <a:solidFill>
+                  <a:srgbClr val="24404D"/>
+                </a:solidFill>
+                <a:latin typeface="Hiragino Sans"/>
+                <a:ea typeface="Hiragino Sans"/>
+                <a:cs typeface="Hiragino Sans"/>
+              </a:rPr>
+              <a:t>→ Cookie・画面の情報を読み、</a:t>
+            </a:r>
+          </a:p>
+          <a:p>
+            <a:pPr algn="ctr"/>
+            <a:r>
+              <a:rPr sz="1100" b="0">
+                <a:solidFill>
+                  <a:srgbClr val="24404D"/>
+                </a:solidFill>
+                <a:latin typeface="Hiragino Sans"/>
+                <a:ea typeface="Hiragino Sans"/>
+                <a:cs typeface="Hiragino Sans"/>
+              </a:rPr>
+              <a:t>   攻撃者の回収サーバへ送る</a:t>
+            </a:r>
+          </a:p>
+        </p:txBody>
+      </p:sp>
+      <p:sp>
+        <p:nvSpPr>
+          <p:cNvPr id="20" name="Rounded Rectangle 19"/>
           <p:cNvSpPr/>
           <p:nvPr/>
         </p:nvSpPr>
@@ -18230,7 +18525,7 @@
       </p:sp>
       <p:sp>
         <p:nvSpPr>
-          <p:cNvPr id="14" name="TextBox 13"/>
+          <p:cNvPr id="21" name="TextBox 20"/>
           <p:cNvSpPr txBox="1"/>
           <p:nvPr/>
         </p:nvSpPr>
@@ -18279,52 +18574,16 @@
           </a:p>
         </p:txBody>
       </p:sp>
-      <p:cxnSp>
-        <p:nvCxnSpPr>
-          <p:cNvPr id="15" name="Connector 14"/>
-          <p:cNvCxnSpPr/>
-          <p:nvPr/>
-        </p:nvCxnSpPr>
-        <p:spPr>
-          <a:xfrm flipH="1" flipV="1">
-            <a:off x="6035040" y="1737360"/>
-            <a:ext cx="2743200" cy="1417320"/>
-          </a:xfrm>
-          <a:prstGeom prst="line">
-            <a:avLst/>
-          </a:prstGeom>
-          <a:ln w="25400">
-            <a:solidFill>
-              <a:srgbClr val="5E7682"/>
-            </a:solidFill>
-            <a:tailEnd type="triangle" w="med" len="med"/>
-          </a:ln>
-        </p:spPr>
-        <p:style>
-          <a:lnRef idx="2">
-            <a:schemeClr val="accent1"/>
-          </a:lnRef>
-          <a:fillRef idx="0">
-            <a:schemeClr val="accent1"/>
-          </a:fillRef>
-          <a:effectRef idx="1">
-            <a:schemeClr val="accent1"/>
-          </a:effectRef>
-          <a:fontRef idx="minor">
-            <a:schemeClr val="tx1"/>
-          </a:fontRef>
-        </p:style>
-      </p:cxnSp>
-      <p:sp>
-        <p:nvSpPr>
-          <p:cNvPr id="16" name="Rounded Rectangle 15"/>
+      <p:sp>
+        <p:nvSpPr>
+          <p:cNvPr id="22" name="Rounded Rectangle 21"/>
           <p:cNvSpPr/>
           <p:nvPr/>
         </p:nvSpPr>
         <p:spPr>
           <a:xfrm>
-            <a:off x="7772400" y="2286000"/>
-            <a:ext cx="2743200" cy="384048"/>
+            <a:off x="7863840" y="2240280"/>
+            <a:ext cx="3108960" cy="384048"/>
           </a:xfrm>
           <a:prstGeom prst="roundRect">
             <a:avLst>
@@ -18365,14 +18624,14 @@
       </p:sp>
       <p:sp>
         <p:nvSpPr>
-          <p:cNvPr id="17" name="TextBox 16"/>
+          <p:cNvPr id="23" name="TextBox 22"/>
           <p:cNvSpPr txBox="1"/>
           <p:nvPr/>
         </p:nvSpPr>
         <p:spPr>
           <a:xfrm>
-            <a:off x="7845552" y="2286000"/>
-            <a:ext cx="2596896" cy="384048"/>
+            <a:off x="7936992" y="2240280"/>
+            <a:ext cx="2962656" cy="384048"/>
           </a:xfrm>
           <a:prstGeom prst="rect">
             <a:avLst/>
@@ -18400,52 +18659,16 @@
           </a:p>
         </p:txBody>
       </p:sp>
-      <p:cxnSp>
-        <p:nvCxnSpPr>
-          <p:cNvPr id="18" name="Connector 17"/>
-          <p:cNvCxnSpPr/>
-          <p:nvPr/>
-        </p:nvCxnSpPr>
-        <p:spPr>
-          <a:xfrm>
-            <a:off x="5394960" y="1737360"/>
-            <a:ext cx="2743200" cy="1417320"/>
-          </a:xfrm>
-          <a:prstGeom prst="line">
-            <a:avLst/>
-          </a:prstGeom>
-          <a:ln w="25400">
-            <a:solidFill>
-              <a:srgbClr val="D9433B"/>
-            </a:solidFill>
-            <a:tailEnd type="triangle" w="med" len="med"/>
-          </a:ln>
-        </p:spPr>
-        <p:style>
-          <a:lnRef idx="2">
-            <a:schemeClr val="accent1"/>
-          </a:lnRef>
-          <a:fillRef idx="0">
-            <a:schemeClr val="accent1"/>
-          </a:fillRef>
-          <a:effectRef idx="1">
-            <a:schemeClr val="accent1"/>
-          </a:effectRef>
-          <a:fontRef idx="minor">
-            <a:schemeClr val="tx1"/>
-          </a:fontRef>
-        </p:style>
-      </p:cxnSp>
-      <p:sp>
-        <p:nvSpPr>
-          <p:cNvPr id="19" name="Rounded Rectangle 18"/>
+      <p:sp>
+        <p:nvSpPr>
+          <p:cNvPr id="24" name="Rounded Rectangle 23"/>
           <p:cNvSpPr/>
           <p:nvPr/>
         </p:nvSpPr>
         <p:spPr>
           <a:xfrm>
-            <a:off x="3566160" y="2011680"/>
-            <a:ext cx="3566160" cy="384048"/>
+            <a:off x="3200400" y="2011680"/>
+            <a:ext cx="3657600" cy="384048"/>
           </a:xfrm>
           <a:prstGeom prst="roundRect">
             <a:avLst>
@@ -18486,14 +18709,14 @@
       </p:sp>
       <p:sp>
         <p:nvSpPr>
-          <p:cNvPr id="20" name="TextBox 19"/>
+          <p:cNvPr id="25" name="TextBox 24"/>
           <p:cNvSpPr txBox="1"/>
           <p:nvPr/>
         </p:nvSpPr>
         <p:spPr>
           <a:xfrm>
-            <a:off x="3639312" y="2011680"/>
-            <a:ext cx="3419856" cy="384048"/>
+            <a:off x="3273552" y="2011680"/>
+            <a:ext cx="3511296" cy="384048"/>
           </a:xfrm>
           <a:prstGeom prst="rect">
             <a:avLst/>
@@ -18523,236 +18746,13 @@
       </p:sp>
       <p:sp>
         <p:nvSpPr>
-          <p:cNvPr id="21" name="Rounded Rectangle 20"/>
-          <p:cNvSpPr/>
-          <p:nvPr/>
-        </p:nvSpPr>
-        <p:spPr>
-          <a:xfrm>
-            <a:off x="8046720" y="3840480"/>
-            <a:ext cx="3383280" cy="1417320"/>
-          </a:xfrm>
-          <a:prstGeom prst="roundRect">
-            <a:avLst>
-              <a:gd name="adj" fmla="val 10000"/>
-            </a:avLst>
-          </a:prstGeom>
-          <a:solidFill>
-            <a:srgbClr val="FBEBEA"/>
-          </a:solidFill>
-          <a:ln w="22860">
-            <a:solidFill>
-              <a:srgbClr val="D9433B"/>
-            </a:solidFill>
-          </a:ln>
-          <a:effectLst/>
-        </p:spPr>
-        <p:style>
-          <a:lnRef idx="1">
-            <a:schemeClr val="accent1"/>
-          </a:lnRef>
-          <a:fillRef idx="3">
-            <a:schemeClr val="accent1"/>
-          </a:fillRef>
-          <a:effectRef idx="2">
-            <a:schemeClr val="accent1"/>
-          </a:effectRef>
-          <a:fontRef idx="minor">
-            <a:schemeClr val="lt1"/>
-          </a:fontRef>
-        </p:style>
-        <p:txBody>
-          <a:bodyPr rtlCol="0" anchor="ctr"/>
-          <a:lstStyle/>
-          <a:p>
-            <a:pPr algn="ctr"/>
-          </a:p>
-        </p:txBody>
-      </p:sp>
-      <p:sp>
-        <p:nvSpPr>
-          <p:cNvPr id="22" name="TextBox 21"/>
-          <p:cNvSpPr txBox="1"/>
-          <p:nvPr/>
-        </p:nvSpPr>
-        <p:spPr>
-          <a:xfrm>
-            <a:off x="8183879" y="3931920"/>
-            <a:ext cx="3108960" cy="320040"/>
-          </a:xfrm>
-          <a:prstGeom prst="rect">
-            <a:avLst/>
-          </a:prstGeom>
-          <a:noFill/>
-        </p:spPr>
-        <p:txBody>
-          <a:bodyPr wrap="square" anchor="t" lIns="0" rIns="0" tIns="0" bIns="0">
-            <a:spAutoFit/>
-          </a:bodyPr>
-          <a:lstStyle/>
-          <a:p>
-            <a:pPr algn="l"/>
-            <a:r>
-              <a:rPr sz="1200" b="1">
-                <a:solidFill>
-                  <a:srgbClr val="D9433B"/>
-                </a:solidFill>
-                <a:latin typeface="Hiragino Sans"/>
-                <a:ea typeface="Hiragino Sans"/>
-                <a:cs typeface="Hiragino Sans"/>
-              </a:rPr>
-              <a:t>④ HTMLパーサがscript要素を作り実行</a:t>
-            </a:r>
-          </a:p>
-        </p:txBody>
-      </p:sp>
-      <p:sp>
-        <p:nvSpPr>
-          <p:cNvPr id="23" name="TextBox 22"/>
-          <p:cNvSpPr txBox="1"/>
-          <p:nvPr/>
-        </p:nvSpPr>
-        <p:spPr>
-          <a:xfrm>
-            <a:off x="8183879" y="4297680"/>
-            <a:ext cx="3108960" cy="914400"/>
-          </a:xfrm>
-          <a:prstGeom prst="rect">
-            <a:avLst/>
-          </a:prstGeom>
-          <a:noFill/>
-        </p:spPr>
-        <p:txBody>
-          <a:bodyPr wrap="square" anchor="ctr" lIns="0" rIns="0" tIns="0" bIns="0">
-            <a:spAutoFit/>
-          </a:bodyPr>
-          <a:lstStyle/>
-          <a:p>
-            <a:pPr algn="l"/>
-            <a:r>
-              <a:rPr sz="1100" b="0">
-                <a:solidFill>
-                  <a:srgbClr val="24404D"/>
-                </a:solidFill>
-                <a:latin typeface="Hiragino Sans"/>
-                <a:ea typeface="Hiragino Sans"/>
-                <a:cs typeface="Hiragino Sans"/>
-              </a:rPr>
-              <a:t>届いたHTMLの中に</a:t>
-            </a:r>
-          </a:p>
-          <a:p>
-            <a:pPr algn="l"/>
-            <a:r>
-              <a:rPr sz="1100" b="0">
-                <a:solidFill>
-                  <a:srgbClr val="24404D"/>
-                </a:solidFill>
-                <a:latin typeface="Hiragino Sans"/>
-                <a:ea typeface="Hiragino Sans"/>
-                <a:cs typeface="Hiragino Sans"/>
-              </a:rPr>
-              <a:t>script要素ができてしまう</a:t>
-            </a:r>
-          </a:p>
-        </p:txBody>
-      </p:sp>
-      <p:sp>
-        <p:nvSpPr>
-          <p:cNvPr id="24" name="TextBox 23"/>
-          <p:cNvSpPr txBox="1"/>
-          <p:nvPr/>
-        </p:nvSpPr>
-        <p:spPr>
-          <a:xfrm>
-            <a:off x="7909560" y="5394960"/>
-            <a:ext cx="3657600" cy="822960"/>
-          </a:xfrm>
-          <a:prstGeom prst="rect">
-            <a:avLst/>
-          </a:prstGeom>
-          <a:noFill/>
-        </p:spPr>
-        <p:txBody>
-          <a:bodyPr wrap="square" anchor="t" lIns="0" rIns="0" tIns="0" bIns="0">
-            <a:spAutoFit/>
-          </a:bodyPr>
-          <a:lstStyle/>
-          <a:p>
-            <a:pPr algn="ctr"/>
-            <a:r>
-              <a:rPr sz="1100" b="0">
-                <a:solidFill>
-                  <a:srgbClr val="24404D"/>
-                </a:solidFill>
-                <a:latin typeface="Hiragino Sans"/>
-                <a:ea typeface="Hiragino Sans"/>
-                <a:cs typeface="Hiragino Sans"/>
-              </a:rPr>
-              <a:t>→ Cookie・画面の情報を読み、</a:t>
-            </a:r>
-          </a:p>
-          <a:p>
-            <a:pPr algn="ctr"/>
-            <a:r>
-              <a:rPr sz="1100" b="0">
-                <a:solidFill>
-                  <a:srgbClr val="24404D"/>
-                </a:solidFill>
-                <a:latin typeface="Hiragino Sans"/>
-                <a:ea typeface="Hiragino Sans"/>
-                <a:cs typeface="Hiragino Sans"/>
-              </a:rPr>
-              <a:t>   攻撃者の回収サーバへ送る</a:t>
-            </a:r>
-          </a:p>
-        </p:txBody>
-      </p:sp>
-      <p:cxnSp>
-        <p:nvCxnSpPr>
-          <p:cNvPr id="25" name="Connector 24"/>
-          <p:cNvCxnSpPr/>
-          <p:nvPr/>
-        </p:nvCxnSpPr>
-        <p:spPr>
-          <a:xfrm flipH="1" flipV="1">
-            <a:off x="3017520" y="6080760"/>
-            <a:ext cx="5212080" cy="411480"/>
-          </a:xfrm>
-          <a:prstGeom prst="line">
-            <a:avLst/>
-          </a:prstGeom>
-          <a:ln w="25400">
-            <a:solidFill>
-              <a:srgbClr val="D9433B"/>
-            </a:solidFill>
-            <a:tailEnd type="triangle" w="med" len="med"/>
-          </a:ln>
-        </p:spPr>
-        <p:style>
-          <a:lnRef idx="2">
-            <a:schemeClr val="accent1"/>
-          </a:lnRef>
-          <a:fillRef idx="0">
-            <a:schemeClr val="accent1"/>
-          </a:fillRef>
-          <a:effectRef idx="1">
-            <a:schemeClr val="accent1"/>
-          </a:effectRef>
-          <a:fontRef idx="minor">
-            <a:schemeClr val="tx1"/>
-          </a:fontRef>
-        </p:style>
-      </p:cxnSp>
-      <p:sp>
-        <p:nvSpPr>
           <p:cNvPr id="26" name="Rounded Rectangle 25"/>
           <p:cNvSpPr/>
           <p:nvPr/>
         </p:nvSpPr>
         <p:spPr>
           <a:xfrm>
-            <a:off x="3931920" y="5669280"/>
+            <a:off x="4023360" y="5669280"/>
             <a:ext cx="3108960" cy="384048"/>
           </a:xfrm>
           <a:prstGeom prst="roundRect">
@@ -18800,7 +18800,7 @@
         </p:nvSpPr>
         <p:spPr>
           <a:xfrm>
-            <a:off x="4005072" y="5669280"/>
+            <a:off x="4096512" y="5669280"/>
             <a:ext cx="2962656" cy="384048"/>
           </a:xfrm>
           <a:prstGeom prst="rect">
@@ -18892,8 +18892,8 @@
         </p:nvSpPr>
         <p:spPr>
           <a:xfrm>
-            <a:off x="4526280" y="777240"/>
-            <a:ext cx="1920240" cy="960120"/>
+            <a:off x="3931920" y="777240"/>
+            <a:ext cx="1737360" cy="960120"/>
           </a:xfrm>
           <a:prstGeom prst="roundRect">
             <a:avLst>
@@ -18940,8 +18940,8 @@
         </p:nvSpPr>
         <p:spPr>
           <a:xfrm>
-            <a:off x="4526280" y="777240"/>
-            <a:ext cx="1920240" cy="960120"/>
+            <a:off x="3931920" y="777240"/>
+            <a:ext cx="1737360" cy="960120"/>
           </a:xfrm>
           <a:prstGeom prst="rect">
             <a:avLst/>
@@ -18977,8 +18977,8 @@
         </p:nvSpPr>
         <p:spPr>
           <a:xfrm>
-            <a:off x="6720840" y="777240"/>
-            <a:ext cx="1371600" cy="960120"/>
+            <a:off x="6629400" y="777240"/>
+            <a:ext cx="1188720" cy="960120"/>
           </a:xfrm>
           <a:prstGeom prst="roundRect">
             <a:avLst>
@@ -19025,8 +19025,8 @@
         </p:nvSpPr>
         <p:spPr>
           <a:xfrm>
-            <a:off x="6720840" y="777240"/>
-            <a:ext cx="1371600" cy="960120"/>
+            <a:off x="6629400" y="777240"/>
+            <a:ext cx="1188720" cy="960120"/>
           </a:xfrm>
           <a:prstGeom prst="rect">
             <a:avLst/>
@@ -19232,8 +19232,8 @@
         </p:nvSpPr>
         <p:spPr>
           <a:xfrm>
-            <a:off x="7772400" y="3154680"/>
-            <a:ext cx="3931920" cy="3337560"/>
+            <a:off x="7955279" y="3154680"/>
+            <a:ext cx="3749039" cy="3337560"/>
           </a:xfrm>
           <a:prstGeom prst="roundRect">
             <a:avLst>
@@ -19280,8 +19280,8 @@
         </p:nvSpPr>
         <p:spPr>
           <a:xfrm>
-            <a:off x="7772400" y="3291840"/>
-            <a:ext cx="3931920" cy="365760"/>
+            <a:off x="7955279" y="3291840"/>
+            <a:ext cx="3749039" cy="365760"/>
           </a:xfrm>
           <a:prstGeom prst="rect">
             <a:avLst/>
@@ -19317,8 +19317,8 @@
         </p:nvCxnSpPr>
         <p:spPr>
           <a:xfrm flipV="1">
-            <a:off x="2651760" y="1737360"/>
-            <a:ext cx="2103120" cy="2331720"/>
+            <a:off x="2606040" y="1737360"/>
+            <a:ext cx="1965960" cy="2331720"/>
           </a:xfrm>
           <a:prstGeom prst="line">
             <a:avLst/>
@@ -19345,15 +19345,346 @@
           </a:fontRef>
         </p:style>
       </p:cxnSp>
-      <p:sp>
-        <p:nvSpPr>
-          <p:cNvPr id="13" name="Rounded Rectangle 12"/>
+      <p:cxnSp>
+        <p:nvCxnSpPr>
+          <p:cNvPr id="13" name="Connector 12"/>
+          <p:cNvCxnSpPr/>
+          <p:nvPr/>
+        </p:nvCxnSpPr>
+        <p:spPr>
+          <a:xfrm flipV="1">
+            <a:off x="5669280" y="1143000"/>
+            <a:ext cx="960120" cy="0"/>
+          </a:xfrm>
+          <a:prstGeom prst="line">
+            <a:avLst/>
+          </a:prstGeom>
+          <a:ln w="25400">
+            <a:solidFill>
+              <a:srgbClr val="D9433B"/>
+            </a:solidFill>
+            <a:tailEnd type="triangle" w="med" len="med"/>
+          </a:ln>
+        </p:spPr>
+        <p:style>
+          <a:lnRef idx="2">
+            <a:schemeClr val="accent1"/>
+          </a:lnRef>
+          <a:fillRef idx="0">
+            <a:schemeClr val="accent1"/>
+          </a:fillRef>
+          <a:effectRef idx="1">
+            <a:schemeClr val="accent1"/>
+          </a:effectRef>
+          <a:fontRef idx="minor">
+            <a:schemeClr val="tx1"/>
+          </a:fontRef>
+        </p:style>
+      </p:cxnSp>
+      <p:cxnSp>
+        <p:nvCxnSpPr>
+          <p:cNvPr id="14" name="Connector 13"/>
+          <p:cNvCxnSpPr/>
+          <p:nvPr/>
+        </p:nvCxnSpPr>
+        <p:spPr>
+          <a:xfrm flipH="1" flipV="1">
+            <a:off x="5394960" y="1737360"/>
+            <a:ext cx="3291840" cy="1417320"/>
+          </a:xfrm>
+          <a:prstGeom prst="line">
+            <a:avLst/>
+          </a:prstGeom>
+          <a:ln w="25400">
+            <a:solidFill>
+              <a:srgbClr val="5E7682"/>
+            </a:solidFill>
+            <a:tailEnd type="triangle" w="med" len="med"/>
+          </a:ln>
+        </p:spPr>
+        <p:style>
+          <a:lnRef idx="2">
+            <a:schemeClr val="accent1"/>
+          </a:lnRef>
+          <a:fillRef idx="0">
+            <a:schemeClr val="accent1"/>
+          </a:fillRef>
+          <a:effectRef idx="1">
+            <a:schemeClr val="accent1"/>
+          </a:effectRef>
+          <a:fontRef idx="minor">
+            <a:schemeClr val="tx1"/>
+          </a:fontRef>
+        </p:style>
+      </p:cxnSp>
+      <p:cxnSp>
+        <p:nvCxnSpPr>
+          <p:cNvPr id="15" name="Connector 14"/>
+          <p:cNvCxnSpPr/>
+          <p:nvPr/>
+        </p:nvCxnSpPr>
+        <p:spPr>
+          <a:xfrm>
+            <a:off x="5120640" y="1737360"/>
+            <a:ext cx="3108960" cy="1417320"/>
+          </a:xfrm>
+          <a:prstGeom prst="line">
+            <a:avLst/>
+          </a:prstGeom>
+          <a:ln w="25400">
+            <a:solidFill>
+              <a:srgbClr val="D9433B"/>
+            </a:solidFill>
+            <a:tailEnd type="triangle" w="med" len="med"/>
+          </a:ln>
+        </p:spPr>
+        <p:style>
+          <a:lnRef idx="2">
+            <a:schemeClr val="accent1"/>
+          </a:lnRef>
+          <a:fillRef idx="0">
+            <a:schemeClr val="accent1"/>
+          </a:fillRef>
+          <a:effectRef idx="1">
+            <a:schemeClr val="accent1"/>
+          </a:effectRef>
+          <a:fontRef idx="minor">
+            <a:schemeClr val="tx1"/>
+          </a:fontRef>
+        </p:style>
+      </p:cxnSp>
+      <p:cxnSp>
+        <p:nvCxnSpPr>
+          <p:cNvPr id="16" name="Connector 15"/>
+          <p:cNvCxnSpPr/>
+          <p:nvPr/>
+        </p:nvCxnSpPr>
+        <p:spPr>
+          <a:xfrm flipH="1" flipV="1">
+            <a:off x="2971800" y="6080760"/>
+            <a:ext cx="5623560" cy="411480"/>
+          </a:xfrm>
+          <a:prstGeom prst="line">
+            <a:avLst/>
+          </a:prstGeom>
+          <a:ln w="25400">
+            <a:solidFill>
+              <a:srgbClr val="D9433B"/>
+            </a:solidFill>
+            <a:tailEnd type="triangle" w="med" len="med"/>
+          </a:ln>
+        </p:spPr>
+        <p:style>
+          <a:lnRef idx="2">
+            <a:schemeClr val="accent1"/>
+          </a:lnRef>
+          <a:fillRef idx="0">
+            <a:schemeClr val="accent1"/>
+          </a:fillRef>
+          <a:effectRef idx="1">
+            <a:schemeClr val="accent1"/>
+          </a:effectRef>
+          <a:fontRef idx="minor">
+            <a:schemeClr val="tx1"/>
+          </a:fontRef>
+        </p:style>
+      </p:cxnSp>
+      <p:sp>
+        <p:nvSpPr>
+          <p:cNvPr id="17" name="Rounded Rectangle 16"/>
           <p:cNvSpPr/>
           <p:nvPr/>
         </p:nvSpPr>
         <p:spPr>
           <a:xfrm>
-            <a:off x="914400" y="2606040"/>
+            <a:off x="8183879" y="3840480"/>
+            <a:ext cx="3291840" cy="1417320"/>
+          </a:xfrm>
+          <a:prstGeom prst="roundRect">
+            <a:avLst>
+              <a:gd name="adj" fmla="val 10000"/>
+            </a:avLst>
+          </a:prstGeom>
+          <a:solidFill>
+            <a:srgbClr val="FBEBEA"/>
+          </a:solidFill>
+          <a:ln w="22860">
+            <a:solidFill>
+              <a:srgbClr val="D9433B"/>
+            </a:solidFill>
+          </a:ln>
+          <a:effectLst/>
+        </p:spPr>
+        <p:style>
+          <a:lnRef idx="1">
+            <a:schemeClr val="accent1"/>
+          </a:lnRef>
+          <a:fillRef idx="3">
+            <a:schemeClr val="accent1"/>
+          </a:fillRef>
+          <a:effectRef idx="2">
+            <a:schemeClr val="accent1"/>
+          </a:effectRef>
+          <a:fontRef idx="minor">
+            <a:schemeClr val="lt1"/>
+          </a:fontRef>
+        </p:style>
+        <p:txBody>
+          <a:bodyPr rtlCol="0" anchor="ctr"/>
+          <a:lstStyle/>
+          <a:p>
+            <a:pPr algn="ctr"/>
+          </a:p>
+        </p:txBody>
+      </p:sp>
+      <p:sp>
+        <p:nvSpPr>
+          <p:cNvPr id="18" name="TextBox 17"/>
+          <p:cNvSpPr txBox="1"/>
+          <p:nvPr/>
+        </p:nvSpPr>
+        <p:spPr>
+          <a:xfrm>
+            <a:off x="8321040" y="3931920"/>
+            <a:ext cx="3017520" cy="640080"/>
+          </a:xfrm>
+          <a:prstGeom prst="rect">
+            <a:avLst/>
+          </a:prstGeom>
+          <a:noFill/>
+        </p:spPr>
+        <p:txBody>
+          <a:bodyPr wrap="square" anchor="t" lIns="0" rIns="0" tIns="0" bIns="0">
+            <a:spAutoFit/>
+          </a:bodyPr>
+          <a:lstStyle/>
+          <a:p>
+            <a:pPr algn="l"/>
+            <a:r>
+              <a:rPr sz="1200" b="1">
+                <a:solidFill>
+                  <a:srgbClr val="D9433B"/>
+                </a:solidFill>
+                <a:latin typeface="Hiragino Sans"/>
+                <a:ea typeface="Hiragino Sans"/>
+                <a:cs typeface="Hiragino Sans"/>
+              </a:rPr>
+              <a:t>⑤ HTMLパーサがscript要素を作り実行</a:t>
+            </a:r>
+          </a:p>
+        </p:txBody>
+      </p:sp>
+      <p:sp>
+        <p:nvSpPr>
+          <p:cNvPr id="19" name="TextBox 18"/>
+          <p:cNvSpPr txBox="1"/>
+          <p:nvPr/>
+        </p:nvSpPr>
+        <p:spPr>
+          <a:xfrm>
+            <a:off x="8321040" y="4590288"/>
+            <a:ext cx="3017520" cy="594360"/>
+          </a:xfrm>
+          <a:prstGeom prst="rect">
+            <a:avLst/>
+          </a:prstGeom>
+          <a:noFill/>
+        </p:spPr>
+        <p:txBody>
+          <a:bodyPr wrap="square" anchor="ctr" lIns="0" rIns="0" tIns="0" bIns="0">
+            <a:spAutoFit/>
+          </a:bodyPr>
+          <a:lstStyle/>
+          <a:p>
+            <a:pPr algn="l"/>
+            <a:r>
+              <a:rPr sz="1100" b="0">
+                <a:solidFill>
+                  <a:srgbClr val="24404D"/>
+                </a:solidFill>
+                <a:latin typeface="Hiragino Sans"/>
+                <a:ea typeface="Hiragino Sans"/>
+                <a:cs typeface="Hiragino Sans"/>
+              </a:rPr>
+              <a:t>保存された投稿が</a:t>
+            </a:r>
+          </a:p>
+          <a:p>
+            <a:pPr algn="l"/>
+            <a:r>
+              <a:rPr sz="1100" b="0">
+                <a:solidFill>
+                  <a:srgbClr val="24404D"/>
+                </a:solidFill>
+                <a:latin typeface="Hiragino Sans"/>
+                <a:ea typeface="Hiragino Sans"/>
+                <a:cs typeface="Hiragino Sans"/>
+              </a:rPr>
+              <a:t>script要素になる</a:t>
+            </a:r>
+          </a:p>
+        </p:txBody>
+      </p:sp>
+      <p:sp>
+        <p:nvSpPr>
+          <p:cNvPr id="20" name="TextBox 19"/>
+          <p:cNvSpPr txBox="1"/>
+          <p:nvPr/>
+        </p:nvSpPr>
+        <p:spPr>
+          <a:xfrm>
+            <a:off x="8001000" y="5440680"/>
+            <a:ext cx="3657599" cy="822960"/>
+          </a:xfrm>
+          <a:prstGeom prst="rect">
+            <a:avLst/>
+          </a:prstGeom>
+          <a:noFill/>
+        </p:spPr>
+        <p:txBody>
+          <a:bodyPr wrap="square" anchor="t" lIns="0" rIns="0" tIns="0" bIns="0">
+            <a:spAutoFit/>
+          </a:bodyPr>
+          <a:lstStyle/>
+          <a:p>
+            <a:pPr algn="ctr"/>
+            <a:r>
+              <a:rPr sz="1100" b="0">
+                <a:solidFill>
+                  <a:srgbClr val="24404D"/>
+                </a:solidFill>
+                <a:latin typeface="Hiragino Sans"/>
+                <a:ea typeface="Hiragino Sans"/>
+                <a:cs typeface="Hiragino Sans"/>
+              </a:rPr>
+              <a:t>→ Cookie・画面の情報を読み、</a:t>
+            </a:r>
+          </a:p>
+          <a:p>
+            <a:pPr algn="ctr"/>
+            <a:r>
+              <a:rPr sz="1100" b="0">
+                <a:solidFill>
+                  <a:srgbClr val="24404D"/>
+                </a:solidFill>
+                <a:latin typeface="Hiragino Sans"/>
+                <a:ea typeface="Hiragino Sans"/>
+                <a:cs typeface="Hiragino Sans"/>
+              </a:rPr>
+              <a:t>   攻撃者の回収サーバへ送る</a:t>
+            </a:r>
+          </a:p>
+        </p:txBody>
+      </p:sp>
+      <p:sp>
+        <p:nvSpPr>
+          <p:cNvPr id="21" name="Rounded Rectangle 20"/>
+          <p:cNvSpPr/>
+          <p:nvPr/>
+        </p:nvSpPr>
+        <p:spPr>
+          <a:xfrm>
+            <a:off x="914400" y="2560320"/>
             <a:ext cx="2743200" cy="621792"/>
           </a:xfrm>
           <a:prstGeom prst="roundRect">
@@ -19395,13 +19726,13 @@
       </p:sp>
       <p:sp>
         <p:nvSpPr>
-          <p:cNvPr id="14" name="TextBox 13"/>
+          <p:cNvPr id="22" name="TextBox 21"/>
           <p:cNvSpPr txBox="1"/>
           <p:nvPr/>
         </p:nvSpPr>
         <p:spPr>
           <a:xfrm>
-            <a:off x="987552" y="2606040"/>
+            <a:off x="987552" y="2560320"/>
             <a:ext cx="2596896" cy="621792"/>
           </a:xfrm>
           <a:prstGeom prst="rect">
@@ -19444,52 +19775,16 @@
           </a:p>
         </p:txBody>
       </p:sp>
-      <p:cxnSp>
-        <p:nvCxnSpPr>
-          <p:cNvPr id="15" name="Connector 14"/>
-          <p:cNvCxnSpPr/>
-          <p:nvPr/>
-        </p:nvCxnSpPr>
-        <p:spPr>
-          <a:xfrm flipV="1">
-            <a:off x="6446520" y="1252728"/>
-            <a:ext cx="274320" cy="0"/>
-          </a:xfrm>
-          <a:prstGeom prst="line">
-            <a:avLst/>
-          </a:prstGeom>
-          <a:ln w="25400">
-            <a:solidFill>
-              <a:srgbClr val="D9433B"/>
-            </a:solidFill>
-            <a:tailEnd type="triangle" w="med" len="med"/>
-          </a:ln>
-        </p:spPr>
-        <p:style>
-          <a:lnRef idx="2">
-            <a:schemeClr val="accent1"/>
-          </a:lnRef>
-          <a:fillRef idx="0">
-            <a:schemeClr val="accent1"/>
-          </a:fillRef>
-          <a:effectRef idx="1">
-            <a:schemeClr val="accent1"/>
-          </a:effectRef>
-          <a:fontRef idx="minor">
-            <a:schemeClr val="tx1"/>
-          </a:fontRef>
-        </p:style>
-      </p:cxnSp>
-      <p:sp>
-        <p:nvSpPr>
-          <p:cNvPr id="16" name="Rounded Rectangle 15"/>
+      <p:sp>
+        <p:nvSpPr>
+          <p:cNvPr id="23" name="Rounded Rectangle 22"/>
           <p:cNvSpPr/>
           <p:nvPr/>
         </p:nvSpPr>
         <p:spPr>
           <a:xfrm>
-            <a:off x="5760720" y="1965960"/>
-            <a:ext cx="2377440" cy="384048"/>
+            <a:off x="6172200" y="1892808"/>
+            <a:ext cx="1920240" cy="384048"/>
           </a:xfrm>
           <a:prstGeom prst="roundRect">
             <a:avLst>
@@ -19530,14 +19825,14 @@
       </p:sp>
       <p:sp>
         <p:nvSpPr>
-          <p:cNvPr id="17" name="TextBox 16"/>
+          <p:cNvPr id="24" name="TextBox 23"/>
           <p:cNvSpPr txBox="1"/>
           <p:nvPr/>
         </p:nvSpPr>
         <p:spPr>
           <a:xfrm>
-            <a:off x="5833872" y="1965960"/>
-            <a:ext cx="2231136" cy="384048"/>
+            <a:off x="6245352" y="1892808"/>
+            <a:ext cx="1773936" cy="384048"/>
           </a:xfrm>
           <a:prstGeom prst="rect">
             <a:avLst/>
@@ -19565,52 +19860,16 @@
           </a:p>
         </p:txBody>
       </p:sp>
-      <p:cxnSp>
-        <p:nvCxnSpPr>
-          <p:cNvPr id="18" name="Connector 17"/>
-          <p:cNvCxnSpPr/>
-          <p:nvPr/>
-        </p:nvCxnSpPr>
-        <p:spPr>
-          <a:xfrm flipH="1" flipV="1">
-            <a:off x="6126480" y="1737360"/>
-            <a:ext cx="2834640" cy="1417320"/>
-          </a:xfrm>
-          <a:prstGeom prst="line">
-            <a:avLst/>
-          </a:prstGeom>
-          <a:ln w="25400">
-            <a:solidFill>
-              <a:srgbClr val="5E7682"/>
-            </a:solidFill>
-            <a:tailEnd type="triangle" w="med" len="med"/>
-          </a:ln>
-        </p:spPr>
-        <p:style>
-          <a:lnRef idx="2">
-            <a:schemeClr val="accent1"/>
-          </a:lnRef>
-          <a:fillRef idx="0">
-            <a:schemeClr val="accent1"/>
-          </a:fillRef>
-          <a:effectRef idx="1">
-            <a:schemeClr val="accent1"/>
-          </a:effectRef>
-          <a:fontRef idx="minor">
-            <a:schemeClr val="tx1"/>
-          </a:fontRef>
-        </p:style>
-      </p:cxnSp>
-      <p:sp>
-        <p:nvSpPr>
-          <p:cNvPr id="19" name="Rounded Rectangle 18"/>
+      <p:sp>
+        <p:nvSpPr>
+          <p:cNvPr id="25" name="Rounded Rectangle 24"/>
           <p:cNvSpPr/>
           <p:nvPr/>
         </p:nvSpPr>
         <p:spPr>
           <a:xfrm>
             <a:off x="7863840" y="2377440"/>
-            <a:ext cx="2926080" cy="384048"/>
+            <a:ext cx="3108960" cy="384048"/>
           </a:xfrm>
           <a:prstGeom prst="roundRect">
             <a:avLst>
@@ -19651,14 +19910,14 @@
       </p:sp>
       <p:sp>
         <p:nvSpPr>
-          <p:cNvPr id="20" name="TextBox 19"/>
+          <p:cNvPr id="26" name="TextBox 25"/>
           <p:cNvSpPr txBox="1"/>
           <p:nvPr/>
         </p:nvSpPr>
         <p:spPr>
           <a:xfrm>
             <a:off x="7936992" y="2377440"/>
-            <a:ext cx="2779776" cy="384048"/>
+            <a:ext cx="2962656" cy="384048"/>
           </a:xfrm>
           <a:prstGeom prst="rect">
             <a:avLst/>
@@ -19686,51 +19945,15 @@
           </a:p>
         </p:txBody>
       </p:sp>
-      <p:cxnSp>
-        <p:nvCxnSpPr>
-          <p:cNvPr id="21" name="Connector 20"/>
-          <p:cNvCxnSpPr/>
-          <p:nvPr/>
-        </p:nvCxnSpPr>
-        <p:spPr>
-          <a:xfrm>
-            <a:off x="5394960" y="1737360"/>
-            <a:ext cx="2743200" cy="1417320"/>
-          </a:xfrm>
-          <a:prstGeom prst="line">
-            <a:avLst/>
-          </a:prstGeom>
-          <a:ln w="25400">
-            <a:solidFill>
-              <a:srgbClr val="D9433B"/>
-            </a:solidFill>
-            <a:tailEnd type="triangle" w="med" len="med"/>
-          </a:ln>
-        </p:spPr>
-        <p:style>
-          <a:lnRef idx="2">
-            <a:schemeClr val="accent1"/>
-          </a:lnRef>
-          <a:fillRef idx="0">
-            <a:schemeClr val="accent1"/>
-          </a:fillRef>
-          <a:effectRef idx="1">
-            <a:schemeClr val="accent1"/>
-          </a:effectRef>
-          <a:fontRef idx="minor">
-            <a:schemeClr val="tx1"/>
-          </a:fontRef>
-        </p:style>
-      </p:cxnSp>
-      <p:sp>
-        <p:nvSpPr>
-          <p:cNvPr id="22" name="Rounded Rectangle 21"/>
+      <p:sp>
+        <p:nvSpPr>
+          <p:cNvPr id="27" name="Rounded Rectangle 26"/>
           <p:cNvSpPr/>
           <p:nvPr/>
         </p:nvSpPr>
         <p:spPr>
           <a:xfrm>
-            <a:off x="3291840" y="3108960"/>
+            <a:off x="3200400" y="3063240"/>
             <a:ext cx="3840480" cy="384048"/>
           </a:xfrm>
           <a:prstGeom prst="roundRect">
@@ -19772,13 +19995,13 @@
       </p:sp>
       <p:sp>
         <p:nvSpPr>
-          <p:cNvPr id="23" name="TextBox 22"/>
+          <p:cNvPr id="28" name="TextBox 27"/>
           <p:cNvSpPr txBox="1"/>
           <p:nvPr/>
         </p:nvSpPr>
         <p:spPr>
           <a:xfrm>
-            <a:off x="3364992" y="3108960"/>
+            <a:off x="3273552" y="3063240"/>
             <a:ext cx="3694176" cy="384048"/>
           </a:xfrm>
           <a:prstGeom prst="rect">
@@ -19809,236 +20032,13 @@
       </p:sp>
       <p:sp>
         <p:nvSpPr>
-          <p:cNvPr id="24" name="Rounded Rectangle 23"/>
-          <p:cNvSpPr/>
-          <p:nvPr/>
-        </p:nvSpPr>
-        <p:spPr>
-          <a:xfrm>
-            <a:off x="8046720" y="3840480"/>
-            <a:ext cx="3383280" cy="1417320"/>
-          </a:xfrm>
-          <a:prstGeom prst="roundRect">
-            <a:avLst>
-              <a:gd name="adj" fmla="val 10000"/>
-            </a:avLst>
-          </a:prstGeom>
-          <a:solidFill>
-            <a:srgbClr val="FBEBEA"/>
-          </a:solidFill>
-          <a:ln w="22860">
-            <a:solidFill>
-              <a:srgbClr val="D9433B"/>
-            </a:solidFill>
-          </a:ln>
-          <a:effectLst/>
-        </p:spPr>
-        <p:style>
-          <a:lnRef idx="1">
-            <a:schemeClr val="accent1"/>
-          </a:lnRef>
-          <a:fillRef idx="3">
-            <a:schemeClr val="accent1"/>
-          </a:fillRef>
-          <a:effectRef idx="2">
-            <a:schemeClr val="accent1"/>
-          </a:effectRef>
-          <a:fontRef idx="minor">
-            <a:schemeClr val="lt1"/>
-          </a:fontRef>
-        </p:style>
-        <p:txBody>
-          <a:bodyPr rtlCol="0" anchor="ctr"/>
-          <a:lstStyle/>
-          <a:p>
-            <a:pPr algn="ctr"/>
-          </a:p>
-        </p:txBody>
-      </p:sp>
-      <p:sp>
-        <p:nvSpPr>
-          <p:cNvPr id="25" name="TextBox 24"/>
-          <p:cNvSpPr txBox="1"/>
-          <p:nvPr/>
-        </p:nvSpPr>
-        <p:spPr>
-          <a:xfrm>
-            <a:off x="8183879" y="3931920"/>
-            <a:ext cx="3108960" cy="320040"/>
-          </a:xfrm>
-          <a:prstGeom prst="rect">
-            <a:avLst/>
-          </a:prstGeom>
-          <a:noFill/>
-        </p:spPr>
-        <p:txBody>
-          <a:bodyPr wrap="square" anchor="t" lIns="0" rIns="0" tIns="0" bIns="0">
-            <a:spAutoFit/>
-          </a:bodyPr>
-          <a:lstStyle/>
-          <a:p>
-            <a:pPr algn="l"/>
-            <a:r>
-              <a:rPr sz="1200" b="1">
-                <a:solidFill>
-                  <a:srgbClr val="D9433B"/>
-                </a:solidFill>
-                <a:latin typeface="Hiragino Sans"/>
-                <a:ea typeface="Hiragino Sans"/>
-                <a:cs typeface="Hiragino Sans"/>
-              </a:rPr>
-              <a:t>⑤ HTMLパーサがscript要素を作り実行</a:t>
-            </a:r>
-          </a:p>
-        </p:txBody>
-      </p:sp>
-      <p:sp>
-        <p:nvSpPr>
-          <p:cNvPr id="26" name="TextBox 25"/>
-          <p:cNvSpPr txBox="1"/>
-          <p:nvPr/>
-        </p:nvSpPr>
-        <p:spPr>
-          <a:xfrm>
-            <a:off x="8183879" y="4297680"/>
-            <a:ext cx="3108960" cy="914400"/>
-          </a:xfrm>
-          <a:prstGeom prst="rect">
-            <a:avLst/>
-          </a:prstGeom>
-          <a:noFill/>
-        </p:spPr>
-        <p:txBody>
-          <a:bodyPr wrap="square" anchor="ctr" lIns="0" rIns="0" tIns="0" bIns="0">
-            <a:spAutoFit/>
-          </a:bodyPr>
-          <a:lstStyle/>
-          <a:p>
-            <a:pPr algn="l"/>
-            <a:r>
-              <a:rPr sz="1100" b="0">
-                <a:solidFill>
-                  <a:srgbClr val="24404D"/>
-                </a:solidFill>
-                <a:latin typeface="Hiragino Sans"/>
-                <a:ea typeface="Hiragino Sans"/>
-                <a:cs typeface="Hiragino Sans"/>
-              </a:rPr>
-              <a:t>保存された投稿が</a:t>
-            </a:r>
-          </a:p>
-          <a:p>
-            <a:pPr algn="l"/>
-            <a:r>
-              <a:rPr sz="1100" b="0">
-                <a:solidFill>
-                  <a:srgbClr val="24404D"/>
-                </a:solidFill>
-                <a:latin typeface="Hiragino Sans"/>
-                <a:ea typeface="Hiragino Sans"/>
-                <a:cs typeface="Hiragino Sans"/>
-              </a:rPr>
-              <a:t>script要素になる</a:t>
-            </a:r>
-          </a:p>
-        </p:txBody>
-      </p:sp>
-      <p:sp>
-        <p:nvSpPr>
-          <p:cNvPr id="27" name="TextBox 26"/>
-          <p:cNvSpPr txBox="1"/>
-          <p:nvPr/>
-        </p:nvSpPr>
-        <p:spPr>
-          <a:xfrm>
-            <a:off x="7909560" y="5394960"/>
-            <a:ext cx="3657600" cy="822960"/>
-          </a:xfrm>
-          <a:prstGeom prst="rect">
-            <a:avLst/>
-          </a:prstGeom>
-          <a:noFill/>
-        </p:spPr>
-        <p:txBody>
-          <a:bodyPr wrap="square" anchor="t" lIns="0" rIns="0" tIns="0" bIns="0">
-            <a:spAutoFit/>
-          </a:bodyPr>
-          <a:lstStyle/>
-          <a:p>
-            <a:pPr algn="ctr"/>
-            <a:r>
-              <a:rPr sz="1100" b="0">
-                <a:solidFill>
-                  <a:srgbClr val="24404D"/>
-                </a:solidFill>
-                <a:latin typeface="Hiragino Sans"/>
-                <a:ea typeface="Hiragino Sans"/>
-                <a:cs typeface="Hiragino Sans"/>
-              </a:rPr>
-              <a:t>→ Cookie・画面の情報を読み、</a:t>
-            </a:r>
-          </a:p>
-          <a:p>
-            <a:pPr algn="ctr"/>
-            <a:r>
-              <a:rPr sz="1100" b="0">
-                <a:solidFill>
-                  <a:srgbClr val="24404D"/>
-                </a:solidFill>
-                <a:latin typeface="Hiragino Sans"/>
-                <a:ea typeface="Hiragino Sans"/>
-                <a:cs typeface="Hiragino Sans"/>
-              </a:rPr>
-              <a:t>   攻撃者の回収サーバへ送る</a:t>
-            </a:r>
-          </a:p>
-        </p:txBody>
-      </p:sp>
-      <p:cxnSp>
-        <p:nvCxnSpPr>
-          <p:cNvPr id="28" name="Connector 27"/>
-          <p:cNvCxnSpPr/>
-          <p:nvPr/>
-        </p:nvCxnSpPr>
-        <p:spPr>
-          <a:xfrm flipH="1" flipV="1">
-            <a:off x="3017520" y="6080760"/>
-            <a:ext cx="5212080" cy="411480"/>
-          </a:xfrm>
-          <a:prstGeom prst="line">
-            <a:avLst/>
-          </a:prstGeom>
-          <a:ln w="25400">
-            <a:solidFill>
-              <a:srgbClr val="D9433B"/>
-            </a:solidFill>
-            <a:tailEnd type="triangle" w="med" len="med"/>
-          </a:ln>
-        </p:spPr>
-        <p:style>
-          <a:lnRef idx="2">
-            <a:schemeClr val="accent1"/>
-          </a:lnRef>
-          <a:fillRef idx="0">
-            <a:schemeClr val="accent1"/>
-          </a:fillRef>
-          <a:effectRef idx="1">
-            <a:schemeClr val="accent1"/>
-          </a:effectRef>
-          <a:fontRef idx="minor">
-            <a:schemeClr val="tx1"/>
-          </a:fontRef>
-        </p:style>
-      </p:cxnSp>
-      <p:sp>
-        <p:nvSpPr>
           <p:cNvPr id="29" name="Rounded Rectangle 28"/>
           <p:cNvSpPr/>
           <p:nvPr/>
         </p:nvSpPr>
         <p:spPr>
           <a:xfrm>
-            <a:off x="3931920" y="5669280"/>
+            <a:off x="4023360" y="5669280"/>
             <a:ext cx="3108960" cy="384048"/>
           </a:xfrm>
           <a:prstGeom prst="roundRect">
@@ -20086,7 +20086,7 @@
         </p:nvSpPr>
         <p:spPr>
           <a:xfrm>
-            <a:off x="4005072" y="5669280"/>
+            <a:off x="4096512" y="5669280"/>
             <a:ext cx="2962656" cy="384048"/>
           </a:xfrm>
           <a:prstGeom prst="rect">

--- a/deep-dive/drafts/no.1-xss/image/HTMLパーサ図.pptx
+++ b/deep-dive/drafts/no.1-xss/image/HTMLパーサ図.pptx
@@ -3119,7 +3119,7 @@
             <a:srgbClr val="D9433B"/>
           </a:solidFill>
           <a:ln>
-            <a:noFill/>
+            <a:solidFill/>
           </a:ln>
           <a:effectLst/>
         </p:spPr>
@@ -3203,7 +3203,7 @@
             <a:srgbClr val="0E7C72"/>
           </a:solidFill>
           <a:ln>
-            <a:noFill/>
+            <a:solidFill/>
           </a:ln>
           <a:effectLst/>
         </p:spPr>
@@ -3287,7 +3287,7 @@
             <a:srgbClr val="24404D"/>
           </a:solidFill>
           <a:ln>
-            <a:noFill/>
+            <a:solidFill/>
           </a:ln>
           <a:effectLst/>
         </p:spPr>
@@ -3371,7 +3371,7 @@
             <a:srgbClr val="F08A24"/>
           </a:solidFill>
           <a:ln>
-            <a:noFill/>
+            <a:solidFill/>
           </a:ln>
           <a:effectLst/>
         </p:spPr>
@@ -3455,7 +3455,7 @@
             <a:srgbClr val="24404D"/>
           </a:solidFill>
           <a:ln>
-            <a:noFill/>
+            <a:solidFill/>
           </a:ln>
           <a:effectLst/>
         </p:spPr>
@@ -3592,7 +3592,7 @@
           <a:p>
             <a:pPr algn="ctr"/>
             <a:r>
-              <a:rPr sz="1150" b="0">
+              <a:rPr sz="1200" b="0">
                 <a:solidFill>
                   <a:srgbClr val="D9433B"/>
                 </a:solidFill>
@@ -3606,7 +3606,7 @@
           <a:p>
             <a:pPr algn="ctr"/>
             <a:r>
-              <a:rPr sz="1150" b="0">
+              <a:rPr sz="1200" b="0">
                 <a:solidFill>
                   <a:srgbClr val="D9433B"/>
                 </a:solidFill>
@@ -3692,7 +3692,7 @@
           <a:p>
             <a:pPr algn="ctr"/>
             <a:r>
-              <a:rPr sz="1150" b="0">
+              <a:rPr sz="1200" b="0">
                 <a:solidFill>
                   <a:srgbClr val="0E7C72"/>
                 </a:solidFill>
@@ -3706,7 +3706,7 @@
           <a:p>
             <a:pPr algn="ctr"/>
             <a:r>
-              <a:rPr sz="1150" b="0">
+              <a:rPr sz="1200" b="0">
                 <a:solidFill>
                   <a:srgbClr val="0E7C72"/>
                 </a:solidFill>
@@ -3833,7 +3833,7 @@
             <a:srgbClr val="24404D"/>
           </a:solidFill>
           <a:ln>
-            <a:noFill/>
+            <a:solidFill/>
           </a:ln>
           <a:effectLst/>
         </p:spPr>
@@ -3970,7 +3970,7 @@
           <a:p>
             <a:pPr algn="ctr"/>
             <a:r>
-              <a:rPr sz="1150" b="0">
+              <a:rPr sz="1200" b="0">
                 <a:solidFill>
                   <a:srgbClr val="D9433B"/>
                 </a:solidFill>
@@ -4150,7 +4150,7 @@
           <a:p>
             <a:pPr algn="ctr"/>
             <a:r>
-              <a:rPr sz="1150" b="1">
+              <a:rPr sz="1200" b="1">
                 <a:solidFill>
                   <a:srgbClr val="F08A24"/>
                 </a:solidFill>
@@ -4164,7 +4164,7 @@
           <a:p>
             <a:pPr algn="ctr"/>
             <a:r>
-              <a:rPr sz="1150" b="1">
+              <a:rPr sz="1200" b="1">
                 <a:solidFill>
                   <a:srgbClr val="F08A24"/>
                 </a:solidFill>
@@ -4197,7 +4197,7 @@
             <a:srgbClr val="24404D"/>
           </a:solidFill>
           <a:ln>
-            <a:noFill/>
+            <a:solidFill/>
           </a:ln>
           <a:effectLst/>
         </p:spPr>
@@ -4381,7 +4381,7 @@
           <a:p>
             <a:pPr algn="ctr"/>
             <a:r>
-              <a:rPr sz="1150" b="0">
+              <a:rPr sz="1200" b="0">
                 <a:solidFill>
                   <a:srgbClr val="0E7C72"/>
                 </a:solidFill>
@@ -4395,7 +4395,7 @@
           <a:p>
             <a:pPr algn="ctr"/>
             <a:r>
-              <a:rPr sz="1150" b="0">
+              <a:rPr sz="1200" b="0">
                 <a:solidFill>
                   <a:srgbClr val="0E7C72"/>
                 </a:solidFill>
@@ -4409,7 +4409,7 @@
           <a:p>
             <a:pPr algn="ctr"/>
             <a:r>
-              <a:rPr sz="1150" b="0">
+              <a:rPr sz="1200" b="0">
                 <a:solidFill>
                   <a:srgbClr val="0E7C72"/>
                 </a:solidFill>
@@ -4495,7 +4495,7 @@
           <a:p>
             <a:pPr algn="ctr"/>
             <a:r>
-              <a:rPr sz="1150" b="0">
+              <a:rPr sz="1200" b="0">
                 <a:solidFill>
                   <a:srgbClr val="24404D"/>
                 </a:solidFill>
@@ -4509,7 +4509,7 @@
           <a:p>
             <a:pPr algn="ctr"/>
             <a:r>
-              <a:rPr sz="1150" b="0">
+              <a:rPr sz="1200" b="0">
                 <a:solidFill>
                   <a:srgbClr val="24404D"/>
                 </a:solidFill>
@@ -4595,7 +4595,7 @@
           <a:p>
             <a:pPr algn="ctr"/>
             <a:r>
-              <a:rPr sz="1150" b="1">
+              <a:rPr sz="1200" b="1">
                 <a:solidFill>
                   <a:srgbClr val="F08A24"/>
                 </a:solidFill>
@@ -4628,7 +4628,7 @@
             <a:srgbClr val="24404D"/>
           </a:solidFill>
           <a:ln>
-            <a:noFill/>
+            <a:solidFill/>
           </a:ln>
           <a:effectLst/>
         </p:spPr>
@@ -4859,7 +4859,7 @@
           <a:p>
             <a:pPr algn="ctr"/>
             <a:r>
-              <a:rPr sz="1150" b="0">
+              <a:rPr sz="1200" b="0">
                 <a:solidFill>
                   <a:srgbClr val="24404D"/>
                 </a:solidFill>
@@ -4873,7 +4873,7 @@
           <a:p>
             <a:pPr algn="ctr"/>
             <a:r>
-              <a:rPr sz="1150" b="0">
+              <a:rPr sz="1200" b="0">
                 <a:solidFill>
                   <a:srgbClr val="24404D"/>
                 </a:solidFill>
@@ -4887,7 +4887,7 @@
           <a:p>
             <a:pPr algn="ctr"/>
             <a:r>
-              <a:rPr sz="1150" b="0">
+              <a:rPr sz="1200" b="0">
                 <a:solidFill>
                   <a:srgbClr val="24404D"/>
                 </a:solidFill>
@@ -4973,7 +4973,7 @@
           <a:p>
             <a:pPr algn="ctr"/>
             <a:r>
-              <a:rPr sz="1150" b="1">
+              <a:rPr sz="1200" b="1">
                 <a:solidFill>
                   <a:srgbClr val="F08A24"/>
                 </a:solidFill>
@@ -4987,7 +4987,7 @@
           <a:p>
             <a:pPr algn="ctr"/>
             <a:r>
-              <a:rPr sz="1150" b="1">
+              <a:rPr sz="1200" b="1">
                 <a:solidFill>
                   <a:srgbClr val="F08A24"/>
                 </a:solidFill>
@@ -5020,7 +5020,7 @@
             <a:srgbClr val="24404D"/>
           </a:solidFill>
           <a:ln>
-            <a:noFill/>
+            <a:solidFill/>
           </a:ln>
           <a:effectLst/>
         </p:spPr>
@@ -5157,7 +5157,7 @@
           <a:p>
             <a:pPr algn="ctr"/>
             <a:r>
-              <a:rPr sz="1150" b="0">
+              <a:rPr sz="1200" b="0">
                 <a:solidFill>
                   <a:srgbClr val="D9433B"/>
                 </a:solidFill>
@@ -5171,7 +5171,7 @@
           <a:p>
             <a:pPr algn="ctr"/>
             <a:r>
-              <a:rPr sz="1150" b="0">
+              <a:rPr sz="1200" b="0">
                 <a:solidFill>
                   <a:srgbClr val="D9433B"/>
                 </a:solidFill>
@@ -5304,7 +5304,7 @@
           <a:p>
             <a:pPr algn="ctr"/>
             <a:r>
-              <a:rPr sz="1150" b="0">
+              <a:rPr sz="1200" b="0">
                 <a:solidFill>
                   <a:srgbClr val="24404D"/>
                 </a:solidFill>
@@ -5318,7 +5318,7 @@
           <a:p>
             <a:pPr algn="ctr"/>
             <a:r>
-              <a:rPr sz="1150" b="0">
+              <a:rPr sz="1200" b="0">
                 <a:solidFill>
                   <a:srgbClr val="24404D"/>
                 </a:solidFill>
@@ -5404,7 +5404,7 @@
           <a:p>
             <a:pPr algn="ctr"/>
             <a:r>
-              <a:rPr sz="1150" b="1">
+              <a:rPr sz="1200" b="1">
                 <a:solidFill>
                   <a:srgbClr val="F08A24"/>
                 </a:solidFill>
@@ -5462,7 +5462,7 @@
             <a:srgbClr val="24404D"/>
           </a:solidFill>
           <a:ln>
-            <a:noFill/>
+            <a:solidFill/>
           </a:ln>
           <a:effectLst/>
         </p:spPr>
@@ -5546,7 +5546,7 @@
             <a:srgbClr val="24404D"/>
           </a:solidFill>
           <a:ln>
-            <a:noFill/>
+            <a:solidFill/>
           </a:ln>
           <a:effectLst/>
         </p:spPr>
@@ -5630,7 +5630,7 @@
             <a:srgbClr val="24404D"/>
           </a:solidFill>
           <a:ln>
-            <a:noFill/>
+            <a:solidFill/>
           </a:ln>
           <a:effectLst/>
         </p:spPr>
@@ -5714,7 +5714,7 @@
             <a:srgbClr val="24404D"/>
           </a:solidFill>
           <a:ln>
-            <a:noFill/>
+            <a:solidFill/>
           </a:ln>
           <a:effectLst/>
         </p:spPr>
@@ -5798,7 +5798,7 @@
             <a:srgbClr val="24404D"/>
           </a:solidFill>
           <a:ln>
-            <a:noFill/>
+            <a:solidFill/>
           </a:ln>
           <a:effectLst/>
         </p:spPr>
@@ -6168,7 +6168,7 @@
           <a:p>
             <a:pPr algn="l"/>
             <a:r>
-              <a:rPr sz="1050" b="0">
+              <a:rPr sz="1200" b="0">
                 <a:solidFill>
                   <a:srgbClr val="24404D"/>
                 </a:solidFill>
@@ -6205,7 +6205,7 @@
           <a:p>
             <a:pPr algn="ctr"/>
             <a:r>
-              <a:rPr sz="1100" b="0">
+              <a:rPr sz="1200" b="0">
                 <a:solidFill>
                   <a:srgbClr val="24404D"/>
                 </a:solidFill>
@@ -6279,7 +6279,7 @@
           <a:p>
             <a:pPr algn="ctr"/>
             <a:r>
-              <a:rPr sz="1100" b="0">
+              <a:rPr sz="1200" b="0">
                 <a:solidFill>
                   <a:srgbClr val="24404D"/>
                 </a:solidFill>
@@ -6316,7 +6316,7 @@
           <a:p>
             <a:pPr algn="l"/>
             <a:r>
-              <a:rPr sz="1150" b="1">
+              <a:rPr sz="1200" b="1">
                 <a:solidFill>
                   <a:srgbClr val="0E7C72"/>
                 </a:solidFill>
@@ -6635,7 +6635,7 @@
           <a:p>
             <a:pPr algn="l"/>
             <a:r>
-              <a:rPr sz="1050" b="0">
+              <a:rPr sz="1200" b="0">
                 <a:solidFill>
                   <a:srgbClr val="24404D"/>
                 </a:solidFill>
@@ -6672,7 +6672,7 @@
           <a:p>
             <a:pPr algn="ctr"/>
             <a:r>
-              <a:rPr sz="1100" b="0">
+              <a:rPr sz="1200" b="0">
                 <a:solidFill>
                   <a:srgbClr val="24404D"/>
                 </a:solidFill>
@@ -6686,7 +6686,7 @@
           <a:p>
             <a:pPr algn="ctr"/>
             <a:r>
-              <a:rPr sz="1100" b="0">
+              <a:rPr sz="1200" b="0">
                 <a:solidFill>
                   <a:srgbClr val="24404D"/>
                 </a:solidFill>
@@ -6760,7 +6760,7 @@
           <a:p>
             <a:pPr algn="ctr"/>
             <a:r>
-              <a:rPr sz="1100" b="0">
+              <a:rPr sz="1200" b="0">
                 <a:solidFill>
                   <a:srgbClr val="24404D"/>
                 </a:solidFill>
@@ -6797,7 +6797,7 @@
           <a:p>
             <a:pPr algn="l"/>
             <a:r>
-              <a:rPr sz="1150" b="1">
+              <a:rPr sz="1200" b="1">
                 <a:solidFill>
                   <a:srgbClr val="0E7C72"/>
                 </a:solidFill>
@@ -6811,7 +6811,7 @@
           <a:p>
             <a:pPr algn="l"/>
             <a:r>
-              <a:rPr sz="1150" b="1">
+              <a:rPr sz="1200" b="1">
                 <a:solidFill>
                   <a:srgbClr val="0E7C72"/>
                 </a:solidFill>
@@ -7130,7 +7130,7 @@
           <a:p>
             <a:pPr algn="l"/>
             <a:r>
-              <a:rPr sz="1050" b="0">
+              <a:rPr sz="1200" b="0">
                 <a:solidFill>
                   <a:srgbClr val="24404D"/>
                 </a:solidFill>
@@ -7167,7 +7167,7 @@
           <a:p>
             <a:pPr algn="ctr"/>
             <a:r>
-              <a:rPr sz="1100" b="0">
+              <a:rPr sz="1200" b="0">
                 <a:solidFill>
                   <a:srgbClr val="24404D"/>
                 </a:solidFill>
@@ -7241,7 +7241,7 @@
           <a:p>
             <a:pPr algn="ctr"/>
             <a:r>
-              <a:rPr sz="1100" b="1">
+              <a:rPr sz="1200" b="1">
                 <a:solidFill>
                   <a:srgbClr val="D9433B"/>
                 </a:solidFill>
@@ -7278,7 +7278,7 @@
           <a:p>
             <a:pPr algn="l"/>
             <a:r>
-              <a:rPr sz="1150" b="1">
+              <a:rPr sz="1200" b="1">
                 <a:solidFill>
                   <a:srgbClr val="D9433B"/>
                 </a:solidFill>
@@ -7292,7 +7292,7 @@
           <a:p>
             <a:pPr algn="l"/>
             <a:r>
-              <a:rPr sz="1150" b="1">
+              <a:rPr sz="1200" b="1">
                 <a:solidFill>
                   <a:srgbClr val="D9433B"/>
                 </a:solidFill>
@@ -7611,7 +7611,7 @@
           <a:p>
             <a:pPr algn="l"/>
             <a:r>
-              <a:rPr sz="1050" b="0">
+              <a:rPr sz="1200" b="0">
                 <a:solidFill>
                   <a:srgbClr val="24404D"/>
                 </a:solidFill>
@@ -7648,7 +7648,7 @@
           <a:p>
             <a:pPr algn="ctr"/>
             <a:r>
-              <a:rPr sz="1100" b="0">
+              <a:rPr sz="1200" b="0">
                 <a:solidFill>
                   <a:srgbClr val="24404D"/>
                 </a:solidFill>
@@ -7662,7 +7662,7 @@
           <a:p>
             <a:pPr algn="ctr"/>
             <a:r>
-              <a:rPr sz="1100" b="0">
+              <a:rPr sz="1200" b="0">
                 <a:solidFill>
                   <a:srgbClr val="24404D"/>
                 </a:solidFill>
@@ -7736,7 +7736,7 @@
           <a:p>
             <a:pPr algn="ctr"/>
             <a:r>
-              <a:rPr sz="1100" b="0">
+              <a:rPr sz="1200" b="0">
                 <a:solidFill>
                   <a:srgbClr val="24404D"/>
                 </a:solidFill>
@@ -7773,7 +7773,7 @@
           <a:p>
             <a:pPr algn="l"/>
             <a:r>
-              <a:rPr sz="1150" b="1">
+              <a:rPr sz="1200" b="1">
                 <a:solidFill>
                   <a:srgbClr val="D9433B"/>
                 </a:solidFill>
@@ -7787,7 +7787,7 @@
           <a:p>
             <a:pPr algn="l"/>
             <a:r>
-              <a:rPr sz="1150" b="1">
+              <a:rPr sz="1200" b="1">
                 <a:solidFill>
                   <a:srgbClr val="D9433B"/>
                 </a:solidFill>
@@ -7796,43 +7796,6 @@
                 <a:cs typeface="Hiragino Sans"/>
               </a:rPr>
               <a:t>スキームを http / https に限定</a:t>
-            </a:r>
-          </a:p>
-        </p:txBody>
-      </p:sp>
-      <p:sp>
-        <p:nvSpPr>
-          <p:cNvPr id="56" name="TextBox 55"/>
-          <p:cNvSpPr txBox="1"/>
-          <p:nvPr/>
-        </p:nvSpPr>
-        <p:spPr>
-          <a:xfrm>
-            <a:off x="457200" y="5760720"/>
-            <a:ext cx="11247120" cy="274320"/>
-          </a:xfrm>
-          <a:prstGeom prst="rect">
-            <a:avLst/>
-          </a:prstGeom>
-          <a:noFill/>
-        </p:spPr>
-        <p:txBody>
-          <a:bodyPr wrap="square" lIns="0" tIns="0" rIns="0" bIns="0" anchor="t">
-            <a:spAutoFit/>
-          </a:bodyPr>
-          <a:lstStyle/>
-          <a:p>
-            <a:pPr algn="l"/>
-            <a:r>
-              <a:rPr sz="1000" b="0">
-                <a:solidFill>
-                  <a:srgbClr val="5E7682"/>
-                </a:solidFill>
-                <a:latin typeface="Hiragino Sans"/>
-                <a:ea typeface="Hiragino Sans"/>
-                <a:cs typeface="Hiragino Sans"/>
-              </a:rPr>
-              <a:t>参考：HTML Living Standard 13.2.5.1 Data state / 13.2.5.4 Script data state / 13.2.5.36 Attribute value (double-quoted) state</a:t>
             </a:r>
           </a:p>
         </p:txBody>
@@ -7882,7 +7845,7 @@
             <a:srgbClr val="24404D"/>
           </a:solidFill>
           <a:ln>
-            <a:noFill/>
+            <a:solidFill/>
           </a:ln>
           <a:effectLst/>
         </p:spPr>
@@ -7966,7 +7929,7 @@
             <a:srgbClr val="24404D"/>
           </a:solidFill>
           <a:ln>
-            <a:noFill/>
+            <a:solidFill/>
           </a:ln>
           <a:effectLst/>
         </p:spPr>
@@ -8050,7 +8013,7 @@
             <a:srgbClr val="24404D"/>
           </a:solidFill>
           <a:ln>
-            <a:noFill/>
+            <a:solidFill/>
           </a:ln>
           <a:effectLst/>
         </p:spPr>
@@ -8134,7 +8097,7 @@
             <a:srgbClr val="24404D"/>
           </a:solidFill>
           <a:ln>
-            <a:noFill/>
+            <a:solidFill/>
           </a:ln>
           <a:effectLst/>
         </p:spPr>
@@ -8457,7 +8420,7 @@
           <a:p>
             <a:pPr algn="l"/>
             <a:r>
-              <a:rPr sz="1100" b="0">
+              <a:rPr sz="1200" b="0">
                 <a:solidFill>
                   <a:srgbClr val="24404D"/>
                 </a:solidFill>
@@ -8471,7 +8434,7 @@
           <a:p>
             <a:pPr algn="l"/>
             <a:r>
-              <a:rPr sz="1100" b="0">
+              <a:rPr sz="1200" b="0">
                 <a:solidFill>
                   <a:srgbClr val="24404D"/>
                 </a:solidFill>
@@ -8857,7 +8820,7 @@
           <a:p>
             <a:pPr algn="l"/>
             <a:r>
-              <a:rPr sz="1100" b="0">
+              <a:rPr sz="1200" b="0">
                 <a:solidFill>
                   <a:srgbClr val="24404D"/>
                 </a:solidFill>
@@ -8871,7 +8834,7 @@
           <a:p>
             <a:pPr algn="l"/>
             <a:r>
-              <a:rPr sz="1100" b="0">
+              <a:rPr sz="1200" b="0">
                 <a:solidFill>
                   <a:srgbClr val="24404D"/>
                 </a:solidFill>
@@ -9257,7 +9220,7 @@
           <a:p>
             <a:pPr algn="l"/>
             <a:r>
-              <a:rPr sz="1100" b="0">
+              <a:rPr sz="1200" b="0">
                 <a:solidFill>
                   <a:srgbClr val="24404D"/>
                 </a:solidFill>
@@ -9271,7 +9234,7 @@
           <a:p>
             <a:pPr algn="l"/>
             <a:r>
-              <a:rPr sz="1100" b="0">
+              <a:rPr sz="1200" b="0">
                 <a:solidFill>
                   <a:srgbClr val="24404D"/>
                 </a:solidFill>
@@ -9380,92 +9343,6 @@
                 <a:cs typeface="Hiragino Sans"/>
               </a:rPr>
               <a:t>（# 以降はサーバに送られない）</a:t>
-            </a:r>
-          </a:p>
-        </p:txBody>
-      </p:sp>
-      <p:sp>
-        <p:nvSpPr>
-          <p:cNvPr id="34" name="Rounded Rectangle 33"/>
-          <p:cNvSpPr/>
-          <p:nvPr/>
-        </p:nvSpPr>
-        <p:spPr>
-          <a:xfrm>
-            <a:off x="457200" y="5294376"/>
-            <a:ext cx="11247120" cy="566928"/>
-          </a:xfrm>
-          <a:prstGeom prst="roundRect">
-            <a:avLst>
-              <a:gd name="adj" fmla="val 20000"/>
-            </a:avLst>
-          </a:prstGeom>
-          <a:solidFill>
-            <a:srgbClr val="FFFFFF"/>
-          </a:solidFill>
-          <a:ln w="19050">
-            <a:solidFill>
-              <a:srgbClr val="F08A24"/>
-            </a:solidFill>
-          </a:ln>
-          <a:effectLst/>
-        </p:spPr>
-        <p:style>
-          <a:lnRef idx="1">
-            <a:schemeClr val="accent1"/>
-          </a:lnRef>
-          <a:fillRef idx="3">
-            <a:schemeClr val="accent1"/>
-          </a:fillRef>
-          <a:effectRef idx="2">
-            <a:schemeClr val="accent1"/>
-          </a:effectRef>
-          <a:fontRef idx="minor">
-            <a:schemeClr val="lt1"/>
-          </a:fontRef>
-        </p:style>
-        <p:txBody>
-          <a:bodyPr rtlCol="0" anchor="ctr"/>
-          <a:lstStyle/>
-          <a:p>
-            <a:pPr algn="ctr"/>
-            <a:endParaRPr/>
-          </a:p>
-        </p:txBody>
-      </p:sp>
-      <p:sp>
-        <p:nvSpPr>
-          <p:cNvPr id="35" name="TextBox 34"/>
-          <p:cNvSpPr txBox="1"/>
-          <p:nvPr/>
-        </p:nvSpPr>
-        <p:spPr>
-          <a:xfrm>
-            <a:off x="685800" y="5294376"/>
-            <a:ext cx="10789920" cy="566928"/>
-          </a:xfrm>
-          <a:prstGeom prst="rect">
-            <a:avLst/>
-          </a:prstGeom>
-          <a:noFill/>
-        </p:spPr>
-        <p:txBody>
-          <a:bodyPr wrap="square" lIns="0" tIns="0" rIns="0" bIns="0" anchor="ctr">
-            <a:spAutoFit/>
-          </a:bodyPr>
-          <a:lstStyle/>
-          <a:p>
-            <a:pPr algn="l"/>
-            <a:r>
-              <a:rPr sz="1300" b="1">
-                <a:solidFill>
-                  <a:srgbClr val="24404D"/>
-                </a:solidFill>
-                <a:latin typeface="Hiragino Sans"/>
-                <a:ea typeface="Hiragino Sans"/>
-                <a:cs typeface="Hiragino Sans"/>
-              </a:rPr>
-              <a:t>どの型でも、最後にスクリプトが動くのは被害者のブラウザの中。違うのは「罠の置き場所」と「誰がHTMLに入れるか」</a:t>
             </a:r>
           </a:p>
         </p:txBody>
@@ -10181,7 +10058,7 @@
           <a:p>
             <a:pPr algn="l"/>
             <a:r>
-              <a:rPr sz="1100" b="0">
+              <a:rPr sz="1200" b="0">
                 <a:solidFill>
                   <a:srgbClr val="24404D"/>
                 </a:solidFill>
@@ -10195,7 +10072,7 @@
           <a:p>
             <a:pPr algn="l"/>
             <a:r>
-              <a:rPr sz="1100" b="0">
+              <a:rPr sz="1200" b="0">
                 <a:solidFill>
                   <a:srgbClr val="24404D"/>
                 </a:solidFill>
@@ -10232,7 +10109,7 @@
           <a:p>
             <a:pPr algn="ctr"/>
             <a:r>
-              <a:rPr sz="1100" b="0">
+              <a:rPr sz="1200" b="0">
                 <a:solidFill>
                   <a:srgbClr val="24404D"/>
                 </a:solidFill>
@@ -10246,7 +10123,7 @@
           <a:p>
             <a:pPr algn="ctr"/>
             <a:r>
-              <a:rPr sz="1100" b="0">
+              <a:rPr sz="1200" b="0">
                 <a:solidFill>
                   <a:srgbClr val="24404D"/>
                 </a:solidFill>
@@ -10332,7 +10209,7 @@
           <a:p>
             <a:pPr algn="ctr"/>
             <a:r>
-              <a:rPr sz="1100" b="0">
+              <a:rPr sz="1200" b="0">
                 <a:solidFill>
                   <a:srgbClr val="24404D"/>
                 </a:solidFill>
@@ -10346,7 +10223,7 @@
           <a:p>
             <a:pPr algn="ctr"/>
             <a:r>
-              <a:rPr sz="1100" b="0">
+              <a:rPr sz="1200" b="0">
                 <a:solidFill>
                   <a:srgbClr val="24404D"/>
                 </a:solidFill>
@@ -10432,7 +10309,7 @@
           <a:p>
             <a:pPr algn="ctr"/>
             <a:r>
-              <a:rPr sz="1100" b="0">
+              <a:rPr sz="1200" b="0">
                 <a:solidFill>
                   <a:srgbClr val="24404D"/>
                 </a:solidFill>
@@ -10518,7 +10395,7 @@
           <a:p>
             <a:pPr algn="ctr"/>
             <a:r>
-              <a:rPr sz="1100" b="0">
+              <a:rPr sz="1200" b="0">
                 <a:solidFill>
                   <a:srgbClr val="24404D"/>
                 </a:solidFill>
@@ -10604,7 +10481,7 @@
           <a:p>
             <a:pPr algn="ctr"/>
             <a:r>
-              <a:rPr sz="1100" b="0" dirty="0">
+              <a:rPr sz="1200" b="0" dirty="0">
                 <a:solidFill>
                   <a:srgbClr val="24404D"/>
                 </a:solidFill>
@@ -10615,7 +10492,7 @@
               <a:t>⑤ </a:t>
             </a:r>
             <a:r>
-              <a:rPr sz="1100" b="0" dirty="0" err="1">
+              <a:rPr sz="1200" b="0" dirty="0" err="1">
                 <a:solidFill>
                   <a:srgbClr val="24404D"/>
                 </a:solidFill>
@@ -10633,43 +10510,6 @@
               <a:ea typeface="Hiragino Sans"/>
               <a:cs typeface="Hiragino Sans"/>
             </a:endParaRPr>
-          </a:p>
-        </p:txBody>
-      </p:sp>
-      <p:sp>
-        <p:nvSpPr>
-          <p:cNvPr id="28" name="TextBox 27"/>
-          <p:cNvSpPr txBox="1"/>
-          <p:nvPr/>
-        </p:nvSpPr>
-        <p:spPr>
-          <a:xfrm>
-            <a:off x="457200" y="365760"/>
-            <a:ext cx="11247120" cy="274320"/>
-          </a:xfrm>
-          <a:prstGeom prst="rect">
-            <a:avLst/>
-          </a:prstGeom>
-          <a:noFill/>
-        </p:spPr>
-        <p:txBody>
-          <a:bodyPr wrap="square" lIns="0" tIns="0" rIns="0" bIns="0" anchor="t">
-            <a:spAutoFit/>
-          </a:bodyPr>
-          <a:lstStyle/>
-          <a:p>
-            <a:pPr algn="l"/>
-            <a:r>
-              <a:rPr sz="1100" b="0">
-                <a:solidFill>
-                  <a:srgbClr val="5E7682"/>
-                </a:solidFill>
-                <a:latin typeface="Hiragino Sans"/>
-                <a:ea typeface="Hiragino Sans"/>
-                <a:cs typeface="Hiragino Sans"/>
-              </a:rPr>
-              <a:t>点線の DB はこの型では使われない。罠の文字列はサーバを素通りして（保存されず）すぐ応答に反射される</a:t>
-            </a:r>
           </a:p>
         </p:txBody>
       </p:sp>
@@ -11430,7 +11270,7 @@
           <a:p>
             <a:pPr algn="l"/>
             <a:r>
-              <a:rPr sz="1100" b="0">
+              <a:rPr sz="1200" b="0">
                 <a:solidFill>
                   <a:srgbClr val="24404D"/>
                 </a:solidFill>
@@ -11444,7 +11284,7 @@
           <a:p>
             <a:pPr algn="l"/>
             <a:r>
-              <a:rPr sz="1100" b="0">
+              <a:rPr sz="1200" b="0">
                 <a:solidFill>
                   <a:srgbClr val="24404D"/>
                 </a:solidFill>
@@ -11481,7 +11321,7 @@
           <a:p>
             <a:pPr algn="ctr"/>
             <a:r>
-              <a:rPr sz="1100" b="0">
+              <a:rPr sz="1200" b="0">
                 <a:solidFill>
                   <a:srgbClr val="24404D"/>
                 </a:solidFill>
@@ -11495,7 +11335,7 @@
           <a:p>
             <a:pPr algn="ctr"/>
             <a:r>
-              <a:rPr sz="1100" b="0">
+              <a:rPr sz="1200" b="0">
                 <a:solidFill>
                   <a:srgbClr val="24404D"/>
                 </a:solidFill>
@@ -11581,7 +11421,7 @@
           <a:p>
             <a:pPr algn="ctr"/>
             <a:r>
-              <a:rPr sz="1100" b="0">
+              <a:rPr sz="1200" b="0">
                 <a:solidFill>
                   <a:srgbClr val="24404D"/>
                 </a:solidFill>
@@ -11595,7 +11435,7 @@
           <a:p>
             <a:pPr algn="ctr"/>
             <a:r>
-              <a:rPr sz="1100" b="0">
+              <a:rPr sz="1200" b="0">
                 <a:solidFill>
                   <a:srgbClr val="24404D"/>
                 </a:solidFill>
@@ -11681,7 +11521,7 @@
           <a:p>
             <a:pPr algn="ctr"/>
             <a:r>
-              <a:rPr sz="1100" b="0" dirty="0">
+              <a:rPr sz="1200" b="0" dirty="0">
                 <a:solidFill>
                   <a:srgbClr val="24404D"/>
                 </a:solidFill>
@@ -11692,7 +11532,7 @@
               <a:t>② </a:t>
             </a:r>
             <a:r>
-              <a:rPr sz="1100" b="0" dirty="0" err="1">
+              <a:rPr sz="1200" b="0" dirty="0" err="1">
                 <a:solidFill>
                   <a:srgbClr val="24404D"/>
                 </a:solidFill>
@@ -11786,7 +11626,7 @@
           <a:p>
             <a:pPr algn="ctr"/>
             <a:r>
-              <a:rPr sz="1100" b="0">
+              <a:rPr sz="1200" b="0">
                 <a:solidFill>
                   <a:srgbClr val="24404D"/>
                 </a:solidFill>
@@ -11872,7 +11712,7 @@
           <a:p>
             <a:pPr algn="ctr"/>
             <a:r>
-              <a:rPr sz="1100" b="0">
+              <a:rPr sz="1200" b="0">
                 <a:solidFill>
                   <a:srgbClr val="24404D"/>
                 </a:solidFill>
@@ -11958,7 +11798,7 @@
           <a:p>
             <a:pPr algn="ctr"/>
             <a:r>
-              <a:rPr sz="1100" b="0">
+              <a:rPr sz="1200" b="0">
                 <a:solidFill>
                   <a:srgbClr val="24404D"/>
                 </a:solidFill>
@@ -11967,43 +11807,6 @@
                 <a:cs typeface="Hiragino Sans"/>
               </a:rPr>
               <a:t>⑥ 盗んだ情報を攻撃者へ送信</a:t>
-            </a:r>
-          </a:p>
-        </p:txBody>
-      </p:sp>
-      <p:sp>
-        <p:nvSpPr>
-          <p:cNvPr id="31" name="TextBox 30"/>
-          <p:cNvSpPr txBox="1"/>
-          <p:nvPr/>
-        </p:nvSpPr>
-        <p:spPr>
-          <a:xfrm>
-            <a:off x="457200" y="365760"/>
-            <a:ext cx="11247120" cy="274320"/>
-          </a:xfrm>
-          <a:prstGeom prst="rect">
-            <a:avLst/>
-          </a:prstGeom>
-          <a:noFill/>
-        </p:spPr>
-        <p:txBody>
-          <a:bodyPr wrap="square" lIns="0" tIns="0" rIns="0" bIns="0" anchor="t">
-            <a:spAutoFit/>
-          </a:bodyPr>
-          <a:lstStyle/>
-          <a:p>
-            <a:pPr algn="l"/>
-            <a:r>
-              <a:rPr sz="1100" b="0">
-                <a:solidFill>
-                  <a:srgbClr val="5E7682"/>
-                </a:solidFill>
-                <a:latin typeface="Hiragino Sans"/>
-                <a:ea typeface="Hiragino Sans"/>
-                <a:cs typeface="Hiragino Sans"/>
-              </a:rPr>
-              <a:t>罠は DB に保存される。被害者は罠URLすら踏まず、普通にページを開くだけで発動する</a:t>
             </a:r>
           </a:p>
         </p:txBody>
@@ -12719,7 +12522,7 @@
           <a:p>
             <a:pPr algn="l"/>
             <a:r>
-              <a:rPr sz="1100" b="0">
+              <a:rPr sz="1200" b="0">
                 <a:solidFill>
                   <a:srgbClr val="24404D"/>
                 </a:solidFill>
@@ -12733,7 +12536,7 @@
           <a:p>
             <a:pPr algn="l"/>
             <a:r>
-              <a:rPr sz="1100" b="0">
+              <a:rPr sz="1200" b="0">
                 <a:solidFill>
                   <a:srgbClr val="24404D"/>
                 </a:solidFill>
@@ -12770,7 +12573,7 @@
           <a:p>
             <a:pPr algn="ctr"/>
             <a:r>
-              <a:rPr sz="1100" b="0">
+              <a:rPr sz="1200" b="0">
                 <a:solidFill>
                   <a:srgbClr val="24404D"/>
                 </a:solidFill>
@@ -12784,7 +12587,7 @@
           <a:p>
             <a:pPr algn="ctr"/>
             <a:r>
-              <a:rPr sz="1100" b="0">
+              <a:rPr sz="1200" b="0">
                 <a:solidFill>
                   <a:srgbClr val="24404D"/>
                 </a:solidFill>
@@ -12870,7 +12673,7 @@
           <a:p>
             <a:pPr algn="ctr"/>
             <a:r>
-              <a:rPr sz="1100" b="0">
+              <a:rPr sz="1200" b="0">
                 <a:solidFill>
                   <a:srgbClr val="24404D"/>
                 </a:solidFill>
@@ -12884,7 +12687,7 @@
           <a:p>
             <a:pPr algn="ctr"/>
             <a:r>
-              <a:rPr sz="1100" b="0">
+              <a:rPr sz="1200" b="0">
                 <a:solidFill>
                   <a:srgbClr val="24404D"/>
                 </a:solidFill>
@@ -12970,7 +12773,7 @@
           <a:p>
             <a:pPr algn="ctr"/>
             <a:r>
-              <a:rPr sz="1100" b="0">
+              <a:rPr sz="1200" b="0">
                 <a:solidFill>
                   <a:srgbClr val="24404D"/>
                 </a:solidFill>
@@ -13056,7 +12859,7 @@
           <a:p>
             <a:pPr algn="ctr"/>
             <a:r>
-              <a:rPr sz="1100" b="0">
+              <a:rPr sz="1200" b="0">
                 <a:solidFill>
                   <a:srgbClr val="24404D"/>
                 </a:solidFill>
@@ -13142,7 +12945,7 @@
           <a:p>
             <a:pPr algn="ctr"/>
             <a:r>
-              <a:rPr sz="1100" b="0">
+              <a:rPr sz="1200" b="0">
                 <a:solidFill>
                   <a:srgbClr val="24404D"/>
                 </a:solidFill>
@@ -13151,43 +12954,6 @@
                 <a:cs typeface="Hiragino Sans"/>
               </a:rPr>
               <a:t>⑤ 盗んだ情報を攻撃者へ送信</a:t>
-            </a:r>
-          </a:p>
-        </p:txBody>
-      </p:sp>
-      <p:sp>
-        <p:nvSpPr>
-          <p:cNvPr id="28" name="TextBox 27"/>
-          <p:cNvSpPr txBox="1"/>
-          <p:nvPr/>
-        </p:nvSpPr>
-        <p:spPr>
-          <a:xfrm>
-            <a:off x="457200" y="365760"/>
-            <a:ext cx="11247120" cy="274320"/>
-          </a:xfrm>
-          <a:prstGeom prst="rect">
-            <a:avLst/>
-          </a:prstGeom>
-          <a:noFill/>
-        </p:spPr>
-        <p:txBody>
-          <a:bodyPr wrap="square" lIns="0" tIns="0" rIns="0" bIns="0" anchor="t">
-            <a:spAutoFit/>
-          </a:bodyPr>
-          <a:lstStyle/>
-          <a:p>
-            <a:pPr algn="l"/>
-            <a:r>
-              <a:rPr sz="1100" b="0">
-                <a:solidFill>
-                  <a:srgbClr val="5E7682"/>
-                </a:solidFill>
-                <a:latin typeface="Hiragino Sans"/>
-                <a:ea typeface="Hiragino Sans"/>
-                <a:cs typeface="Hiragino Sans"/>
-              </a:rPr>
-              <a:t>文字列をHTMLに入れるのはサーバではなくブラウザ上のJavaScript。# 以降はサーバに届かない</a:t>
             </a:r>
           </a:p>
         </p:txBody>
@@ -13413,7 +13179,7 @@
           <a:p>
             <a:pPr algn="l"/>
             <a:r>
-              <a:rPr sz="1100" b="0">
+              <a:rPr sz="1200" b="0">
                 <a:solidFill>
                   <a:srgbClr val="24404D"/>
                 </a:solidFill>
@@ -13672,7 +13438,7 @@
           <a:p>
             <a:pPr algn="l"/>
             <a:r>
-              <a:rPr sz="1100" b="0">
+              <a:rPr sz="1200" b="0">
                 <a:solidFill>
                   <a:srgbClr val="24404D"/>
                 </a:solidFill>
@@ -13931,7 +13697,7 @@
           <a:p>
             <a:pPr algn="l"/>
             <a:r>
-              <a:rPr sz="1100" b="0">
+              <a:rPr sz="1200" b="0">
                 <a:solidFill>
                   <a:srgbClr val="24404D"/>
                 </a:solidFill>
@@ -13945,7 +13711,7 @@
           <a:p>
             <a:pPr algn="l"/>
             <a:r>
-              <a:rPr sz="1100" b="0">
+              <a:rPr sz="1200" b="0">
                 <a:solidFill>
                   <a:srgbClr val="24404D"/>
                 </a:solidFill>
@@ -14204,7 +13970,7 @@
           <a:p>
             <a:pPr algn="l"/>
             <a:r>
-              <a:rPr sz="1100" b="0">
+              <a:rPr sz="1200" b="0">
                 <a:solidFill>
                   <a:srgbClr val="24404D"/>
                 </a:solidFill>
@@ -14218,7 +13984,7 @@
           <a:p>
             <a:pPr algn="l"/>
             <a:r>
-              <a:rPr sz="1100" b="0">
+              <a:rPr sz="1200" b="0">
                 <a:solidFill>
                   <a:srgbClr val="24404D"/>
                 </a:solidFill>
@@ -14484,7 +14250,7 @@
         <p:spPr>
           <a:xfrm>
             <a:off x="457200" y="3931920"/>
-            <a:ext cx="8311896" cy="1252728"/>
+            <a:ext cx="8311896" cy="868680"/>
           </a:xfrm>
           <a:prstGeom prst="roundRect">
             <a:avLst>
@@ -14557,93 +14323,6 @@
                 <a:cs typeface="Hiragino Sans"/>
               </a:rPr>
               <a:t>「どこからどこまでがタグか」はトークナイザで決まる</a:t>
-            </a:r>
-          </a:p>
-          <a:p>
-            <a:pPr algn="l"/>
-            <a:r>
-              <a:rPr sz="1200" b="0">
-                <a:solidFill>
-                  <a:srgbClr val="24404D"/>
-                </a:solidFill>
-                <a:latin typeface="Hiragino Sans"/>
-                <a:ea typeface="Hiragino Sans"/>
-                <a:cs typeface="Hiragino Sans"/>
-              </a:rPr>
-              <a:t>サーバは文字列を埋め込んだだけ。それを「文字」と読むか「タグ」と読むかは、</a:t>
-            </a:r>
-          </a:p>
-          <a:p>
-            <a:pPr algn="l"/>
-            <a:r>
-              <a:rPr sz="1200" b="0">
-                <a:solidFill>
-                  <a:srgbClr val="24404D"/>
-                </a:solidFill>
-                <a:latin typeface="Hiragino Sans"/>
-                <a:ea typeface="Hiragino Sans"/>
-                <a:cs typeface="Hiragino Sans"/>
-              </a:rPr>
-              <a:t>被害者のブラウザのトークナイザが、</a:t>
-            </a:r>
-            <a:r>
-              <a:rPr sz="1200" b="1">
-                <a:solidFill>
-                  <a:srgbClr val="D9433B"/>
-                </a:solidFill>
-                <a:latin typeface="Menlo"/>
-                <a:ea typeface="Menlo"/>
-                <a:cs typeface="Menlo"/>
-              </a:rPr>
-              <a:t>&lt;</a:t>
-            </a:r>
-            <a:r>
-              <a:rPr sz="1200" b="0">
-                <a:solidFill>
-                  <a:srgbClr val="24404D"/>
-                </a:solidFill>
-                <a:latin typeface="Hiragino Sans"/>
-                <a:ea typeface="Hiragino Sans"/>
-                <a:cs typeface="Hiragino Sans"/>
-              </a:rPr>
-              <a:t>を見た瞬間に決めている（SQLiでいう字句解析と同じ役割）</a:t>
-            </a:r>
-          </a:p>
-        </p:txBody>
-      </p:sp>
-      <p:sp>
-        <p:nvSpPr>
-          <p:cNvPr id="33" name="TextBox 32"/>
-          <p:cNvSpPr txBox="1"/>
-          <p:nvPr/>
-        </p:nvSpPr>
-        <p:spPr>
-          <a:xfrm>
-            <a:off x="457200" y="5440680"/>
-            <a:ext cx="10515600" cy="274320"/>
-          </a:xfrm>
-          <a:prstGeom prst="rect">
-            <a:avLst/>
-          </a:prstGeom>
-          <a:noFill/>
-        </p:spPr>
-        <p:txBody>
-          <a:bodyPr wrap="square" lIns="0" tIns="0" rIns="0" bIns="0" anchor="t">
-            <a:spAutoFit/>
-          </a:bodyPr>
-          <a:lstStyle/>
-          <a:p>
-            <a:pPr algn="l"/>
-            <a:r>
-              <a:rPr sz="1000" b="0">
-                <a:solidFill>
-                  <a:srgbClr val="5E7682"/>
-                </a:solidFill>
-                <a:latin typeface="Hiragino Sans"/>
-                <a:ea typeface="Hiragino Sans"/>
-                <a:cs typeface="Hiragino Sans"/>
-              </a:rPr>
-              <a:t>参考：HTML Living Standard 13.2「Parsing HTML documents」（13.2.3 入力バイトストリーム / 13.2.5 トークン化 / 13.2.6 ツリー構築）</a:t>
             </a:r>
           </a:p>
         </p:txBody>
@@ -14842,7 +14521,7 @@
           <a:p>
             <a:pPr algn="ctr"/>
             <a:r>
-              <a:rPr sz="1000" b="0">
+              <a:rPr sz="1200" b="0">
                 <a:solidFill>
                   <a:srgbClr val="5E7682"/>
                 </a:solidFill>
@@ -14965,7 +14644,7 @@
           <a:p>
             <a:pPr algn="ctr"/>
             <a:r>
-              <a:rPr sz="1000" b="0">
+              <a:rPr sz="1200" b="0">
                 <a:solidFill>
                   <a:srgbClr val="5E7682"/>
                 </a:solidFill>
@@ -15088,7 +14767,7 @@
           <a:p>
             <a:pPr algn="ctr"/>
             <a:r>
-              <a:rPr sz="1000" b="0">
+              <a:rPr sz="1200" b="0">
                 <a:solidFill>
                   <a:srgbClr val="5E7682"/>
                 </a:solidFill>
@@ -15211,7 +14890,7 @@
           <a:p>
             <a:pPr algn="ctr"/>
             <a:r>
-              <a:rPr sz="1100" b="0">
+              <a:rPr sz="1200" b="0">
                 <a:solidFill>
                   <a:srgbClr val="24404D"/>
                 </a:solidFill>
@@ -15612,7 +15291,7 @@
           <a:p>
             <a:pPr algn="ctr"/>
             <a:r>
-              <a:rPr sz="1000" b="0">
+              <a:rPr sz="1200" b="0">
                 <a:solidFill>
                   <a:srgbClr val="5E7682"/>
                 </a:solidFill>
@@ -15735,7 +15414,7 @@
           <a:p>
             <a:pPr algn="ctr"/>
             <a:r>
-              <a:rPr sz="1000" b="0">
+              <a:rPr sz="1200" b="0">
                 <a:solidFill>
                   <a:srgbClr val="5E7682"/>
                 </a:solidFill>
@@ -15858,7 +15537,7 @@
           <a:p>
             <a:pPr algn="ctr"/>
             <a:r>
-              <a:rPr sz="1100" b="0">
+              <a:rPr sz="1200" b="0">
                 <a:solidFill>
                   <a:srgbClr val="24404D"/>
                 </a:solidFill>
@@ -15981,7 +15660,7 @@
           <a:p>
             <a:pPr algn="ctr"/>
             <a:r>
-              <a:rPr sz="1100" b="0">
+              <a:rPr sz="1200" b="0">
                 <a:solidFill>
                   <a:srgbClr val="24404D"/>
                 </a:solidFill>
@@ -16196,7 +15875,7 @@
             <a:srgbClr val="F08A24"/>
           </a:solidFill>
           <a:ln>
-            <a:noFill/>
+            <a:solidFill/>
           </a:ln>
           <a:effectLst/>
         </p:spPr>
@@ -16288,7 +15967,7 @@
             <a:srgbClr val="F08A24"/>
           </a:solidFill>
           <a:ln>
-            <a:noFill/>
+            <a:solidFill/>
           </a:ln>
           <a:effectLst/>
         </p:spPr>
@@ -16380,7 +16059,7 @@
             <a:srgbClr val="F08A24"/>
           </a:solidFill>
           <a:ln>
-            <a:noFill/>
+            <a:solidFill/>
           </a:ln>
           <a:effectLst/>
         </p:spPr>
@@ -16472,7 +16151,7 @@
             <a:srgbClr val="F08A24"/>
           </a:solidFill>
           <a:ln>
-            <a:noFill/>
+            <a:solidFill/>
           </a:ln>
           <a:effectLst/>
         </p:spPr>
@@ -16540,43 +16219,6 @@
                 <a:cs typeface="Hiragino Sans"/>
               </a:rPr>
               <a:t>&lt;script&gt; の中身は専用の状態（Script data state）で読まれる</a:t>
-            </a:r>
-          </a:p>
-        </p:txBody>
-      </p:sp>
-      <p:sp>
-        <p:nvSpPr>
-          <p:cNvPr id="47" name="TextBox 46"/>
-          <p:cNvSpPr txBox="1"/>
-          <p:nvPr/>
-        </p:nvSpPr>
-        <p:spPr>
-          <a:xfrm>
-            <a:off x="457200" y="5554980"/>
-            <a:ext cx="10515600" cy="274320"/>
-          </a:xfrm>
-          <a:prstGeom prst="rect">
-            <a:avLst/>
-          </a:prstGeom>
-          <a:noFill/>
-        </p:spPr>
-        <p:txBody>
-          <a:bodyPr wrap="square" lIns="0" tIns="0" rIns="0" bIns="0" anchor="t">
-            <a:spAutoFit/>
-          </a:bodyPr>
-          <a:lstStyle/>
-          <a:p>
-            <a:pPr algn="l"/>
-            <a:r>
-              <a:rPr sz="1000" b="0">
-                <a:solidFill>
-                  <a:srgbClr val="5E7682"/>
-                </a:solidFill>
-                <a:latin typeface="Hiragino Sans"/>
-                <a:ea typeface="Hiragino Sans"/>
-                <a:cs typeface="Hiragino Sans"/>
-              </a:rPr>
-              <a:t>参考：HTML Living Standard 13.2.5「Tokenization」（13.2.5.1 Data state / 13.2.5.6 Tag open state / 13.2.5.77 Character reference state）</a:t>
             </a:r>
           </a:p>
         </p:txBody>
@@ -16883,7 +16525,7 @@
           <a:p>
             <a:pPr algn="l"/>
             <a:r>
-              <a:rPr sz="1100" b="1">
+              <a:rPr sz="1200" b="1">
                 <a:solidFill>
                   <a:srgbClr val="5E7682"/>
                 </a:solidFill>
@@ -16969,7 +16611,7 @@
           <a:p>
             <a:pPr algn="l"/>
             <a:r>
-              <a:rPr sz="1150" b="0">
+              <a:rPr sz="1200" b="0">
                 <a:solidFill>
                   <a:srgbClr val="24404D"/>
                 </a:solidFill>
@@ -16980,7 +16622,7 @@
               <a:t>&lt;p&gt;こんにちは、</a:t>
             </a:r>
             <a:r>
-              <a:rPr sz="1150" b="1">
+              <a:rPr sz="1200" b="1">
                 <a:solidFill>
                   <a:srgbClr val="D9433B"/>
                 </a:solidFill>
@@ -16991,7 +16633,7 @@
               <a:t>&lt;b&gt;</a:t>
             </a:r>
             <a:r>
-              <a:rPr sz="1150" b="0">
+              <a:rPr sz="1200" b="0">
                 <a:solidFill>
                   <a:srgbClr val="24404D"/>
                 </a:solidFill>
@@ -17002,7 +16644,7 @@
               <a:t>Nico</a:t>
             </a:r>
             <a:r>
-              <a:rPr sz="1150" b="1">
+              <a:rPr sz="1200" b="1">
                 <a:solidFill>
                   <a:srgbClr val="D9433B"/>
                 </a:solidFill>
@@ -17013,7 +16655,7 @@
               <a:t>&lt;/b&gt;</a:t>
             </a:r>
             <a:r>
-              <a:rPr sz="1150" b="0">
+              <a:rPr sz="1200" b="0">
                 <a:solidFill>
                   <a:srgbClr val="24404D"/>
                 </a:solidFill>
@@ -17050,7 +16692,7 @@
           <a:p>
             <a:pPr algn="l"/>
             <a:r>
-              <a:rPr sz="1100" b="1">
+              <a:rPr sz="1200" b="1">
                 <a:solidFill>
                   <a:srgbClr val="5E7682"/>
                 </a:solidFill>
@@ -17136,7 +16778,7 @@
           <a:p>
             <a:pPr algn="ctr"/>
             <a:r>
-              <a:rPr sz="1000" b="0">
+              <a:rPr sz="1200" b="0">
                 <a:solidFill>
                   <a:srgbClr val="24404D"/>
                 </a:solidFill>
@@ -17222,7 +16864,7 @@
           <a:p>
             <a:pPr algn="ctr"/>
             <a:r>
-              <a:rPr sz="1000" b="0">
+              <a:rPr sz="1200" b="0">
                 <a:solidFill>
                   <a:srgbClr val="24404D"/>
                 </a:solidFill>
@@ -17255,7 +16897,7 @@
             <a:srgbClr val="D9433B"/>
           </a:solidFill>
           <a:ln>
-            <a:noFill/>
+            <a:solidFill/>
           </a:ln>
           <a:effectLst/>
         </p:spPr>
@@ -17306,7 +16948,7 @@
           <a:p>
             <a:pPr algn="ctr"/>
             <a:r>
-              <a:rPr sz="1000" b="0">
+              <a:rPr sz="1200" b="0">
                 <a:solidFill>
                   <a:srgbClr val="FFFFFF"/>
                 </a:solidFill>
@@ -17392,7 +17034,7 @@
           <a:p>
             <a:pPr algn="ctr"/>
             <a:r>
-              <a:rPr sz="1000" b="0">
+              <a:rPr sz="1200" b="0">
                 <a:solidFill>
                   <a:srgbClr val="24404D"/>
                 </a:solidFill>
@@ -17425,7 +17067,7 @@
             <a:srgbClr val="D9433B"/>
           </a:solidFill>
           <a:ln>
-            <a:noFill/>
+            <a:solidFill/>
           </a:ln>
           <a:effectLst/>
         </p:spPr>
@@ -17476,7 +17118,7 @@
           <a:p>
             <a:pPr algn="ctr"/>
             <a:r>
-              <a:rPr sz="1000" b="0">
+              <a:rPr sz="1200" b="0">
                 <a:solidFill>
                   <a:srgbClr val="FFFFFF"/>
                 </a:solidFill>
@@ -17562,7 +17204,7 @@
           <a:p>
             <a:pPr algn="ctr"/>
             <a:r>
-              <a:rPr sz="1000" b="0">
+              <a:rPr sz="1200" b="0">
                 <a:solidFill>
                   <a:srgbClr val="24404D"/>
                 </a:solidFill>
@@ -17648,7 +17290,7 @@
           <a:p>
             <a:pPr algn="ctr"/>
             <a:r>
-              <a:rPr sz="1000" b="0">
+              <a:rPr sz="1200" b="0">
                 <a:solidFill>
                   <a:srgbClr val="24404D"/>
                 </a:solidFill>
@@ -17685,7 +17327,7 @@
           <a:p>
             <a:pPr algn="l"/>
             <a:r>
-              <a:rPr sz="1100" b="1">
+              <a:rPr sz="1200" b="1">
                 <a:solidFill>
                   <a:srgbClr val="5E7682"/>
                 </a:solidFill>
@@ -17771,7 +17413,7 @@
           <a:p>
             <a:pPr algn="l"/>
             <a:r>
-              <a:rPr sz="1100" b="0">
+              <a:rPr sz="1200" b="0">
                 <a:solidFill>
                   <a:srgbClr val="24404D"/>
                 </a:solidFill>
@@ -17785,7 +17427,7 @@
           <a:p>
             <a:pPr algn="l"/>
             <a:r>
-              <a:rPr sz="1100" b="0">
+              <a:rPr sz="1200" b="0">
                 <a:solidFill>
                   <a:srgbClr val="24404D"/>
                 </a:solidFill>
@@ -17799,7 +17441,7 @@
           <a:p>
             <a:pPr algn="l"/>
             <a:r>
-              <a:rPr sz="1100" b="0">
+              <a:rPr sz="1200" b="0">
                 <a:solidFill>
                   <a:srgbClr val="24404D"/>
                 </a:solidFill>
@@ -17810,7 +17452,7 @@
               <a:t>├ </a:t>
             </a:r>
             <a:r>
-              <a:rPr sz="1100" b="1">
+              <a:rPr sz="1200" b="1">
                 <a:solidFill>
                   <a:srgbClr val="D9433B"/>
                 </a:solidFill>
@@ -17824,7 +17466,7 @@
           <a:p>
             <a:pPr algn="l"/>
             <a:r>
-              <a:rPr sz="1100" b="0">
+              <a:rPr sz="1200" b="0">
                 <a:solidFill>
                   <a:srgbClr val="24404D"/>
                 </a:solidFill>
@@ -17838,7 +17480,7 @@
           <a:p>
             <a:pPr algn="l"/>
             <a:r>
-              <a:rPr sz="1100" b="0">
+              <a:rPr sz="1200" b="0">
                 <a:solidFill>
                   <a:srgbClr val="24404D"/>
                 </a:solidFill>
@@ -17863,7 +17505,7 @@
           <a:p>
             <a:pPr algn="l"/>
             <a:r>
-              <a:rPr sz="1100" b="1">
+              <a:rPr sz="1200" b="1">
                 <a:solidFill>
                   <a:srgbClr val="D9433B"/>
                 </a:solidFill>
@@ -18034,7 +17676,7 @@
           <a:p>
             <a:pPr algn="l"/>
             <a:r>
-              <a:rPr sz="1100" b="1">
+              <a:rPr sz="1200" b="1">
                 <a:solidFill>
                   <a:srgbClr val="5E7682"/>
                 </a:solidFill>
@@ -18120,7 +17762,7 @@
           <a:p>
             <a:pPr algn="l"/>
             <a:r>
-              <a:rPr sz="1150" b="0">
+              <a:rPr sz="1200" b="0">
                 <a:solidFill>
                   <a:srgbClr val="24404D"/>
                 </a:solidFill>
@@ -18131,7 +17773,7 @@
               <a:t>&lt;p&gt;こんにちは、</a:t>
             </a:r>
             <a:r>
-              <a:rPr sz="1150" b="1">
+              <a:rPr sz="1200" b="1">
                 <a:solidFill>
                   <a:srgbClr val="0E7C72"/>
                 </a:solidFill>
@@ -18142,7 +17784,7 @@
               <a:t>&amp;lt;b&amp;gt;</a:t>
             </a:r>
             <a:r>
-              <a:rPr sz="1150" b="0">
+              <a:rPr sz="1200" b="0">
                 <a:solidFill>
                   <a:srgbClr val="24404D"/>
                 </a:solidFill>
@@ -18153,7 +17795,7 @@
               <a:t>Nico</a:t>
             </a:r>
             <a:r>
-              <a:rPr sz="1150" b="1">
+              <a:rPr sz="1200" b="1">
                 <a:solidFill>
                   <a:srgbClr val="0E7C72"/>
                 </a:solidFill>
@@ -18164,7 +17806,7 @@
               <a:t>&amp;lt;/b&amp;gt;</a:t>
             </a:r>
             <a:r>
-              <a:rPr sz="1150" b="0">
+              <a:rPr sz="1200" b="0">
                 <a:solidFill>
                   <a:srgbClr val="24404D"/>
                 </a:solidFill>
@@ -18201,7 +17843,7 @@
           <a:p>
             <a:pPr algn="l"/>
             <a:r>
-              <a:rPr sz="1100" b="1">
+              <a:rPr sz="1200" b="1">
                 <a:solidFill>
                   <a:srgbClr val="5E7682"/>
                 </a:solidFill>
@@ -18287,7 +17929,7 @@
           <a:p>
             <a:pPr algn="ctr"/>
             <a:r>
-              <a:rPr sz="1000" b="0">
+              <a:rPr sz="1200" b="0">
                 <a:solidFill>
                   <a:srgbClr val="24404D"/>
                 </a:solidFill>
@@ -18373,7 +18015,7 @@
           <a:p>
             <a:pPr algn="ctr"/>
             <a:r>
-              <a:rPr sz="1000" b="0">
+              <a:rPr sz="1200" b="0">
                 <a:solidFill>
                   <a:srgbClr val="24404D"/>
                 </a:solidFill>
@@ -18387,7 +18029,7 @@
           <a:p>
             <a:pPr algn="ctr"/>
             <a:r>
-              <a:rPr sz="1000" b="0">
+              <a:rPr sz="1200" b="0">
                 <a:solidFill>
                   <a:srgbClr val="24404D"/>
                 </a:solidFill>
@@ -18473,7 +18115,7 @@
           <a:p>
             <a:pPr algn="ctr"/>
             <a:r>
-              <a:rPr sz="1000" b="0">
+              <a:rPr sz="1200" b="0">
                 <a:solidFill>
                   <a:srgbClr val="24404D"/>
                 </a:solidFill>
@@ -18510,7 +18152,7 @@
           <a:p>
             <a:pPr algn="l"/>
             <a:r>
-              <a:rPr sz="1100" b="1">
+              <a:rPr sz="1200" b="1">
                 <a:solidFill>
                   <a:srgbClr val="5E7682"/>
                 </a:solidFill>
@@ -18596,7 +18238,7 @@
           <a:p>
             <a:pPr algn="l"/>
             <a:r>
-              <a:rPr sz="1100" b="0">
+              <a:rPr sz="1200" b="0">
                 <a:solidFill>
                   <a:srgbClr val="24404D"/>
                 </a:solidFill>
@@ -18610,7 +18252,7 @@
           <a:p>
             <a:pPr algn="l"/>
             <a:r>
-              <a:rPr sz="1100" b="0">
+              <a:rPr sz="1200" b="0">
                 <a:solidFill>
                   <a:srgbClr val="24404D"/>
                 </a:solidFill>
@@ -18624,7 +18266,7 @@
           <a:p>
             <a:pPr algn="l"/>
             <a:r>
-              <a:rPr sz="1100" b="0">
+              <a:rPr sz="1200" b="0">
                 <a:solidFill>
                   <a:srgbClr val="24404D"/>
                 </a:solidFill>
@@ -18649,7 +18291,7 @@
           <a:p>
             <a:pPr algn="l"/>
             <a:r>
-              <a:rPr sz="1100" b="1">
+              <a:rPr sz="1200" b="1">
                 <a:solidFill>
                   <a:srgbClr val="0E7C72"/>
                 </a:solidFill>
@@ -19985,7 +19627,7 @@
           <a:p>
             <a:pPr algn="l"/>
             <a:r>
-              <a:rPr sz="1100" b="0">
+              <a:rPr sz="1200" b="0">
                 <a:solidFill>
                   <a:srgbClr val="5E7682"/>
                 </a:solidFill>
@@ -20103,7 +19745,7 @@
           <a:p>
             <a:pPr algn="l"/>
             <a:r>
-              <a:rPr sz="1100" b="0">
+              <a:rPr sz="1200" b="0">
                 <a:solidFill>
                   <a:srgbClr val="D9433B"/>
                 </a:solidFill>
@@ -20140,7 +19782,7 @@
           <a:p>
             <a:pPr algn="l"/>
             <a:r>
-              <a:rPr sz="1100" b="0">
+              <a:rPr sz="1200" b="0">
                 <a:solidFill>
                   <a:srgbClr val="5E7682"/>
                 </a:solidFill>
@@ -20210,7 +19852,7 @@
               <a:t>&amp;lt;</a:t>
             </a:r>
             <a:r>
-              <a:rPr sz="1100" b="0">
+              <a:rPr sz="1200" b="0">
                 <a:solidFill>
                   <a:srgbClr val="0E7C72"/>
                 </a:solidFill>
@@ -20366,45 +20008,6 @@
                 <a:cs typeface="Hiragino Sans"/>
               </a:rPr>
               <a:t> など）に言い換えるだけ。</a:t>
-            </a:r>
-          </a:p>
-          <a:p>
-            <a:pPr algn="l"/>
-            <a:endParaRPr sz="1200" b="0">
-              <a:solidFill>
-                <a:srgbClr val="24404D"/>
-              </a:solidFill>
-              <a:latin typeface="Hiragino Sans"/>
-              <a:ea typeface="Hiragino Sans"/>
-              <a:cs typeface="Hiragino Sans"/>
-            </a:endParaRPr>
-          </a:p>
-          <a:p>
-            <a:pPr algn="l"/>
-            <a:r>
-              <a:rPr sz="1200" b="0">
-                <a:solidFill>
-                  <a:srgbClr val="24404D"/>
-                </a:solidFill>
-                <a:latin typeface="Hiragino Sans"/>
-                <a:ea typeface="Hiragino Sans"/>
-                <a:cs typeface="Hiragino Sans"/>
-              </a:rPr>
-              <a:t>文字参照はトークナイザの中で「ただの文字」に戻るので、</a:t>
-            </a:r>
-          </a:p>
-          <a:p>
-            <a:pPr algn="l"/>
-            <a:r>
-              <a:rPr sz="1200" b="0">
-                <a:solidFill>
-                  <a:srgbClr val="24404D"/>
-                </a:solidFill>
-                <a:latin typeface="Hiragino Sans"/>
-                <a:ea typeface="Hiragino Sans"/>
-                <a:cs typeface="Hiragino Sans"/>
-              </a:rPr>
-              <a:t>画面には元の文字がそのまま表示される</a:t>
             </a:r>
           </a:p>
         </p:txBody>
